--- a/resources/map/_layout_tomb.pptx
+++ b/resources/map/_layout_tomb.pptx
@@ -7,7 +7,7 @@
   <p:sldIdLst>
     <p:sldId id="256" r:id="rId7"/>
   </p:sldIdLst>
-  <p:sldSz cx="20100000" cy="18250000" type="screen4x3"/>
+  <p:sldSz cx="20100000" cy="19400000" type="screen4x3"/>
   <p:notesSz cx="6858000" cy="9144000"/>
   <p:defaultTextStyle>
     <a:defPPr>
@@ -3122,7 +3122,7 @@
                   <a:srgbClr val="7A787E"/>
                 </a:solidFill>
               </a:rPr>
-              <a:t>34 格・每一格是「縮圖＋地名」的群組，可以直接拖；連線是 connector，拖格子時會跟著走</a:t>
+              <a:t>35 格・每一格是「縮圖＋地名」的群組，可以直接拖；連線是 connector，拖格子時會跟著走</a:t>
             </a:r>
           </a:p>
         </p:txBody>
@@ -3135,9 +3135,9 @@
         </p:nvGrpSpPr>
         <p:grpSpPr>
           <a:xfrm>
-            <a:off x="12300000" y="17100000"/>
+            <a:off x="12300000" y="18250000"/>
             <a:ext cx="1280000" cy="1020000"/>
-            <a:chOff x="12300000" y="17100000"/>
+            <a:chOff x="12300000" y="18250000"/>
             <a:chExt cx="1280000" cy="1020000"/>
           </a:xfrm>
         </p:grpSpPr>
@@ -3157,7 +3157,7 @@
           </p:blipFill>
           <p:spPr>
             <a:xfrm>
-              <a:off x="12300000" y="17100000"/>
+              <a:off x="12300000" y="18250000"/>
               <a:ext cx="1280000" cy="720000"/>
             </a:xfrm>
             <a:prstGeom prst="rect">
@@ -3173,7 +3173,7 @@
           </p:nvSpPr>
           <p:spPr>
             <a:xfrm>
-              <a:off x="12300000" y="17820000"/>
+              <a:off x="12300000" y="18970000"/>
               <a:ext cx="1280000" cy="300000"/>
             </a:xfrm>
             <a:prstGeom prst="rect">
@@ -3215,9 +3215,9 @@
         </p:nvGrpSpPr>
         <p:grpSpPr>
           <a:xfrm>
-            <a:off x="12300000" y="15950000"/>
+            <a:off x="12300000" y="17100000"/>
             <a:ext cx="1280000" cy="1020000"/>
-            <a:chOff x="12300000" y="15950000"/>
+            <a:chOff x="12300000" y="17100000"/>
             <a:chExt cx="1280000" cy="1020000"/>
           </a:xfrm>
         </p:grpSpPr>
@@ -3237,7 +3237,7 @@
           </p:blipFill>
           <p:spPr>
             <a:xfrm>
-              <a:off x="12300000" y="15950000"/>
+              <a:off x="12300000" y="17100000"/>
               <a:ext cx="1280000" cy="720000"/>
             </a:xfrm>
             <a:prstGeom prst="rect">
@@ -3253,7 +3253,7 @@
           </p:nvSpPr>
           <p:spPr>
             <a:xfrm>
-              <a:off x="12300000" y="16670000"/>
+              <a:off x="12300000" y="17820000"/>
               <a:ext cx="1280000" cy="300000"/>
             </a:xfrm>
             <a:prstGeom prst="rect">
@@ -3295,9 +3295,9 @@
         </p:nvGrpSpPr>
         <p:grpSpPr>
           <a:xfrm>
-            <a:off x="15300000" y="15950000"/>
+            <a:off x="15300000" y="17100000"/>
             <a:ext cx="1280000" cy="1020000"/>
-            <a:chOff x="15300000" y="15950000"/>
+            <a:chOff x="15300000" y="17100000"/>
             <a:chExt cx="1280000" cy="1020000"/>
           </a:xfrm>
         </p:grpSpPr>
@@ -3317,7 +3317,7 @@
           </p:blipFill>
           <p:spPr>
             <a:xfrm>
-              <a:off x="15300000" y="15950000"/>
+              <a:off x="15300000" y="17100000"/>
               <a:ext cx="1280000" cy="720000"/>
             </a:xfrm>
             <a:prstGeom prst="rect">
@@ -3333,7 +3333,7 @@
           </p:nvSpPr>
           <p:spPr>
             <a:xfrm>
-              <a:off x="15300000" y="16670000"/>
+              <a:off x="15300000" y="17820000"/>
               <a:ext cx="1280000" cy="300000"/>
             </a:xfrm>
             <a:prstGeom prst="rect">
@@ -3375,9 +3375,9 @@
         </p:nvGrpSpPr>
         <p:grpSpPr>
           <a:xfrm>
-            <a:off x="18300000" y="15950000"/>
+            <a:off x="18300000" y="17100000"/>
             <a:ext cx="1280000" cy="1020000"/>
-            <a:chOff x="18300000" y="15950000"/>
+            <a:chOff x="18300000" y="17100000"/>
             <a:chExt cx="1280000" cy="1020000"/>
           </a:xfrm>
         </p:grpSpPr>
@@ -3397,7 +3397,7 @@
           </p:blipFill>
           <p:spPr>
             <a:xfrm>
-              <a:off x="18300000" y="15950000"/>
+              <a:off x="18300000" y="17100000"/>
               <a:ext cx="1280000" cy="720000"/>
             </a:xfrm>
             <a:prstGeom prst="rect">
@@ -3413,7 +3413,7 @@
           </p:nvSpPr>
           <p:spPr>
             <a:xfrm>
-              <a:off x="18300000" y="16670000"/>
+              <a:off x="18300000" y="17820000"/>
               <a:ext cx="1280000" cy="300000"/>
             </a:xfrm>
             <a:prstGeom prst="rect">
@@ -3455,9 +3455,9 @@
         </p:nvGrpSpPr>
         <p:grpSpPr>
           <a:xfrm>
-            <a:off x="18300000" y="14800000"/>
+            <a:off x="18300000" y="15950000"/>
             <a:ext cx="1280000" cy="1020000"/>
-            <a:chOff x="18300000" y="14800000"/>
+            <a:chOff x="18300000" y="15950000"/>
             <a:chExt cx="1280000" cy="1020000"/>
           </a:xfrm>
         </p:grpSpPr>
@@ -3477,7 +3477,7 @@
           </p:blipFill>
           <p:spPr>
             <a:xfrm>
-              <a:off x="18300000" y="14800000"/>
+              <a:off x="18300000" y="15950000"/>
               <a:ext cx="1280000" cy="720000"/>
             </a:xfrm>
             <a:prstGeom prst="rect">
@@ -3493,7 +3493,7 @@
           </p:nvSpPr>
           <p:spPr>
             <a:xfrm>
-              <a:off x="18300000" y="15520000"/>
+              <a:off x="18300000" y="16670000"/>
               <a:ext cx="1280000" cy="300000"/>
             </a:xfrm>
             <a:prstGeom prst="rect">
@@ -3535,9 +3535,9 @@
         </p:nvGrpSpPr>
         <p:grpSpPr>
           <a:xfrm>
-            <a:off x="12300000" y="14800000"/>
+            <a:off x="12300000" y="15950000"/>
             <a:ext cx="1280000" cy="1020000"/>
-            <a:chOff x="12300000" y="14800000"/>
+            <a:chOff x="12300000" y="15950000"/>
             <a:chExt cx="1280000" cy="1020000"/>
           </a:xfrm>
         </p:grpSpPr>
@@ -3557,7 +3557,7 @@
           </p:blipFill>
           <p:spPr>
             <a:xfrm>
-              <a:off x="12300000" y="14800000"/>
+              <a:off x="12300000" y="15950000"/>
               <a:ext cx="1280000" cy="720000"/>
             </a:xfrm>
             <a:prstGeom prst="rect">
@@ -3573,7 +3573,7 @@
           </p:nvSpPr>
           <p:spPr>
             <a:xfrm>
-              <a:off x="12300000" y="15520000"/>
+              <a:off x="12300000" y="16670000"/>
               <a:ext cx="1280000" cy="300000"/>
             </a:xfrm>
             <a:prstGeom prst="rect">
@@ -3615,9 +3615,9 @@
         </p:nvGrpSpPr>
         <p:grpSpPr>
           <a:xfrm>
-            <a:off x="9300000" y="14800000"/>
+            <a:off x="9300000" y="15950000"/>
             <a:ext cx="1280000" cy="1020000"/>
-            <a:chOff x="9300000" y="14800000"/>
+            <a:chOff x="9300000" y="15950000"/>
             <a:chExt cx="1280000" cy="1020000"/>
           </a:xfrm>
         </p:grpSpPr>
@@ -3637,7 +3637,7 @@
           </p:blipFill>
           <p:spPr>
             <a:xfrm>
-              <a:off x="9300000" y="14800000"/>
+              <a:off x="9300000" y="15950000"/>
               <a:ext cx="1280000" cy="720000"/>
             </a:xfrm>
             <a:prstGeom prst="rect">
@@ -3653,7 +3653,7 @@
           </p:nvSpPr>
           <p:spPr>
             <a:xfrm>
-              <a:off x="9300000" y="15520000"/>
+              <a:off x="9300000" y="16670000"/>
               <a:ext cx="1280000" cy="300000"/>
             </a:xfrm>
             <a:prstGeom prst="rect">
@@ -3695,9 +3695,9 @@
         </p:nvGrpSpPr>
         <p:grpSpPr>
           <a:xfrm>
-            <a:off x="6300000" y="14800000"/>
+            <a:off x="6300000" y="15950000"/>
             <a:ext cx="1280000" cy="1020000"/>
-            <a:chOff x="6300000" y="14800000"/>
+            <a:chOff x="6300000" y="15950000"/>
             <a:chExt cx="1280000" cy="1020000"/>
           </a:xfrm>
         </p:grpSpPr>
@@ -3717,7 +3717,7 @@
           </p:blipFill>
           <p:spPr>
             <a:xfrm>
-              <a:off x="6300000" y="14800000"/>
+              <a:off x="6300000" y="15950000"/>
               <a:ext cx="1280000" cy="720000"/>
             </a:xfrm>
             <a:prstGeom prst="rect">
@@ -3733,7 +3733,7 @@
           </p:nvSpPr>
           <p:spPr>
             <a:xfrm>
-              <a:off x="6300000" y="15520000"/>
+              <a:off x="6300000" y="16670000"/>
               <a:ext cx="1280000" cy="300000"/>
             </a:xfrm>
             <a:prstGeom prst="rect">
@@ -3775,9 +3775,9 @@
         </p:nvGrpSpPr>
         <p:grpSpPr>
           <a:xfrm>
-            <a:off x="6300000" y="15950000"/>
+            <a:off x="6300000" y="17100000"/>
             <a:ext cx="1280000" cy="1020000"/>
-            <a:chOff x="6300000" y="15950000"/>
+            <a:chOff x="6300000" y="17100000"/>
             <a:chExt cx="1280000" cy="1020000"/>
           </a:xfrm>
         </p:grpSpPr>
@@ -3797,7 +3797,7 @@
           </p:blipFill>
           <p:spPr>
             <a:xfrm>
-              <a:off x="6300000" y="15950000"/>
+              <a:off x="6300000" y="17100000"/>
               <a:ext cx="1280000" cy="720000"/>
             </a:xfrm>
             <a:prstGeom prst="rect">
@@ -3813,7 +3813,7 @@
           </p:nvSpPr>
           <p:spPr>
             <a:xfrm>
-              <a:off x="6300000" y="16670000"/>
+              <a:off x="6300000" y="17820000"/>
               <a:ext cx="1280000" cy="300000"/>
             </a:xfrm>
             <a:prstGeom prst="rect">
@@ -3855,9 +3855,9 @@
         </p:nvGrpSpPr>
         <p:grpSpPr>
           <a:xfrm>
-            <a:off x="12300000" y="13650000"/>
+            <a:off x="12300000" y="14800000"/>
             <a:ext cx="1280000" cy="1020000"/>
-            <a:chOff x="12300000" y="13650000"/>
+            <a:chOff x="12300000" y="14800000"/>
             <a:chExt cx="1280000" cy="1020000"/>
           </a:xfrm>
         </p:grpSpPr>
@@ -3877,7 +3877,7 @@
           </p:blipFill>
           <p:spPr>
             <a:xfrm>
-              <a:off x="12300000" y="13650000"/>
+              <a:off x="12300000" y="14800000"/>
               <a:ext cx="1280000" cy="720000"/>
             </a:xfrm>
             <a:prstGeom prst="rect">
@@ -3893,7 +3893,7 @@
           </p:nvSpPr>
           <p:spPr>
             <a:xfrm>
-              <a:off x="12300000" y="14370000"/>
+              <a:off x="12300000" y="15520000"/>
               <a:ext cx="1280000" cy="300000"/>
             </a:xfrm>
             <a:prstGeom prst="rect">
@@ -3935,9 +3935,9 @@
         </p:nvGrpSpPr>
         <p:grpSpPr>
           <a:xfrm>
-            <a:off x="9300000" y="13650000"/>
+            <a:off x="9300000" y="14800000"/>
             <a:ext cx="1280000" cy="1020000"/>
-            <a:chOff x="9300000" y="13650000"/>
+            <a:chOff x="9300000" y="14800000"/>
             <a:chExt cx="1280000" cy="1020000"/>
           </a:xfrm>
         </p:grpSpPr>
@@ -3957,7 +3957,7 @@
           </p:blipFill>
           <p:spPr>
             <a:xfrm>
-              <a:off x="9300000" y="13650000"/>
+              <a:off x="9300000" y="14800000"/>
               <a:ext cx="1280000" cy="720000"/>
             </a:xfrm>
             <a:prstGeom prst="rect">
@@ -3973,7 +3973,7 @@
           </p:nvSpPr>
           <p:spPr>
             <a:xfrm>
-              <a:off x="9300000" y="14370000"/>
+              <a:off x="9300000" y="15520000"/>
               <a:ext cx="1280000" cy="300000"/>
             </a:xfrm>
             <a:prstGeom prst="rect">
@@ -4015,9 +4015,9 @@
         </p:nvGrpSpPr>
         <p:grpSpPr>
           <a:xfrm>
-            <a:off x="15300000" y="13650000"/>
+            <a:off x="15300000" y="14800000"/>
             <a:ext cx="1280000" cy="1020000"/>
-            <a:chOff x="15300000" y="13650000"/>
+            <a:chOff x="15300000" y="14800000"/>
             <a:chExt cx="1280000" cy="1020000"/>
           </a:xfrm>
         </p:grpSpPr>
@@ -4037,7 +4037,7 @@
           </p:blipFill>
           <p:spPr>
             <a:xfrm>
-              <a:off x="15300000" y="13650000"/>
+              <a:off x="15300000" y="14800000"/>
               <a:ext cx="1280000" cy="720000"/>
             </a:xfrm>
             <a:prstGeom prst="rect">
@@ -4053,7 +4053,7 @@
           </p:nvSpPr>
           <p:spPr>
             <a:xfrm>
-              <a:off x="15300000" y="14370000"/>
+              <a:off x="15300000" y="15520000"/>
               <a:ext cx="1280000" cy="300000"/>
             </a:xfrm>
             <a:prstGeom prst="rect">
@@ -4095,9 +4095,9 @@
         </p:nvGrpSpPr>
         <p:grpSpPr>
           <a:xfrm>
-            <a:off x="15300000" y="12500000"/>
+            <a:off x="15300000" y="13650000"/>
             <a:ext cx="1280000" cy="1020000"/>
-            <a:chOff x="15300000" y="12500000"/>
+            <a:chOff x="15300000" y="13650000"/>
             <a:chExt cx="1280000" cy="1020000"/>
           </a:xfrm>
         </p:grpSpPr>
@@ -4117,7 +4117,7 @@
           </p:blipFill>
           <p:spPr>
             <a:xfrm>
-              <a:off x="15300000" y="12500000"/>
+              <a:off x="15300000" y="13650000"/>
               <a:ext cx="1280000" cy="720000"/>
             </a:xfrm>
             <a:prstGeom prst="rect">
@@ -4133,7 +4133,7 @@
           </p:nvSpPr>
           <p:spPr>
             <a:xfrm>
-              <a:off x="15300000" y="13220000"/>
+              <a:off x="15300000" y="14370000"/>
               <a:ext cx="1280000" cy="300000"/>
             </a:xfrm>
             <a:prstGeom prst="rect">
@@ -4175,9 +4175,9 @@
         </p:nvGrpSpPr>
         <p:grpSpPr>
           <a:xfrm>
-            <a:off x="12300000" y="12500000"/>
+            <a:off x="12300000" y="13650000"/>
             <a:ext cx="1280000" cy="1020000"/>
-            <a:chOff x="12300000" y="12500000"/>
+            <a:chOff x="12300000" y="13650000"/>
             <a:chExt cx="1280000" cy="1020000"/>
           </a:xfrm>
         </p:grpSpPr>
@@ -4197,7 +4197,7 @@
           </p:blipFill>
           <p:spPr>
             <a:xfrm>
-              <a:off x="12300000" y="12500000"/>
+              <a:off x="12300000" y="13650000"/>
               <a:ext cx="1280000" cy="720000"/>
             </a:xfrm>
             <a:prstGeom prst="rect">
@@ -4213,7 +4213,7 @@
           </p:nvSpPr>
           <p:spPr>
             <a:xfrm>
-              <a:off x="12300000" y="13220000"/>
+              <a:off x="12300000" y="14370000"/>
               <a:ext cx="1280000" cy="300000"/>
             </a:xfrm>
             <a:prstGeom prst="rect">
@@ -4255,9 +4255,9 @@
         </p:nvGrpSpPr>
         <p:grpSpPr>
           <a:xfrm>
-            <a:off x="12300000" y="11350000"/>
+            <a:off x="12300000" y="12500000"/>
             <a:ext cx="1280000" cy="1020000"/>
-            <a:chOff x="12300000" y="11350000"/>
+            <a:chOff x="12300000" y="12500000"/>
             <a:chExt cx="1280000" cy="1020000"/>
           </a:xfrm>
         </p:grpSpPr>
@@ -4277,7 +4277,7 @@
           </p:blipFill>
           <p:spPr>
             <a:xfrm>
-              <a:off x="12300000" y="11350000"/>
+              <a:off x="12300000" y="12500000"/>
               <a:ext cx="1280000" cy="720000"/>
             </a:xfrm>
             <a:prstGeom prst="rect">
@@ -4293,7 +4293,7 @@
           </p:nvSpPr>
           <p:spPr>
             <a:xfrm>
-              <a:off x="12300000" y="12070000"/>
+              <a:off x="12300000" y="13220000"/>
               <a:ext cx="1280000" cy="300000"/>
             </a:xfrm>
             <a:prstGeom prst="rect">
@@ -4335,9 +4335,9 @@
         </p:nvGrpSpPr>
         <p:grpSpPr>
           <a:xfrm>
-            <a:off x="9300000" y="12500000"/>
+            <a:off x="9300000" y="13650000"/>
             <a:ext cx="1280000" cy="1020000"/>
-            <a:chOff x="9300000" y="12500000"/>
+            <a:chOff x="9300000" y="13650000"/>
             <a:chExt cx="1280000" cy="1020000"/>
           </a:xfrm>
         </p:grpSpPr>
@@ -4357,7 +4357,7 @@
           </p:blipFill>
           <p:spPr>
             <a:xfrm>
-              <a:off x="9300000" y="12500000"/>
+              <a:off x="9300000" y="13650000"/>
               <a:ext cx="1280000" cy="720000"/>
             </a:xfrm>
             <a:prstGeom prst="rect">
@@ -4373,7 +4373,7 @@
           </p:nvSpPr>
           <p:spPr>
             <a:xfrm>
-              <a:off x="9300000" y="13220000"/>
+              <a:off x="9300000" y="14370000"/>
               <a:ext cx="1280000" cy="300000"/>
             </a:xfrm>
             <a:prstGeom prst="rect">
@@ -4415,9 +4415,9 @@
         </p:nvGrpSpPr>
         <p:grpSpPr>
           <a:xfrm>
-            <a:off x="6300000" y="12500000"/>
+            <a:off x="6300000" y="13650000"/>
             <a:ext cx="1280000" cy="1020000"/>
-            <a:chOff x="6300000" y="12500000"/>
+            <a:chOff x="6300000" y="13650000"/>
             <a:chExt cx="1280000" cy="1020000"/>
           </a:xfrm>
         </p:grpSpPr>
@@ -4437,7 +4437,7 @@
           </p:blipFill>
           <p:spPr>
             <a:xfrm>
-              <a:off x="6300000" y="12500000"/>
+              <a:off x="6300000" y="13650000"/>
               <a:ext cx="1280000" cy="720000"/>
             </a:xfrm>
             <a:prstGeom prst="rect">
@@ -4453,7 +4453,7 @@
           </p:nvSpPr>
           <p:spPr>
             <a:xfrm>
-              <a:off x="6300000" y="13220000"/>
+              <a:off x="6300000" y="14370000"/>
               <a:ext cx="1280000" cy="300000"/>
             </a:xfrm>
             <a:prstGeom prst="rect">
@@ -4495,9 +4495,9 @@
         </p:nvGrpSpPr>
         <p:grpSpPr>
           <a:xfrm>
-            <a:off x="6300000" y="9050000"/>
+            <a:off x="6300000" y="10200000"/>
             <a:ext cx="1280000" cy="1020000"/>
-            <a:chOff x="6300000" y="9050000"/>
+            <a:chOff x="6300000" y="10200000"/>
             <a:chExt cx="1280000" cy="1020000"/>
           </a:xfrm>
         </p:grpSpPr>
@@ -4517,7 +4517,7 @@
           </p:blipFill>
           <p:spPr>
             <a:xfrm>
-              <a:off x="6300000" y="9050000"/>
+              <a:off x="6300000" y="10200000"/>
               <a:ext cx="1280000" cy="720000"/>
             </a:xfrm>
             <a:prstGeom prst="rect">
@@ -4533,7 +4533,7 @@
           </p:nvSpPr>
           <p:spPr>
             <a:xfrm>
-              <a:off x="6300000" y="9770000"/>
+              <a:off x="6300000" y="10920000"/>
               <a:ext cx="1280000" cy="300000"/>
             </a:xfrm>
             <a:prstGeom prst="rect">
@@ -4575,9 +4575,9 @@
         </p:nvGrpSpPr>
         <p:grpSpPr>
           <a:xfrm>
-            <a:off x="6300000" y="7900000"/>
+            <a:off x="6300000" y="9050000"/>
             <a:ext cx="1280000" cy="1020000"/>
-            <a:chOff x="6300000" y="7900000"/>
+            <a:chOff x="6300000" y="9050000"/>
             <a:chExt cx="1280000" cy="1020000"/>
           </a:xfrm>
         </p:grpSpPr>
@@ -4597,7 +4597,7 @@
           </p:blipFill>
           <p:spPr>
             <a:xfrm>
-              <a:off x="6300000" y="7900000"/>
+              <a:off x="6300000" y="9050000"/>
               <a:ext cx="1280000" cy="720000"/>
             </a:xfrm>
             <a:prstGeom prst="rect">
@@ -4613,7 +4613,7 @@
           </p:nvSpPr>
           <p:spPr>
             <a:xfrm>
-              <a:off x="6300000" y="8620000"/>
+              <a:off x="6300000" y="9770000"/>
               <a:ext cx="1280000" cy="300000"/>
             </a:xfrm>
             <a:prstGeom prst="rect">
@@ -4655,9 +4655,9 @@
         </p:nvGrpSpPr>
         <p:grpSpPr>
           <a:xfrm>
-            <a:off x="6300000" y="6750000"/>
+            <a:off x="6300000" y="7900000"/>
             <a:ext cx="1280000" cy="1020000"/>
-            <a:chOff x="6300000" y="6750000"/>
+            <a:chOff x="6300000" y="7900000"/>
             <a:chExt cx="1280000" cy="1020000"/>
           </a:xfrm>
         </p:grpSpPr>
@@ -4677,7 +4677,7 @@
           </p:blipFill>
           <p:spPr>
             <a:xfrm>
-              <a:off x="6300000" y="6750000"/>
+              <a:off x="6300000" y="7900000"/>
               <a:ext cx="1280000" cy="720000"/>
             </a:xfrm>
             <a:prstGeom prst="rect">
@@ -4693,7 +4693,7 @@
           </p:nvSpPr>
           <p:spPr>
             <a:xfrm>
-              <a:off x="6300000" y="7470000"/>
+              <a:off x="6300000" y="8620000"/>
               <a:ext cx="1280000" cy="300000"/>
             </a:xfrm>
             <a:prstGeom prst="rect">
@@ -4735,9 +4735,9 @@
         </p:nvGrpSpPr>
         <p:grpSpPr>
           <a:xfrm>
-            <a:off x="9300000" y="7900000"/>
+            <a:off x="9300000" y="9050000"/>
             <a:ext cx="1280000" cy="1020000"/>
-            <a:chOff x="9300000" y="7900000"/>
+            <a:chOff x="9300000" y="9050000"/>
             <a:chExt cx="1280000" cy="1020000"/>
           </a:xfrm>
         </p:grpSpPr>
@@ -4757,7 +4757,7 @@
           </p:blipFill>
           <p:spPr>
             <a:xfrm>
-              <a:off x="9300000" y="7900000"/>
+              <a:off x="9300000" y="9050000"/>
               <a:ext cx="1280000" cy="720000"/>
             </a:xfrm>
             <a:prstGeom prst="rect">
@@ -4773,7 +4773,7 @@
           </p:nvSpPr>
           <p:spPr>
             <a:xfrm>
-              <a:off x="9300000" y="8620000"/>
+              <a:off x="9300000" y="9770000"/>
               <a:ext cx="1280000" cy="300000"/>
             </a:xfrm>
             <a:prstGeom prst="rect">
@@ -4815,9 +4815,9 @@
         </p:nvGrpSpPr>
         <p:grpSpPr>
           <a:xfrm>
-            <a:off x="9300000" y="9050000"/>
+            <a:off x="9300000" y="10200000"/>
             <a:ext cx="1280000" cy="1020000"/>
-            <a:chOff x="9300000" y="9050000"/>
+            <a:chOff x="9300000" y="10200000"/>
             <a:chExt cx="1280000" cy="1020000"/>
           </a:xfrm>
         </p:grpSpPr>
@@ -4837,7 +4837,7 @@
           </p:blipFill>
           <p:spPr>
             <a:xfrm>
-              <a:off x="9300000" y="9050000"/>
+              <a:off x="9300000" y="10200000"/>
               <a:ext cx="1280000" cy="720000"/>
             </a:xfrm>
             <a:prstGeom prst="rect">
@@ -4853,7 +4853,7 @@
           </p:nvSpPr>
           <p:spPr>
             <a:xfrm>
-              <a:off x="9300000" y="9770000"/>
+              <a:off x="9300000" y="10920000"/>
               <a:ext cx="1280000" cy="300000"/>
             </a:xfrm>
             <a:prstGeom prst="rect">
@@ -4895,9 +4895,9 @@
         </p:nvGrpSpPr>
         <p:grpSpPr>
           <a:xfrm>
-            <a:off x="12300000" y="7900000"/>
+            <a:off x="12300000" y="9050000"/>
             <a:ext cx="1280000" cy="1020000"/>
-            <a:chOff x="12300000" y="7900000"/>
+            <a:chOff x="12300000" y="9050000"/>
             <a:chExt cx="1280000" cy="1020000"/>
           </a:xfrm>
         </p:grpSpPr>
@@ -4917,7 +4917,7 @@
           </p:blipFill>
           <p:spPr>
             <a:xfrm>
-              <a:off x="12300000" y="7900000"/>
+              <a:off x="12300000" y="9050000"/>
               <a:ext cx="1280000" cy="720000"/>
             </a:xfrm>
             <a:prstGeom prst="rect">
@@ -4933,7 +4933,7 @@
           </p:nvSpPr>
           <p:spPr>
             <a:xfrm>
-              <a:off x="12300000" y="8620000"/>
+              <a:off x="12300000" y="9770000"/>
               <a:ext cx="1280000" cy="300000"/>
             </a:xfrm>
             <a:prstGeom prst="rect">
@@ -4975,9 +4975,9 @@
         </p:nvGrpSpPr>
         <p:grpSpPr>
           <a:xfrm>
-            <a:off x="15300000" y="7900000"/>
+            <a:off x="15300000" y="9050000"/>
             <a:ext cx="1280000" cy="1020000"/>
-            <a:chOff x="15300000" y="7900000"/>
+            <a:chOff x="15300000" y="9050000"/>
             <a:chExt cx="1280000" cy="1020000"/>
           </a:xfrm>
         </p:grpSpPr>
@@ -4997,7 +4997,7 @@
           </p:blipFill>
           <p:spPr>
             <a:xfrm>
-              <a:off x="15300000" y="7900000"/>
+              <a:off x="15300000" y="9050000"/>
               <a:ext cx="1280000" cy="720000"/>
             </a:xfrm>
             <a:prstGeom prst="rect">
@@ -5013,7 +5013,7 @@
           </p:nvSpPr>
           <p:spPr>
             <a:xfrm>
-              <a:off x="15300000" y="8620000"/>
+              <a:off x="15300000" y="9770000"/>
               <a:ext cx="1280000" cy="300000"/>
             </a:xfrm>
             <a:prstGeom prst="rect">
@@ -5055,9 +5055,9 @@
         </p:nvGrpSpPr>
         <p:grpSpPr>
           <a:xfrm>
-            <a:off x="18300000" y="7900000"/>
+            <a:off x="18300000" y="9050000"/>
             <a:ext cx="1280000" cy="1020000"/>
-            <a:chOff x="18300000" y="7900000"/>
+            <a:chOff x="18300000" y="9050000"/>
             <a:chExt cx="1280000" cy="1020000"/>
           </a:xfrm>
         </p:grpSpPr>
@@ -5077,7 +5077,7 @@
           </p:blipFill>
           <p:spPr>
             <a:xfrm>
-              <a:off x="18300000" y="7900000"/>
+              <a:off x="18300000" y="9050000"/>
               <a:ext cx="1280000" cy="720000"/>
             </a:xfrm>
             <a:prstGeom prst="rect">
@@ -5093,7 +5093,7 @@
           </p:nvSpPr>
           <p:spPr>
             <a:xfrm>
-              <a:off x="18300000" y="8620000"/>
+              <a:off x="18300000" y="9770000"/>
               <a:ext cx="1280000" cy="300000"/>
             </a:xfrm>
             <a:prstGeom prst="rect">
@@ -5135,9 +5135,9 @@
         </p:nvGrpSpPr>
         <p:grpSpPr>
           <a:xfrm>
-            <a:off x="18300000" y="6750000"/>
+            <a:off x="18300000" y="7900000"/>
             <a:ext cx="1280000" cy="1020000"/>
-            <a:chOff x="18300000" y="6750000"/>
+            <a:chOff x="18300000" y="7900000"/>
             <a:chExt cx="1280000" cy="1020000"/>
           </a:xfrm>
         </p:grpSpPr>
@@ -5157,7 +5157,7 @@
           </p:blipFill>
           <p:spPr>
             <a:xfrm>
-              <a:off x="18300000" y="6750000"/>
+              <a:off x="18300000" y="7900000"/>
               <a:ext cx="1280000" cy="720000"/>
             </a:xfrm>
             <a:prstGeom prst="rect">
@@ -5173,7 +5173,7 @@
           </p:nvSpPr>
           <p:spPr>
             <a:xfrm>
-              <a:off x="18300000" y="7470000"/>
+              <a:off x="18300000" y="8620000"/>
               <a:ext cx="1280000" cy="300000"/>
             </a:xfrm>
             <a:prstGeom prst="rect">
@@ -5215,9 +5215,9 @@
         </p:nvGrpSpPr>
         <p:grpSpPr>
           <a:xfrm>
-            <a:off x="12300000" y="6750000"/>
+            <a:off x="12300000" y="7900000"/>
             <a:ext cx="1280000" cy="1020000"/>
-            <a:chOff x="12300000" y="6750000"/>
+            <a:chOff x="12300000" y="7900000"/>
             <a:chExt cx="1280000" cy="1020000"/>
           </a:xfrm>
         </p:grpSpPr>
@@ -5237,7 +5237,7 @@
           </p:blipFill>
           <p:spPr>
             <a:xfrm>
-              <a:off x="12300000" y="6750000"/>
+              <a:off x="12300000" y="7900000"/>
               <a:ext cx="1280000" cy="720000"/>
             </a:xfrm>
             <a:prstGeom prst="rect">
@@ -5253,7 +5253,7 @@
           </p:nvSpPr>
           <p:spPr>
             <a:xfrm>
-              <a:off x="12300000" y="7470000"/>
+              <a:off x="12300000" y="8620000"/>
               <a:ext cx="1280000" cy="300000"/>
             </a:xfrm>
             <a:prstGeom prst="rect">
@@ -5295,9 +5295,9 @@
         </p:nvGrpSpPr>
         <p:grpSpPr>
           <a:xfrm>
-            <a:off x="9300000" y="6750000"/>
+            <a:off x="9300000" y="7900000"/>
             <a:ext cx="1280000" cy="1020000"/>
-            <a:chOff x="9300000" y="6750000"/>
+            <a:chOff x="9300000" y="7900000"/>
             <a:chExt cx="1280000" cy="1020000"/>
           </a:xfrm>
         </p:grpSpPr>
@@ -5317,7 +5317,7 @@
           </p:blipFill>
           <p:spPr>
             <a:xfrm>
-              <a:off x="9300000" y="6750000"/>
+              <a:off x="9300000" y="7900000"/>
               <a:ext cx="1280000" cy="720000"/>
             </a:xfrm>
             <a:prstGeom prst="rect">
@@ -5333,7 +5333,7 @@
           </p:nvSpPr>
           <p:spPr>
             <a:xfrm>
-              <a:off x="9300000" y="7470000"/>
+              <a:off x="9300000" y="8620000"/>
               <a:ext cx="1280000" cy="300000"/>
             </a:xfrm>
             <a:prstGeom prst="rect">
@@ -5375,9 +5375,9 @@
         </p:nvGrpSpPr>
         <p:grpSpPr>
           <a:xfrm>
-            <a:off x="9300000" y="5600000"/>
+            <a:off x="9300000" y="6750000"/>
             <a:ext cx="1280000" cy="1020000"/>
-            <a:chOff x="9300000" y="5600000"/>
+            <a:chOff x="9300000" y="6750000"/>
             <a:chExt cx="1280000" cy="1020000"/>
           </a:xfrm>
         </p:grpSpPr>
@@ -5397,7 +5397,7 @@
           </p:blipFill>
           <p:spPr>
             <a:xfrm>
-              <a:off x="9300000" y="5600000"/>
+              <a:off x="9300000" y="6750000"/>
               <a:ext cx="1280000" cy="720000"/>
             </a:xfrm>
             <a:prstGeom prst="rect">
@@ -5413,7 +5413,7 @@
           </p:nvSpPr>
           <p:spPr>
             <a:xfrm>
-              <a:off x="9300000" y="6320000"/>
+              <a:off x="9300000" y="7470000"/>
               <a:ext cx="1280000" cy="300000"/>
             </a:xfrm>
             <a:prstGeom prst="rect">
@@ -5455,9 +5455,9 @@
         </p:nvGrpSpPr>
         <p:grpSpPr>
           <a:xfrm>
-            <a:off x="9300000" y="3300000"/>
+            <a:off x="9300000" y="4450000"/>
             <a:ext cx="1280000" cy="1020000"/>
-            <a:chOff x="9300000" y="3300000"/>
+            <a:chOff x="9300000" y="4450000"/>
             <a:chExt cx="1280000" cy="1020000"/>
           </a:xfrm>
         </p:grpSpPr>
@@ -5477,7 +5477,7 @@
           </p:blipFill>
           <p:spPr>
             <a:xfrm>
-              <a:off x="9300000" y="3300000"/>
+              <a:off x="9300000" y="4450000"/>
               <a:ext cx="1280000" cy="720000"/>
             </a:xfrm>
             <a:prstGeom prst="rect">
@@ -5493,7 +5493,7 @@
           </p:nvSpPr>
           <p:spPr>
             <a:xfrm>
-              <a:off x="9300000" y="4020000"/>
+              <a:off x="9300000" y="5170000"/>
               <a:ext cx="1280000" cy="300000"/>
             </a:xfrm>
             <a:prstGeom prst="rect">
@@ -5535,9 +5535,9 @@
         </p:nvGrpSpPr>
         <p:grpSpPr>
           <a:xfrm>
-            <a:off x="9300000" y="2150000"/>
+            <a:off x="9300000" y="3300000"/>
             <a:ext cx="1280000" cy="1020000"/>
-            <a:chOff x="9300000" y="2150000"/>
+            <a:chOff x="9300000" y="3300000"/>
             <a:chExt cx="1280000" cy="1020000"/>
           </a:xfrm>
         </p:grpSpPr>
@@ -5557,7 +5557,7 @@
           </p:blipFill>
           <p:spPr>
             <a:xfrm>
-              <a:off x="9300000" y="2150000"/>
+              <a:off x="9300000" y="3300000"/>
               <a:ext cx="1280000" cy="720000"/>
             </a:xfrm>
             <a:prstGeom prst="rect">
@@ -5573,7 +5573,7 @@
           </p:nvSpPr>
           <p:spPr>
             <a:xfrm>
-              <a:off x="9300000" y="2870000"/>
+              <a:off x="9300000" y="4020000"/>
               <a:ext cx="1280000" cy="300000"/>
             </a:xfrm>
             <a:prstGeom prst="rect">
@@ -5615,9 +5615,9 @@
         </p:nvGrpSpPr>
         <p:grpSpPr>
           <a:xfrm>
-            <a:off x="6300000" y="2150000"/>
+            <a:off x="6300000" y="3300000"/>
             <a:ext cx="1280000" cy="1020000"/>
-            <a:chOff x="6300000" y="2150000"/>
+            <a:chOff x="6300000" y="3300000"/>
             <a:chExt cx="1280000" cy="1020000"/>
           </a:xfrm>
         </p:grpSpPr>
@@ -5637,7 +5637,7 @@
           </p:blipFill>
           <p:spPr>
             <a:xfrm>
-              <a:off x="6300000" y="2150000"/>
+              <a:off x="6300000" y="3300000"/>
               <a:ext cx="1280000" cy="720000"/>
             </a:xfrm>
             <a:prstGeom prst="rect">
@@ -5653,7 +5653,7 @@
           </p:nvSpPr>
           <p:spPr>
             <a:xfrm>
-              <a:off x="6300000" y="2870000"/>
+              <a:off x="6300000" y="4020000"/>
               <a:ext cx="1280000" cy="300000"/>
             </a:xfrm>
             <a:prstGeom prst="rect">
@@ -5695,9 +5695,9 @@
         </p:nvGrpSpPr>
         <p:grpSpPr>
           <a:xfrm>
-            <a:off x="6300000" y="1000000"/>
+            <a:off x="6300000" y="2150000"/>
             <a:ext cx="1280000" cy="1020000"/>
-            <a:chOff x="6300000" y="1000000"/>
+            <a:chOff x="6300000" y="2150000"/>
             <a:chExt cx="1280000" cy="1020000"/>
           </a:xfrm>
         </p:grpSpPr>
@@ -5717,7 +5717,7 @@
           </p:blipFill>
           <p:spPr>
             <a:xfrm>
-              <a:off x="6300000" y="1000000"/>
+              <a:off x="6300000" y="2150000"/>
               <a:ext cx="1280000" cy="720000"/>
             </a:xfrm>
             <a:prstGeom prst="rect">
@@ -5733,7 +5733,7 @@
           </p:nvSpPr>
           <p:spPr>
             <a:xfrm>
-              <a:off x="6300000" y="1720000"/>
+              <a:off x="6300000" y="2870000"/>
               <a:ext cx="1280000" cy="300000"/>
             </a:xfrm>
             <a:prstGeom prst="rect">
@@ -5775,29 +5775,29 @@
         </p:nvGrpSpPr>
         <p:grpSpPr>
           <a:xfrm>
-            <a:off x="9300000" y="1000000"/>
+            <a:off x="6300000" y="1000000"/>
             <a:ext cx="1280000" cy="1020000"/>
-            <a:chOff x="9300000" y="1000000"/>
+            <a:chOff x="6300000" y="1000000"/>
             <a:chExt cx="1280000" cy="1020000"/>
           </a:xfrm>
         </p:grpSpPr>
         <p:pic>
           <p:nvPicPr>
-            <p:cNvPr id="103" name="Picture 102" descr="tomb_crypt.webp.jpg"/>
+            <p:cNvPr id="103" name="Picture 102" descr="tomb_bonepit.webp.jpg"/>
             <p:cNvPicPr>
               <a:picLocks noChangeAspect="1"/>
             </p:cNvPicPr>
             <p:nvPr/>
           </p:nvPicPr>
           <p:blipFill>
-            <a:blip r:embed="rId35"/>
+            <a:blip r:embed="rId34"/>
             <a:stretch>
               <a:fillRect/>
             </a:stretch>
           </p:blipFill>
           <p:spPr>
             <a:xfrm>
-              <a:off x="9300000" y="1000000"/>
+              <a:off x="6300000" y="1000000"/>
               <a:ext cx="1280000" cy="720000"/>
             </a:xfrm>
             <a:prstGeom prst="rect">
@@ -5813,7 +5813,87 @@
           </p:nvSpPr>
           <p:spPr>
             <a:xfrm>
-              <a:off x="9300000" y="1720000"/>
+              <a:off x="6300000" y="1720000"/>
+              <a:ext cx="1280000" cy="300000"/>
+            </a:xfrm>
+            <a:prstGeom prst="rect">
+              <a:avLst/>
+            </a:prstGeom>
+            <a:noFill/>
+          </p:spPr>
+          <p:txBody>
+            <a:bodyPr wrap="square" anchor="t">
+              <a:spAutoFit/>
+            </a:bodyPr>
+            <a:lstStyle/>
+            <a:p>
+              <a:pPr algn="ctr"/>
+              <a:r>
+                <a:rPr sz="1300" b="1"/>
+                <a:t>底層祭壇</a:t>
+              </a:r>
+            </a:p>
+            <a:p>
+              <a:pPr algn="ctr"/>
+              <a:r>
+                <a:rPr sz="800">
+                  <a:solidFill>
+                    <a:srgbClr val="9A989E"/>
+                  </a:solidFill>
+                </a:rPr>
+                <a:t>lowaltar</a:t>
+              </a:r>
+            </a:p>
+          </p:txBody>
+        </p:sp>
+      </p:grpSp>
+      <p:grpSp>
+        <p:nvGrpSpPr>
+          <p:cNvPr id="105" name="Group 104"/>
+          <p:cNvGrpSpPr/>
+          <p:nvPr/>
+        </p:nvGrpSpPr>
+        <p:grpSpPr>
+          <a:xfrm>
+            <a:off x="9300000" y="2150000"/>
+            <a:ext cx="1280000" cy="1020000"/>
+            <a:chOff x="9300000" y="2150000"/>
+            <a:chExt cx="1280000" cy="1020000"/>
+          </a:xfrm>
+        </p:grpSpPr>
+        <p:pic>
+          <p:nvPicPr>
+            <p:cNvPr id="106" name="Picture 105" descr="tomb_crypt.webp.jpg"/>
+            <p:cNvPicPr>
+              <a:picLocks noChangeAspect="1"/>
+            </p:cNvPicPr>
+            <p:nvPr/>
+          </p:nvPicPr>
+          <p:blipFill>
+            <a:blip r:embed="rId35"/>
+            <a:stretch>
+              <a:fillRect/>
+            </a:stretch>
+          </p:blipFill>
+          <p:spPr>
+            <a:xfrm>
+              <a:off x="9300000" y="2150000"/>
+              <a:ext cx="1280000" cy="720000"/>
+            </a:xfrm>
+            <a:prstGeom prst="rect">
+              <a:avLst/>
+            </a:prstGeom>
+          </p:spPr>
+        </p:pic>
+        <p:sp>
+          <p:nvSpPr>
+            <p:cNvPr id="107" name="TextBox 106"/>
+            <p:cNvSpPr txBox="1"/>
+            <p:nvPr/>
+          </p:nvSpPr>
+          <p:spPr>
+            <a:xfrm>
+              <a:off x="9300000" y="2870000"/>
               <a:ext cx="1280000" cy="300000"/>
             </a:xfrm>
             <a:prstGeom prst="rect">
@@ -5849,119 +5929,14 @@
       </p:grpSp>
       <p:cxnSp>
         <p:nvCxnSpPr>
-          <p:cNvPr id="105" name="Connector 104"/>
+          <p:cNvPr id="108" name="Connector 107"/>
           <p:cNvCxnSpPr/>
           <p:nvPr/>
         </p:nvCxnSpPr>
         <p:spPr>
           <a:xfrm flipV="1">
-            <a:off x="12940000" y="16310000"/>
+            <a:off x="12940000" y="17460000"/>
             <a:ext cx="0" cy="1150000"/>
-          </a:xfrm>
-          <a:prstGeom prst="line">
-            <a:avLst/>
-          </a:prstGeom>
-          <a:ln w="19050">
-            <a:solidFill>
-              <a:srgbClr val="333338"/>
-            </a:solidFill>
-          </a:ln>
-        </p:spPr>
-        <p:style>
-          <a:lnRef idx="2">
-            <a:schemeClr val="accent1"/>
-          </a:lnRef>
-          <a:fillRef idx="0">
-            <a:schemeClr val="accent1"/>
-          </a:fillRef>
-          <a:effectRef idx="1">
-            <a:schemeClr val="accent1"/>
-          </a:effectRef>
-          <a:fontRef idx="minor">
-            <a:schemeClr val="tx1"/>
-          </a:fontRef>
-        </p:style>
-      </p:cxnSp>
-      <p:cxnSp>
-        <p:nvCxnSpPr>
-          <p:cNvPr id="106" name="Connector 105"/>
-          <p:cNvCxnSpPr/>
-          <p:nvPr/>
-        </p:nvCxnSpPr>
-        <p:spPr>
-          <a:xfrm flipV="1">
-            <a:off x="12940000" y="15160000"/>
-            <a:ext cx="0" cy="1150000"/>
-          </a:xfrm>
-          <a:prstGeom prst="line">
-            <a:avLst/>
-          </a:prstGeom>
-          <a:ln w="19050">
-            <a:solidFill>
-              <a:srgbClr val="333338"/>
-            </a:solidFill>
-          </a:ln>
-        </p:spPr>
-        <p:style>
-          <a:lnRef idx="2">
-            <a:schemeClr val="accent1"/>
-          </a:lnRef>
-          <a:fillRef idx="0">
-            <a:schemeClr val="accent1"/>
-          </a:fillRef>
-          <a:effectRef idx="1">
-            <a:schemeClr val="accent1"/>
-          </a:effectRef>
-          <a:fontRef idx="minor">
-            <a:schemeClr val="tx1"/>
-          </a:fontRef>
-        </p:style>
-      </p:cxnSp>
-      <p:cxnSp>
-        <p:nvCxnSpPr>
-          <p:cNvPr id="107" name="Connector 106"/>
-          <p:cNvCxnSpPr/>
-          <p:nvPr/>
-        </p:nvCxnSpPr>
-        <p:spPr>
-          <a:xfrm>
-            <a:off x="12940000" y="16310000"/>
-            <a:ext cx="3000000" cy="0"/>
-          </a:xfrm>
-          <a:prstGeom prst="line">
-            <a:avLst/>
-          </a:prstGeom>
-          <a:ln w="19050">
-            <a:solidFill>
-              <a:srgbClr val="333338"/>
-            </a:solidFill>
-          </a:ln>
-        </p:spPr>
-        <p:style>
-          <a:lnRef idx="2">
-            <a:schemeClr val="accent1"/>
-          </a:lnRef>
-          <a:fillRef idx="0">
-            <a:schemeClr val="accent1"/>
-          </a:fillRef>
-          <a:effectRef idx="1">
-            <a:schemeClr val="accent1"/>
-          </a:effectRef>
-          <a:fontRef idx="minor">
-            <a:schemeClr val="tx1"/>
-          </a:fontRef>
-        </p:style>
-      </p:cxnSp>
-      <p:cxnSp>
-        <p:nvCxnSpPr>
-          <p:cNvPr id="108" name="Connector 107"/>
-          <p:cNvCxnSpPr/>
-          <p:nvPr/>
-        </p:nvCxnSpPr>
-        <p:spPr>
-          <a:xfrm>
-            <a:off x="15940000" y="16310000"/>
-            <a:ext cx="3000000" cy="0"/>
           </a:xfrm>
           <a:prstGeom prst="line">
             <a:avLst/>
@@ -5995,7 +5970,7 @@
         </p:nvCxnSpPr>
         <p:spPr>
           <a:xfrm flipV="1">
-            <a:off x="18940000" y="15160000"/>
+            <a:off x="12940000" y="16310000"/>
             <a:ext cx="0" cy="1150000"/>
           </a:xfrm>
           <a:prstGeom prst="line">
@@ -6029,9 +6004,9 @@
           <p:nvPr/>
         </p:nvCxnSpPr>
         <p:spPr>
-          <a:xfrm flipV="1">
-            <a:off x="12940000" y="14010000"/>
-            <a:ext cx="0" cy="1150000"/>
+          <a:xfrm>
+            <a:off x="12940000" y="17460000"/>
+            <a:ext cx="3000000" cy="0"/>
           </a:xfrm>
           <a:prstGeom prst="line">
             <a:avLst/>
@@ -6064,8 +6039,8 @@
           <p:nvPr/>
         </p:nvCxnSpPr>
         <p:spPr>
-          <a:xfrm flipH="1">
-            <a:off x="9940000" y="15160000"/>
+          <a:xfrm>
+            <a:off x="15940000" y="17460000"/>
             <a:ext cx="3000000" cy="0"/>
           </a:xfrm>
           <a:prstGeom prst="line">
@@ -6099,9 +6074,9 @@
           <p:nvPr/>
         </p:nvCxnSpPr>
         <p:spPr>
-          <a:xfrm flipH="1">
-            <a:off x="6940000" y="15160000"/>
-            <a:ext cx="3000000" cy="0"/>
+          <a:xfrm flipV="1">
+            <a:off x="18940000" y="16310000"/>
+            <a:ext cx="0" cy="1150000"/>
           </a:xfrm>
           <a:prstGeom prst="line">
             <a:avLst/>
@@ -6134,8 +6109,8 @@
           <p:nvPr/>
         </p:nvCxnSpPr>
         <p:spPr>
-          <a:xfrm>
-            <a:off x="6940000" y="15160000"/>
+          <a:xfrm flipV="1">
+            <a:off x="12940000" y="15160000"/>
             <a:ext cx="0" cy="1150000"/>
           </a:xfrm>
           <a:prstGeom prst="line">
@@ -6169,8 +6144,8 @@
           <p:nvPr/>
         </p:nvCxnSpPr>
         <p:spPr>
-          <a:xfrm>
-            <a:off x="12940000" y="14010000"/>
+          <a:xfrm flipH="1">
+            <a:off x="9940000" y="16310000"/>
             <a:ext cx="3000000" cy="0"/>
           </a:xfrm>
           <a:prstGeom prst="line">
@@ -6205,7 +6180,7 @@
         </p:nvCxnSpPr>
         <p:spPr>
           <a:xfrm flipH="1">
-            <a:off x="9940000" y="14010000"/>
+            <a:off x="6940000" y="16310000"/>
             <a:ext cx="3000000" cy="0"/>
           </a:xfrm>
           <a:prstGeom prst="line">
@@ -6239,8 +6214,8 @@
           <p:nvPr/>
         </p:nvCxnSpPr>
         <p:spPr>
-          <a:xfrm flipV="1">
-            <a:off x="15940000" y="12860000"/>
+          <a:xfrm>
+            <a:off x="6940000" y="16310000"/>
             <a:ext cx="0" cy="1150000"/>
           </a:xfrm>
           <a:prstGeom prst="line">
@@ -6274,8 +6249,8 @@
           <p:nvPr/>
         </p:nvCxnSpPr>
         <p:spPr>
-          <a:xfrm flipH="1">
-            <a:off x="12940000" y="12860000"/>
+          <a:xfrm>
+            <a:off x="12940000" y="15160000"/>
             <a:ext cx="3000000" cy="0"/>
           </a:xfrm>
           <a:prstGeom prst="line">
@@ -6309,9 +6284,9 @@
           <p:nvPr/>
         </p:nvCxnSpPr>
         <p:spPr>
-          <a:xfrm flipV="1">
-            <a:off x="12940000" y="11710000"/>
-            <a:ext cx="0" cy="1150000"/>
+          <a:xfrm flipH="1">
+            <a:off x="9940000" y="15160000"/>
+            <a:ext cx="3000000" cy="0"/>
           </a:xfrm>
           <a:prstGeom prst="line">
             <a:avLst/>
@@ -6344,9 +6319,9 @@
           <p:nvPr/>
         </p:nvCxnSpPr>
         <p:spPr>
-          <a:xfrm flipH="1">
-            <a:off x="9940000" y="12860000"/>
-            <a:ext cx="3000000" cy="0"/>
+          <a:xfrm flipV="1">
+            <a:off x="15940000" y="14010000"/>
+            <a:ext cx="0" cy="1150000"/>
           </a:xfrm>
           <a:prstGeom prst="line">
             <a:avLst/>
@@ -6380,7 +6355,7 @@
         </p:nvCxnSpPr>
         <p:spPr>
           <a:xfrm flipH="1">
-            <a:off x="6940000" y="12860000"/>
+            <a:off x="12940000" y="14010000"/>
             <a:ext cx="3000000" cy="0"/>
           </a:xfrm>
           <a:prstGeom prst="line">
@@ -6415,8 +6390,8 @@
         </p:nvCxnSpPr>
         <p:spPr>
           <a:xfrm flipV="1">
-            <a:off x="6940000" y="9410000"/>
-            <a:ext cx="0" cy="3450000"/>
+            <a:off x="12940000" y="12860000"/>
+            <a:ext cx="0" cy="1150000"/>
           </a:xfrm>
           <a:prstGeom prst="line">
             <a:avLst/>
@@ -6449,9 +6424,9 @@
           <p:nvPr/>
         </p:nvCxnSpPr>
         <p:spPr>
-          <a:xfrm flipV="1">
-            <a:off x="6940000" y="8260000"/>
-            <a:ext cx="0" cy="1150000"/>
+          <a:xfrm flipH="1">
+            <a:off x="9940000" y="14010000"/>
+            <a:ext cx="3000000" cy="0"/>
           </a:xfrm>
           <a:prstGeom prst="line">
             <a:avLst/>
@@ -6484,9 +6459,9 @@
           <p:nvPr/>
         </p:nvCxnSpPr>
         <p:spPr>
-          <a:xfrm flipV="1">
-            <a:off x="6940000" y="7110000"/>
-            <a:ext cx="0" cy="1150000"/>
+          <a:xfrm flipH="1">
+            <a:off x="6940000" y="14010000"/>
+            <a:ext cx="3000000" cy="0"/>
           </a:xfrm>
           <a:prstGeom prst="line">
             <a:avLst/>
@@ -6519,9 +6494,9 @@
           <p:nvPr/>
         </p:nvCxnSpPr>
         <p:spPr>
-          <a:xfrm>
-            <a:off x="6940000" y="8260000"/>
-            <a:ext cx="3000000" cy="0"/>
+          <a:xfrm flipV="1">
+            <a:off x="6940000" y="10560000"/>
+            <a:ext cx="0" cy="3450000"/>
           </a:xfrm>
           <a:prstGeom prst="line">
             <a:avLst/>
@@ -6554,8 +6529,8 @@
           <p:nvPr/>
         </p:nvCxnSpPr>
         <p:spPr>
-          <a:xfrm>
-            <a:off x="9940000" y="8260000"/>
+          <a:xfrm flipV="1">
+            <a:off x="6940000" y="9410000"/>
             <a:ext cx="0" cy="1150000"/>
           </a:xfrm>
           <a:prstGeom prst="line">
@@ -6589,9 +6564,9 @@
           <p:nvPr/>
         </p:nvCxnSpPr>
         <p:spPr>
-          <a:xfrm>
-            <a:off x="9940000" y="8260000"/>
-            <a:ext cx="3000000" cy="0"/>
+          <a:xfrm flipV="1">
+            <a:off x="6940000" y="8260000"/>
+            <a:ext cx="0" cy="1150000"/>
           </a:xfrm>
           <a:prstGeom prst="line">
             <a:avLst/>
@@ -6624,9 +6599,9 @@
           <p:nvPr/>
         </p:nvCxnSpPr>
         <p:spPr>
-          <a:xfrm flipV="1">
-            <a:off x="12940000" y="7110000"/>
-            <a:ext cx="0" cy="1150000"/>
+          <a:xfrm>
+            <a:off x="6940000" y="9410000"/>
+            <a:ext cx="3000000" cy="0"/>
           </a:xfrm>
           <a:prstGeom prst="line">
             <a:avLst/>
@@ -6660,8 +6635,8 @@
         </p:nvCxnSpPr>
         <p:spPr>
           <a:xfrm>
-            <a:off x="12940000" y="8260000"/>
-            <a:ext cx="3000000" cy="0"/>
+            <a:off x="9940000" y="9410000"/>
+            <a:ext cx="0" cy="1150000"/>
           </a:xfrm>
           <a:prstGeom prst="line">
             <a:avLst/>
@@ -6695,7 +6670,7 @@
         </p:nvCxnSpPr>
         <p:spPr>
           <a:xfrm>
-            <a:off x="15940000" y="8260000"/>
+            <a:off x="9940000" y="9410000"/>
             <a:ext cx="3000000" cy="0"/>
           </a:xfrm>
           <a:prstGeom prst="line">
@@ -6730,7 +6705,7 @@
         </p:nvCxnSpPr>
         <p:spPr>
           <a:xfrm flipV="1">
-            <a:off x="18940000" y="7110000"/>
+            <a:off x="12940000" y="8260000"/>
             <a:ext cx="0" cy="1150000"/>
           </a:xfrm>
           <a:prstGeom prst="line">
@@ -6764,8 +6739,8 @@
           <p:nvPr/>
         </p:nvCxnSpPr>
         <p:spPr>
-          <a:xfrm flipH="1">
-            <a:off x="9940000" y="7110000"/>
+          <a:xfrm>
+            <a:off x="12940000" y="9410000"/>
             <a:ext cx="3000000" cy="0"/>
           </a:xfrm>
           <a:prstGeom prst="line">
@@ -6799,9 +6774,9 @@
           <p:nvPr/>
         </p:nvCxnSpPr>
         <p:spPr>
-          <a:xfrm flipV="1">
-            <a:off x="9940000" y="5960000"/>
-            <a:ext cx="0" cy="1150000"/>
+          <a:xfrm>
+            <a:off x="15940000" y="9410000"/>
+            <a:ext cx="3000000" cy="0"/>
           </a:xfrm>
           <a:prstGeom prst="line">
             <a:avLst/>
@@ -6835,8 +6810,8 @@
         </p:nvCxnSpPr>
         <p:spPr>
           <a:xfrm flipV="1">
-            <a:off x="9940000" y="3660000"/>
-            <a:ext cx="0" cy="2300000"/>
+            <a:off x="18940000" y="8260000"/>
+            <a:ext cx="0" cy="1150000"/>
           </a:xfrm>
           <a:prstGeom prst="line">
             <a:avLst/>
@@ -6869,9 +6844,9 @@
           <p:nvPr/>
         </p:nvCxnSpPr>
         <p:spPr>
-          <a:xfrm flipV="1">
-            <a:off x="9940000" y="2510000"/>
-            <a:ext cx="0" cy="1150000"/>
+          <a:xfrm flipH="1">
+            <a:off x="9940000" y="8260000"/>
+            <a:ext cx="3000000" cy="0"/>
           </a:xfrm>
           <a:prstGeom prst="line">
             <a:avLst/>
@@ -6905,7 +6880,7 @@
         </p:nvCxnSpPr>
         <p:spPr>
           <a:xfrm flipV="1">
-            <a:off x="9940000" y="1360000"/>
+            <a:off x="9940000" y="7110000"/>
             <a:ext cx="0" cy="1150000"/>
           </a:xfrm>
           <a:prstGeom prst="line">
@@ -6939,9 +6914,9 @@
           <p:nvPr/>
         </p:nvCxnSpPr>
         <p:spPr>
-          <a:xfrm flipH="1">
-            <a:off x="6940000" y="2510000"/>
-            <a:ext cx="3000000" cy="0"/>
+          <a:xfrm flipV="1">
+            <a:off x="9940000" y="4810000"/>
+            <a:ext cx="0" cy="2300000"/>
           </a:xfrm>
           <a:prstGeom prst="line">
             <a:avLst/>
@@ -6970,6 +6945,146 @@
       <p:cxnSp>
         <p:nvCxnSpPr>
           <p:cNvPr id="137" name="Connector 136"/>
+          <p:cNvCxnSpPr/>
+          <p:nvPr/>
+        </p:nvCxnSpPr>
+        <p:spPr>
+          <a:xfrm flipV="1">
+            <a:off x="9940000" y="3660000"/>
+            <a:ext cx="0" cy="1150000"/>
+          </a:xfrm>
+          <a:prstGeom prst="line">
+            <a:avLst/>
+          </a:prstGeom>
+          <a:ln w="19050">
+            <a:solidFill>
+              <a:srgbClr val="333338"/>
+            </a:solidFill>
+          </a:ln>
+        </p:spPr>
+        <p:style>
+          <a:lnRef idx="2">
+            <a:schemeClr val="accent1"/>
+          </a:lnRef>
+          <a:fillRef idx="0">
+            <a:schemeClr val="accent1"/>
+          </a:fillRef>
+          <a:effectRef idx="1">
+            <a:schemeClr val="accent1"/>
+          </a:effectRef>
+          <a:fontRef idx="minor">
+            <a:schemeClr val="tx1"/>
+          </a:fontRef>
+        </p:style>
+      </p:cxnSp>
+      <p:cxnSp>
+        <p:nvCxnSpPr>
+          <p:cNvPr id="138" name="Connector 137"/>
+          <p:cNvCxnSpPr/>
+          <p:nvPr/>
+        </p:nvCxnSpPr>
+        <p:spPr>
+          <a:xfrm flipV="1">
+            <a:off x="9940000" y="2510000"/>
+            <a:ext cx="0" cy="1150000"/>
+          </a:xfrm>
+          <a:prstGeom prst="line">
+            <a:avLst/>
+          </a:prstGeom>
+          <a:ln w="19050">
+            <a:solidFill>
+              <a:srgbClr val="333338"/>
+            </a:solidFill>
+          </a:ln>
+        </p:spPr>
+        <p:style>
+          <a:lnRef idx="2">
+            <a:schemeClr val="accent1"/>
+          </a:lnRef>
+          <a:fillRef idx="0">
+            <a:schemeClr val="accent1"/>
+          </a:fillRef>
+          <a:effectRef idx="1">
+            <a:schemeClr val="accent1"/>
+          </a:effectRef>
+          <a:fontRef idx="minor">
+            <a:schemeClr val="tx1"/>
+          </a:fontRef>
+        </p:style>
+      </p:cxnSp>
+      <p:cxnSp>
+        <p:nvCxnSpPr>
+          <p:cNvPr id="139" name="Connector 138"/>
+          <p:cNvCxnSpPr/>
+          <p:nvPr/>
+        </p:nvCxnSpPr>
+        <p:spPr>
+          <a:xfrm flipH="1">
+            <a:off x="6940000" y="3660000"/>
+            <a:ext cx="3000000" cy="0"/>
+          </a:xfrm>
+          <a:prstGeom prst="line">
+            <a:avLst/>
+          </a:prstGeom>
+          <a:ln w="19050">
+            <a:solidFill>
+              <a:srgbClr val="333338"/>
+            </a:solidFill>
+          </a:ln>
+        </p:spPr>
+        <p:style>
+          <a:lnRef idx="2">
+            <a:schemeClr val="accent1"/>
+          </a:lnRef>
+          <a:fillRef idx="0">
+            <a:schemeClr val="accent1"/>
+          </a:fillRef>
+          <a:effectRef idx="1">
+            <a:schemeClr val="accent1"/>
+          </a:effectRef>
+          <a:fontRef idx="minor">
+            <a:schemeClr val="tx1"/>
+          </a:fontRef>
+        </p:style>
+      </p:cxnSp>
+      <p:cxnSp>
+        <p:nvCxnSpPr>
+          <p:cNvPr id="140" name="Connector 139"/>
+          <p:cNvCxnSpPr/>
+          <p:nvPr/>
+        </p:nvCxnSpPr>
+        <p:spPr>
+          <a:xfrm flipV="1">
+            <a:off x="6940000" y="2510000"/>
+            <a:ext cx="0" cy="1150000"/>
+          </a:xfrm>
+          <a:prstGeom prst="line">
+            <a:avLst/>
+          </a:prstGeom>
+          <a:ln w="19050">
+            <a:solidFill>
+              <a:srgbClr val="333338"/>
+            </a:solidFill>
+          </a:ln>
+        </p:spPr>
+        <p:style>
+          <a:lnRef idx="2">
+            <a:schemeClr val="accent1"/>
+          </a:lnRef>
+          <a:fillRef idx="0">
+            <a:schemeClr val="accent1"/>
+          </a:fillRef>
+          <a:effectRef idx="1">
+            <a:schemeClr val="accent1"/>
+          </a:effectRef>
+          <a:fontRef idx="minor">
+            <a:schemeClr val="tx1"/>
+          </a:fontRef>
+        </p:style>
+      </p:cxnSp>
+      <p:cxnSp>
+        <p:nvCxnSpPr>
+          <p:cNvPr id="141" name="Connector 140"/>
           <p:cNvCxnSpPr/>
           <p:nvPr/>
         </p:nvCxnSpPr>

--- a/resources/map/_layout_tomb.pptx
+++ b/resources/map/_layout_tomb.pptx
@@ -3122,7 +3122,7 @@
                   <a:srgbClr val="7A787E"/>
                 </a:solidFill>
               </a:rPr>
-              <a:t>35 格・每一格是「縮圖＋地名」的群組，可以直接拖；連線是 connector，拖格子時會跟著走</a:t>
+              <a:t>43 格・每一格是「縮圖＋地名」的群組，可以直接拖；連線是 connector，拖格子時會跟著走</a:t>
             </a:r>
           </a:p>
         </p:txBody>
@@ -4015,6 +4015,86 @@
         </p:nvGrpSpPr>
         <p:grpSpPr>
           <a:xfrm>
+            <a:off x="6300000" y="14800000"/>
+            <a:ext cx="1280000" cy="1020000"/>
+            <a:chOff x="6300000" y="14800000"/>
+            <a:chExt cx="1280000" cy="1020000"/>
+          </a:xfrm>
+        </p:grpSpPr>
+        <p:pic>
+          <p:nvPicPr>
+            <p:cNvPr id="37" name="Picture 36" descr="tomb_chantry.webp.jpg"/>
+            <p:cNvPicPr>
+              <a:picLocks noChangeAspect="1"/>
+            </p:cNvPicPr>
+            <p:nvPr/>
+          </p:nvPicPr>
+          <p:blipFill>
+            <a:blip r:embed="rId12"/>
+            <a:stretch>
+              <a:fillRect/>
+            </a:stretch>
+          </p:blipFill>
+          <p:spPr>
+            <a:xfrm>
+              <a:off x="6300000" y="14800000"/>
+              <a:ext cx="1280000" cy="720000"/>
+            </a:xfrm>
+            <a:prstGeom prst="rect">
+              <a:avLst/>
+            </a:prstGeom>
+          </p:spPr>
+        </p:pic>
+        <p:sp>
+          <p:nvSpPr>
+            <p:cNvPr id="38" name="TextBox 37"/>
+            <p:cNvSpPr txBox="1"/>
+            <p:nvPr/>
+          </p:nvSpPr>
+          <p:spPr>
+            <a:xfrm>
+              <a:off x="6300000" y="15520000"/>
+              <a:ext cx="1280000" cy="300000"/>
+            </a:xfrm>
+            <a:prstGeom prst="rect">
+              <a:avLst/>
+            </a:prstGeom>
+            <a:noFill/>
+          </p:spPr>
+          <p:txBody>
+            <a:bodyPr wrap="square" anchor="t">
+              <a:spAutoFit/>
+            </a:bodyPr>
+            <a:lstStyle/>
+            <a:p>
+              <a:pPr algn="ctr"/>
+              <a:r>
+                <a:rPr sz="1300" b="1"/>
+                <a:t>抄經房</a:t>
+              </a:r>
+            </a:p>
+            <a:p>
+              <a:pPr algn="ctr"/>
+              <a:r>
+                <a:rPr sz="800">
+                  <a:solidFill>
+                    <a:srgbClr val="9A989E"/>
+                  </a:solidFill>
+                </a:rPr>
+                <a:t>scriptorium</a:t>
+              </a:r>
+            </a:p>
+          </p:txBody>
+        </p:sp>
+      </p:grpSp>
+      <p:grpSp>
+        <p:nvGrpSpPr>
+          <p:cNvPr id="39" name="Group 38"/>
+          <p:cNvGrpSpPr/>
+          <p:nvPr/>
+        </p:nvGrpSpPr>
+        <p:grpSpPr>
+          <a:xfrm>
             <a:off x="15300000" y="14800000"/>
             <a:ext cx="1280000" cy="1020000"/>
             <a:chOff x="15300000" y="14800000"/>
@@ -4023,7 +4103,7 @@
         </p:grpSpPr>
         <p:pic>
           <p:nvPicPr>
-            <p:cNvPr id="37" name="Picture 36" descr="tomb_chapel.webp.jpg"/>
+            <p:cNvPr id="40" name="Picture 39" descr="tomb_chapel.webp.jpg"/>
             <p:cNvPicPr>
               <a:picLocks noChangeAspect="1"/>
             </p:cNvPicPr>
@@ -4047,7 +4127,7 @@
         </p:pic>
         <p:sp>
           <p:nvSpPr>
-            <p:cNvPr id="38" name="TextBox 37"/>
+            <p:cNvPr id="41" name="TextBox 40"/>
             <p:cNvSpPr txBox="1"/>
             <p:nvPr/>
           </p:nvSpPr>
@@ -4089,7 +4169,87 @@
       </p:grpSp>
       <p:grpSp>
         <p:nvGrpSpPr>
-          <p:cNvPr id="39" name="Group 38"/>
+          <p:cNvPr id="42" name="Group 41"/>
+          <p:cNvGrpSpPr/>
+          <p:nvPr/>
+        </p:nvGrpSpPr>
+        <p:grpSpPr>
+          <a:xfrm>
+            <a:off x="18300000" y="14800000"/>
+            <a:ext cx="1280000" cy="1020000"/>
+            <a:chOff x="18300000" y="14800000"/>
+            <a:chExt cx="1280000" cy="1020000"/>
+          </a:xfrm>
+        </p:grpSpPr>
+        <p:pic>
+          <p:nvPicPr>
+            <p:cNvPr id="43" name="Picture 42" descr="tomb_chapel.webp.jpg"/>
+            <p:cNvPicPr>
+              <a:picLocks noChangeAspect="1"/>
+            </p:cNvPicPr>
+            <p:nvPr/>
+          </p:nvPicPr>
+          <p:blipFill>
+            <a:blip r:embed="rId13"/>
+            <a:stretch>
+              <a:fillRect/>
+            </a:stretch>
+          </p:blipFill>
+          <p:spPr>
+            <a:xfrm>
+              <a:off x="18300000" y="14800000"/>
+              <a:ext cx="1280000" cy="720000"/>
+            </a:xfrm>
+            <a:prstGeom prst="rect">
+              <a:avLst/>
+            </a:prstGeom>
+          </p:spPr>
+        </p:pic>
+        <p:sp>
+          <p:nvSpPr>
+            <p:cNvPr id="44" name="TextBox 43"/>
+            <p:cNvSpPr txBox="1"/>
+            <p:nvPr/>
+          </p:nvSpPr>
+          <p:spPr>
+            <a:xfrm>
+              <a:off x="18300000" y="15520000"/>
+              <a:ext cx="1280000" cy="300000"/>
+            </a:xfrm>
+            <a:prstGeom prst="rect">
+              <a:avLst/>
+            </a:prstGeom>
+            <a:noFill/>
+          </p:spPr>
+          <p:txBody>
+            <a:bodyPr wrap="square" anchor="t">
+              <a:spAutoFit/>
+            </a:bodyPr>
+            <a:lstStyle/>
+            <a:p>
+              <a:pPr algn="ctr"/>
+              <a:r>
+                <a:rPr sz="1300" b="1"/>
+                <a:t>告解所</a:t>
+              </a:r>
+            </a:p>
+            <a:p>
+              <a:pPr algn="ctr"/>
+              <a:r>
+                <a:rPr sz="800">
+                  <a:solidFill>
+                    <a:srgbClr val="9A989E"/>
+                  </a:solidFill>
+                </a:rPr>
+                <a:t>confessio</a:t>
+              </a:r>
+            </a:p>
+          </p:txBody>
+        </p:sp>
+      </p:grpSp>
+      <p:grpSp>
+        <p:nvGrpSpPr>
+          <p:cNvPr id="45" name="Group 44"/>
           <p:cNvGrpSpPr/>
           <p:nvPr/>
         </p:nvGrpSpPr>
@@ -4103,7 +4263,7 @@
         </p:grpSpPr>
         <p:pic>
           <p:nvPicPr>
-            <p:cNvPr id="40" name="Picture 39" descr="tomb_ambulatory.webp.jpg"/>
+            <p:cNvPr id="46" name="Picture 45" descr="tomb_ambulatory.webp.jpg"/>
             <p:cNvPicPr>
               <a:picLocks noChangeAspect="1"/>
             </p:cNvPicPr>
@@ -4127,7 +4287,7 @@
         </p:pic>
         <p:sp>
           <p:nvSpPr>
-            <p:cNvPr id="41" name="TextBox 40"/>
+            <p:cNvPr id="47" name="TextBox 46"/>
             <p:cNvSpPr txBox="1"/>
             <p:nvPr/>
           </p:nvSpPr>
@@ -4169,7 +4329,87 @@
       </p:grpSp>
       <p:grpSp>
         <p:nvGrpSpPr>
-          <p:cNvPr id="42" name="Group 41"/>
+          <p:cNvPr id="48" name="Group 47"/>
+          <p:cNvGrpSpPr/>
+          <p:nvPr/>
+        </p:nvGrpSpPr>
+        <p:grpSpPr>
+          <a:xfrm>
+            <a:off x="15300000" y="12500000"/>
+            <a:ext cx="1280000" cy="1020000"/>
+            <a:chOff x="15300000" y="12500000"/>
+            <a:chExt cx="1280000" cy="1020000"/>
+          </a:xfrm>
+        </p:grpSpPr>
+        <p:pic>
+          <p:nvPicPr>
+            <p:cNvPr id="49" name="Picture 48" descr="tomb_reliquary.webp.jpg"/>
+            <p:cNvPicPr>
+              <a:picLocks noChangeAspect="1"/>
+            </p:cNvPicPr>
+            <p:nvPr/>
+          </p:nvPicPr>
+          <p:blipFill>
+            <a:blip r:embed="rId15"/>
+            <a:stretch>
+              <a:fillRect/>
+            </a:stretch>
+          </p:blipFill>
+          <p:spPr>
+            <a:xfrm>
+              <a:off x="15300000" y="12500000"/>
+              <a:ext cx="1280000" cy="720000"/>
+            </a:xfrm>
+            <a:prstGeom prst="rect">
+              <a:avLst/>
+            </a:prstGeom>
+          </p:spPr>
+        </p:pic>
+        <p:sp>
+          <p:nvSpPr>
+            <p:cNvPr id="50" name="TextBox 49"/>
+            <p:cNvSpPr txBox="1"/>
+            <p:nvPr/>
+          </p:nvSpPr>
+          <p:spPr>
+            <a:xfrm>
+              <a:off x="15300000" y="13220000"/>
+              <a:ext cx="1280000" cy="300000"/>
+            </a:xfrm>
+            <a:prstGeom prst="rect">
+              <a:avLst/>
+            </a:prstGeom>
+            <a:noFill/>
+          </p:spPr>
+          <p:txBody>
+            <a:bodyPr wrap="square" anchor="t">
+              <a:spAutoFit/>
+            </a:bodyPr>
+            <a:lstStyle/>
+            <a:p>
+              <a:pPr algn="ctr"/>
+              <a:r>
+                <a:rPr sz="1300" b="1"/>
+                <a:t>法衣室</a:t>
+              </a:r>
+            </a:p>
+            <a:p>
+              <a:pPr algn="ctr"/>
+              <a:r>
+                <a:rPr sz="800">
+                  <a:solidFill>
+                    <a:srgbClr val="9A989E"/>
+                  </a:solidFill>
+                </a:rPr>
+                <a:t>sacristy</a:t>
+              </a:r>
+            </a:p>
+          </p:txBody>
+        </p:sp>
+      </p:grpSp>
+      <p:grpSp>
+        <p:nvGrpSpPr>
+          <p:cNvPr id="51" name="Group 50"/>
           <p:cNvGrpSpPr/>
           <p:nvPr/>
         </p:nvGrpSpPr>
@@ -4183,7 +4423,87 @@
         </p:grpSpPr>
         <p:pic>
           <p:nvPicPr>
-            <p:cNvPr id="43" name="Picture 42" descr="tomb_apse_day.webp.jpg"/>
+            <p:cNvPr id="52" name="Picture 51" descr="tomb_apse_day.webp.jpg"/>
+            <p:cNvPicPr>
+              <a:picLocks noChangeAspect="1"/>
+            </p:cNvPicPr>
+            <p:nvPr/>
+          </p:nvPicPr>
+          <p:blipFill>
+            <a:blip r:embed="rId16"/>
+            <a:stretch>
+              <a:fillRect/>
+            </a:stretch>
+          </p:blipFill>
+          <p:spPr>
+            <a:xfrm>
+              <a:off x="12300000" y="13650000"/>
+              <a:ext cx="1280000" cy="720000"/>
+            </a:xfrm>
+            <a:prstGeom prst="rect">
+              <a:avLst/>
+            </a:prstGeom>
+          </p:spPr>
+        </p:pic>
+        <p:sp>
+          <p:nvSpPr>
+            <p:cNvPr id="53" name="TextBox 52"/>
+            <p:cNvSpPr txBox="1"/>
+            <p:nvPr/>
+          </p:nvSpPr>
+          <p:spPr>
+            <a:xfrm>
+              <a:off x="12300000" y="14370000"/>
+              <a:ext cx="1280000" cy="300000"/>
+            </a:xfrm>
+            <a:prstGeom prst="rect">
+              <a:avLst/>
+            </a:prstGeom>
+            <a:noFill/>
+          </p:spPr>
+          <p:txBody>
+            <a:bodyPr wrap="square" anchor="t">
+              <a:spAutoFit/>
+            </a:bodyPr>
+            <a:lstStyle/>
+            <a:p>
+              <a:pPr algn="ctr"/>
+              <a:r>
+                <a:rPr sz="1300" b="1"/>
+                <a:t>後殿</a:t>
+              </a:r>
+            </a:p>
+            <a:p>
+              <a:pPr algn="ctr"/>
+              <a:r>
+                <a:rPr sz="800">
+                  <a:solidFill>
+                    <a:srgbClr val="9A989E"/>
+                  </a:solidFill>
+                </a:rPr>
+                <a:t>apse</a:t>
+              </a:r>
+            </a:p>
+          </p:txBody>
+        </p:sp>
+      </p:grpSp>
+      <p:grpSp>
+        <p:nvGrpSpPr>
+          <p:cNvPr id="54" name="Group 53"/>
+          <p:cNvGrpSpPr/>
+          <p:nvPr/>
+        </p:nvGrpSpPr>
+        <p:grpSpPr>
+          <a:xfrm>
+            <a:off x="12300000" y="12500000"/>
+            <a:ext cx="1280000" cy="1020000"/>
+            <a:chOff x="12300000" y="12500000"/>
+            <a:chExt cx="1280000" cy="1020000"/>
+          </a:xfrm>
+        </p:grpSpPr>
+        <p:pic>
+          <p:nvPicPr>
+            <p:cNvPr id="55" name="Picture 54" descr="tomb_reliquary.webp.jpg"/>
             <p:cNvPicPr>
               <a:picLocks noChangeAspect="1"/>
             </p:cNvPicPr>
@@ -4197,7 +4517,7 @@
           </p:blipFill>
           <p:spPr>
             <a:xfrm>
-              <a:off x="12300000" y="13650000"/>
+              <a:off x="12300000" y="12500000"/>
               <a:ext cx="1280000" cy="720000"/>
             </a:xfrm>
             <a:prstGeom prst="rect">
@@ -4207,87 +4527,7 @@
         </p:pic>
         <p:sp>
           <p:nvSpPr>
-            <p:cNvPr id="44" name="TextBox 43"/>
-            <p:cNvSpPr txBox="1"/>
-            <p:nvPr/>
-          </p:nvSpPr>
-          <p:spPr>
-            <a:xfrm>
-              <a:off x="12300000" y="14370000"/>
-              <a:ext cx="1280000" cy="300000"/>
-            </a:xfrm>
-            <a:prstGeom prst="rect">
-              <a:avLst/>
-            </a:prstGeom>
-            <a:noFill/>
-          </p:spPr>
-          <p:txBody>
-            <a:bodyPr wrap="square" anchor="t">
-              <a:spAutoFit/>
-            </a:bodyPr>
-            <a:lstStyle/>
-            <a:p>
-              <a:pPr algn="ctr"/>
-              <a:r>
-                <a:rPr sz="1300" b="1"/>
-                <a:t>後殿</a:t>
-              </a:r>
-            </a:p>
-            <a:p>
-              <a:pPr algn="ctr"/>
-              <a:r>
-                <a:rPr sz="800">
-                  <a:solidFill>
-                    <a:srgbClr val="9A989E"/>
-                  </a:solidFill>
-                </a:rPr>
-                <a:t>apse</a:t>
-              </a:r>
-            </a:p>
-          </p:txBody>
-        </p:sp>
-      </p:grpSp>
-      <p:grpSp>
-        <p:nvGrpSpPr>
-          <p:cNvPr id="45" name="Group 44"/>
-          <p:cNvGrpSpPr/>
-          <p:nvPr/>
-        </p:nvGrpSpPr>
-        <p:grpSpPr>
-          <a:xfrm>
-            <a:off x="12300000" y="12500000"/>
-            <a:ext cx="1280000" cy="1020000"/>
-            <a:chOff x="12300000" y="12500000"/>
-            <a:chExt cx="1280000" cy="1020000"/>
-          </a:xfrm>
-        </p:grpSpPr>
-        <p:pic>
-          <p:nvPicPr>
-            <p:cNvPr id="46" name="Picture 45" descr="tomb_reliquary.webp.jpg"/>
-            <p:cNvPicPr>
-              <a:picLocks noChangeAspect="1"/>
-            </p:cNvPicPr>
-            <p:nvPr/>
-          </p:nvPicPr>
-          <p:blipFill>
-            <a:blip r:embed="rId16"/>
-            <a:stretch>
-              <a:fillRect/>
-            </a:stretch>
-          </p:blipFill>
-          <p:spPr>
-            <a:xfrm>
-              <a:off x="12300000" y="12500000"/>
-              <a:ext cx="1280000" cy="720000"/>
-            </a:xfrm>
-            <a:prstGeom prst="rect">
-              <a:avLst/>
-            </a:prstGeom>
-          </p:spPr>
-        </p:pic>
-        <p:sp>
-          <p:nvSpPr>
-            <p:cNvPr id="47" name="TextBox 46"/>
+            <p:cNvPr id="56" name="TextBox 55"/>
             <p:cNvSpPr txBox="1"/>
             <p:nvPr/>
           </p:nvSpPr>
@@ -4329,7 +4569,7 @@
       </p:grpSp>
       <p:grpSp>
         <p:nvGrpSpPr>
-          <p:cNvPr id="48" name="Group 47"/>
+          <p:cNvPr id="57" name="Group 56"/>
           <p:cNvGrpSpPr/>
           <p:nvPr/>
         </p:nvGrpSpPr>
@@ -4343,7 +4583,7 @@
         </p:grpSpPr>
         <p:pic>
           <p:nvPicPr>
-            <p:cNvPr id="49" name="Picture 48" descr="tomb_cloister.webp.jpg"/>
+            <p:cNvPr id="58" name="Picture 57" descr="tomb_cloister.webp.jpg"/>
             <p:cNvPicPr>
               <a:picLocks noChangeAspect="1"/>
             </p:cNvPicPr>
@@ -4367,7 +4607,7 @@
         </p:pic>
         <p:sp>
           <p:nvSpPr>
-            <p:cNvPr id="50" name="TextBox 49"/>
+            <p:cNvPr id="59" name="TextBox 58"/>
             <p:cNvSpPr txBox="1"/>
             <p:nvPr/>
           </p:nvSpPr>
@@ -4409,7 +4649,87 @@
       </p:grpSp>
       <p:grpSp>
         <p:nvGrpSpPr>
-          <p:cNvPr id="51" name="Group 50"/>
+          <p:cNvPr id="60" name="Group 59"/>
+          <p:cNvGrpSpPr/>
+          <p:nvPr/>
+        </p:nvGrpSpPr>
+        <p:grpSpPr>
+          <a:xfrm>
+            <a:off x="9300000" y="12500000"/>
+            <a:ext cx="1280000" cy="1020000"/>
+            <a:chOff x="9300000" y="12500000"/>
+            <a:chExt cx="1280000" cy="1020000"/>
+          </a:xfrm>
+        </p:grpSpPr>
+        <p:pic>
+          <p:nvPicPr>
+            <p:cNvPr id="61" name="Picture 60" descr="tomb_cloister.webp.jpg"/>
+            <p:cNvPicPr>
+              <a:picLocks noChangeAspect="1"/>
+            </p:cNvPicPr>
+            <p:nvPr/>
+          </p:nvPicPr>
+          <p:blipFill>
+            <a:blip r:embed="rId17"/>
+            <a:stretch>
+              <a:fillRect/>
+            </a:stretch>
+          </p:blipFill>
+          <p:spPr>
+            <a:xfrm>
+              <a:off x="9300000" y="12500000"/>
+              <a:ext cx="1280000" cy="720000"/>
+            </a:xfrm>
+            <a:prstGeom prst="rect">
+              <a:avLst/>
+            </a:prstGeom>
+          </p:spPr>
+        </p:pic>
+        <p:sp>
+          <p:nvSpPr>
+            <p:cNvPr id="62" name="TextBox 61"/>
+            <p:cNvSpPr txBox="1"/>
+            <p:nvPr/>
+          </p:nvSpPr>
+          <p:spPr>
+            <a:xfrm>
+              <a:off x="9300000" y="13220000"/>
+              <a:ext cx="1280000" cy="300000"/>
+            </a:xfrm>
+            <a:prstGeom prst="rect">
+              <a:avLst/>
+            </a:prstGeom>
+            <a:noFill/>
+          </p:spPr>
+          <p:txBody>
+            <a:bodyPr wrap="square" anchor="t">
+              <a:spAutoFit/>
+            </a:bodyPr>
+            <a:lstStyle/>
+            <a:p>
+              <a:pPr algn="ctr"/>
+              <a:r>
+                <a:rPr sz="1300" b="1"/>
+                <a:t>井庭</a:t>
+              </a:r>
+            </a:p>
+            <a:p>
+              <a:pPr algn="ctr"/>
+              <a:r>
+                <a:rPr sz="800">
+                  <a:solidFill>
+                    <a:srgbClr val="9A989E"/>
+                  </a:solidFill>
+                </a:rPr>
+                <a:t>wellyard</a:t>
+              </a:r>
+            </a:p>
+          </p:txBody>
+        </p:sp>
+      </p:grpSp>
+      <p:grpSp>
+        <p:nvGrpSpPr>
+          <p:cNvPr id="63" name="Group 62"/>
           <p:cNvGrpSpPr/>
           <p:nvPr/>
         </p:nvGrpSpPr>
@@ -4423,7 +4743,7 @@
         </p:grpSpPr>
         <p:pic>
           <p:nvPicPr>
-            <p:cNvPr id="52" name="Picture 51" descr="tomb_stair1.webp.jpg"/>
+            <p:cNvPr id="64" name="Picture 63" descr="tomb_stair1.webp.jpg"/>
             <p:cNvPicPr>
               <a:picLocks noChangeAspect="1"/>
             </p:cNvPicPr>
@@ -4447,7 +4767,7 @@
         </p:pic>
         <p:sp>
           <p:nvSpPr>
-            <p:cNvPr id="53" name="TextBox 52"/>
+            <p:cNvPr id="65" name="TextBox 64"/>
             <p:cNvSpPr txBox="1"/>
             <p:nvPr/>
           </p:nvSpPr>
@@ -4489,7 +4809,7 @@
       </p:grpSp>
       <p:grpSp>
         <p:nvGrpSpPr>
-          <p:cNvPr id="54" name="Group 53"/>
+          <p:cNvPr id="66" name="Group 65"/>
           <p:cNvGrpSpPr/>
           <p:nvPr/>
         </p:nvGrpSpPr>
@@ -4503,7 +4823,7 @@
         </p:grpSpPr>
         <p:pic>
           <p:nvPicPr>
-            <p:cNvPr id="55" name="Picture 54" descr="tomb_landing2.webp.jpg"/>
+            <p:cNvPr id="67" name="Picture 66" descr="tomb_landing2.webp.jpg"/>
             <p:cNvPicPr>
               <a:picLocks noChangeAspect="1"/>
             </p:cNvPicPr>
@@ -4527,7 +4847,7 @@
         </p:pic>
         <p:sp>
           <p:nvSpPr>
-            <p:cNvPr id="56" name="TextBox 55"/>
+            <p:cNvPr id="68" name="TextBox 67"/>
             <p:cNvSpPr txBox="1"/>
             <p:nvPr/>
           </p:nvSpPr>
@@ -4569,7 +4889,7 @@
       </p:grpSp>
       <p:grpSp>
         <p:nvGrpSpPr>
-          <p:cNvPr id="57" name="Group 56"/>
+          <p:cNvPr id="69" name="Group 68"/>
           <p:cNvGrpSpPr/>
           <p:nvPr/>
         </p:nvGrpSpPr>
@@ -4583,7 +4903,7 @@
         </p:grpSpPr>
         <p:pic>
           <p:nvPicPr>
-            <p:cNvPr id="58" name="Picture 57" descr="tomb_hall2.webp.jpg"/>
+            <p:cNvPr id="70" name="Picture 69" descr="tomb_hall2.webp.jpg"/>
             <p:cNvPicPr>
               <a:picLocks noChangeAspect="1"/>
             </p:cNvPicPr>
@@ -4607,7 +4927,7 @@
         </p:pic>
         <p:sp>
           <p:nvSpPr>
-            <p:cNvPr id="59" name="TextBox 58"/>
+            <p:cNvPr id="71" name="TextBox 70"/>
             <p:cNvSpPr txBox="1"/>
             <p:nvPr/>
           </p:nvSpPr>
@@ -4649,7 +4969,167 @@
       </p:grpSp>
       <p:grpSp>
         <p:nvGrpSpPr>
-          <p:cNvPr id="60" name="Group 59"/>
+          <p:cNvPr id="72" name="Group 71"/>
+          <p:cNvGrpSpPr/>
+          <p:nvPr/>
+        </p:nvGrpSpPr>
+        <p:grpSpPr>
+          <a:xfrm>
+            <a:off x="3300000" y="9050000"/>
+            <a:ext cx="1280000" cy="1020000"/>
+            <a:chOff x="3300000" y="9050000"/>
+            <a:chExt cx="1280000" cy="1020000"/>
+          </a:xfrm>
+        </p:grpSpPr>
+        <p:pic>
+          <p:nvPicPr>
+            <p:cNvPr id="73" name="Picture 72" descr="tomb_hall2.webp.jpg"/>
+            <p:cNvPicPr>
+              <a:picLocks noChangeAspect="1"/>
+            </p:cNvPicPr>
+            <p:nvPr/>
+          </p:nvPicPr>
+          <p:blipFill>
+            <a:blip r:embed="rId20"/>
+            <a:stretch>
+              <a:fillRect/>
+            </a:stretch>
+          </p:blipFill>
+          <p:spPr>
+            <a:xfrm>
+              <a:off x="3300000" y="9050000"/>
+              <a:ext cx="1280000" cy="720000"/>
+            </a:xfrm>
+            <a:prstGeom prst="rect">
+              <a:avLst/>
+            </a:prstGeom>
+          </p:spPr>
+        </p:pic>
+        <p:sp>
+          <p:nvSpPr>
+            <p:cNvPr id="74" name="TextBox 73"/>
+            <p:cNvSpPr txBox="1"/>
+            <p:nvPr/>
+          </p:nvSpPr>
+          <p:spPr>
+            <a:xfrm>
+              <a:off x="3300000" y="9770000"/>
+              <a:ext cx="1280000" cy="300000"/>
+            </a:xfrm>
+            <a:prstGeom prst="rect">
+              <a:avLst/>
+            </a:prstGeom>
+            <a:noFill/>
+          </p:spPr>
+          <p:txBody>
+            <a:bodyPr wrap="square" anchor="t">
+              <a:spAutoFit/>
+            </a:bodyPr>
+            <a:lstStyle/>
+            <a:p>
+              <a:pPr algn="ctr"/>
+              <a:r>
+                <a:rPr sz="1300" b="1"/>
+                <a:t>列柱廊</a:t>
+              </a:r>
+            </a:p>
+            <a:p>
+              <a:pPr algn="ctr"/>
+              <a:r>
+                <a:rPr sz="800">
+                  <a:solidFill>
+                    <a:srgbClr val="9A989E"/>
+                  </a:solidFill>
+                </a:rPr>
+                <a:t>colonnade</a:t>
+              </a:r>
+            </a:p>
+          </p:txBody>
+        </p:sp>
+      </p:grpSp>
+      <p:grpSp>
+        <p:nvGrpSpPr>
+          <p:cNvPr id="75" name="Group 74"/>
+          <p:cNvGrpSpPr/>
+          <p:nvPr/>
+        </p:nvGrpSpPr>
+        <p:grpSpPr>
+          <a:xfrm>
+            <a:off x="3300000" y="7900000"/>
+            <a:ext cx="1280000" cy="1020000"/>
+            <a:chOff x="3300000" y="7900000"/>
+            <a:chExt cx="1280000" cy="1020000"/>
+          </a:xfrm>
+        </p:grpSpPr>
+        <p:pic>
+          <p:nvPicPr>
+            <p:cNvPr id="76" name="Picture 75" descr="tomb_kiln.webp.jpg"/>
+            <p:cNvPicPr>
+              <a:picLocks noChangeAspect="1"/>
+            </p:cNvPicPr>
+            <p:nvPr/>
+          </p:nvPicPr>
+          <p:blipFill>
+            <a:blip r:embed="rId21"/>
+            <a:stretch>
+              <a:fillRect/>
+            </a:stretch>
+          </p:blipFill>
+          <p:spPr>
+            <a:xfrm>
+              <a:off x="3300000" y="7900000"/>
+              <a:ext cx="1280000" cy="720000"/>
+            </a:xfrm>
+            <a:prstGeom prst="rect">
+              <a:avLst/>
+            </a:prstGeom>
+          </p:spPr>
+        </p:pic>
+        <p:sp>
+          <p:nvSpPr>
+            <p:cNvPr id="77" name="TextBox 76"/>
+            <p:cNvSpPr txBox="1"/>
+            <p:nvPr/>
+          </p:nvSpPr>
+          <p:spPr>
+            <a:xfrm>
+              <a:off x="3300000" y="8620000"/>
+              <a:ext cx="1280000" cy="300000"/>
+            </a:xfrm>
+            <a:prstGeom prst="rect">
+              <a:avLst/>
+            </a:prstGeom>
+            <a:noFill/>
+          </p:spPr>
+          <p:txBody>
+            <a:bodyPr wrap="square" anchor="t">
+              <a:spAutoFit/>
+            </a:bodyPr>
+            <a:lstStyle/>
+            <a:p>
+              <a:pPr algn="ctr"/>
+              <a:r>
+                <a:rPr sz="1300" b="1"/>
+                <a:t>石工房</a:t>
+              </a:r>
+            </a:p>
+            <a:p>
+              <a:pPr algn="ctr"/>
+              <a:r>
+                <a:rPr sz="800">
+                  <a:solidFill>
+                    <a:srgbClr val="9A989E"/>
+                  </a:solidFill>
+                </a:rPr>
+                <a:t>mason</a:t>
+              </a:r>
+            </a:p>
+          </p:txBody>
+        </p:sp>
+      </p:grpSp>
+      <p:grpSp>
+        <p:nvGrpSpPr>
+          <p:cNvPr id="78" name="Group 77"/>
           <p:cNvGrpSpPr/>
           <p:nvPr/>
         </p:nvGrpSpPr>
@@ -4663,7 +5143,647 @@
         </p:grpSpPr>
         <p:pic>
           <p:nvPicPr>
-            <p:cNvPr id="61" name="Picture 60" descr="tomb_cistern.webp.jpg"/>
+            <p:cNvPr id="79" name="Picture 78" descr="tomb_cistern.webp.jpg"/>
+            <p:cNvPicPr>
+              <a:picLocks noChangeAspect="1"/>
+            </p:cNvPicPr>
+            <p:nvPr/>
+          </p:nvPicPr>
+          <p:blipFill>
+            <a:blip r:embed="rId22"/>
+            <a:stretch>
+              <a:fillRect/>
+            </a:stretch>
+          </p:blipFill>
+          <p:spPr>
+            <a:xfrm>
+              <a:off x="6300000" y="7900000"/>
+              <a:ext cx="1280000" cy="720000"/>
+            </a:xfrm>
+            <a:prstGeom prst="rect">
+              <a:avLst/>
+            </a:prstGeom>
+          </p:spPr>
+        </p:pic>
+        <p:sp>
+          <p:nvSpPr>
+            <p:cNvPr id="80" name="TextBox 79"/>
+            <p:cNvSpPr txBox="1"/>
+            <p:nvPr/>
+          </p:nvSpPr>
+          <p:spPr>
+            <a:xfrm>
+              <a:off x="6300000" y="8620000"/>
+              <a:ext cx="1280000" cy="300000"/>
+            </a:xfrm>
+            <a:prstGeom prst="rect">
+              <a:avLst/>
+            </a:prstGeom>
+            <a:noFill/>
+          </p:spPr>
+          <p:txBody>
+            <a:bodyPr wrap="square" anchor="t">
+              <a:spAutoFit/>
+            </a:bodyPr>
+            <a:lstStyle/>
+            <a:p>
+              <a:pPr algn="ctr"/>
+              <a:r>
+                <a:rPr sz="1300" b="1"/>
+                <a:t>蓄水池</a:t>
+              </a:r>
+            </a:p>
+            <a:p>
+              <a:pPr algn="ctr"/>
+              <a:r>
+                <a:rPr sz="800">
+                  <a:solidFill>
+                    <a:srgbClr val="9A989E"/>
+                  </a:solidFill>
+                </a:rPr>
+                <a:t>cistern</a:t>
+              </a:r>
+            </a:p>
+          </p:txBody>
+        </p:sp>
+      </p:grpSp>
+      <p:grpSp>
+        <p:nvGrpSpPr>
+          <p:cNvPr id="81" name="Group 80"/>
+          <p:cNvGrpSpPr/>
+          <p:nvPr/>
+        </p:nvGrpSpPr>
+        <p:grpSpPr>
+          <a:xfrm>
+            <a:off x="6300000" y="6750000"/>
+            <a:ext cx="1280000" cy="1020000"/>
+            <a:chOff x="6300000" y="6750000"/>
+            <a:chExt cx="1280000" cy="1020000"/>
+          </a:xfrm>
+        </p:grpSpPr>
+        <p:pic>
+          <p:nvPicPr>
+            <p:cNvPr id="82" name="Picture 81" descr="tomb_cistern.webp.jpg"/>
+            <p:cNvPicPr>
+              <a:picLocks noChangeAspect="1"/>
+            </p:cNvPicPr>
+            <p:nvPr/>
+          </p:nvPicPr>
+          <p:blipFill>
+            <a:blip r:embed="rId22"/>
+            <a:stretch>
+              <a:fillRect/>
+            </a:stretch>
+          </p:blipFill>
+          <p:spPr>
+            <a:xfrm>
+              <a:off x="6300000" y="6750000"/>
+              <a:ext cx="1280000" cy="720000"/>
+            </a:xfrm>
+            <a:prstGeom prst="rect">
+              <a:avLst/>
+            </a:prstGeom>
+          </p:spPr>
+        </p:pic>
+        <p:sp>
+          <p:nvSpPr>
+            <p:cNvPr id="83" name="TextBox 82"/>
+            <p:cNvSpPr txBox="1"/>
+            <p:nvPr/>
+          </p:nvSpPr>
+          <p:spPr>
+            <a:xfrm>
+              <a:off x="6300000" y="7470000"/>
+              <a:ext cx="1280000" cy="300000"/>
+            </a:xfrm>
+            <a:prstGeom prst="rect">
+              <a:avLst/>
+            </a:prstGeom>
+            <a:noFill/>
+          </p:spPr>
+          <p:txBody>
+            <a:bodyPr wrap="square" anchor="t">
+              <a:spAutoFit/>
+            </a:bodyPr>
+            <a:lstStyle/>
+            <a:p>
+              <a:pPr algn="ctr"/>
+              <a:r>
+                <a:rPr sz="1300" b="1"/>
+                <a:t>汲水階</a:t>
+              </a:r>
+            </a:p>
+            <a:p>
+              <a:pPr algn="ctr"/>
+              <a:r>
+                <a:rPr sz="800">
+                  <a:solidFill>
+                    <a:srgbClr val="9A989E"/>
+                  </a:solidFill>
+                </a:rPr>
+                <a:t>waterstair</a:t>
+              </a:r>
+            </a:p>
+          </p:txBody>
+        </p:sp>
+      </p:grpSp>
+      <p:grpSp>
+        <p:nvGrpSpPr>
+          <p:cNvPr id="84" name="Group 83"/>
+          <p:cNvGrpSpPr/>
+          <p:nvPr/>
+        </p:nvGrpSpPr>
+        <p:grpSpPr>
+          <a:xfrm>
+            <a:off x="9300000" y="9050000"/>
+            <a:ext cx="1280000" cy="1020000"/>
+            <a:chOff x="9300000" y="9050000"/>
+            <a:chExt cx="1280000" cy="1020000"/>
+          </a:xfrm>
+        </p:grpSpPr>
+        <p:pic>
+          <p:nvPicPr>
+            <p:cNvPr id="85" name="Picture 84" descr="tomb_corr2.webp.jpg"/>
+            <p:cNvPicPr>
+              <a:picLocks noChangeAspect="1"/>
+            </p:cNvPicPr>
+            <p:nvPr/>
+          </p:nvPicPr>
+          <p:blipFill>
+            <a:blip r:embed="rId23"/>
+            <a:stretch>
+              <a:fillRect/>
+            </a:stretch>
+          </p:blipFill>
+          <p:spPr>
+            <a:xfrm>
+              <a:off x="9300000" y="9050000"/>
+              <a:ext cx="1280000" cy="720000"/>
+            </a:xfrm>
+            <a:prstGeom prst="rect">
+              <a:avLst/>
+            </a:prstGeom>
+          </p:spPr>
+        </p:pic>
+        <p:sp>
+          <p:nvSpPr>
+            <p:cNvPr id="86" name="TextBox 85"/>
+            <p:cNvSpPr txBox="1"/>
+            <p:nvPr/>
+          </p:nvSpPr>
+          <p:spPr>
+            <a:xfrm>
+              <a:off x="9300000" y="9770000"/>
+              <a:ext cx="1280000" cy="300000"/>
+            </a:xfrm>
+            <a:prstGeom prst="rect">
+              <a:avLst/>
+            </a:prstGeom>
+            <a:noFill/>
+          </p:spPr>
+          <p:txBody>
+            <a:bodyPr wrap="square" anchor="t">
+              <a:spAutoFit/>
+            </a:bodyPr>
+            <a:lstStyle/>
+            <a:p>
+              <a:pPr algn="ctr"/>
+              <a:r>
+                <a:rPr sz="1300" b="1"/>
+                <a:t>長廊</a:t>
+              </a:r>
+            </a:p>
+            <a:p>
+              <a:pPr algn="ctr"/>
+              <a:r>
+                <a:rPr sz="800">
+                  <a:solidFill>
+                    <a:srgbClr val="9A989E"/>
+                  </a:solidFill>
+                </a:rPr>
+                <a:t>corr2</a:t>
+              </a:r>
+            </a:p>
+          </p:txBody>
+        </p:sp>
+      </p:grpSp>
+      <p:grpSp>
+        <p:nvGrpSpPr>
+          <p:cNvPr id="87" name="Group 86"/>
+          <p:cNvGrpSpPr/>
+          <p:nvPr/>
+        </p:nvGrpSpPr>
+        <p:grpSpPr>
+          <a:xfrm>
+            <a:off x="9300000" y="10200000"/>
+            <a:ext cx="1280000" cy="1020000"/>
+            <a:chOff x="9300000" y="10200000"/>
+            <a:chExt cx="1280000" cy="1020000"/>
+          </a:xfrm>
+        </p:grpSpPr>
+        <p:pic>
+          <p:nvPicPr>
+            <p:cNvPr id="88" name="Picture 87" descr="tomb_sump.webp.jpg"/>
+            <p:cNvPicPr>
+              <a:picLocks noChangeAspect="1"/>
+            </p:cNvPicPr>
+            <p:nvPr/>
+          </p:nvPicPr>
+          <p:blipFill>
+            <a:blip r:embed="rId24"/>
+            <a:stretch>
+              <a:fillRect/>
+            </a:stretch>
+          </p:blipFill>
+          <p:spPr>
+            <a:xfrm>
+              <a:off x="9300000" y="10200000"/>
+              <a:ext cx="1280000" cy="720000"/>
+            </a:xfrm>
+            <a:prstGeom prst="rect">
+              <a:avLst/>
+            </a:prstGeom>
+          </p:spPr>
+        </p:pic>
+        <p:sp>
+          <p:nvSpPr>
+            <p:cNvPr id="89" name="TextBox 88"/>
+            <p:cNvSpPr txBox="1"/>
+            <p:nvPr/>
+          </p:nvSpPr>
+          <p:spPr>
+            <a:xfrm>
+              <a:off x="9300000" y="10920000"/>
+              <a:ext cx="1280000" cy="300000"/>
+            </a:xfrm>
+            <a:prstGeom prst="rect">
+              <a:avLst/>
+            </a:prstGeom>
+            <a:noFill/>
+          </p:spPr>
+          <p:txBody>
+            <a:bodyPr wrap="square" anchor="t">
+              <a:spAutoFit/>
+            </a:bodyPr>
+            <a:lstStyle/>
+            <a:p>
+              <a:pPr algn="ctr"/>
+              <a:r>
+                <a:rPr sz="1300" b="1"/>
+                <a:t>積水坑</a:t>
+              </a:r>
+            </a:p>
+            <a:p>
+              <a:pPr algn="ctr"/>
+              <a:r>
+                <a:rPr sz="800">
+                  <a:solidFill>
+                    <a:srgbClr val="9A989E"/>
+                  </a:solidFill>
+                </a:rPr>
+                <a:t>sump</a:t>
+              </a:r>
+            </a:p>
+          </p:txBody>
+        </p:sp>
+      </p:grpSp>
+      <p:grpSp>
+        <p:nvGrpSpPr>
+          <p:cNvPr id="90" name="Group 89"/>
+          <p:cNvGrpSpPr/>
+          <p:nvPr/>
+        </p:nvGrpSpPr>
+        <p:grpSpPr>
+          <a:xfrm>
+            <a:off x="12300000" y="9050000"/>
+            <a:ext cx="1280000" cy="1020000"/>
+            <a:chOff x="12300000" y="9050000"/>
+            <a:chExt cx="1280000" cy="1020000"/>
+          </a:xfrm>
+        </p:grpSpPr>
+        <p:pic>
+          <p:nvPicPr>
+            <p:cNvPr id="91" name="Picture 90" descr="tomb_rotunda.webp.jpg"/>
+            <p:cNvPicPr>
+              <a:picLocks noChangeAspect="1"/>
+            </p:cNvPicPr>
+            <p:nvPr/>
+          </p:nvPicPr>
+          <p:blipFill>
+            <a:blip r:embed="rId25"/>
+            <a:stretch>
+              <a:fillRect/>
+            </a:stretch>
+          </p:blipFill>
+          <p:spPr>
+            <a:xfrm>
+              <a:off x="12300000" y="9050000"/>
+              <a:ext cx="1280000" cy="720000"/>
+            </a:xfrm>
+            <a:prstGeom prst="rect">
+              <a:avLst/>
+            </a:prstGeom>
+          </p:spPr>
+        </p:pic>
+        <p:sp>
+          <p:nvSpPr>
+            <p:cNvPr id="92" name="TextBox 91"/>
+            <p:cNvSpPr txBox="1"/>
+            <p:nvPr/>
+          </p:nvSpPr>
+          <p:spPr>
+            <a:xfrm>
+              <a:off x="12300000" y="9770000"/>
+              <a:ext cx="1280000" cy="300000"/>
+            </a:xfrm>
+            <a:prstGeom prst="rect">
+              <a:avLst/>
+            </a:prstGeom>
+            <a:noFill/>
+          </p:spPr>
+          <p:txBody>
+            <a:bodyPr wrap="square" anchor="t">
+              <a:spAutoFit/>
+            </a:bodyPr>
+            <a:lstStyle/>
+            <a:p>
+              <a:pPr algn="ctr"/>
+              <a:r>
+                <a:rPr sz="1300" b="1"/>
+                <a:t>圓廳</a:t>
+              </a:r>
+            </a:p>
+            <a:p>
+              <a:pPr algn="ctr"/>
+              <a:r>
+                <a:rPr sz="800">
+                  <a:solidFill>
+                    <a:srgbClr val="9A989E"/>
+                  </a:solidFill>
+                </a:rPr>
+                <a:t>rotunda</a:t>
+              </a:r>
+            </a:p>
+          </p:txBody>
+        </p:sp>
+      </p:grpSp>
+      <p:grpSp>
+        <p:nvGrpSpPr>
+          <p:cNvPr id="93" name="Group 92"/>
+          <p:cNvGrpSpPr/>
+          <p:nvPr/>
+        </p:nvGrpSpPr>
+        <p:grpSpPr>
+          <a:xfrm>
+            <a:off x="12300000" y="10200000"/>
+            <a:ext cx="1280000" cy="1020000"/>
+            <a:chOff x="12300000" y="10200000"/>
+            <a:chExt cx="1280000" cy="1020000"/>
+          </a:xfrm>
+        </p:grpSpPr>
+        <p:pic>
+          <p:nvPicPr>
+            <p:cNvPr id="94" name="Picture 93" descr="tomb_rotunda.webp.jpg"/>
+            <p:cNvPicPr>
+              <a:picLocks noChangeAspect="1"/>
+            </p:cNvPicPr>
+            <p:nvPr/>
+          </p:nvPicPr>
+          <p:blipFill>
+            <a:blip r:embed="rId25"/>
+            <a:stretch>
+              <a:fillRect/>
+            </a:stretch>
+          </p:blipFill>
+          <p:spPr>
+            <a:xfrm>
+              <a:off x="12300000" y="10200000"/>
+              <a:ext cx="1280000" cy="720000"/>
+            </a:xfrm>
+            <a:prstGeom prst="rect">
+              <a:avLst/>
+            </a:prstGeom>
+          </p:spPr>
+        </p:pic>
+        <p:sp>
+          <p:nvSpPr>
+            <p:cNvPr id="95" name="TextBox 94"/>
+            <p:cNvSpPr txBox="1"/>
+            <p:nvPr/>
+          </p:nvSpPr>
+          <p:spPr>
+            <a:xfrm>
+              <a:off x="12300000" y="10920000"/>
+              <a:ext cx="1280000" cy="300000"/>
+            </a:xfrm>
+            <a:prstGeom prst="rect">
+              <a:avLst/>
+            </a:prstGeom>
+            <a:noFill/>
+          </p:spPr>
+          <p:txBody>
+            <a:bodyPr wrap="square" anchor="t">
+              <a:spAutoFit/>
+            </a:bodyPr>
+            <a:lstStyle/>
+            <a:p>
+              <a:pPr algn="ctr"/>
+              <a:r>
+                <a:rPr sz="1300" b="1"/>
+                <a:t>香爐室</a:t>
+              </a:r>
+            </a:p>
+            <a:p>
+              <a:pPr algn="ctr"/>
+              <a:r>
+                <a:rPr sz="800">
+                  <a:solidFill>
+                    <a:srgbClr val="9A989E"/>
+                  </a:solidFill>
+                </a:rPr>
+                <a:t>censerroom</a:t>
+              </a:r>
+            </a:p>
+          </p:txBody>
+        </p:sp>
+      </p:grpSp>
+      <p:grpSp>
+        <p:nvGrpSpPr>
+          <p:cNvPr id="96" name="Group 95"/>
+          <p:cNvGrpSpPr/>
+          <p:nvPr/>
+        </p:nvGrpSpPr>
+        <p:grpSpPr>
+          <a:xfrm>
+            <a:off x="15300000" y="9050000"/>
+            <a:ext cx="1280000" cy="1020000"/>
+            <a:chOff x="15300000" y="9050000"/>
+            <a:chExt cx="1280000" cy="1020000"/>
+          </a:xfrm>
+        </p:grpSpPr>
+        <p:pic>
+          <p:nvPicPr>
+            <p:cNvPr id="97" name="Picture 96" descr="tomb_sarce.webp.jpg"/>
+            <p:cNvPicPr>
+              <a:picLocks noChangeAspect="1"/>
+            </p:cNvPicPr>
+            <p:nvPr/>
+          </p:nvPicPr>
+          <p:blipFill>
+            <a:blip r:embed="rId26"/>
+            <a:stretch>
+              <a:fillRect/>
+            </a:stretch>
+          </p:blipFill>
+          <p:spPr>
+            <a:xfrm>
+              <a:off x="15300000" y="9050000"/>
+              <a:ext cx="1280000" cy="720000"/>
+            </a:xfrm>
+            <a:prstGeom prst="rect">
+              <a:avLst/>
+            </a:prstGeom>
+          </p:spPr>
+        </p:pic>
+        <p:sp>
+          <p:nvSpPr>
+            <p:cNvPr id="98" name="TextBox 97"/>
+            <p:cNvSpPr txBox="1"/>
+            <p:nvPr/>
+          </p:nvSpPr>
+          <p:spPr>
+            <a:xfrm>
+              <a:off x="15300000" y="9770000"/>
+              <a:ext cx="1280000" cy="300000"/>
+            </a:xfrm>
+            <a:prstGeom prst="rect">
+              <a:avLst/>
+            </a:prstGeom>
+            <a:noFill/>
+          </p:spPr>
+          <p:txBody>
+            <a:bodyPr wrap="square" anchor="t">
+              <a:spAutoFit/>
+            </a:bodyPr>
+            <a:lstStyle/>
+            <a:p>
+              <a:pPr algn="ctr"/>
+              <a:r>
+                <a:rPr sz="1300" b="1"/>
+                <a:t>石棺室</a:t>
+              </a:r>
+            </a:p>
+            <a:p>
+              <a:pPr algn="ctr"/>
+              <a:r>
+                <a:rPr sz="800">
+                  <a:solidFill>
+                    <a:srgbClr val="9A989E"/>
+                  </a:solidFill>
+                </a:rPr>
+                <a:t>sarcE</a:t>
+              </a:r>
+            </a:p>
+          </p:txBody>
+        </p:sp>
+      </p:grpSp>
+      <p:grpSp>
+        <p:nvGrpSpPr>
+          <p:cNvPr id="99" name="Group 98"/>
+          <p:cNvGrpSpPr/>
+          <p:nvPr/>
+        </p:nvGrpSpPr>
+        <p:grpSpPr>
+          <a:xfrm>
+            <a:off x="18300000" y="9050000"/>
+            <a:ext cx="1280000" cy="1020000"/>
+            <a:chOff x="18300000" y="9050000"/>
+            <a:chExt cx="1280000" cy="1020000"/>
+          </a:xfrm>
+        </p:grpSpPr>
+        <p:pic>
+          <p:nvPicPr>
+            <p:cNvPr id="100" name="Picture 99" descr="tomb_ossuary2.webp.jpg"/>
+            <p:cNvPicPr>
+              <a:picLocks noChangeAspect="1"/>
+            </p:cNvPicPr>
+            <p:nvPr/>
+          </p:nvPicPr>
+          <p:blipFill>
+            <a:blip r:embed="rId27"/>
+            <a:stretch>
+              <a:fillRect/>
+            </a:stretch>
+          </p:blipFill>
+          <p:spPr>
+            <a:xfrm>
+              <a:off x="18300000" y="9050000"/>
+              <a:ext cx="1280000" cy="720000"/>
+            </a:xfrm>
+            <a:prstGeom prst="rect">
+              <a:avLst/>
+            </a:prstGeom>
+          </p:spPr>
+        </p:pic>
+        <p:sp>
+          <p:nvSpPr>
+            <p:cNvPr id="101" name="TextBox 100"/>
+            <p:cNvSpPr txBox="1"/>
+            <p:nvPr/>
+          </p:nvSpPr>
+          <p:spPr>
+            <a:xfrm>
+              <a:off x="18300000" y="9770000"/>
+              <a:ext cx="1280000" cy="300000"/>
+            </a:xfrm>
+            <a:prstGeom prst="rect">
+              <a:avLst/>
+            </a:prstGeom>
+            <a:noFill/>
+          </p:spPr>
+          <p:txBody>
+            <a:bodyPr wrap="square" anchor="t">
+              <a:spAutoFit/>
+            </a:bodyPr>
+            <a:lstStyle/>
+            <a:p>
+              <a:pPr algn="ctr"/>
+              <a:r>
+                <a:rPr sz="1300" b="1"/>
+                <a:t>甕棺廊</a:t>
+              </a:r>
+            </a:p>
+            <a:p>
+              <a:pPr algn="ctr"/>
+              <a:r>
+                <a:rPr sz="800">
+                  <a:solidFill>
+                    <a:srgbClr val="9A989E"/>
+                  </a:solidFill>
+                </a:rPr>
+                <a:t>ossuary2</a:t>
+              </a:r>
+            </a:p>
+          </p:txBody>
+        </p:sp>
+      </p:grpSp>
+      <p:grpSp>
+        <p:nvGrpSpPr>
+          <p:cNvPr id="102" name="Group 101"/>
+          <p:cNvGrpSpPr/>
+          <p:nvPr/>
+        </p:nvGrpSpPr>
+        <p:grpSpPr>
+          <a:xfrm>
+            <a:off x="18300000" y="7900000"/>
+            <a:ext cx="1280000" cy="1020000"/>
+            <a:chOff x="18300000" y="7900000"/>
+            <a:chExt cx="1280000" cy="1020000"/>
+          </a:xfrm>
+        </p:grpSpPr>
+        <p:pic>
+          <p:nvPicPr>
+            <p:cNvPr id="103" name="Picture 102" descr="tomb_kiln.webp.jpg"/>
             <p:cNvPicPr>
               <a:picLocks noChangeAspect="1"/>
             </p:cNvPicPr>
@@ -4677,7 +5797,7 @@
           </p:blipFill>
           <p:spPr>
             <a:xfrm>
-              <a:off x="6300000" y="7900000"/>
+              <a:off x="18300000" y="7900000"/>
               <a:ext cx="1280000" cy="720000"/>
             </a:xfrm>
             <a:prstGeom prst="rect">
@@ -4687,487 +5807,7 @@
         </p:pic>
         <p:sp>
           <p:nvSpPr>
-            <p:cNvPr id="62" name="TextBox 61"/>
-            <p:cNvSpPr txBox="1"/>
-            <p:nvPr/>
-          </p:nvSpPr>
-          <p:spPr>
-            <a:xfrm>
-              <a:off x="6300000" y="8620000"/>
-              <a:ext cx="1280000" cy="300000"/>
-            </a:xfrm>
-            <a:prstGeom prst="rect">
-              <a:avLst/>
-            </a:prstGeom>
-            <a:noFill/>
-          </p:spPr>
-          <p:txBody>
-            <a:bodyPr wrap="square" anchor="t">
-              <a:spAutoFit/>
-            </a:bodyPr>
-            <a:lstStyle/>
-            <a:p>
-              <a:pPr algn="ctr"/>
-              <a:r>
-                <a:rPr sz="1300" b="1"/>
-                <a:t>蓄水池</a:t>
-              </a:r>
-            </a:p>
-            <a:p>
-              <a:pPr algn="ctr"/>
-              <a:r>
-                <a:rPr sz="800">
-                  <a:solidFill>
-                    <a:srgbClr val="9A989E"/>
-                  </a:solidFill>
-                </a:rPr>
-                <a:t>cistern</a:t>
-              </a:r>
-            </a:p>
-          </p:txBody>
-        </p:sp>
-      </p:grpSp>
-      <p:grpSp>
-        <p:nvGrpSpPr>
-          <p:cNvPr id="63" name="Group 62"/>
-          <p:cNvGrpSpPr/>
-          <p:nvPr/>
-        </p:nvGrpSpPr>
-        <p:grpSpPr>
-          <a:xfrm>
-            <a:off x="9300000" y="9050000"/>
-            <a:ext cx="1280000" cy="1020000"/>
-            <a:chOff x="9300000" y="9050000"/>
-            <a:chExt cx="1280000" cy="1020000"/>
-          </a:xfrm>
-        </p:grpSpPr>
-        <p:pic>
-          <p:nvPicPr>
-            <p:cNvPr id="64" name="Picture 63" descr="tomb_corr2.webp.jpg"/>
-            <p:cNvPicPr>
-              <a:picLocks noChangeAspect="1"/>
-            </p:cNvPicPr>
-            <p:nvPr/>
-          </p:nvPicPr>
-          <p:blipFill>
-            <a:blip r:embed="rId22"/>
-            <a:stretch>
-              <a:fillRect/>
-            </a:stretch>
-          </p:blipFill>
-          <p:spPr>
-            <a:xfrm>
-              <a:off x="9300000" y="9050000"/>
-              <a:ext cx="1280000" cy="720000"/>
-            </a:xfrm>
-            <a:prstGeom prst="rect">
-              <a:avLst/>
-            </a:prstGeom>
-          </p:spPr>
-        </p:pic>
-        <p:sp>
-          <p:nvSpPr>
-            <p:cNvPr id="65" name="TextBox 64"/>
-            <p:cNvSpPr txBox="1"/>
-            <p:nvPr/>
-          </p:nvSpPr>
-          <p:spPr>
-            <a:xfrm>
-              <a:off x="9300000" y="9770000"/>
-              <a:ext cx="1280000" cy="300000"/>
-            </a:xfrm>
-            <a:prstGeom prst="rect">
-              <a:avLst/>
-            </a:prstGeom>
-            <a:noFill/>
-          </p:spPr>
-          <p:txBody>
-            <a:bodyPr wrap="square" anchor="t">
-              <a:spAutoFit/>
-            </a:bodyPr>
-            <a:lstStyle/>
-            <a:p>
-              <a:pPr algn="ctr"/>
-              <a:r>
-                <a:rPr sz="1300" b="1"/>
-                <a:t>長廊</a:t>
-              </a:r>
-            </a:p>
-            <a:p>
-              <a:pPr algn="ctr"/>
-              <a:r>
-                <a:rPr sz="800">
-                  <a:solidFill>
-                    <a:srgbClr val="9A989E"/>
-                  </a:solidFill>
-                </a:rPr>
-                <a:t>corr2</a:t>
-              </a:r>
-            </a:p>
-          </p:txBody>
-        </p:sp>
-      </p:grpSp>
-      <p:grpSp>
-        <p:nvGrpSpPr>
-          <p:cNvPr id="66" name="Group 65"/>
-          <p:cNvGrpSpPr/>
-          <p:nvPr/>
-        </p:nvGrpSpPr>
-        <p:grpSpPr>
-          <a:xfrm>
-            <a:off x="9300000" y="10200000"/>
-            <a:ext cx="1280000" cy="1020000"/>
-            <a:chOff x="9300000" y="10200000"/>
-            <a:chExt cx="1280000" cy="1020000"/>
-          </a:xfrm>
-        </p:grpSpPr>
-        <p:pic>
-          <p:nvPicPr>
-            <p:cNvPr id="67" name="Picture 66" descr="tomb_sump.webp.jpg"/>
-            <p:cNvPicPr>
-              <a:picLocks noChangeAspect="1"/>
-            </p:cNvPicPr>
-            <p:nvPr/>
-          </p:nvPicPr>
-          <p:blipFill>
-            <a:blip r:embed="rId23"/>
-            <a:stretch>
-              <a:fillRect/>
-            </a:stretch>
-          </p:blipFill>
-          <p:spPr>
-            <a:xfrm>
-              <a:off x="9300000" y="10200000"/>
-              <a:ext cx="1280000" cy="720000"/>
-            </a:xfrm>
-            <a:prstGeom prst="rect">
-              <a:avLst/>
-            </a:prstGeom>
-          </p:spPr>
-        </p:pic>
-        <p:sp>
-          <p:nvSpPr>
-            <p:cNvPr id="68" name="TextBox 67"/>
-            <p:cNvSpPr txBox="1"/>
-            <p:nvPr/>
-          </p:nvSpPr>
-          <p:spPr>
-            <a:xfrm>
-              <a:off x="9300000" y="10920000"/>
-              <a:ext cx="1280000" cy="300000"/>
-            </a:xfrm>
-            <a:prstGeom prst="rect">
-              <a:avLst/>
-            </a:prstGeom>
-            <a:noFill/>
-          </p:spPr>
-          <p:txBody>
-            <a:bodyPr wrap="square" anchor="t">
-              <a:spAutoFit/>
-            </a:bodyPr>
-            <a:lstStyle/>
-            <a:p>
-              <a:pPr algn="ctr"/>
-              <a:r>
-                <a:rPr sz="1300" b="1"/>
-                <a:t>積水坑</a:t>
-              </a:r>
-            </a:p>
-            <a:p>
-              <a:pPr algn="ctr"/>
-              <a:r>
-                <a:rPr sz="800">
-                  <a:solidFill>
-                    <a:srgbClr val="9A989E"/>
-                  </a:solidFill>
-                </a:rPr>
-                <a:t>sump</a:t>
-              </a:r>
-            </a:p>
-          </p:txBody>
-        </p:sp>
-      </p:grpSp>
-      <p:grpSp>
-        <p:nvGrpSpPr>
-          <p:cNvPr id="69" name="Group 68"/>
-          <p:cNvGrpSpPr/>
-          <p:nvPr/>
-        </p:nvGrpSpPr>
-        <p:grpSpPr>
-          <a:xfrm>
-            <a:off x="12300000" y="9050000"/>
-            <a:ext cx="1280000" cy="1020000"/>
-            <a:chOff x="12300000" y="9050000"/>
-            <a:chExt cx="1280000" cy="1020000"/>
-          </a:xfrm>
-        </p:grpSpPr>
-        <p:pic>
-          <p:nvPicPr>
-            <p:cNvPr id="70" name="Picture 69" descr="tomb_rotunda.webp.jpg"/>
-            <p:cNvPicPr>
-              <a:picLocks noChangeAspect="1"/>
-            </p:cNvPicPr>
-            <p:nvPr/>
-          </p:nvPicPr>
-          <p:blipFill>
-            <a:blip r:embed="rId24"/>
-            <a:stretch>
-              <a:fillRect/>
-            </a:stretch>
-          </p:blipFill>
-          <p:spPr>
-            <a:xfrm>
-              <a:off x="12300000" y="9050000"/>
-              <a:ext cx="1280000" cy="720000"/>
-            </a:xfrm>
-            <a:prstGeom prst="rect">
-              <a:avLst/>
-            </a:prstGeom>
-          </p:spPr>
-        </p:pic>
-        <p:sp>
-          <p:nvSpPr>
-            <p:cNvPr id="71" name="TextBox 70"/>
-            <p:cNvSpPr txBox="1"/>
-            <p:nvPr/>
-          </p:nvSpPr>
-          <p:spPr>
-            <a:xfrm>
-              <a:off x="12300000" y="9770000"/>
-              <a:ext cx="1280000" cy="300000"/>
-            </a:xfrm>
-            <a:prstGeom prst="rect">
-              <a:avLst/>
-            </a:prstGeom>
-            <a:noFill/>
-          </p:spPr>
-          <p:txBody>
-            <a:bodyPr wrap="square" anchor="t">
-              <a:spAutoFit/>
-            </a:bodyPr>
-            <a:lstStyle/>
-            <a:p>
-              <a:pPr algn="ctr"/>
-              <a:r>
-                <a:rPr sz="1300" b="1"/>
-                <a:t>圓廳</a:t>
-              </a:r>
-            </a:p>
-            <a:p>
-              <a:pPr algn="ctr"/>
-              <a:r>
-                <a:rPr sz="800">
-                  <a:solidFill>
-                    <a:srgbClr val="9A989E"/>
-                  </a:solidFill>
-                </a:rPr>
-                <a:t>rotunda</a:t>
-              </a:r>
-            </a:p>
-          </p:txBody>
-        </p:sp>
-      </p:grpSp>
-      <p:grpSp>
-        <p:nvGrpSpPr>
-          <p:cNvPr id="72" name="Group 71"/>
-          <p:cNvGrpSpPr/>
-          <p:nvPr/>
-        </p:nvGrpSpPr>
-        <p:grpSpPr>
-          <a:xfrm>
-            <a:off x="15300000" y="9050000"/>
-            <a:ext cx="1280000" cy="1020000"/>
-            <a:chOff x="15300000" y="9050000"/>
-            <a:chExt cx="1280000" cy="1020000"/>
-          </a:xfrm>
-        </p:grpSpPr>
-        <p:pic>
-          <p:nvPicPr>
-            <p:cNvPr id="73" name="Picture 72" descr="tomb_sarce.webp.jpg"/>
-            <p:cNvPicPr>
-              <a:picLocks noChangeAspect="1"/>
-            </p:cNvPicPr>
-            <p:nvPr/>
-          </p:nvPicPr>
-          <p:blipFill>
-            <a:blip r:embed="rId25"/>
-            <a:stretch>
-              <a:fillRect/>
-            </a:stretch>
-          </p:blipFill>
-          <p:spPr>
-            <a:xfrm>
-              <a:off x="15300000" y="9050000"/>
-              <a:ext cx="1280000" cy="720000"/>
-            </a:xfrm>
-            <a:prstGeom prst="rect">
-              <a:avLst/>
-            </a:prstGeom>
-          </p:spPr>
-        </p:pic>
-        <p:sp>
-          <p:nvSpPr>
-            <p:cNvPr id="74" name="TextBox 73"/>
-            <p:cNvSpPr txBox="1"/>
-            <p:nvPr/>
-          </p:nvSpPr>
-          <p:spPr>
-            <a:xfrm>
-              <a:off x="15300000" y="9770000"/>
-              <a:ext cx="1280000" cy="300000"/>
-            </a:xfrm>
-            <a:prstGeom prst="rect">
-              <a:avLst/>
-            </a:prstGeom>
-            <a:noFill/>
-          </p:spPr>
-          <p:txBody>
-            <a:bodyPr wrap="square" anchor="t">
-              <a:spAutoFit/>
-            </a:bodyPr>
-            <a:lstStyle/>
-            <a:p>
-              <a:pPr algn="ctr"/>
-              <a:r>
-                <a:rPr sz="1300" b="1"/>
-                <a:t>石棺室</a:t>
-              </a:r>
-            </a:p>
-            <a:p>
-              <a:pPr algn="ctr"/>
-              <a:r>
-                <a:rPr sz="800">
-                  <a:solidFill>
-                    <a:srgbClr val="9A989E"/>
-                  </a:solidFill>
-                </a:rPr>
-                <a:t>sarcE</a:t>
-              </a:r>
-            </a:p>
-          </p:txBody>
-        </p:sp>
-      </p:grpSp>
-      <p:grpSp>
-        <p:nvGrpSpPr>
-          <p:cNvPr id="75" name="Group 74"/>
-          <p:cNvGrpSpPr/>
-          <p:nvPr/>
-        </p:nvGrpSpPr>
-        <p:grpSpPr>
-          <a:xfrm>
-            <a:off x="18300000" y="9050000"/>
-            <a:ext cx="1280000" cy="1020000"/>
-            <a:chOff x="18300000" y="9050000"/>
-            <a:chExt cx="1280000" cy="1020000"/>
-          </a:xfrm>
-        </p:grpSpPr>
-        <p:pic>
-          <p:nvPicPr>
-            <p:cNvPr id="76" name="Picture 75" descr="tomb_ossuary2.webp.jpg"/>
-            <p:cNvPicPr>
-              <a:picLocks noChangeAspect="1"/>
-            </p:cNvPicPr>
-            <p:nvPr/>
-          </p:nvPicPr>
-          <p:blipFill>
-            <a:blip r:embed="rId26"/>
-            <a:stretch>
-              <a:fillRect/>
-            </a:stretch>
-          </p:blipFill>
-          <p:spPr>
-            <a:xfrm>
-              <a:off x="18300000" y="9050000"/>
-              <a:ext cx="1280000" cy="720000"/>
-            </a:xfrm>
-            <a:prstGeom prst="rect">
-              <a:avLst/>
-            </a:prstGeom>
-          </p:spPr>
-        </p:pic>
-        <p:sp>
-          <p:nvSpPr>
-            <p:cNvPr id="77" name="TextBox 76"/>
-            <p:cNvSpPr txBox="1"/>
-            <p:nvPr/>
-          </p:nvSpPr>
-          <p:spPr>
-            <a:xfrm>
-              <a:off x="18300000" y="9770000"/>
-              <a:ext cx="1280000" cy="300000"/>
-            </a:xfrm>
-            <a:prstGeom prst="rect">
-              <a:avLst/>
-            </a:prstGeom>
-            <a:noFill/>
-          </p:spPr>
-          <p:txBody>
-            <a:bodyPr wrap="square" anchor="t">
-              <a:spAutoFit/>
-            </a:bodyPr>
-            <a:lstStyle/>
-            <a:p>
-              <a:pPr algn="ctr"/>
-              <a:r>
-                <a:rPr sz="1300" b="1"/>
-                <a:t>甕棺廊</a:t>
-              </a:r>
-            </a:p>
-            <a:p>
-              <a:pPr algn="ctr"/>
-              <a:r>
-                <a:rPr sz="800">
-                  <a:solidFill>
-                    <a:srgbClr val="9A989E"/>
-                  </a:solidFill>
-                </a:rPr>
-                <a:t>ossuary2</a:t>
-              </a:r>
-            </a:p>
-          </p:txBody>
-        </p:sp>
-      </p:grpSp>
-      <p:grpSp>
-        <p:nvGrpSpPr>
-          <p:cNvPr id="78" name="Group 77"/>
-          <p:cNvGrpSpPr/>
-          <p:nvPr/>
-        </p:nvGrpSpPr>
-        <p:grpSpPr>
-          <a:xfrm>
-            <a:off x="18300000" y="7900000"/>
-            <a:ext cx="1280000" cy="1020000"/>
-            <a:chOff x="18300000" y="7900000"/>
-            <a:chExt cx="1280000" cy="1020000"/>
-          </a:xfrm>
-        </p:grpSpPr>
-        <p:pic>
-          <p:nvPicPr>
-            <p:cNvPr id="79" name="Picture 78" descr="tomb_kiln.webp.jpg"/>
-            <p:cNvPicPr>
-              <a:picLocks noChangeAspect="1"/>
-            </p:cNvPicPr>
-            <p:nvPr/>
-          </p:nvPicPr>
-          <p:blipFill>
-            <a:blip r:embed="rId27"/>
-            <a:stretch>
-              <a:fillRect/>
-            </a:stretch>
-          </p:blipFill>
-          <p:spPr>
-            <a:xfrm>
-              <a:off x="18300000" y="7900000"/>
-              <a:ext cx="1280000" cy="720000"/>
-            </a:xfrm>
-            <a:prstGeom prst="rect">
-              <a:avLst/>
-            </a:prstGeom>
-          </p:spPr>
-        </p:pic>
-        <p:sp>
-          <p:nvSpPr>
-            <p:cNvPr id="80" name="TextBox 79"/>
+            <p:cNvPr id="104" name="TextBox 103"/>
             <p:cNvSpPr txBox="1"/>
             <p:nvPr/>
           </p:nvSpPr>
@@ -5209,7 +5849,7 @@
       </p:grpSp>
       <p:grpSp>
         <p:nvGrpSpPr>
-          <p:cNvPr id="81" name="Group 80"/>
+          <p:cNvPr id="105" name="Group 104"/>
           <p:cNvGrpSpPr/>
           <p:nvPr/>
         </p:nvGrpSpPr>
@@ -5223,7 +5863,7 @@
         </p:grpSpPr>
         <p:pic>
           <p:nvPicPr>
-            <p:cNvPr id="82" name="Picture 81" descr="tomb_nichehall.webp.jpg"/>
+            <p:cNvPr id="106" name="Picture 105" descr="tomb_nichehall.webp.jpg"/>
             <p:cNvPicPr>
               <a:picLocks noChangeAspect="1"/>
             </p:cNvPicPr>
@@ -5247,7 +5887,7 @@
         </p:pic>
         <p:sp>
           <p:nvSpPr>
-            <p:cNvPr id="83" name="TextBox 82"/>
+            <p:cNvPr id="107" name="TextBox 106"/>
             <p:cNvSpPr txBox="1"/>
             <p:nvPr/>
           </p:nvSpPr>
@@ -5289,7 +5929,7 @@
       </p:grpSp>
       <p:grpSp>
         <p:nvGrpSpPr>
-          <p:cNvPr id="84" name="Group 83"/>
+          <p:cNvPr id="108" name="Group 107"/>
           <p:cNvGrpSpPr/>
           <p:nvPr/>
         </p:nvGrpSpPr>
@@ -5303,7 +5943,7 @@
         </p:grpSpPr>
         <p:pic>
           <p:nvPicPr>
-            <p:cNvPr id="85" name="Picture 84" descr="tomb_ossuary.webp.jpg"/>
+            <p:cNvPr id="109" name="Picture 108" descr="tomb_ossuary.webp.jpg"/>
             <p:cNvPicPr>
               <a:picLocks noChangeAspect="1"/>
             </p:cNvPicPr>
@@ -5327,7 +5967,7 @@
         </p:pic>
         <p:sp>
           <p:nvSpPr>
-            <p:cNvPr id="86" name="TextBox 85"/>
+            <p:cNvPr id="110" name="TextBox 109"/>
             <p:cNvSpPr txBox="1"/>
             <p:nvPr/>
           </p:nvSpPr>
@@ -5369,7 +6009,7 @@
       </p:grpSp>
       <p:grpSp>
         <p:nvGrpSpPr>
-          <p:cNvPr id="87" name="Group 86"/>
+          <p:cNvPr id="111" name="Group 110"/>
           <p:cNvGrpSpPr/>
           <p:nvPr/>
         </p:nvGrpSpPr>
@@ -5383,7 +6023,7 @@
         </p:grpSpPr>
         <p:pic>
           <p:nvPicPr>
-            <p:cNvPr id="88" name="Picture 87" descr="tomb_stair2.webp.jpg"/>
+            <p:cNvPr id="112" name="Picture 111" descr="tomb_stair2.webp.jpg"/>
             <p:cNvPicPr>
               <a:picLocks noChangeAspect="1"/>
             </p:cNvPicPr>
@@ -5407,7 +6047,7 @@
         </p:pic>
         <p:sp>
           <p:nvSpPr>
-            <p:cNvPr id="89" name="TextBox 88"/>
+            <p:cNvPr id="113" name="TextBox 112"/>
             <p:cNvSpPr txBox="1"/>
             <p:nvPr/>
           </p:nvSpPr>
@@ -5449,7 +6089,7 @@
       </p:grpSp>
       <p:grpSp>
         <p:nvGrpSpPr>
-          <p:cNvPr id="90" name="Group 89"/>
+          <p:cNvPr id="114" name="Group 113"/>
           <p:cNvGrpSpPr/>
           <p:nvPr/>
         </p:nvGrpSpPr>
@@ -5463,7 +6103,7 @@
         </p:grpSpPr>
         <p:pic>
           <p:nvPicPr>
-            <p:cNvPr id="91" name="Picture 90" descr="tomb_landing3.webp.jpg"/>
+            <p:cNvPr id="115" name="Picture 114" descr="tomb_landing3.webp.jpg"/>
             <p:cNvPicPr>
               <a:picLocks noChangeAspect="1"/>
             </p:cNvPicPr>
@@ -5487,7 +6127,7 @@
         </p:pic>
         <p:sp>
           <p:nvSpPr>
-            <p:cNvPr id="92" name="TextBox 91"/>
+            <p:cNvPr id="116" name="TextBox 115"/>
             <p:cNvSpPr txBox="1"/>
             <p:nvPr/>
           </p:nvSpPr>
@@ -5529,7 +6169,7 @@
       </p:grpSp>
       <p:grpSp>
         <p:nvGrpSpPr>
-          <p:cNvPr id="93" name="Group 92"/>
+          <p:cNvPr id="117" name="Group 116"/>
           <p:cNvGrpSpPr/>
           <p:nvPr/>
         </p:nvGrpSpPr>
@@ -5543,7 +6183,7 @@
         </p:grpSpPr>
         <p:pic>
           <p:nvPicPr>
-            <p:cNvPr id="94" name="Picture 93" descr="tomb_gallery3.webp.jpg"/>
+            <p:cNvPr id="118" name="Picture 117" descr="tomb_gallery3.webp.jpg"/>
             <p:cNvPicPr>
               <a:picLocks noChangeAspect="1"/>
             </p:cNvPicPr>
@@ -5567,7 +6207,7 @@
         </p:pic>
         <p:sp>
           <p:nvSpPr>
-            <p:cNvPr id="95" name="TextBox 94"/>
+            <p:cNvPr id="119" name="TextBox 118"/>
             <p:cNvSpPr txBox="1"/>
             <p:nvPr/>
           </p:nvSpPr>
@@ -5609,7 +6249,7 @@
       </p:grpSp>
       <p:grpSp>
         <p:nvGrpSpPr>
-          <p:cNvPr id="96" name="Group 95"/>
+          <p:cNvPr id="120" name="Group 119"/>
           <p:cNvGrpSpPr/>
           <p:nvPr/>
         </p:nvGrpSpPr>
@@ -5623,7 +6263,7 @@
         </p:grpSpPr>
         <p:pic>
           <p:nvPicPr>
-            <p:cNvPr id="97" name="Picture 96" descr="tomb_vaultw.webp.jpg"/>
+            <p:cNvPr id="121" name="Picture 120" descr="tomb_vaultw.webp.jpg"/>
             <p:cNvPicPr>
               <a:picLocks noChangeAspect="1"/>
             </p:cNvPicPr>
@@ -5647,7 +6287,7 @@
         </p:pic>
         <p:sp>
           <p:nvSpPr>
-            <p:cNvPr id="98" name="TextBox 97"/>
+            <p:cNvPr id="122" name="TextBox 121"/>
             <p:cNvSpPr txBox="1"/>
             <p:nvPr/>
           </p:nvSpPr>
@@ -5689,7 +6329,7 @@
       </p:grpSp>
       <p:grpSp>
         <p:nvGrpSpPr>
-          <p:cNvPr id="99" name="Group 98"/>
+          <p:cNvPr id="123" name="Group 122"/>
           <p:cNvGrpSpPr/>
           <p:nvPr/>
         </p:nvGrpSpPr>
@@ -5703,7 +6343,7 @@
         </p:grpSpPr>
         <p:pic>
           <p:nvPicPr>
-            <p:cNvPr id="100" name="Picture 99" descr="tomb_bonepit.webp.jpg"/>
+            <p:cNvPr id="124" name="Picture 123" descr="tomb_bonepit.webp.jpg"/>
             <p:cNvPicPr>
               <a:picLocks noChangeAspect="1"/>
             </p:cNvPicPr>
@@ -5727,7 +6367,7 @@
         </p:pic>
         <p:sp>
           <p:nvSpPr>
-            <p:cNvPr id="101" name="TextBox 100"/>
+            <p:cNvPr id="125" name="TextBox 124"/>
             <p:cNvSpPr txBox="1"/>
             <p:nvPr/>
           </p:nvSpPr>
@@ -5769,7 +6409,7 @@
       </p:grpSp>
       <p:grpSp>
         <p:nvGrpSpPr>
-          <p:cNvPr id="102" name="Group 101"/>
+          <p:cNvPr id="126" name="Group 125"/>
           <p:cNvGrpSpPr/>
           <p:nvPr/>
         </p:nvGrpSpPr>
@@ -5783,7 +6423,7 @@
         </p:grpSpPr>
         <p:pic>
           <p:nvPicPr>
-            <p:cNvPr id="103" name="Picture 102" descr="tomb_bonepit.webp.jpg"/>
+            <p:cNvPr id="127" name="Picture 126" descr="tomb_bonepit.webp.jpg"/>
             <p:cNvPicPr>
               <a:picLocks noChangeAspect="1"/>
             </p:cNvPicPr>
@@ -5807,7 +6447,7 @@
         </p:pic>
         <p:sp>
           <p:nvSpPr>
-            <p:cNvPr id="104" name="TextBox 103"/>
+            <p:cNvPr id="128" name="TextBox 127"/>
             <p:cNvSpPr txBox="1"/>
             <p:nvPr/>
           </p:nvSpPr>
@@ -5849,7 +6489,7 @@
       </p:grpSp>
       <p:grpSp>
         <p:nvGrpSpPr>
-          <p:cNvPr id="105" name="Group 104"/>
+          <p:cNvPr id="129" name="Group 128"/>
           <p:cNvGrpSpPr/>
           <p:nvPr/>
         </p:nvGrpSpPr>
@@ -5863,7 +6503,7 @@
         </p:grpSpPr>
         <p:pic>
           <p:nvPicPr>
-            <p:cNvPr id="106" name="Picture 105" descr="tomb_crypt.webp.jpg"/>
+            <p:cNvPr id="130" name="Picture 129" descr="tomb_crypt.webp.jpg"/>
             <p:cNvPicPr>
               <a:picLocks noChangeAspect="1"/>
             </p:cNvPicPr>
@@ -5887,7 +6527,7 @@
         </p:pic>
         <p:sp>
           <p:nvSpPr>
-            <p:cNvPr id="107" name="TextBox 106"/>
+            <p:cNvPr id="131" name="TextBox 130"/>
             <p:cNvSpPr txBox="1"/>
             <p:nvPr/>
           </p:nvSpPr>
@@ -5929,7 +6569,7 @@
       </p:grpSp>
       <p:cxnSp>
         <p:nvCxnSpPr>
-          <p:cNvPr id="108" name="Connector 107"/>
+          <p:cNvPr id="132" name="Connector 131"/>
           <p:cNvCxnSpPr/>
           <p:nvPr/>
         </p:nvCxnSpPr>
@@ -5964,7 +6604,7 @@
       </p:cxnSp>
       <p:cxnSp>
         <p:nvCxnSpPr>
-          <p:cNvPr id="109" name="Connector 108"/>
+          <p:cNvPr id="133" name="Connector 132"/>
           <p:cNvCxnSpPr/>
           <p:nvPr/>
         </p:nvCxnSpPr>
@@ -5999,7 +6639,7 @@
       </p:cxnSp>
       <p:cxnSp>
         <p:nvCxnSpPr>
-          <p:cNvPr id="110" name="Connector 109"/>
+          <p:cNvPr id="134" name="Connector 133"/>
           <p:cNvCxnSpPr/>
           <p:nvPr/>
         </p:nvCxnSpPr>
@@ -6034,7 +6674,7 @@
       </p:cxnSp>
       <p:cxnSp>
         <p:nvCxnSpPr>
-          <p:cNvPr id="111" name="Connector 110"/>
+          <p:cNvPr id="135" name="Connector 134"/>
           <p:cNvCxnSpPr/>
           <p:nvPr/>
         </p:nvCxnSpPr>
@@ -6069,7 +6709,7 @@
       </p:cxnSp>
       <p:cxnSp>
         <p:nvCxnSpPr>
-          <p:cNvPr id="112" name="Connector 111"/>
+          <p:cNvPr id="136" name="Connector 135"/>
           <p:cNvCxnSpPr/>
           <p:nvPr/>
         </p:nvCxnSpPr>
@@ -6104,7 +6744,7 @@
       </p:cxnSp>
       <p:cxnSp>
         <p:nvCxnSpPr>
-          <p:cNvPr id="113" name="Connector 112"/>
+          <p:cNvPr id="137" name="Connector 136"/>
           <p:cNvCxnSpPr/>
           <p:nvPr/>
         </p:nvCxnSpPr>
@@ -6139,7 +6779,7 @@
       </p:cxnSp>
       <p:cxnSp>
         <p:nvCxnSpPr>
-          <p:cNvPr id="114" name="Connector 113"/>
+          <p:cNvPr id="138" name="Connector 137"/>
           <p:cNvCxnSpPr/>
           <p:nvPr/>
         </p:nvCxnSpPr>
@@ -6174,7 +6814,7 @@
       </p:cxnSp>
       <p:cxnSp>
         <p:nvCxnSpPr>
-          <p:cNvPr id="115" name="Connector 114"/>
+          <p:cNvPr id="139" name="Connector 138"/>
           <p:cNvCxnSpPr/>
           <p:nvPr/>
         </p:nvCxnSpPr>
@@ -6209,7 +6849,7 @@
       </p:cxnSp>
       <p:cxnSp>
         <p:nvCxnSpPr>
-          <p:cNvPr id="116" name="Connector 115"/>
+          <p:cNvPr id="140" name="Connector 139"/>
           <p:cNvCxnSpPr/>
           <p:nvPr/>
         </p:nvCxnSpPr>
@@ -6244,7 +6884,7 @@
       </p:cxnSp>
       <p:cxnSp>
         <p:nvCxnSpPr>
-          <p:cNvPr id="117" name="Connector 116"/>
+          <p:cNvPr id="141" name="Connector 140"/>
           <p:cNvCxnSpPr/>
           <p:nvPr/>
         </p:nvCxnSpPr>
@@ -6279,7 +6919,7 @@
       </p:cxnSp>
       <p:cxnSp>
         <p:nvCxnSpPr>
-          <p:cNvPr id="118" name="Connector 117"/>
+          <p:cNvPr id="142" name="Connector 141"/>
           <p:cNvCxnSpPr/>
           <p:nvPr/>
         </p:nvCxnSpPr>
@@ -6314,14 +6954,14 @@
       </p:cxnSp>
       <p:cxnSp>
         <p:nvCxnSpPr>
-          <p:cNvPr id="119" name="Connector 118"/>
+          <p:cNvPr id="143" name="Connector 142"/>
           <p:cNvCxnSpPr/>
           <p:nvPr/>
         </p:nvCxnSpPr>
         <p:spPr>
-          <a:xfrm flipV="1">
-            <a:off x="15940000" y="14010000"/>
-            <a:ext cx="0" cy="1150000"/>
+          <a:xfrm flipH="1">
+            <a:off x="6940000" y="15160000"/>
+            <a:ext cx="3000000" cy="0"/>
           </a:xfrm>
           <a:prstGeom prst="line">
             <a:avLst/>
@@ -6349,14 +6989,14 @@
       </p:cxnSp>
       <p:cxnSp>
         <p:nvCxnSpPr>
-          <p:cNvPr id="120" name="Connector 119"/>
+          <p:cNvPr id="144" name="Connector 143"/>
           <p:cNvCxnSpPr/>
           <p:nvPr/>
         </p:nvCxnSpPr>
         <p:spPr>
-          <a:xfrm flipH="1">
-            <a:off x="12940000" y="14010000"/>
-            <a:ext cx="3000000" cy="0"/>
+          <a:xfrm flipV="1">
+            <a:off x="15940000" y="14010000"/>
+            <a:ext cx="0" cy="1150000"/>
           </a:xfrm>
           <a:prstGeom prst="line">
             <a:avLst/>
@@ -6384,14 +7024,14 @@
       </p:cxnSp>
       <p:cxnSp>
         <p:nvCxnSpPr>
-          <p:cNvPr id="121" name="Connector 120"/>
+          <p:cNvPr id="145" name="Connector 144"/>
           <p:cNvCxnSpPr/>
           <p:nvPr/>
         </p:nvCxnSpPr>
         <p:spPr>
-          <a:xfrm flipV="1">
-            <a:off x="12940000" y="12860000"/>
-            <a:ext cx="0" cy="1150000"/>
+          <a:xfrm>
+            <a:off x="15940000" y="15160000"/>
+            <a:ext cx="3000000" cy="0"/>
           </a:xfrm>
           <a:prstGeom prst="line">
             <a:avLst/>
@@ -6419,13 +7059,13 @@
       </p:cxnSp>
       <p:cxnSp>
         <p:nvCxnSpPr>
-          <p:cNvPr id="122" name="Connector 121"/>
+          <p:cNvPr id="146" name="Connector 145"/>
           <p:cNvCxnSpPr/>
           <p:nvPr/>
         </p:nvCxnSpPr>
         <p:spPr>
           <a:xfrm flipH="1">
-            <a:off x="9940000" y="14010000"/>
+            <a:off x="12940000" y="14010000"/>
             <a:ext cx="3000000" cy="0"/>
           </a:xfrm>
           <a:prstGeom prst="line">
@@ -6454,14 +7094,14 @@
       </p:cxnSp>
       <p:cxnSp>
         <p:nvCxnSpPr>
-          <p:cNvPr id="123" name="Connector 122"/>
+          <p:cNvPr id="147" name="Connector 146"/>
           <p:cNvCxnSpPr/>
           <p:nvPr/>
         </p:nvCxnSpPr>
         <p:spPr>
-          <a:xfrm flipH="1">
-            <a:off x="6940000" y="14010000"/>
-            <a:ext cx="3000000" cy="0"/>
+          <a:xfrm flipV="1">
+            <a:off x="15940000" y="12860000"/>
+            <a:ext cx="0" cy="1150000"/>
           </a:xfrm>
           <a:prstGeom prst="line">
             <a:avLst/>
@@ -6489,14 +7129,14 @@
       </p:cxnSp>
       <p:cxnSp>
         <p:nvCxnSpPr>
-          <p:cNvPr id="124" name="Connector 123"/>
+          <p:cNvPr id="148" name="Connector 147"/>
           <p:cNvCxnSpPr/>
           <p:nvPr/>
         </p:nvCxnSpPr>
         <p:spPr>
           <a:xfrm flipV="1">
-            <a:off x="6940000" y="10560000"/>
-            <a:ext cx="0" cy="3450000"/>
+            <a:off x="12940000" y="12860000"/>
+            <a:ext cx="0" cy="1150000"/>
           </a:xfrm>
           <a:prstGeom prst="line">
             <a:avLst/>
@@ -6524,14 +7164,14 @@
       </p:cxnSp>
       <p:cxnSp>
         <p:nvCxnSpPr>
-          <p:cNvPr id="125" name="Connector 124"/>
+          <p:cNvPr id="149" name="Connector 148"/>
           <p:cNvCxnSpPr/>
           <p:nvPr/>
         </p:nvCxnSpPr>
         <p:spPr>
-          <a:xfrm flipV="1">
-            <a:off x="6940000" y="9410000"/>
-            <a:ext cx="0" cy="1150000"/>
+          <a:xfrm flipH="1">
+            <a:off x="9940000" y="14010000"/>
+            <a:ext cx="3000000" cy="0"/>
           </a:xfrm>
           <a:prstGeom prst="line">
             <a:avLst/>
@@ -6559,14 +7199,14 @@
       </p:cxnSp>
       <p:cxnSp>
         <p:nvCxnSpPr>
-          <p:cNvPr id="126" name="Connector 125"/>
+          <p:cNvPr id="150" name="Connector 149"/>
           <p:cNvCxnSpPr/>
           <p:nvPr/>
         </p:nvCxnSpPr>
         <p:spPr>
-          <a:xfrm flipV="1">
-            <a:off x="6940000" y="8260000"/>
-            <a:ext cx="0" cy="1150000"/>
+          <a:xfrm flipH="1">
+            <a:off x="6940000" y="14010000"/>
+            <a:ext cx="3000000" cy="0"/>
           </a:xfrm>
           <a:prstGeom prst="line">
             <a:avLst/>
@@ -6594,14 +7234,14 @@
       </p:cxnSp>
       <p:cxnSp>
         <p:nvCxnSpPr>
-          <p:cNvPr id="127" name="Connector 126"/>
+          <p:cNvPr id="151" name="Connector 150"/>
           <p:cNvCxnSpPr/>
           <p:nvPr/>
         </p:nvCxnSpPr>
         <p:spPr>
-          <a:xfrm>
-            <a:off x="6940000" y="9410000"/>
-            <a:ext cx="3000000" cy="0"/>
+          <a:xfrm flipV="1">
+            <a:off x="9940000" y="12860000"/>
+            <a:ext cx="0" cy="1150000"/>
           </a:xfrm>
           <a:prstGeom prst="line">
             <a:avLst/>
@@ -6629,14 +7269,14 @@
       </p:cxnSp>
       <p:cxnSp>
         <p:nvCxnSpPr>
-          <p:cNvPr id="128" name="Connector 127"/>
+          <p:cNvPr id="152" name="Connector 151"/>
           <p:cNvCxnSpPr/>
           <p:nvPr/>
         </p:nvCxnSpPr>
         <p:spPr>
-          <a:xfrm>
-            <a:off x="9940000" y="9410000"/>
-            <a:ext cx="0" cy="1150000"/>
+          <a:xfrm flipV="1">
+            <a:off x="6940000" y="10560000"/>
+            <a:ext cx="0" cy="3450000"/>
           </a:xfrm>
           <a:prstGeom prst="line">
             <a:avLst/>
@@ -6664,14 +7304,14 @@
       </p:cxnSp>
       <p:cxnSp>
         <p:nvCxnSpPr>
-          <p:cNvPr id="129" name="Connector 128"/>
+          <p:cNvPr id="153" name="Connector 152"/>
           <p:cNvCxnSpPr/>
           <p:nvPr/>
         </p:nvCxnSpPr>
         <p:spPr>
-          <a:xfrm>
-            <a:off x="9940000" y="9410000"/>
-            <a:ext cx="3000000" cy="0"/>
+          <a:xfrm flipV="1">
+            <a:off x="6940000" y="9410000"/>
+            <a:ext cx="0" cy="1150000"/>
           </a:xfrm>
           <a:prstGeom prst="line">
             <a:avLst/>
@@ -6699,13 +7339,13 @@
       </p:cxnSp>
       <p:cxnSp>
         <p:nvCxnSpPr>
-          <p:cNvPr id="130" name="Connector 129"/>
+          <p:cNvPr id="154" name="Connector 153"/>
           <p:cNvCxnSpPr/>
           <p:nvPr/>
         </p:nvCxnSpPr>
         <p:spPr>
           <a:xfrm flipV="1">
-            <a:off x="12940000" y="8260000"/>
+            <a:off x="6940000" y="8260000"/>
             <a:ext cx="0" cy="1150000"/>
           </a:xfrm>
           <a:prstGeom prst="line">
@@ -6734,13 +7374,13 @@
       </p:cxnSp>
       <p:cxnSp>
         <p:nvCxnSpPr>
-          <p:cNvPr id="131" name="Connector 130"/>
+          <p:cNvPr id="155" name="Connector 154"/>
           <p:cNvCxnSpPr/>
           <p:nvPr/>
         </p:nvCxnSpPr>
         <p:spPr>
           <a:xfrm>
-            <a:off x="12940000" y="9410000"/>
+            <a:off x="6940000" y="9410000"/>
             <a:ext cx="3000000" cy="0"/>
           </a:xfrm>
           <a:prstGeom prst="line">
@@ -6769,13 +7409,13 @@
       </p:cxnSp>
       <p:cxnSp>
         <p:nvCxnSpPr>
-          <p:cNvPr id="132" name="Connector 131"/>
+          <p:cNvPr id="156" name="Connector 155"/>
           <p:cNvCxnSpPr/>
           <p:nvPr/>
         </p:nvCxnSpPr>
         <p:spPr>
-          <a:xfrm>
-            <a:off x="15940000" y="9410000"/>
+          <a:xfrm flipH="1">
+            <a:off x="3940000" y="9410000"/>
             <a:ext cx="3000000" cy="0"/>
           </a:xfrm>
           <a:prstGeom prst="line">
@@ -6804,13 +7444,13 @@
       </p:cxnSp>
       <p:cxnSp>
         <p:nvCxnSpPr>
-          <p:cNvPr id="133" name="Connector 132"/>
+          <p:cNvPr id="157" name="Connector 156"/>
           <p:cNvCxnSpPr/>
           <p:nvPr/>
         </p:nvCxnSpPr>
         <p:spPr>
           <a:xfrm flipV="1">
-            <a:off x="18940000" y="8260000"/>
+            <a:off x="3940000" y="8260000"/>
             <a:ext cx="0" cy="1150000"/>
           </a:xfrm>
           <a:prstGeom prst="line">
@@ -6839,14 +7479,14 @@
       </p:cxnSp>
       <p:cxnSp>
         <p:nvCxnSpPr>
-          <p:cNvPr id="134" name="Connector 133"/>
+          <p:cNvPr id="158" name="Connector 157"/>
           <p:cNvCxnSpPr/>
           <p:nvPr/>
         </p:nvCxnSpPr>
         <p:spPr>
-          <a:xfrm flipH="1">
-            <a:off x="9940000" y="8260000"/>
-            <a:ext cx="3000000" cy="0"/>
+          <a:xfrm flipV="1">
+            <a:off x="6940000" y="7110000"/>
+            <a:ext cx="0" cy="1150000"/>
           </a:xfrm>
           <a:prstGeom prst="line">
             <a:avLst/>
@@ -6874,13 +7514,13 @@
       </p:cxnSp>
       <p:cxnSp>
         <p:nvCxnSpPr>
-          <p:cNvPr id="135" name="Connector 134"/>
+          <p:cNvPr id="159" name="Connector 158"/>
           <p:cNvCxnSpPr/>
           <p:nvPr/>
         </p:nvCxnSpPr>
         <p:spPr>
-          <a:xfrm flipV="1">
-            <a:off x="9940000" y="7110000"/>
+          <a:xfrm>
+            <a:off x="9940000" y="9410000"/>
             <a:ext cx="0" cy="1150000"/>
           </a:xfrm>
           <a:prstGeom prst="line">
@@ -6909,14 +7549,14 @@
       </p:cxnSp>
       <p:cxnSp>
         <p:nvCxnSpPr>
-          <p:cNvPr id="136" name="Connector 135"/>
+          <p:cNvPr id="160" name="Connector 159"/>
           <p:cNvCxnSpPr/>
           <p:nvPr/>
         </p:nvCxnSpPr>
         <p:spPr>
-          <a:xfrm flipV="1">
-            <a:off x="9940000" y="4810000"/>
-            <a:ext cx="0" cy="2300000"/>
+          <a:xfrm>
+            <a:off x="9940000" y="9410000"/>
+            <a:ext cx="3000000" cy="0"/>
           </a:xfrm>
           <a:prstGeom prst="line">
             <a:avLst/>
@@ -6944,13 +7584,13 @@
       </p:cxnSp>
       <p:cxnSp>
         <p:nvCxnSpPr>
-          <p:cNvPr id="137" name="Connector 136"/>
+          <p:cNvPr id="161" name="Connector 160"/>
           <p:cNvCxnSpPr/>
           <p:nvPr/>
         </p:nvCxnSpPr>
         <p:spPr>
           <a:xfrm flipV="1">
-            <a:off x="9940000" y="3660000"/>
+            <a:off x="12940000" y="8260000"/>
             <a:ext cx="0" cy="1150000"/>
           </a:xfrm>
           <a:prstGeom prst="line">
@@ -6979,14 +7619,14 @@
       </p:cxnSp>
       <p:cxnSp>
         <p:nvCxnSpPr>
-          <p:cNvPr id="138" name="Connector 137"/>
+          <p:cNvPr id="162" name="Connector 161"/>
           <p:cNvCxnSpPr/>
           <p:nvPr/>
         </p:nvCxnSpPr>
         <p:spPr>
-          <a:xfrm flipV="1">
-            <a:off x="9940000" y="2510000"/>
-            <a:ext cx="0" cy="1150000"/>
+          <a:xfrm>
+            <a:off x="12940000" y="9410000"/>
+            <a:ext cx="3000000" cy="0"/>
           </a:xfrm>
           <a:prstGeom prst="line">
             <a:avLst/>
@@ -7014,14 +7654,14 @@
       </p:cxnSp>
       <p:cxnSp>
         <p:nvCxnSpPr>
-          <p:cNvPr id="139" name="Connector 138"/>
+          <p:cNvPr id="163" name="Connector 162"/>
           <p:cNvCxnSpPr/>
           <p:nvPr/>
         </p:nvCxnSpPr>
         <p:spPr>
-          <a:xfrm flipH="1">
-            <a:off x="6940000" y="3660000"/>
-            <a:ext cx="3000000" cy="0"/>
+          <a:xfrm>
+            <a:off x="12940000" y="9410000"/>
+            <a:ext cx="0" cy="1150000"/>
           </a:xfrm>
           <a:prstGeom prst="line">
             <a:avLst/>
@@ -7049,14 +7689,14 @@
       </p:cxnSp>
       <p:cxnSp>
         <p:nvCxnSpPr>
-          <p:cNvPr id="140" name="Connector 139"/>
+          <p:cNvPr id="164" name="Connector 163"/>
           <p:cNvCxnSpPr/>
           <p:nvPr/>
         </p:nvCxnSpPr>
         <p:spPr>
-          <a:xfrm flipV="1">
-            <a:off x="6940000" y="2510000"/>
-            <a:ext cx="0" cy="1150000"/>
+          <a:xfrm>
+            <a:off x="15940000" y="9410000"/>
+            <a:ext cx="3000000" cy="0"/>
           </a:xfrm>
           <a:prstGeom prst="line">
             <a:avLst/>
@@ -7084,7 +7724,287 @@
       </p:cxnSp>
       <p:cxnSp>
         <p:nvCxnSpPr>
-          <p:cNvPr id="141" name="Connector 140"/>
+          <p:cNvPr id="165" name="Connector 164"/>
+          <p:cNvCxnSpPr/>
+          <p:nvPr/>
+        </p:nvCxnSpPr>
+        <p:spPr>
+          <a:xfrm flipV="1">
+            <a:off x="18940000" y="8260000"/>
+            <a:ext cx="0" cy="1150000"/>
+          </a:xfrm>
+          <a:prstGeom prst="line">
+            <a:avLst/>
+          </a:prstGeom>
+          <a:ln w="19050">
+            <a:solidFill>
+              <a:srgbClr val="333338"/>
+            </a:solidFill>
+          </a:ln>
+        </p:spPr>
+        <p:style>
+          <a:lnRef idx="2">
+            <a:schemeClr val="accent1"/>
+          </a:lnRef>
+          <a:fillRef idx="0">
+            <a:schemeClr val="accent1"/>
+          </a:fillRef>
+          <a:effectRef idx="1">
+            <a:schemeClr val="accent1"/>
+          </a:effectRef>
+          <a:fontRef idx="minor">
+            <a:schemeClr val="tx1"/>
+          </a:fontRef>
+        </p:style>
+      </p:cxnSp>
+      <p:cxnSp>
+        <p:nvCxnSpPr>
+          <p:cNvPr id="166" name="Connector 165"/>
+          <p:cNvCxnSpPr/>
+          <p:nvPr/>
+        </p:nvCxnSpPr>
+        <p:spPr>
+          <a:xfrm flipH="1">
+            <a:off x="9940000" y="8260000"/>
+            <a:ext cx="3000000" cy="0"/>
+          </a:xfrm>
+          <a:prstGeom prst="line">
+            <a:avLst/>
+          </a:prstGeom>
+          <a:ln w="19050">
+            <a:solidFill>
+              <a:srgbClr val="333338"/>
+            </a:solidFill>
+          </a:ln>
+        </p:spPr>
+        <p:style>
+          <a:lnRef idx="2">
+            <a:schemeClr val="accent1"/>
+          </a:lnRef>
+          <a:fillRef idx="0">
+            <a:schemeClr val="accent1"/>
+          </a:fillRef>
+          <a:effectRef idx="1">
+            <a:schemeClr val="accent1"/>
+          </a:effectRef>
+          <a:fontRef idx="minor">
+            <a:schemeClr val="tx1"/>
+          </a:fontRef>
+        </p:style>
+      </p:cxnSp>
+      <p:cxnSp>
+        <p:nvCxnSpPr>
+          <p:cNvPr id="167" name="Connector 166"/>
+          <p:cNvCxnSpPr/>
+          <p:nvPr/>
+        </p:nvCxnSpPr>
+        <p:spPr>
+          <a:xfrm flipV="1">
+            <a:off x="9940000" y="7110000"/>
+            <a:ext cx="0" cy="1150000"/>
+          </a:xfrm>
+          <a:prstGeom prst="line">
+            <a:avLst/>
+          </a:prstGeom>
+          <a:ln w="19050">
+            <a:solidFill>
+              <a:srgbClr val="333338"/>
+            </a:solidFill>
+          </a:ln>
+        </p:spPr>
+        <p:style>
+          <a:lnRef idx="2">
+            <a:schemeClr val="accent1"/>
+          </a:lnRef>
+          <a:fillRef idx="0">
+            <a:schemeClr val="accent1"/>
+          </a:fillRef>
+          <a:effectRef idx="1">
+            <a:schemeClr val="accent1"/>
+          </a:effectRef>
+          <a:fontRef idx="minor">
+            <a:schemeClr val="tx1"/>
+          </a:fontRef>
+        </p:style>
+      </p:cxnSp>
+      <p:cxnSp>
+        <p:nvCxnSpPr>
+          <p:cNvPr id="168" name="Connector 167"/>
+          <p:cNvCxnSpPr/>
+          <p:nvPr/>
+        </p:nvCxnSpPr>
+        <p:spPr>
+          <a:xfrm flipV="1">
+            <a:off x="9940000" y="4810000"/>
+            <a:ext cx="0" cy="2300000"/>
+          </a:xfrm>
+          <a:prstGeom prst="line">
+            <a:avLst/>
+          </a:prstGeom>
+          <a:ln w="19050">
+            <a:solidFill>
+              <a:srgbClr val="333338"/>
+            </a:solidFill>
+          </a:ln>
+        </p:spPr>
+        <p:style>
+          <a:lnRef idx="2">
+            <a:schemeClr val="accent1"/>
+          </a:lnRef>
+          <a:fillRef idx="0">
+            <a:schemeClr val="accent1"/>
+          </a:fillRef>
+          <a:effectRef idx="1">
+            <a:schemeClr val="accent1"/>
+          </a:effectRef>
+          <a:fontRef idx="minor">
+            <a:schemeClr val="tx1"/>
+          </a:fontRef>
+        </p:style>
+      </p:cxnSp>
+      <p:cxnSp>
+        <p:nvCxnSpPr>
+          <p:cNvPr id="169" name="Connector 168"/>
+          <p:cNvCxnSpPr/>
+          <p:nvPr/>
+        </p:nvCxnSpPr>
+        <p:spPr>
+          <a:xfrm flipV="1">
+            <a:off x="9940000" y="3660000"/>
+            <a:ext cx="0" cy="1150000"/>
+          </a:xfrm>
+          <a:prstGeom prst="line">
+            <a:avLst/>
+          </a:prstGeom>
+          <a:ln w="19050">
+            <a:solidFill>
+              <a:srgbClr val="333338"/>
+            </a:solidFill>
+          </a:ln>
+        </p:spPr>
+        <p:style>
+          <a:lnRef idx="2">
+            <a:schemeClr val="accent1"/>
+          </a:lnRef>
+          <a:fillRef idx="0">
+            <a:schemeClr val="accent1"/>
+          </a:fillRef>
+          <a:effectRef idx="1">
+            <a:schemeClr val="accent1"/>
+          </a:effectRef>
+          <a:fontRef idx="minor">
+            <a:schemeClr val="tx1"/>
+          </a:fontRef>
+        </p:style>
+      </p:cxnSp>
+      <p:cxnSp>
+        <p:nvCxnSpPr>
+          <p:cNvPr id="170" name="Connector 169"/>
+          <p:cNvCxnSpPr/>
+          <p:nvPr/>
+        </p:nvCxnSpPr>
+        <p:spPr>
+          <a:xfrm flipV="1">
+            <a:off x="9940000" y="2510000"/>
+            <a:ext cx="0" cy="1150000"/>
+          </a:xfrm>
+          <a:prstGeom prst="line">
+            <a:avLst/>
+          </a:prstGeom>
+          <a:ln w="19050">
+            <a:solidFill>
+              <a:srgbClr val="333338"/>
+            </a:solidFill>
+          </a:ln>
+        </p:spPr>
+        <p:style>
+          <a:lnRef idx="2">
+            <a:schemeClr val="accent1"/>
+          </a:lnRef>
+          <a:fillRef idx="0">
+            <a:schemeClr val="accent1"/>
+          </a:fillRef>
+          <a:effectRef idx="1">
+            <a:schemeClr val="accent1"/>
+          </a:effectRef>
+          <a:fontRef idx="minor">
+            <a:schemeClr val="tx1"/>
+          </a:fontRef>
+        </p:style>
+      </p:cxnSp>
+      <p:cxnSp>
+        <p:nvCxnSpPr>
+          <p:cNvPr id="171" name="Connector 170"/>
+          <p:cNvCxnSpPr/>
+          <p:nvPr/>
+        </p:nvCxnSpPr>
+        <p:spPr>
+          <a:xfrm flipH="1">
+            <a:off x="6940000" y="3660000"/>
+            <a:ext cx="3000000" cy="0"/>
+          </a:xfrm>
+          <a:prstGeom prst="line">
+            <a:avLst/>
+          </a:prstGeom>
+          <a:ln w="19050">
+            <a:solidFill>
+              <a:srgbClr val="333338"/>
+            </a:solidFill>
+          </a:ln>
+        </p:spPr>
+        <p:style>
+          <a:lnRef idx="2">
+            <a:schemeClr val="accent1"/>
+          </a:lnRef>
+          <a:fillRef idx="0">
+            <a:schemeClr val="accent1"/>
+          </a:fillRef>
+          <a:effectRef idx="1">
+            <a:schemeClr val="accent1"/>
+          </a:effectRef>
+          <a:fontRef idx="minor">
+            <a:schemeClr val="tx1"/>
+          </a:fontRef>
+        </p:style>
+      </p:cxnSp>
+      <p:cxnSp>
+        <p:nvCxnSpPr>
+          <p:cNvPr id="172" name="Connector 171"/>
+          <p:cNvCxnSpPr/>
+          <p:nvPr/>
+        </p:nvCxnSpPr>
+        <p:spPr>
+          <a:xfrm flipV="1">
+            <a:off x="6940000" y="2510000"/>
+            <a:ext cx="0" cy="1150000"/>
+          </a:xfrm>
+          <a:prstGeom prst="line">
+            <a:avLst/>
+          </a:prstGeom>
+          <a:ln w="19050">
+            <a:solidFill>
+              <a:srgbClr val="333338"/>
+            </a:solidFill>
+          </a:ln>
+        </p:spPr>
+        <p:style>
+          <a:lnRef idx="2">
+            <a:schemeClr val="accent1"/>
+          </a:lnRef>
+          <a:fillRef idx="0">
+            <a:schemeClr val="accent1"/>
+          </a:fillRef>
+          <a:effectRef idx="1">
+            <a:schemeClr val="accent1"/>
+          </a:effectRef>
+          <a:fontRef idx="minor">
+            <a:schemeClr val="tx1"/>
+          </a:fontRef>
+        </p:style>
+      </p:cxnSp>
+      <p:cxnSp>
+        <p:nvCxnSpPr>
+          <p:cNvPr id="173" name="Connector 172"/>
           <p:cNvCxnSpPr/>
           <p:nvPr/>
         </p:nvCxnSpPr>

--- a/resources/map/_layout_tomb.pptx
+++ b/resources/map/_layout_tomb.pptx
@@ -7,7 +7,7 @@
   <p:sldIdLst>
     <p:sldId id="256" r:id="rId7"/>
   </p:sldIdLst>
-  <p:sldSz cx="20100000" cy="19400000" type="screen4x3"/>
+  <p:sldSz cx="24600000" cy="32050000" type="screen4x3"/>
   <p:notesSz cx="6858000" cy="9144000"/>
   <p:defaultTextStyle>
     <a:defPPr>
@@ -3097,7 +3097,7 @@
         <p:spPr>
           <a:xfrm>
             <a:off x="300000" y="160000"/>
-            <a:ext cx="19500000" cy="420000"/>
+            <a:ext cx="24000000" cy="420000"/>
           </a:xfrm>
           <a:prstGeom prst="rect">
             <a:avLst/>
@@ -3122,7 +3122,7 @@
                   <a:srgbClr val="7A787E"/>
                 </a:solidFill>
               </a:rPr>
-              <a:t>43 格・每一格是「縮圖＋地名」的群組，可以直接拖；連線是 connector，拖格子時會跟著走</a:t>
+              <a:t>48 格・每一格是「縮圖＋地名」的群組，可以直接拖；連線是 connector，拖格子時會跟著走</a:t>
             </a:r>
           </a:p>
         </p:txBody>
@@ -4021,20 +4021,12 @@
             <a:chExt cx="1280000" cy="1020000"/>
           </a:xfrm>
         </p:grpSpPr>
-        <p:pic>
-          <p:nvPicPr>
-            <p:cNvPr id="37" name="Picture 36" descr="tomb_chantry.webp.jpg"/>
-            <p:cNvPicPr>
-              <a:picLocks noChangeAspect="1"/>
-            </p:cNvPicPr>
-            <p:nvPr/>
-          </p:nvPicPr>
-          <p:blipFill>
-            <a:blip r:embed="rId12"/>
-            <a:stretch>
-              <a:fillRect/>
-            </a:stretch>
-          </p:blipFill>
+        <p:sp>
+          <p:nvSpPr>
+            <p:cNvPr id="37" name="Rectangle 36"/>
+            <p:cNvSpPr/>
+            <p:nvPr/>
+          </p:nvSpPr>
           <p:spPr>
             <a:xfrm>
               <a:off x="6300000" y="14800000"/>
@@ -4043,8 +4035,54 @@
             <a:prstGeom prst="rect">
               <a:avLst/>
             </a:prstGeom>
-          </p:spPr>
-        </p:pic>
+            <a:solidFill>
+              <a:srgbClr val="3FB950"/>
+            </a:solidFill>
+            <a:ln>
+              <a:solidFill>
+                <a:srgbClr val="2B8A3A"/>
+              </a:solidFill>
+            </a:ln>
+          </p:spPr>
+          <p:style>
+            <a:lnRef idx="1">
+              <a:schemeClr val="accent1"/>
+            </a:lnRef>
+            <a:fillRef idx="3">
+              <a:schemeClr val="accent1"/>
+            </a:fillRef>
+            <a:effectRef idx="2">
+              <a:schemeClr val="accent1"/>
+            </a:effectRef>
+            <a:fontRef idx="minor">
+              <a:schemeClr val="lt1"/>
+            </a:fontRef>
+          </p:style>
+          <p:txBody>
+            <a:bodyPr rtlCol="0" anchor="ctr"/>
+            <a:lstStyle/>
+            <a:p>
+              <a:r>
+                <a:rPr sz="900" b="1">
+                  <a:solidFill>
+                    <a:srgbClr val="FFFFFF"/>
+                  </a:solidFill>
+                </a:rPr>
+                <a:t>要補圖</a:t>
+              </a:r>
+            </a:p>
+            <a:p>
+              <a:r>
+                <a:rPr sz="900" b="1">
+                  <a:solidFill>
+                    <a:srgbClr val="FFFFFF"/>
+                  </a:solidFill>
+                </a:rPr>
+                <a:t>tomb_scriptorium</a:t>
+              </a:r>
+            </a:p>
+          </p:txBody>
+        </p:sp>
         <p:sp>
           <p:nvSpPr>
             <p:cNvPr id="38" name="TextBox 37"/>
@@ -4181,20 +4219,12 @@
             <a:chExt cx="1280000" cy="1020000"/>
           </a:xfrm>
         </p:grpSpPr>
-        <p:pic>
-          <p:nvPicPr>
-            <p:cNvPr id="43" name="Picture 42" descr="tomb_chapel.webp.jpg"/>
-            <p:cNvPicPr>
-              <a:picLocks noChangeAspect="1"/>
-            </p:cNvPicPr>
-            <p:nvPr/>
-          </p:nvPicPr>
-          <p:blipFill>
-            <a:blip r:embed="rId13"/>
-            <a:stretch>
-              <a:fillRect/>
-            </a:stretch>
-          </p:blipFill>
+        <p:sp>
+          <p:nvSpPr>
+            <p:cNvPr id="43" name="Rectangle 42"/>
+            <p:cNvSpPr/>
+            <p:nvPr/>
+          </p:nvSpPr>
           <p:spPr>
             <a:xfrm>
               <a:off x="18300000" y="14800000"/>
@@ -4203,8 +4233,54 @@
             <a:prstGeom prst="rect">
               <a:avLst/>
             </a:prstGeom>
-          </p:spPr>
-        </p:pic>
+            <a:solidFill>
+              <a:srgbClr val="3FB950"/>
+            </a:solidFill>
+            <a:ln>
+              <a:solidFill>
+                <a:srgbClr val="2B8A3A"/>
+              </a:solidFill>
+            </a:ln>
+          </p:spPr>
+          <p:style>
+            <a:lnRef idx="1">
+              <a:schemeClr val="accent1"/>
+            </a:lnRef>
+            <a:fillRef idx="3">
+              <a:schemeClr val="accent1"/>
+            </a:fillRef>
+            <a:effectRef idx="2">
+              <a:schemeClr val="accent1"/>
+            </a:effectRef>
+            <a:fontRef idx="minor">
+              <a:schemeClr val="lt1"/>
+            </a:fontRef>
+          </p:style>
+          <p:txBody>
+            <a:bodyPr rtlCol="0" anchor="ctr"/>
+            <a:lstStyle/>
+            <a:p>
+              <a:r>
+                <a:rPr sz="900" b="1">
+                  <a:solidFill>
+                    <a:srgbClr val="FFFFFF"/>
+                  </a:solidFill>
+                </a:rPr>
+                <a:t>要補圖</a:t>
+              </a:r>
+            </a:p>
+            <a:p>
+              <a:r>
+                <a:rPr sz="900" b="1">
+                  <a:solidFill>
+                    <a:srgbClr val="FFFFFF"/>
+                  </a:solidFill>
+                </a:rPr>
+                <a:t>tomb_confessio</a:t>
+              </a:r>
+            </a:p>
+          </p:txBody>
+        </p:sp>
         <p:sp>
           <p:nvSpPr>
             <p:cNvPr id="44" name="TextBox 43"/>
@@ -4341,9 +4417,127 @@
             <a:chExt cx="1280000" cy="1020000"/>
           </a:xfrm>
         </p:grpSpPr>
+        <p:sp>
+          <p:nvSpPr>
+            <p:cNvPr id="49" name="Rectangle 48"/>
+            <p:cNvSpPr/>
+            <p:nvPr/>
+          </p:nvSpPr>
+          <p:spPr>
+            <a:xfrm>
+              <a:off x="15300000" y="12500000"/>
+              <a:ext cx="1280000" cy="720000"/>
+            </a:xfrm>
+            <a:prstGeom prst="rect">
+              <a:avLst/>
+            </a:prstGeom>
+            <a:solidFill>
+              <a:srgbClr val="3FB950"/>
+            </a:solidFill>
+            <a:ln>
+              <a:solidFill>
+                <a:srgbClr val="2B8A3A"/>
+              </a:solidFill>
+            </a:ln>
+          </p:spPr>
+          <p:style>
+            <a:lnRef idx="1">
+              <a:schemeClr val="accent1"/>
+            </a:lnRef>
+            <a:fillRef idx="3">
+              <a:schemeClr val="accent1"/>
+            </a:fillRef>
+            <a:effectRef idx="2">
+              <a:schemeClr val="accent1"/>
+            </a:effectRef>
+            <a:fontRef idx="minor">
+              <a:schemeClr val="lt1"/>
+            </a:fontRef>
+          </p:style>
+          <p:txBody>
+            <a:bodyPr rtlCol="0" anchor="ctr"/>
+            <a:lstStyle/>
+            <a:p>
+              <a:r>
+                <a:rPr sz="900" b="1">
+                  <a:solidFill>
+                    <a:srgbClr val="FFFFFF"/>
+                  </a:solidFill>
+                </a:rPr>
+                <a:t>要補圖</a:t>
+              </a:r>
+            </a:p>
+            <a:p>
+              <a:r>
+                <a:rPr sz="900" b="1">
+                  <a:solidFill>
+                    <a:srgbClr val="FFFFFF"/>
+                  </a:solidFill>
+                </a:rPr>
+                <a:t>tomb_sacristy</a:t>
+              </a:r>
+            </a:p>
+          </p:txBody>
+        </p:sp>
+        <p:sp>
+          <p:nvSpPr>
+            <p:cNvPr id="50" name="TextBox 49"/>
+            <p:cNvSpPr txBox="1"/>
+            <p:nvPr/>
+          </p:nvSpPr>
+          <p:spPr>
+            <a:xfrm>
+              <a:off x="15300000" y="13220000"/>
+              <a:ext cx="1280000" cy="300000"/>
+            </a:xfrm>
+            <a:prstGeom prst="rect">
+              <a:avLst/>
+            </a:prstGeom>
+            <a:noFill/>
+          </p:spPr>
+          <p:txBody>
+            <a:bodyPr wrap="square" anchor="t">
+              <a:spAutoFit/>
+            </a:bodyPr>
+            <a:lstStyle/>
+            <a:p>
+              <a:pPr algn="ctr"/>
+              <a:r>
+                <a:rPr sz="1300" b="1"/>
+                <a:t>法衣室</a:t>
+              </a:r>
+            </a:p>
+            <a:p>
+              <a:pPr algn="ctr"/>
+              <a:r>
+                <a:rPr sz="800">
+                  <a:solidFill>
+                    <a:srgbClr val="9A989E"/>
+                  </a:solidFill>
+                </a:rPr>
+                <a:t>sacristy</a:t>
+              </a:r>
+            </a:p>
+          </p:txBody>
+        </p:sp>
+      </p:grpSp>
+      <p:grpSp>
+        <p:nvGrpSpPr>
+          <p:cNvPr id="51" name="Group 50"/>
+          <p:cNvGrpSpPr/>
+          <p:nvPr/>
+        </p:nvGrpSpPr>
+        <p:grpSpPr>
+          <a:xfrm>
+            <a:off x="12300000" y="13650000"/>
+            <a:ext cx="1280000" cy="1020000"/>
+            <a:chOff x="12300000" y="13650000"/>
+            <a:chExt cx="1280000" cy="1020000"/>
+          </a:xfrm>
+        </p:grpSpPr>
         <p:pic>
           <p:nvPicPr>
-            <p:cNvPr id="49" name="Picture 48" descr="tomb_reliquary.webp.jpg"/>
+            <p:cNvPr id="52" name="Picture 51" descr="tomb_apse_day.webp.jpg"/>
             <p:cNvPicPr>
               <a:picLocks noChangeAspect="1"/>
             </p:cNvPicPr>
@@ -4357,7 +4551,7 @@
           </p:blipFill>
           <p:spPr>
             <a:xfrm>
-              <a:off x="15300000" y="12500000"/>
+              <a:off x="12300000" y="13650000"/>
               <a:ext cx="1280000" cy="720000"/>
             </a:xfrm>
             <a:prstGeom prst="rect">
@@ -4367,13 +4561,13 @@
         </p:pic>
         <p:sp>
           <p:nvSpPr>
-            <p:cNvPr id="50" name="TextBox 49"/>
+            <p:cNvPr id="53" name="TextBox 52"/>
             <p:cNvSpPr txBox="1"/>
             <p:nvPr/>
           </p:nvSpPr>
           <p:spPr>
             <a:xfrm>
-              <a:off x="15300000" y="13220000"/>
+              <a:off x="12300000" y="14370000"/>
               <a:ext cx="1280000" cy="300000"/>
             </a:xfrm>
             <a:prstGeom prst="rect">
@@ -4390,7 +4584,7 @@
               <a:pPr algn="ctr"/>
               <a:r>
                 <a:rPr sz="1300" b="1"/>
-                <a:t>法衣室</a:t>
+                <a:t>後殿</a:t>
               </a:r>
             </a:p>
             <a:p>
@@ -4401,7 +4595,7 @@
                     <a:srgbClr val="9A989E"/>
                   </a:solidFill>
                 </a:rPr>
-                <a:t>sacristy</a:t>
+                <a:t>apse</a:t>
               </a:r>
             </a:p>
           </p:txBody>
@@ -4409,21 +4603,21 @@
       </p:grpSp>
       <p:grpSp>
         <p:nvGrpSpPr>
-          <p:cNvPr id="51" name="Group 50"/>
+          <p:cNvPr id="54" name="Group 53"/>
           <p:cNvGrpSpPr/>
           <p:nvPr/>
         </p:nvGrpSpPr>
         <p:grpSpPr>
           <a:xfrm>
-            <a:off x="12300000" y="13650000"/>
+            <a:off x="12300000" y="12500000"/>
             <a:ext cx="1280000" cy="1020000"/>
-            <a:chOff x="12300000" y="13650000"/>
+            <a:chOff x="12300000" y="12500000"/>
             <a:chExt cx="1280000" cy="1020000"/>
           </a:xfrm>
         </p:grpSpPr>
         <p:pic>
           <p:nvPicPr>
-            <p:cNvPr id="52" name="Picture 51" descr="tomb_apse_day.webp.jpg"/>
+            <p:cNvPr id="55" name="Picture 54" descr="tomb_reliquary.webp.jpg"/>
             <p:cNvPicPr>
               <a:picLocks noChangeAspect="1"/>
             </p:cNvPicPr>
@@ -4437,86 +4631,6 @@
           </p:blipFill>
           <p:spPr>
             <a:xfrm>
-              <a:off x="12300000" y="13650000"/>
-              <a:ext cx="1280000" cy="720000"/>
-            </a:xfrm>
-            <a:prstGeom prst="rect">
-              <a:avLst/>
-            </a:prstGeom>
-          </p:spPr>
-        </p:pic>
-        <p:sp>
-          <p:nvSpPr>
-            <p:cNvPr id="53" name="TextBox 52"/>
-            <p:cNvSpPr txBox="1"/>
-            <p:nvPr/>
-          </p:nvSpPr>
-          <p:spPr>
-            <a:xfrm>
-              <a:off x="12300000" y="14370000"/>
-              <a:ext cx="1280000" cy="300000"/>
-            </a:xfrm>
-            <a:prstGeom prst="rect">
-              <a:avLst/>
-            </a:prstGeom>
-            <a:noFill/>
-          </p:spPr>
-          <p:txBody>
-            <a:bodyPr wrap="square" anchor="t">
-              <a:spAutoFit/>
-            </a:bodyPr>
-            <a:lstStyle/>
-            <a:p>
-              <a:pPr algn="ctr"/>
-              <a:r>
-                <a:rPr sz="1300" b="1"/>
-                <a:t>後殿</a:t>
-              </a:r>
-            </a:p>
-            <a:p>
-              <a:pPr algn="ctr"/>
-              <a:r>
-                <a:rPr sz="800">
-                  <a:solidFill>
-                    <a:srgbClr val="9A989E"/>
-                  </a:solidFill>
-                </a:rPr>
-                <a:t>apse</a:t>
-              </a:r>
-            </a:p>
-          </p:txBody>
-        </p:sp>
-      </p:grpSp>
-      <p:grpSp>
-        <p:nvGrpSpPr>
-          <p:cNvPr id="54" name="Group 53"/>
-          <p:cNvGrpSpPr/>
-          <p:nvPr/>
-        </p:nvGrpSpPr>
-        <p:grpSpPr>
-          <a:xfrm>
-            <a:off x="12300000" y="12500000"/>
-            <a:ext cx="1280000" cy="1020000"/>
-            <a:chOff x="12300000" y="12500000"/>
-            <a:chExt cx="1280000" cy="1020000"/>
-          </a:xfrm>
-        </p:grpSpPr>
-        <p:pic>
-          <p:nvPicPr>
-            <p:cNvPr id="55" name="Picture 54" descr="tomb_reliquary.webp.jpg"/>
-            <p:cNvPicPr>
-              <a:picLocks noChangeAspect="1"/>
-            </p:cNvPicPr>
-            <p:nvPr/>
-          </p:nvPicPr>
-          <p:blipFill>
-            <a:blip r:embed="rId15"/>
-            <a:stretch>
-              <a:fillRect/>
-            </a:stretch>
-          </p:blipFill>
-          <p:spPr>
-            <a:xfrm>
               <a:off x="12300000" y="12500000"/>
               <a:ext cx="1280000" cy="720000"/>
             </a:xfrm>
@@ -4661,20 +4775,12 @@
             <a:chExt cx="1280000" cy="1020000"/>
           </a:xfrm>
         </p:grpSpPr>
-        <p:pic>
-          <p:nvPicPr>
-            <p:cNvPr id="61" name="Picture 60" descr="tomb_cloister.webp.jpg"/>
-            <p:cNvPicPr>
-              <a:picLocks noChangeAspect="1"/>
-            </p:cNvPicPr>
-            <p:nvPr/>
-          </p:nvPicPr>
-          <p:blipFill>
-            <a:blip r:embed="rId17"/>
-            <a:stretch>
-              <a:fillRect/>
-            </a:stretch>
-          </p:blipFill>
+        <p:sp>
+          <p:nvSpPr>
+            <p:cNvPr id="61" name="Rectangle 60"/>
+            <p:cNvSpPr/>
+            <p:nvPr/>
+          </p:nvSpPr>
           <p:spPr>
             <a:xfrm>
               <a:off x="9300000" y="12500000"/>
@@ -4683,8 +4789,54 @@
             <a:prstGeom prst="rect">
               <a:avLst/>
             </a:prstGeom>
-          </p:spPr>
-        </p:pic>
+            <a:solidFill>
+              <a:srgbClr val="3FB950"/>
+            </a:solidFill>
+            <a:ln>
+              <a:solidFill>
+                <a:srgbClr val="2B8A3A"/>
+              </a:solidFill>
+            </a:ln>
+          </p:spPr>
+          <p:style>
+            <a:lnRef idx="1">
+              <a:schemeClr val="accent1"/>
+            </a:lnRef>
+            <a:fillRef idx="3">
+              <a:schemeClr val="accent1"/>
+            </a:fillRef>
+            <a:effectRef idx="2">
+              <a:schemeClr val="accent1"/>
+            </a:effectRef>
+            <a:fontRef idx="minor">
+              <a:schemeClr val="lt1"/>
+            </a:fontRef>
+          </p:style>
+          <p:txBody>
+            <a:bodyPr rtlCol="0" anchor="ctr"/>
+            <a:lstStyle/>
+            <a:p>
+              <a:r>
+                <a:rPr sz="900" b="1">
+                  <a:solidFill>
+                    <a:srgbClr val="FFFFFF"/>
+                  </a:solidFill>
+                </a:rPr>
+                <a:t>要補圖</a:t>
+              </a:r>
+            </a:p>
+            <a:p>
+              <a:r>
+                <a:rPr sz="900" b="1">
+                  <a:solidFill>
+                    <a:srgbClr val="FFFFFF"/>
+                  </a:solidFill>
+                </a:rPr>
+                <a:t>tomb_wellyard</a:t>
+              </a:r>
+            </a:p>
+          </p:txBody>
+        </p:sp>
         <p:sp>
           <p:nvSpPr>
             <p:cNvPr id="62" name="TextBox 61"/>
@@ -4815,9 +4967,9 @@
         </p:nvGrpSpPr>
         <p:grpSpPr>
           <a:xfrm>
-            <a:off x="6300000" y="10200000"/>
+            <a:off x="21300000" y="14800000"/>
             <a:ext cx="1280000" cy="1020000"/>
-            <a:chOff x="6300000" y="10200000"/>
+            <a:chOff x="21300000" y="14800000"/>
             <a:chExt cx="1280000" cy="1020000"/>
           </a:xfrm>
         </p:grpSpPr>
@@ -4837,7 +4989,7 @@
           </p:blipFill>
           <p:spPr>
             <a:xfrm>
-              <a:off x="6300000" y="10200000"/>
+              <a:off x="21300000" y="14800000"/>
               <a:ext cx="1280000" cy="720000"/>
             </a:xfrm>
             <a:prstGeom prst="rect">
@@ -4853,7 +5005,7 @@
           </p:nvSpPr>
           <p:spPr>
             <a:xfrm>
-              <a:off x="6300000" y="10920000"/>
+              <a:off x="21300000" y="15520000"/>
               <a:ext cx="1280000" cy="300000"/>
             </a:xfrm>
             <a:prstGeom prst="rect">
@@ -4895,9 +5047,9 @@
         </p:nvGrpSpPr>
         <p:grpSpPr>
           <a:xfrm>
-            <a:off x="6300000" y="9050000"/>
+            <a:off x="21300000" y="15950000"/>
             <a:ext cx="1280000" cy="1020000"/>
-            <a:chOff x="6300000" y="9050000"/>
+            <a:chOff x="21300000" y="15950000"/>
             <a:chExt cx="1280000" cy="1020000"/>
           </a:xfrm>
         </p:grpSpPr>
@@ -4917,7 +5069,7 @@
           </p:blipFill>
           <p:spPr>
             <a:xfrm>
-              <a:off x="6300000" y="9050000"/>
+              <a:off x="21300000" y="15950000"/>
               <a:ext cx="1280000" cy="720000"/>
             </a:xfrm>
             <a:prstGeom prst="rect">
@@ -4933,7 +5085,7 @@
           </p:nvSpPr>
           <p:spPr>
             <a:xfrm>
-              <a:off x="6300000" y="9770000"/>
+              <a:off x="21300000" y="16670000"/>
               <a:ext cx="1280000" cy="300000"/>
             </a:xfrm>
             <a:prstGeom prst="rect">
@@ -4975,36 +5127,74 @@
         </p:nvGrpSpPr>
         <p:grpSpPr>
           <a:xfrm>
-            <a:off x="3300000" y="9050000"/>
+            <a:off x="21300000" y="17100000"/>
             <a:ext cx="1280000" cy="1020000"/>
-            <a:chOff x="3300000" y="9050000"/>
+            <a:chOff x="21300000" y="17100000"/>
             <a:chExt cx="1280000" cy="1020000"/>
           </a:xfrm>
         </p:grpSpPr>
-        <p:pic>
-          <p:nvPicPr>
-            <p:cNvPr id="73" name="Picture 72" descr="tomb_hall2.webp.jpg"/>
-            <p:cNvPicPr>
-              <a:picLocks noChangeAspect="1"/>
-            </p:cNvPicPr>
-            <p:nvPr/>
-          </p:nvPicPr>
-          <p:blipFill>
-            <a:blip r:embed="rId20"/>
-            <a:stretch>
-              <a:fillRect/>
-            </a:stretch>
-          </p:blipFill>
-          <p:spPr>
-            <a:xfrm>
-              <a:off x="3300000" y="9050000"/>
+        <p:sp>
+          <p:nvSpPr>
+            <p:cNvPr id="73" name="Rectangle 72"/>
+            <p:cNvSpPr/>
+            <p:nvPr/>
+          </p:nvSpPr>
+          <p:spPr>
+            <a:xfrm>
+              <a:off x="21300000" y="17100000"/>
               <a:ext cx="1280000" cy="720000"/>
             </a:xfrm>
             <a:prstGeom prst="rect">
               <a:avLst/>
             </a:prstGeom>
-          </p:spPr>
-        </p:pic>
+            <a:solidFill>
+              <a:srgbClr val="3FB950"/>
+            </a:solidFill>
+            <a:ln>
+              <a:solidFill>
+                <a:srgbClr val="2B8A3A"/>
+              </a:solidFill>
+            </a:ln>
+          </p:spPr>
+          <p:style>
+            <a:lnRef idx="1">
+              <a:schemeClr val="accent1"/>
+            </a:lnRef>
+            <a:fillRef idx="3">
+              <a:schemeClr val="accent1"/>
+            </a:fillRef>
+            <a:effectRef idx="2">
+              <a:schemeClr val="accent1"/>
+            </a:effectRef>
+            <a:fontRef idx="minor">
+              <a:schemeClr val="lt1"/>
+            </a:fontRef>
+          </p:style>
+          <p:txBody>
+            <a:bodyPr rtlCol="0" anchor="ctr"/>
+            <a:lstStyle/>
+            <a:p>
+              <a:r>
+                <a:rPr sz="900" b="1">
+                  <a:solidFill>
+                    <a:srgbClr val="FFFFFF"/>
+                  </a:solidFill>
+                </a:rPr>
+                <a:t>要補圖</a:t>
+              </a:r>
+            </a:p>
+            <a:p>
+              <a:r>
+                <a:rPr sz="900" b="1">
+                  <a:solidFill>
+                    <a:srgbClr val="FFFFFF"/>
+                  </a:solidFill>
+                </a:rPr>
+                <a:t>tomb_colonnade</a:t>
+              </a:r>
+            </a:p>
+          </p:txBody>
+        </p:sp>
         <p:sp>
           <p:nvSpPr>
             <p:cNvPr id="74" name="TextBox 73"/>
@@ -5013,7 +5203,7 @@
           </p:nvSpPr>
           <p:spPr>
             <a:xfrm>
-              <a:off x="3300000" y="9770000"/>
+              <a:off x="21300000" y="17820000"/>
               <a:ext cx="1280000" cy="300000"/>
             </a:xfrm>
             <a:prstGeom prst="rect">
@@ -5055,15 +5245,133 @@
         </p:nvGrpSpPr>
         <p:grpSpPr>
           <a:xfrm>
-            <a:off x="3300000" y="7900000"/>
+            <a:off x="22800000" y="17100000"/>
             <a:ext cx="1280000" cy="1020000"/>
-            <a:chOff x="3300000" y="7900000"/>
+            <a:chOff x="22800000" y="17100000"/>
+            <a:chExt cx="1280000" cy="1020000"/>
+          </a:xfrm>
+        </p:grpSpPr>
+        <p:sp>
+          <p:nvSpPr>
+            <p:cNvPr id="76" name="Rectangle 75"/>
+            <p:cNvSpPr/>
+            <p:nvPr/>
+          </p:nvSpPr>
+          <p:spPr>
+            <a:xfrm>
+              <a:off x="22800000" y="17100000"/>
+              <a:ext cx="1280000" cy="720000"/>
+            </a:xfrm>
+            <a:prstGeom prst="rect">
+              <a:avLst/>
+            </a:prstGeom>
+            <a:solidFill>
+              <a:srgbClr val="3FB950"/>
+            </a:solidFill>
+            <a:ln>
+              <a:solidFill>
+                <a:srgbClr val="2B8A3A"/>
+              </a:solidFill>
+            </a:ln>
+          </p:spPr>
+          <p:style>
+            <a:lnRef idx="1">
+              <a:schemeClr val="accent1"/>
+            </a:lnRef>
+            <a:fillRef idx="3">
+              <a:schemeClr val="accent1"/>
+            </a:fillRef>
+            <a:effectRef idx="2">
+              <a:schemeClr val="accent1"/>
+            </a:effectRef>
+            <a:fontRef idx="minor">
+              <a:schemeClr val="lt1"/>
+            </a:fontRef>
+          </p:style>
+          <p:txBody>
+            <a:bodyPr rtlCol="0" anchor="ctr"/>
+            <a:lstStyle/>
+            <a:p>
+              <a:r>
+                <a:rPr sz="900" b="1">
+                  <a:solidFill>
+                    <a:srgbClr val="FFFFFF"/>
+                  </a:solidFill>
+                </a:rPr>
+                <a:t>要補圖</a:t>
+              </a:r>
+            </a:p>
+            <a:p>
+              <a:r>
+                <a:rPr sz="900" b="1">
+                  <a:solidFill>
+                    <a:srgbClr val="FFFFFF"/>
+                  </a:solidFill>
+                </a:rPr>
+                <a:t>tomb_mason</a:t>
+              </a:r>
+            </a:p>
+          </p:txBody>
+        </p:sp>
+        <p:sp>
+          <p:nvSpPr>
+            <p:cNvPr id="77" name="TextBox 76"/>
+            <p:cNvSpPr txBox="1"/>
+            <p:nvPr/>
+          </p:nvSpPr>
+          <p:spPr>
+            <a:xfrm>
+              <a:off x="22800000" y="17820000"/>
+              <a:ext cx="1280000" cy="300000"/>
+            </a:xfrm>
+            <a:prstGeom prst="rect">
+              <a:avLst/>
+            </a:prstGeom>
+            <a:noFill/>
+          </p:spPr>
+          <p:txBody>
+            <a:bodyPr wrap="square" anchor="t">
+              <a:spAutoFit/>
+            </a:bodyPr>
+            <a:lstStyle/>
+            <a:p>
+              <a:pPr algn="ctr"/>
+              <a:r>
+                <a:rPr sz="1300" b="1"/>
+                <a:t>石工房</a:t>
+              </a:r>
+            </a:p>
+            <a:p>
+              <a:pPr algn="ctr"/>
+              <a:r>
+                <a:rPr sz="800">
+                  <a:solidFill>
+                    <a:srgbClr val="9A989E"/>
+                  </a:solidFill>
+                </a:rPr>
+                <a:t>mason</a:t>
+              </a:r>
+            </a:p>
+          </p:txBody>
+        </p:sp>
+      </p:grpSp>
+      <p:grpSp>
+        <p:nvGrpSpPr>
+          <p:cNvPr id="78" name="Group 77"/>
+          <p:cNvGrpSpPr/>
+          <p:nvPr/>
+        </p:nvGrpSpPr>
+        <p:grpSpPr>
+          <a:xfrm>
+            <a:off x="19800000" y="15950000"/>
+            <a:ext cx="1280000" cy="1020000"/>
+            <a:chOff x="19800000" y="15950000"/>
             <a:chExt cx="1280000" cy="1020000"/>
           </a:xfrm>
         </p:grpSpPr>
         <p:pic>
           <p:nvPicPr>
-            <p:cNvPr id="76" name="Picture 75" descr="tomb_kiln.webp.jpg"/>
+            <p:cNvPr id="79" name="Picture 78" descr="tomb_cistern.webp.jpg"/>
             <p:cNvPicPr>
               <a:picLocks noChangeAspect="1"/>
             </p:cNvPicPr>
@@ -5077,7 +5385,7 @@
           </p:blipFill>
           <p:spPr>
             <a:xfrm>
-              <a:off x="3300000" y="7900000"/>
+              <a:off x="19800000" y="15950000"/>
               <a:ext cx="1280000" cy="720000"/>
             </a:xfrm>
             <a:prstGeom prst="rect">
@@ -5087,13 +5395,13 @@
         </p:pic>
         <p:sp>
           <p:nvSpPr>
-            <p:cNvPr id="77" name="TextBox 76"/>
+            <p:cNvPr id="80" name="TextBox 79"/>
             <p:cNvSpPr txBox="1"/>
             <p:nvPr/>
           </p:nvSpPr>
           <p:spPr>
             <a:xfrm>
-              <a:off x="3300000" y="8620000"/>
+              <a:off x="19800000" y="16670000"/>
               <a:ext cx="1280000" cy="300000"/>
             </a:xfrm>
             <a:prstGeom prst="rect">
@@ -5110,7 +5418,7 @@
               <a:pPr algn="ctr"/>
               <a:r>
                 <a:rPr sz="1300" b="1"/>
-                <a:t>石工房</a:t>
+                <a:t>蓄水池</a:t>
               </a:r>
             </a:p>
             <a:p>
@@ -5121,7 +5429,7 @@
                     <a:srgbClr val="9A989E"/>
                   </a:solidFill>
                 </a:rPr>
-                <a:t>mason</a:t>
+                <a:t>cistern</a:t>
               </a:r>
             </a:p>
           </p:txBody>
@@ -5129,21 +5437,139 @@
       </p:grpSp>
       <p:grpSp>
         <p:nvGrpSpPr>
-          <p:cNvPr id="78" name="Group 77"/>
+          <p:cNvPr id="81" name="Group 80"/>
           <p:cNvGrpSpPr/>
           <p:nvPr/>
         </p:nvGrpSpPr>
         <p:grpSpPr>
           <a:xfrm>
-            <a:off x="6300000" y="7900000"/>
+            <a:off x="19800000" y="17100000"/>
             <a:ext cx="1280000" cy="1020000"/>
-            <a:chOff x="6300000" y="7900000"/>
+            <a:chOff x="19800000" y="17100000"/>
+            <a:chExt cx="1280000" cy="1020000"/>
+          </a:xfrm>
+        </p:grpSpPr>
+        <p:sp>
+          <p:nvSpPr>
+            <p:cNvPr id="82" name="Rectangle 81"/>
+            <p:cNvSpPr/>
+            <p:nvPr/>
+          </p:nvSpPr>
+          <p:spPr>
+            <a:xfrm>
+              <a:off x="19800000" y="17100000"/>
+              <a:ext cx="1280000" cy="720000"/>
+            </a:xfrm>
+            <a:prstGeom prst="rect">
+              <a:avLst/>
+            </a:prstGeom>
+            <a:solidFill>
+              <a:srgbClr val="3FB950"/>
+            </a:solidFill>
+            <a:ln>
+              <a:solidFill>
+                <a:srgbClr val="2B8A3A"/>
+              </a:solidFill>
+            </a:ln>
+          </p:spPr>
+          <p:style>
+            <a:lnRef idx="1">
+              <a:schemeClr val="accent1"/>
+            </a:lnRef>
+            <a:fillRef idx="3">
+              <a:schemeClr val="accent1"/>
+            </a:fillRef>
+            <a:effectRef idx="2">
+              <a:schemeClr val="accent1"/>
+            </a:effectRef>
+            <a:fontRef idx="minor">
+              <a:schemeClr val="lt1"/>
+            </a:fontRef>
+          </p:style>
+          <p:txBody>
+            <a:bodyPr rtlCol="0" anchor="ctr"/>
+            <a:lstStyle/>
+            <a:p>
+              <a:r>
+                <a:rPr sz="900" b="1">
+                  <a:solidFill>
+                    <a:srgbClr val="FFFFFF"/>
+                  </a:solidFill>
+                </a:rPr>
+                <a:t>要補圖</a:t>
+              </a:r>
+            </a:p>
+            <a:p>
+              <a:r>
+                <a:rPr sz="900" b="1">
+                  <a:solidFill>
+                    <a:srgbClr val="FFFFFF"/>
+                  </a:solidFill>
+                </a:rPr>
+                <a:t>tomb_waterstair</a:t>
+              </a:r>
+            </a:p>
+          </p:txBody>
+        </p:sp>
+        <p:sp>
+          <p:nvSpPr>
+            <p:cNvPr id="83" name="TextBox 82"/>
+            <p:cNvSpPr txBox="1"/>
+            <p:nvPr/>
+          </p:nvSpPr>
+          <p:spPr>
+            <a:xfrm>
+              <a:off x="19800000" y="17820000"/>
+              <a:ext cx="1280000" cy="300000"/>
+            </a:xfrm>
+            <a:prstGeom prst="rect">
+              <a:avLst/>
+            </a:prstGeom>
+            <a:noFill/>
+          </p:spPr>
+          <p:txBody>
+            <a:bodyPr wrap="square" anchor="t">
+              <a:spAutoFit/>
+            </a:bodyPr>
+            <a:lstStyle/>
+            <a:p>
+              <a:pPr algn="ctr"/>
+              <a:r>
+                <a:rPr sz="1300" b="1"/>
+                <a:t>汲水階</a:t>
+              </a:r>
+            </a:p>
+            <a:p>
+              <a:pPr algn="ctr"/>
+              <a:r>
+                <a:rPr sz="800">
+                  <a:solidFill>
+                    <a:srgbClr val="9A989E"/>
+                  </a:solidFill>
+                </a:rPr>
+                <a:t>waterstair</a:t>
+              </a:r>
+            </a:p>
+          </p:txBody>
+        </p:sp>
+      </p:grpSp>
+      <p:grpSp>
+        <p:nvGrpSpPr>
+          <p:cNvPr id="84" name="Group 83"/>
+          <p:cNvGrpSpPr/>
+          <p:nvPr/>
+        </p:nvGrpSpPr>
+        <p:grpSpPr>
+          <a:xfrm>
+            <a:off x="21300000" y="18250000"/>
+            <a:ext cx="1280000" cy="1020000"/>
+            <a:chOff x="21300000" y="18250000"/>
             <a:chExt cx="1280000" cy="1020000"/>
           </a:xfrm>
         </p:grpSpPr>
         <p:pic>
           <p:nvPicPr>
-            <p:cNvPr id="79" name="Picture 78" descr="tomb_cistern.webp.jpg"/>
+            <p:cNvPr id="85" name="Picture 84" descr="tomb_corr2.webp.jpg"/>
             <p:cNvPicPr>
               <a:picLocks noChangeAspect="1"/>
             </p:cNvPicPr>
@@ -5157,7 +5583,7 @@
           </p:blipFill>
           <p:spPr>
             <a:xfrm>
-              <a:off x="6300000" y="7900000"/>
+              <a:off x="21300000" y="18250000"/>
               <a:ext cx="1280000" cy="720000"/>
             </a:xfrm>
             <a:prstGeom prst="rect">
@@ -5167,13 +5593,13 @@
         </p:pic>
         <p:sp>
           <p:nvSpPr>
-            <p:cNvPr id="80" name="TextBox 79"/>
+            <p:cNvPr id="86" name="TextBox 85"/>
             <p:cNvSpPr txBox="1"/>
             <p:nvPr/>
           </p:nvSpPr>
           <p:spPr>
             <a:xfrm>
-              <a:off x="6300000" y="8620000"/>
+              <a:off x="21300000" y="18970000"/>
               <a:ext cx="1280000" cy="300000"/>
             </a:xfrm>
             <a:prstGeom prst="rect">
@@ -5190,7 +5616,7 @@
               <a:pPr algn="ctr"/>
               <a:r>
                 <a:rPr sz="1300" b="1"/>
-                <a:t>蓄水池</a:t>
+                <a:t>長廊</a:t>
               </a:r>
             </a:p>
             <a:p>
@@ -5201,7 +5627,7 @@
                     <a:srgbClr val="9A989E"/>
                   </a:solidFill>
                 </a:rPr>
-                <a:t>cistern</a:t>
+                <a:t>corr2</a:t>
               </a:r>
             </a:p>
           </p:txBody>
@@ -5209,101 +5635,21 @@
       </p:grpSp>
       <p:grpSp>
         <p:nvGrpSpPr>
-          <p:cNvPr id="81" name="Group 80"/>
+          <p:cNvPr id="87" name="Group 86"/>
           <p:cNvGrpSpPr/>
           <p:nvPr/>
         </p:nvGrpSpPr>
         <p:grpSpPr>
           <a:xfrm>
-            <a:off x="6300000" y="6750000"/>
+            <a:off x="19800000" y="18250000"/>
             <a:ext cx="1280000" cy="1020000"/>
-            <a:chOff x="6300000" y="6750000"/>
+            <a:chOff x="19800000" y="18250000"/>
             <a:chExt cx="1280000" cy="1020000"/>
           </a:xfrm>
         </p:grpSpPr>
         <p:pic>
           <p:nvPicPr>
-            <p:cNvPr id="82" name="Picture 81" descr="tomb_cistern.webp.jpg"/>
-            <p:cNvPicPr>
-              <a:picLocks noChangeAspect="1"/>
-            </p:cNvPicPr>
-            <p:nvPr/>
-          </p:nvPicPr>
-          <p:blipFill>
-            <a:blip r:embed="rId22"/>
-            <a:stretch>
-              <a:fillRect/>
-            </a:stretch>
-          </p:blipFill>
-          <p:spPr>
-            <a:xfrm>
-              <a:off x="6300000" y="6750000"/>
-              <a:ext cx="1280000" cy="720000"/>
-            </a:xfrm>
-            <a:prstGeom prst="rect">
-              <a:avLst/>
-            </a:prstGeom>
-          </p:spPr>
-        </p:pic>
-        <p:sp>
-          <p:nvSpPr>
-            <p:cNvPr id="83" name="TextBox 82"/>
-            <p:cNvSpPr txBox="1"/>
-            <p:nvPr/>
-          </p:nvSpPr>
-          <p:spPr>
-            <a:xfrm>
-              <a:off x="6300000" y="7470000"/>
-              <a:ext cx="1280000" cy="300000"/>
-            </a:xfrm>
-            <a:prstGeom prst="rect">
-              <a:avLst/>
-            </a:prstGeom>
-            <a:noFill/>
-          </p:spPr>
-          <p:txBody>
-            <a:bodyPr wrap="square" anchor="t">
-              <a:spAutoFit/>
-            </a:bodyPr>
-            <a:lstStyle/>
-            <a:p>
-              <a:pPr algn="ctr"/>
-              <a:r>
-                <a:rPr sz="1300" b="1"/>
-                <a:t>汲水階</a:t>
-              </a:r>
-            </a:p>
-            <a:p>
-              <a:pPr algn="ctr"/>
-              <a:r>
-                <a:rPr sz="800">
-                  <a:solidFill>
-                    <a:srgbClr val="9A989E"/>
-                  </a:solidFill>
-                </a:rPr>
-                <a:t>waterstair</a:t>
-              </a:r>
-            </a:p>
-          </p:txBody>
-        </p:sp>
-      </p:grpSp>
-      <p:grpSp>
-        <p:nvGrpSpPr>
-          <p:cNvPr id="84" name="Group 83"/>
-          <p:cNvGrpSpPr/>
-          <p:nvPr/>
-        </p:nvGrpSpPr>
-        <p:grpSpPr>
-          <a:xfrm>
-            <a:off x="9300000" y="9050000"/>
-            <a:ext cx="1280000" cy="1020000"/>
-            <a:chOff x="9300000" y="9050000"/>
-            <a:chExt cx="1280000" cy="1020000"/>
-          </a:xfrm>
-        </p:grpSpPr>
-        <p:pic>
-          <p:nvPicPr>
-            <p:cNvPr id="85" name="Picture 84" descr="tomb_corr2.webp.jpg"/>
+            <p:cNvPr id="88" name="Picture 87" descr="tomb_sump.webp.jpg"/>
             <p:cNvPicPr>
               <a:picLocks noChangeAspect="1"/>
             </p:cNvPicPr>
@@ -5317,7 +5663,7 @@
           </p:blipFill>
           <p:spPr>
             <a:xfrm>
-              <a:off x="9300000" y="9050000"/>
+              <a:off x="19800000" y="18250000"/>
               <a:ext cx="1280000" cy="720000"/>
             </a:xfrm>
             <a:prstGeom prst="rect">
@@ -5327,13 +5673,13 @@
         </p:pic>
         <p:sp>
           <p:nvSpPr>
-            <p:cNvPr id="86" name="TextBox 85"/>
+            <p:cNvPr id="89" name="TextBox 88"/>
             <p:cNvSpPr txBox="1"/>
             <p:nvPr/>
           </p:nvSpPr>
           <p:spPr>
             <a:xfrm>
-              <a:off x="9300000" y="9770000"/>
+              <a:off x="19800000" y="18970000"/>
               <a:ext cx="1280000" cy="300000"/>
             </a:xfrm>
             <a:prstGeom prst="rect">
@@ -5350,7 +5696,7 @@
               <a:pPr algn="ctr"/>
               <a:r>
                 <a:rPr sz="1300" b="1"/>
-                <a:t>長廊</a:t>
+                <a:t>積水坑</a:t>
               </a:r>
             </a:p>
             <a:p>
@@ -5361,7 +5707,7 @@
                     <a:srgbClr val="9A989E"/>
                   </a:solidFill>
                 </a:rPr>
-                <a:t>corr2</a:t>
+                <a:t>sump</a:t>
               </a:r>
             </a:p>
           </p:txBody>
@@ -5369,21 +5715,21 @@
       </p:grpSp>
       <p:grpSp>
         <p:nvGrpSpPr>
-          <p:cNvPr id="87" name="Group 86"/>
+          <p:cNvPr id="90" name="Group 89"/>
           <p:cNvGrpSpPr/>
           <p:nvPr/>
         </p:nvGrpSpPr>
         <p:grpSpPr>
           <a:xfrm>
-            <a:off x="9300000" y="10200000"/>
+            <a:off x="21300000" y="19400000"/>
             <a:ext cx="1280000" cy="1020000"/>
-            <a:chOff x="9300000" y="10200000"/>
+            <a:chOff x="21300000" y="19400000"/>
             <a:chExt cx="1280000" cy="1020000"/>
           </a:xfrm>
         </p:grpSpPr>
         <p:pic>
           <p:nvPicPr>
-            <p:cNvPr id="88" name="Picture 87" descr="tomb_sump.webp.jpg"/>
+            <p:cNvPr id="91" name="Picture 90" descr="tomb_rotunda.webp.jpg"/>
             <p:cNvPicPr>
               <a:picLocks noChangeAspect="1"/>
             </p:cNvPicPr>
@@ -5397,7 +5743,7 @@
           </p:blipFill>
           <p:spPr>
             <a:xfrm>
-              <a:off x="9300000" y="10200000"/>
+              <a:off x="21300000" y="19400000"/>
               <a:ext cx="1280000" cy="720000"/>
             </a:xfrm>
             <a:prstGeom prst="rect">
@@ -5407,13 +5753,13 @@
         </p:pic>
         <p:sp>
           <p:nvSpPr>
-            <p:cNvPr id="89" name="TextBox 88"/>
+            <p:cNvPr id="92" name="TextBox 91"/>
             <p:cNvSpPr txBox="1"/>
             <p:nvPr/>
           </p:nvSpPr>
           <p:spPr>
             <a:xfrm>
-              <a:off x="9300000" y="10920000"/>
+              <a:off x="21300000" y="20120000"/>
               <a:ext cx="1280000" cy="300000"/>
             </a:xfrm>
             <a:prstGeom prst="rect">
@@ -5430,7 +5776,7 @@
               <a:pPr algn="ctr"/>
               <a:r>
                 <a:rPr sz="1300" b="1"/>
-                <a:t>積水坑</a:t>
+                <a:t>圓廳</a:t>
               </a:r>
             </a:p>
             <a:p>
@@ -5441,7 +5787,7 @@
                     <a:srgbClr val="9A989E"/>
                   </a:solidFill>
                 </a:rPr>
-                <a:t>sump</a:t>
+                <a:t>rotunda</a:t>
               </a:r>
             </a:p>
           </p:txBody>
@@ -5449,21 +5795,139 @@
       </p:grpSp>
       <p:grpSp>
         <p:nvGrpSpPr>
-          <p:cNvPr id="90" name="Group 89"/>
+          <p:cNvPr id="93" name="Group 92"/>
           <p:cNvGrpSpPr/>
           <p:nvPr/>
         </p:nvGrpSpPr>
         <p:grpSpPr>
           <a:xfrm>
-            <a:off x="12300000" y="9050000"/>
+            <a:off x="22800000" y="19400000"/>
             <a:ext cx="1280000" cy="1020000"/>
-            <a:chOff x="12300000" y="9050000"/>
+            <a:chOff x="22800000" y="19400000"/>
+            <a:chExt cx="1280000" cy="1020000"/>
+          </a:xfrm>
+        </p:grpSpPr>
+        <p:sp>
+          <p:nvSpPr>
+            <p:cNvPr id="94" name="Rectangle 93"/>
+            <p:cNvSpPr/>
+            <p:nvPr/>
+          </p:nvSpPr>
+          <p:spPr>
+            <a:xfrm>
+              <a:off x="22800000" y="19400000"/>
+              <a:ext cx="1280000" cy="720000"/>
+            </a:xfrm>
+            <a:prstGeom prst="rect">
+              <a:avLst/>
+            </a:prstGeom>
+            <a:solidFill>
+              <a:srgbClr val="3FB950"/>
+            </a:solidFill>
+            <a:ln>
+              <a:solidFill>
+                <a:srgbClr val="2B8A3A"/>
+              </a:solidFill>
+            </a:ln>
+          </p:spPr>
+          <p:style>
+            <a:lnRef idx="1">
+              <a:schemeClr val="accent1"/>
+            </a:lnRef>
+            <a:fillRef idx="3">
+              <a:schemeClr val="accent1"/>
+            </a:fillRef>
+            <a:effectRef idx="2">
+              <a:schemeClr val="accent1"/>
+            </a:effectRef>
+            <a:fontRef idx="minor">
+              <a:schemeClr val="lt1"/>
+            </a:fontRef>
+          </p:style>
+          <p:txBody>
+            <a:bodyPr rtlCol="0" anchor="ctr"/>
+            <a:lstStyle/>
+            <a:p>
+              <a:r>
+                <a:rPr sz="900" b="1">
+                  <a:solidFill>
+                    <a:srgbClr val="FFFFFF"/>
+                  </a:solidFill>
+                </a:rPr>
+                <a:t>要補圖</a:t>
+              </a:r>
+            </a:p>
+            <a:p>
+              <a:r>
+                <a:rPr sz="900" b="1">
+                  <a:solidFill>
+                    <a:srgbClr val="FFFFFF"/>
+                  </a:solidFill>
+                </a:rPr>
+                <a:t>tomb_censerroom</a:t>
+              </a:r>
+            </a:p>
+          </p:txBody>
+        </p:sp>
+        <p:sp>
+          <p:nvSpPr>
+            <p:cNvPr id="95" name="TextBox 94"/>
+            <p:cNvSpPr txBox="1"/>
+            <p:nvPr/>
+          </p:nvSpPr>
+          <p:spPr>
+            <a:xfrm>
+              <a:off x="22800000" y="20120000"/>
+              <a:ext cx="1280000" cy="300000"/>
+            </a:xfrm>
+            <a:prstGeom prst="rect">
+              <a:avLst/>
+            </a:prstGeom>
+            <a:noFill/>
+          </p:spPr>
+          <p:txBody>
+            <a:bodyPr wrap="square" anchor="t">
+              <a:spAutoFit/>
+            </a:bodyPr>
+            <a:lstStyle/>
+            <a:p>
+              <a:pPr algn="ctr"/>
+              <a:r>
+                <a:rPr sz="1300" b="1"/>
+                <a:t>香爐室</a:t>
+              </a:r>
+            </a:p>
+            <a:p>
+              <a:pPr algn="ctr"/>
+              <a:r>
+                <a:rPr sz="800">
+                  <a:solidFill>
+                    <a:srgbClr val="9A989E"/>
+                  </a:solidFill>
+                </a:rPr>
+                <a:t>censerroom</a:t>
+              </a:r>
+            </a:p>
+          </p:txBody>
+        </p:sp>
+      </p:grpSp>
+      <p:grpSp>
+        <p:nvGrpSpPr>
+          <p:cNvPr id="96" name="Group 95"/>
+          <p:cNvGrpSpPr/>
+          <p:nvPr/>
+        </p:nvGrpSpPr>
+        <p:grpSpPr>
+          <a:xfrm>
+            <a:off x="21300000" y="21700000"/>
+            <a:ext cx="1280000" cy="1020000"/>
+            <a:chOff x="21300000" y="21700000"/>
             <a:chExt cx="1280000" cy="1020000"/>
           </a:xfrm>
         </p:grpSpPr>
         <p:pic>
           <p:nvPicPr>
-            <p:cNvPr id="91" name="Picture 90" descr="tomb_rotunda.webp.jpg"/>
+            <p:cNvPr id="97" name="Picture 96" descr="tomb_sarce.webp.jpg"/>
             <p:cNvPicPr>
               <a:picLocks noChangeAspect="1"/>
             </p:cNvPicPr>
@@ -5477,7 +5941,7 @@
           </p:blipFill>
           <p:spPr>
             <a:xfrm>
-              <a:off x="12300000" y="9050000"/>
+              <a:off x="21300000" y="21700000"/>
               <a:ext cx="1280000" cy="720000"/>
             </a:xfrm>
             <a:prstGeom prst="rect">
@@ -5487,13 +5951,13 @@
         </p:pic>
         <p:sp>
           <p:nvSpPr>
-            <p:cNvPr id="92" name="TextBox 91"/>
+            <p:cNvPr id="98" name="TextBox 97"/>
             <p:cNvSpPr txBox="1"/>
             <p:nvPr/>
           </p:nvSpPr>
           <p:spPr>
             <a:xfrm>
-              <a:off x="12300000" y="9770000"/>
+              <a:off x="21300000" y="22420000"/>
               <a:ext cx="1280000" cy="300000"/>
             </a:xfrm>
             <a:prstGeom prst="rect">
@@ -5510,7 +5974,7 @@
               <a:pPr algn="ctr"/>
               <a:r>
                 <a:rPr sz="1300" b="1"/>
-                <a:t>圓廳</a:t>
+                <a:t>石棺室</a:t>
               </a:r>
             </a:p>
             <a:p>
@@ -5521,7 +5985,7 @@
                     <a:srgbClr val="9A989E"/>
                   </a:solidFill>
                 </a:rPr>
-                <a:t>rotunda</a:t>
+                <a:t>sarcE</a:t>
               </a:r>
             </a:p>
           </p:txBody>
@@ -5529,101 +5993,21 @@
       </p:grpSp>
       <p:grpSp>
         <p:nvGrpSpPr>
-          <p:cNvPr id="93" name="Group 92"/>
+          <p:cNvPr id="99" name="Group 98"/>
           <p:cNvGrpSpPr/>
           <p:nvPr/>
         </p:nvGrpSpPr>
         <p:grpSpPr>
           <a:xfrm>
-            <a:off x="12300000" y="10200000"/>
+            <a:off x="21300000" y="22850000"/>
             <a:ext cx="1280000" cy="1020000"/>
-            <a:chOff x="12300000" y="10200000"/>
+            <a:chOff x="21300000" y="22850000"/>
             <a:chExt cx="1280000" cy="1020000"/>
           </a:xfrm>
         </p:grpSpPr>
         <p:pic>
           <p:nvPicPr>
-            <p:cNvPr id="94" name="Picture 93" descr="tomb_rotunda.webp.jpg"/>
-            <p:cNvPicPr>
-              <a:picLocks noChangeAspect="1"/>
-            </p:cNvPicPr>
-            <p:nvPr/>
-          </p:nvPicPr>
-          <p:blipFill>
-            <a:blip r:embed="rId25"/>
-            <a:stretch>
-              <a:fillRect/>
-            </a:stretch>
-          </p:blipFill>
-          <p:spPr>
-            <a:xfrm>
-              <a:off x="12300000" y="10200000"/>
-              <a:ext cx="1280000" cy="720000"/>
-            </a:xfrm>
-            <a:prstGeom prst="rect">
-              <a:avLst/>
-            </a:prstGeom>
-          </p:spPr>
-        </p:pic>
-        <p:sp>
-          <p:nvSpPr>
-            <p:cNvPr id="95" name="TextBox 94"/>
-            <p:cNvSpPr txBox="1"/>
-            <p:nvPr/>
-          </p:nvSpPr>
-          <p:spPr>
-            <a:xfrm>
-              <a:off x="12300000" y="10920000"/>
-              <a:ext cx="1280000" cy="300000"/>
-            </a:xfrm>
-            <a:prstGeom prst="rect">
-              <a:avLst/>
-            </a:prstGeom>
-            <a:noFill/>
-          </p:spPr>
-          <p:txBody>
-            <a:bodyPr wrap="square" anchor="t">
-              <a:spAutoFit/>
-            </a:bodyPr>
-            <a:lstStyle/>
-            <a:p>
-              <a:pPr algn="ctr"/>
-              <a:r>
-                <a:rPr sz="1300" b="1"/>
-                <a:t>香爐室</a:t>
-              </a:r>
-            </a:p>
-            <a:p>
-              <a:pPr algn="ctr"/>
-              <a:r>
-                <a:rPr sz="800">
-                  <a:solidFill>
-                    <a:srgbClr val="9A989E"/>
-                  </a:solidFill>
-                </a:rPr>
-                <a:t>censerroom</a:t>
-              </a:r>
-            </a:p>
-          </p:txBody>
-        </p:sp>
-      </p:grpSp>
-      <p:grpSp>
-        <p:nvGrpSpPr>
-          <p:cNvPr id="96" name="Group 95"/>
-          <p:cNvGrpSpPr/>
-          <p:nvPr/>
-        </p:nvGrpSpPr>
-        <p:grpSpPr>
-          <a:xfrm>
-            <a:off x="15300000" y="9050000"/>
-            <a:ext cx="1280000" cy="1020000"/>
-            <a:chOff x="15300000" y="9050000"/>
-            <a:chExt cx="1280000" cy="1020000"/>
-          </a:xfrm>
-        </p:grpSpPr>
-        <p:pic>
-          <p:nvPicPr>
-            <p:cNvPr id="97" name="Picture 96" descr="tomb_sarce.webp.jpg"/>
+            <p:cNvPr id="100" name="Picture 99" descr="tomb_ossuary2.webp.jpg"/>
             <p:cNvPicPr>
               <a:picLocks noChangeAspect="1"/>
             </p:cNvPicPr>
@@ -5637,7 +6021,7 @@
           </p:blipFill>
           <p:spPr>
             <a:xfrm>
-              <a:off x="15300000" y="9050000"/>
+              <a:off x="21300000" y="22850000"/>
               <a:ext cx="1280000" cy="720000"/>
             </a:xfrm>
             <a:prstGeom prst="rect">
@@ -5647,13 +6031,13 @@
         </p:pic>
         <p:sp>
           <p:nvSpPr>
-            <p:cNvPr id="98" name="TextBox 97"/>
+            <p:cNvPr id="101" name="TextBox 100"/>
             <p:cNvSpPr txBox="1"/>
             <p:nvPr/>
           </p:nvSpPr>
           <p:spPr>
             <a:xfrm>
-              <a:off x="15300000" y="9770000"/>
+              <a:off x="21300000" y="23570000"/>
               <a:ext cx="1280000" cy="300000"/>
             </a:xfrm>
             <a:prstGeom prst="rect">
@@ -5670,7 +6054,7 @@
               <a:pPr algn="ctr"/>
               <a:r>
                 <a:rPr sz="1300" b="1"/>
-                <a:t>石棺室</a:t>
+                <a:t>甕棺廊</a:t>
               </a:r>
             </a:p>
             <a:p>
@@ -5681,7 +6065,7 @@
                     <a:srgbClr val="9A989E"/>
                   </a:solidFill>
                 </a:rPr>
-                <a:t>sarcE</a:t>
+                <a:t>ossuary2</a:t>
               </a:r>
             </a:p>
           </p:txBody>
@@ -5689,21 +6073,21 @@
       </p:grpSp>
       <p:grpSp>
         <p:nvGrpSpPr>
-          <p:cNvPr id="99" name="Group 98"/>
+          <p:cNvPr id="102" name="Group 101"/>
           <p:cNvGrpSpPr/>
           <p:nvPr/>
         </p:nvGrpSpPr>
         <p:grpSpPr>
           <a:xfrm>
-            <a:off x="18300000" y="9050000"/>
+            <a:off x="19800000" y="20550000"/>
             <a:ext cx="1280000" cy="1020000"/>
-            <a:chOff x="18300000" y="9050000"/>
+            <a:chOff x="19800000" y="20550000"/>
             <a:chExt cx="1280000" cy="1020000"/>
           </a:xfrm>
         </p:grpSpPr>
         <p:pic>
           <p:nvPicPr>
-            <p:cNvPr id="100" name="Picture 99" descr="tomb_ossuary2.webp.jpg"/>
+            <p:cNvPr id="103" name="Picture 102" descr="tomb_kiln.webp.jpg"/>
             <p:cNvPicPr>
               <a:picLocks noChangeAspect="1"/>
             </p:cNvPicPr>
@@ -5717,87 +6101,7 @@
           </p:blipFill>
           <p:spPr>
             <a:xfrm>
-              <a:off x="18300000" y="9050000"/>
-              <a:ext cx="1280000" cy="720000"/>
-            </a:xfrm>
-            <a:prstGeom prst="rect">
-              <a:avLst/>
-            </a:prstGeom>
-          </p:spPr>
-        </p:pic>
-        <p:sp>
-          <p:nvSpPr>
-            <p:cNvPr id="101" name="TextBox 100"/>
-            <p:cNvSpPr txBox="1"/>
-            <p:nvPr/>
-          </p:nvSpPr>
-          <p:spPr>
-            <a:xfrm>
-              <a:off x="18300000" y="9770000"/>
-              <a:ext cx="1280000" cy="300000"/>
-            </a:xfrm>
-            <a:prstGeom prst="rect">
-              <a:avLst/>
-            </a:prstGeom>
-            <a:noFill/>
-          </p:spPr>
-          <p:txBody>
-            <a:bodyPr wrap="square" anchor="t">
-              <a:spAutoFit/>
-            </a:bodyPr>
-            <a:lstStyle/>
-            <a:p>
-              <a:pPr algn="ctr"/>
-              <a:r>
-                <a:rPr sz="1300" b="1"/>
-                <a:t>甕棺廊</a:t>
-              </a:r>
-            </a:p>
-            <a:p>
-              <a:pPr algn="ctr"/>
-              <a:r>
-                <a:rPr sz="800">
-                  <a:solidFill>
-                    <a:srgbClr val="9A989E"/>
-                  </a:solidFill>
-                </a:rPr>
-                <a:t>ossuary2</a:t>
-              </a:r>
-            </a:p>
-          </p:txBody>
-        </p:sp>
-      </p:grpSp>
-      <p:grpSp>
-        <p:nvGrpSpPr>
-          <p:cNvPr id="102" name="Group 101"/>
-          <p:cNvGrpSpPr/>
-          <p:nvPr/>
-        </p:nvGrpSpPr>
-        <p:grpSpPr>
-          <a:xfrm>
-            <a:off x="18300000" y="7900000"/>
-            <a:ext cx="1280000" cy="1020000"/>
-            <a:chOff x="18300000" y="7900000"/>
-            <a:chExt cx="1280000" cy="1020000"/>
-          </a:xfrm>
-        </p:grpSpPr>
-        <p:pic>
-          <p:nvPicPr>
-            <p:cNvPr id="103" name="Picture 102" descr="tomb_kiln.webp.jpg"/>
-            <p:cNvPicPr>
-              <a:picLocks noChangeAspect="1"/>
-            </p:cNvPicPr>
-            <p:nvPr/>
-          </p:nvPicPr>
-          <p:blipFill>
-            <a:blip r:embed="rId21"/>
-            <a:stretch>
-              <a:fillRect/>
-            </a:stretch>
-          </p:blipFill>
-          <p:spPr>
-            <a:xfrm>
-              <a:off x="18300000" y="7900000"/>
+              <a:off x="19800000" y="20550000"/>
               <a:ext cx="1280000" cy="720000"/>
             </a:xfrm>
             <a:prstGeom prst="rect">
@@ -5813,7 +6117,7 @@
           </p:nvSpPr>
           <p:spPr>
             <a:xfrm>
-              <a:off x="18300000" y="8620000"/>
+              <a:off x="19800000" y="21270000"/>
               <a:ext cx="1280000" cy="300000"/>
             </a:xfrm>
             <a:prstGeom prst="rect">
@@ -5855,9 +6159,9 @@
         </p:nvGrpSpPr>
         <p:grpSpPr>
           <a:xfrm>
-            <a:off x="12300000" y="7900000"/>
+            <a:off x="21300000" y="20550000"/>
             <a:ext cx="1280000" cy="1020000"/>
-            <a:chOff x="12300000" y="7900000"/>
+            <a:chOff x="21300000" y="20550000"/>
             <a:chExt cx="1280000" cy="1020000"/>
           </a:xfrm>
         </p:grpSpPr>
@@ -5877,7 +6181,7 @@
           </p:blipFill>
           <p:spPr>
             <a:xfrm>
-              <a:off x="12300000" y="7900000"/>
+              <a:off x="21300000" y="20550000"/>
               <a:ext cx="1280000" cy="720000"/>
             </a:xfrm>
             <a:prstGeom prst="rect">
@@ -5893,7 +6197,7 @@
           </p:nvSpPr>
           <p:spPr>
             <a:xfrm>
-              <a:off x="12300000" y="8620000"/>
+              <a:off x="21300000" y="21270000"/>
               <a:ext cx="1280000" cy="300000"/>
             </a:xfrm>
             <a:prstGeom prst="rect">
@@ -5935,9 +6239,9 @@
         </p:nvGrpSpPr>
         <p:grpSpPr>
           <a:xfrm>
-            <a:off x="9300000" y="7900000"/>
+            <a:off x="21300000" y="24000000"/>
             <a:ext cx="1280000" cy="1020000"/>
-            <a:chOff x="9300000" y="7900000"/>
+            <a:chOff x="21300000" y="24000000"/>
             <a:chExt cx="1280000" cy="1020000"/>
           </a:xfrm>
         </p:grpSpPr>
@@ -5957,7 +6261,7 @@
           </p:blipFill>
           <p:spPr>
             <a:xfrm>
-              <a:off x="9300000" y="7900000"/>
+              <a:off x="21300000" y="24000000"/>
               <a:ext cx="1280000" cy="720000"/>
             </a:xfrm>
             <a:prstGeom prst="rect">
@@ -5973,7 +6277,7 @@
           </p:nvSpPr>
           <p:spPr>
             <a:xfrm>
-              <a:off x="9300000" y="8620000"/>
+              <a:off x="21300000" y="24720000"/>
               <a:ext cx="1280000" cy="300000"/>
             </a:xfrm>
             <a:prstGeom prst="rect">
@@ -6015,15 +6319,605 @@
         </p:nvGrpSpPr>
         <p:grpSpPr>
           <a:xfrm>
-            <a:off x="9300000" y="6750000"/>
+            <a:off x="22800000" y="21700000"/>
             <a:ext cx="1280000" cy="1020000"/>
-            <a:chOff x="9300000" y="6750000"/>
+            <a:chOff x="22800000" y="21700000"/>
+            <a:chExt cx="1280000" cy="1020000"/>
+          </a:xfrm>
+        </p:grpSpPr>
+        <p:sp>
+          <p:nvSpPr>
+            <p:cNvPr id="112" name="Rectangle 111"/>
+            <p:cNvSpPr/>
+            <p:nvPr/>
+          </p:nvSpPr>
+          <p:spPr>
+            <a:xfrm>
+              <a:off x="22800000" y="21700000"/>
+              <a:ext cx="1280000" cy="720000"/>
+            </a:xfrm>
+            <a:prstGeom prst="rect">
+              <a:avLst/>
+            </a:prstGeom>
+            <a:solidFill>
+              <a:srgbClr val="3FB950"/>
+            </a:solidFill>
+            <a:ln>
+              <a:solidFill>
+                <a:srgbClr val="2B8A3A"/>
+              </a:solidFill>
+            </a:ln>
+          </p:spPr>
+          <p:style>
+            <a:lnRef idx="1">
+              <a:schemeClr val="accent1"/>
+            </a:lnRef>
+            <a:fillRef idx="3">
+              <a:schemeClr val="accent1"/>
+            </a:fillRef>
+            <a:effectRef idx="2">
+              <a:schemeClr val="accent1"/>
+            </a:effectRef>
+            <a:fontRef idx="minor">
+              <a:schemeClr val="lt1"/>
+            </a:fontRef>
+          </p:style>
+          <p:txBody>
+            <a:bodyPr rtlCol="0" anchor="ctr"/>
+            <a:lstStyle/>
+            <a:p>
+              <a:r>
+                <a:rPr sz="900" b="1">
+                  <a:solidFill>
+                    <a:srgbClr val="FFFFFF"/>
+                  </a:solidFill>
+                </a:rPr>
+                <a:t>要補圖</a:t>
+              </a:r>
+            </a:p>
+            <a:p>
+              <a:r>
+                <a:rPr sz="900" b="1">
+                  <a:solidFill>
+                    <a:srgbClr val="FFFFFF"/>
+                  </a:solidFill>
+                </a:rPr>
+                <a:t>tomb_shaft</a:t>
+              </a:r>
+            </a:p>
+          </p:txBody>
+        </p:sp>
+        <p:sp>
+          <p:nvSpPr>
+            <p:cNvPr id="113" name="TextBox 112"/>
+            <p:cNvSpPr txBox="1"/>
+            <p:nvPr/>
+          </p:nvSpPr>
+          <p:spPr>
+            <a:xfrm>
+              <a:off x="22800000" y="22420000"/>
+              <a:ext cx="1280000" cy="300000"/>
+            </a:xfrm>
+            <a:prstGeom prst="rect">
+              <a:avLst/>
+            </a:prstGeom>
+            <a:noFill/>
+          </p:spPr>
+          <p:txBody>
+            <a:bodyPr wrap="square" anchor="t">
+              <a:spAutoFit/>
+            </a:bodyPr>
+            <a:lstStyle/>
+            <a:p>
+              <a:pPr algn="ctr"/>
+              <a:r>
+                <a:rPr sz="1300" b="1"/>
+                <a:t>豎井</a:t>
+              </a:r>
+            </a:p>
+            <a:p>
+              <a:pPr algn="ctr"/>
+              <a:r>
+                <a:rPr sz="800">
+                  <a:solidFill>
+                    <a:srgbClr val="9A989E"/>
+                  </a:solidFill>
+                </a:rPr>
+                <a:t>shaft</a:t>
+              </a:r>
+            </a:p>
+          </p:txBody>
+        </p:sp>
+      </p:grpSp>
+      <p:grpSp>
+        <p:nvGrpSpPr>
+          <p:cNvPr id="114" name="Group 113"/>
+          <p:cNvGrpSpPr/>
+          <p:nvPr/>
+        </p:nvGrpSpPr>
+        <p:grpSpPr>
+          <a:xfrm>
+            <a:off x="19800000" y="22850000"/>
+            <a:ext cx="1280000" cy="1020000"/>
+            <a:chOff x="19800000" y="22850000"/>
+            <a:chExt cx="1280000" cy="1020000"/>
+          </a:xfrm>
+        </p:grpSpPr>
+        <p:sp>
+          <p:nvSpPr>
+            <p:cNvPr id="115" name="Rectangle 114"/>
+            <p:cNvSpPr/>
+            <p:nvPr/>
+          </p:nvSpPr>
+          <p:spPr>
+            <a:xfrm>
+              <a:off x="19800000" y="22850000"/>
+              <a:ext cx="1280000" cy="720000"/>
+            </a:xfrm>
+            <a:prstGeom prst="rect">
+              <a:avLst/>
+            </a:prstGeom>
+            <a:solidFill>
+              <a:srgbClr val="3FB950"/>
+            </a:solidFill>
+            <a:ln>
+              <a:solidFill>
+                <a:srgbClr val="2B8A3A"/>
+              </a:solidFill>
+            </a:ln>
+          </p:spPr>
+          <p:style>
+            <a:lnRef idx="1">
+              <a:schemeClr val="accent1"/>
+            </a:lnRef>
+            <a:fillRef idx="3">
+              <a:schemeClr val="accent1"/>
+            </a:fillRef>
+            <a:effectRef idx="2">
+              <a:schemeClr val="accent1"/>
+            </a:effectRef>
+            <a:fontRef idx="minor">
+              <a:schemeClr val="lt1"/>
+            </a:fontRef>
+          </p:style>
+          <p:txBody>
+            <a:bodyPr rtlCol="0" anchor="ctr"/>
+            <a:lstStyle/>
+            <a:p>
+              <a:r>
+                <a:rPr sz="900" b="1">
+                  <a:solidFill>
+                    <a:srgbClr val="FFFFFF"/>
+                  </a:solidFill>
+                </a:rPr>
+                <a:t>要補圖</a:t>
+              </a:r>
+            </a:p>
+            <a:p>
+              <a:r>
+                <a:rPr sz="900" b="1">
+                  <a:solidFill>
+                    <a:srgbClr val="FFFFFF"/>
+                  </a:solidFill>
+                </a:rPr>
+                <a:t>tomb_urnvault</a:t>
+              </a:r>
+            </a:p>
+          </p:txBody>
+        </p:sp>
+        <p:sp>
+          <p:nvSpPr>
+            <p:cNvPr id="116" name="TextBox 115"/>
+            <p:cNvSpPr txBox="1"/>
+            <p:nvPr/>
+          </p:nvSpPr>
+          <p:spPr>
+            <a:xfrm>
+              <a:off x="19800000" y="23570000"/>
+              <a:ext cx="1280000" cy="300000"/>
+            </a:xfrm>
+            <a:prstGeom prst="rect">
+              <a:avLst/>
+            </a:prstGeom>
+            <a:noFill/>
+          </p:spPr>
+          <p:txBody>
+            <a:bodyPr wrap="square" anchor="t">
+              <a:spAutoFit/>
+            </a:bodyPr>
+            <a:lstStyle/>
+            <a:p>
+              <a:pPr algn="ctr"/>
+              <a:r>
+                <a:rPr sz="1300" b="1"/>
+                <a:t>甕窖</a:t>
+              </a:r>
+            </a:p>
+            <a:p>
+              <a:pPr algn="ctr"/>
+              <a:r>
+                <a:rPr sz="800">
+                  <a:solidFill>
+                    <a:srgbClr val="9A989E"/>
+                  </a:solidFill>
+                </a:rPr>
+                <a:t>urnvault</a:t>
+              </a:r>
+            </a:p>
+          </p:txBody>
+        </p:sp>
+      </p:grpSp>
+      <p:grpSp>
+        <p:nvGrpSpPr>
+          <p:cNvPr id="117" name="Group 116"/>
+          <p:cNvGrpSpPr/>
+          <p:nvPr/>
+        </p:nvGrpSpPr>
+        <p:grpSpPr>
+          <a:xfrm>
+            <a:off x="19800000" y="24000000"/>
+            <a:ext cx="1280000" cy="1020000"/>
+            <a:chOff x="19800000" y="24000000"/>
+            <a:chExt cx="1280000" cy="1020000"/>
+          </a:xfrm>
+        </p:grpSpPr>
+        <p:sp>
+          <p:nvSpPr>
+            <p:cNvPr id="118" name="Rectangle 117"/>
+            <p:cNvSpPr/>
+            <p:nvPr/>
+          </p:nvSpPr>
+          <p:spPr>
+            <a:xfrm>
+              <a:off x="19800000" y="24000000"/>
+              <a:ext cx="1280000" cy="720000"/>
+            </a:xfrm>
+            <a:prstGeom prst="rect">
+              <a:avLst/>
+            </a:prstGeom>
+            <a:solidFill>
+              <a:srgbClr val="3FB950"/>
+            </a:solidFill>
+            <a:ln>
+              <a:solidFill>
+                <a:srgbClr val="2B8A3A"/>
+              </a:solidFill>
+            </a:ln>
+          </p:spPr>
+          <p:style>
+            <a:lnRef idx="1">
+              <a:schemeClr val="accent1"/>
+            </a:lnRef>
+            <a:fillRef idx="3">
+              <a:schemeClr val="accent1"/>
+            </a:fillRef>
+            <a:effectRef idx="2">
+              <a:schemeClr val="accent1"/>
+            </a:effectRef>
+            <a:fontRef idx="minor">
+              <a:schemeClr val="lt1"/>
+            </a:fontRef>
+          </p:style>
+          <p:txBody>
+            <a:bodyPr rtlCol="0" anchor="ctr"/>
+            <a:lstStyle/>
+            <a:p>
+              <a:r>
+                <a:rPr sz="900" b="1">
+                  <a:solidFill>
+                    <a:srgbClr val="FFFFFF"/>
+                  </a:solidFill>
+                </a:rPr>
+                <a:t>要補圖</a:t>
+              </a:r>
+            </a:p>
+            <a:p>
+              <a:r>
+                <a:rPr sz="900" b="1">
+                  <a:solidFill>
+                    <a:srgbClr val="FFFFFF"/>
+                  </a:solidFill>
+                </a:rPr>
+                <a:t>tomb_ashpit</a:t>
+              </a:r>
+            </a:p>
+          </p:txBody>
+        </p:sp>
+        <p:sp>
+          <p:nvSpPr>
+            <p:cNvPr id="119" name="TextBox 118"/>
+            <p:cNvSpPr txBox="1"/>
+            <p:nvPr/>
+          </p:nvSpPr>
+          <p:spPr>
+            <a:xfrm>
+              <a:off x="19800000" y="24720000"/>
+              <a:ext cx="1280000" cy="300000"/>
+            </a:xfrm>
+            <a:prstGeom prst="rect">
+              <a:avLst/>
+            </a:prstGeom>
+            <a:noFill/>
+          </p:spPr>
+          <p:txBody>
+            <a:bodyPr wrap="square" anchor="t">
+              <a:spAutoFit/>
+            </a:bodyPr>
+            <a:lstStyle/>
+            <a:p>
+              <a:pPr algn="ctr"/>
+              <a:r>
+                <a:rPr sz="1300" b="1"/>
+                <a:t>灰坑</a:t>
+              </a:r>
+            </a:p>
+            <a:p>
+              <a:pPr algn="ctr"/>
+              <a:r>
+                <a:rPr sz="800">
+                  <a:solidFill>
+                    <a:srgbClr val="9A989E"/>
+                  </a:solidFill>
+                </a:rPr>
+                <a:t>ashpit</a:t>
+              </a:r>
+            </a:p>
+          </p:txBody>
+        </p:sp>
+      </p:grpSp>
+      <p:grpSp>
+        <p:nvGrpSpPr>
+          <p:cNvPr id="120" name="Group 119"/>
+          <p:cNvGrpSpPr/>
+          <p:nvPr/>
+        </p:nvGrpSpPr>
+        <p:grpSpPr>
+          <a:xfrm>
+            <a:off x="22800000" y="24000000"/>
+            <a:ext cx="1280000" cy="1020000"/>
+            <a:chOff x="22800000" y="24000000"/>
+            <a:chExt cx="1280000" cy="1020000"/>
+          </a:xfrm>
+        </p:grpSpPr>
+        <p:sp>
+          <p:nvSpPr>
+            <p:cNvPr id="121" name="Rectangle 120"/>
+            <p:cNvSpPr/>
+            <p:nvPr/>
+          </p:nvSpPr>
+          <p:spPr>
+            <a:xfrm>
+              <a:off x="22800000" y="24000000"/>
+              <a:ext cx="1280000" cy="720000"/>
+            </a:xfrm>
+            <a:prstGeom prst="rect">
+              <a:avLst/>
+            </a:prstGeom>
+            <a:solidFill>
+              <a:srgbClr val="3FB950"/>
+            </a:solidFill>
+            <a:ln>
+              <a:solidFill>
+                <a:srgbClr val="2B8A3A"/>
+              </a:solidFill>
+            </a:ln>
+          </p:spPr>
+          <p:style>
+            <a:lnRef idx="1">
+              <a:schemeClr val="accent1"/>
+            </a:lnRef>
+            <a:fillRef idx="3">
+              <a:schemeClr val="accent1"/>
+            </a:fillRef>
+            <a:effectRef idx="2">
+              <a:schemeClr val="accent1"/>
+            </a:effectRef>
+            <a:fontRef idx="minor">
+              <a:schemeClr val="lt1"/>
+            </a:fontRef>
+          </p:style>
+          <p:txBody>
+            <a:bodyPr rtlCol="0" anchor="ctr"/>
+            <a:lstStyle/>
+            <a:p>
+              <a:r>
+                <a:rPr sz="900" b="1">
+                  <a:solidFill>
+                    <a:srgbClr val="FFFFFF"/>
+                  </a:solidFill>
+                </a:rPr>
+                <a:t>要補圖</a:t>
+              </a:r>
+            </a:p>
+            <a:p>
+              <a:r>
+                <a:rPr sz="900" b="1">
+                  <a:solidFill>
+                    <a:srgbClr val="FFFFFF"/>
+                  </a:solidFill>
+                </a:rPr>
+                <a:t>tomb_graveldrop</a:t>
+              </a:r>
+            </a:p>
+          </p:txBody>
+        </p:sp>
+        <p:sp>
+          <p:nvSpPr>
+            <p:cNvPr id="122" name="TextBox 121"/>
+            <p:cNvSpPr txBox="1"/>
+            <p:nvPr/>
+          </p:nvSpPr>
+          <p:spPr>
+            <a:xfrm>
+              <a:off x="22800000" y="24720000"/>
+              <a:ext cx="1280000" cy="300000"/>
+            </a:xfrm>
+            <a:prstGeom prst="rect">
+              <a:avLst/>
+            </a:prstGeom>
+            <a:noFill/>
+          </p:spPr>
+          <p:txBody>
+            <a:bodyPr wrap="square" anchor="t">
+              <a:spAutoFit/>
+            </a:bodyPr>
+            <a:lstStyle/>
+            <a:p>
+              <a:pPr algn="ctr"/>
+              <a:r>
+                <a:rPr sz="1300" b="1"/>
+                <a:t>碎石陷落</a:t>
+              </a:r>
+            </a:p>
+            <a:p>
+              <a:pPr algn="ctr"/>
+              <a:r>
+                <a:rPr sz="800">
+                  <a:solidFill>
+                    <a:srgbClr val="9A989E"/>
+                  </a:solidFill>
+                </a:rPr>
+                <a:t>graveldrop</a:t>
+              </a:r>
+            </a:p>
+          </p:txBody>
+        </p:sp>
+      </p:grpSp>
+      <p:grpSp>
+        <p:nvGrpSpPr>
+          <p:cNvPr id="123" name="Group 122"/>
+          <p:cNvGrpSpPr/>
+          <p:nvPr/>
+        </p:nvGrpSpPr>
+        <p:grpSpPr>
+          <a:xfrm>
+            <a:off x="21300000" y="25150000"/>
+            <a:ext cx="1280000" cy="1020000"/>
+            <a:chOff x="21300000" y="25150000"/>
+            <a:chExt cx="1280000" cy="1020000"/>
+          </a:xfrm>
+        </p:grpSpPr>
+        <p:sp>
+          <p:nvSpPr>
+            <p:cNvPr id="124" name="Rectangle 123"/>
+            <p:cNvSpPr/>
+            <p:nvPr/>
+          </p:nvSpPr>
+          <p:spPr>
+            <a:xfrm>
+              <a:off x="21300000" y="25150000"/>
+              <a:ext cx="1280000" cy="720000"/>
+            </a:xfrm>
+            <a:prstGeom prst="rect">
+              <a:avLst/>
+            </a:prstGeom>
+            <a:solidFill>
+              <a:srgbClr val="3FB950"/>
+            </a:solidFill>
+            <a:ln>
+              <a:solidFill>
+                <a:srgbClr val="2B8A3A"/>
+              </a:solidFill>
+            </a:ln>
+          </p:spPr>
+          <p:style>
+            <a:lnRef idx="1">
+              <a:schemeClr val="accent1"/>
+            </a:lnRef>
+            <a:fillRef idx="3">
+              <a:schemeClr val="accent1"/>
+            </a:fillRef>
+            <a:effectRef idx="2">
+              <a:schemeClr val="accent1"/>
+            </a:effectRef>
+            <a:fontRef idx="minor">
+              <a:schemeClr val="lt1"/>
+            </a:fontRef>
+          </p:style>
+          <p:txBody>
+            <a:bodyPr rtlCol="0" anchor="ctr"/>
+            <a:lstStyle/>
+            <a:p>
+              <a:r>
+                <a:rPr sz="900" b="1">
+                  <a:solidFill>
+                    <a:srgbClr val="FFFFFF"/>
+                  </a:solidFill>
+                </a:rPr>
+                <a:t>要補圖</a:t>
+              </a:r>
+            </a:p>
+            <a:p>
+              <a:r>
+                <a:rPr sz="900" b="1">
+                  <a:solidFill>
+                    <a:srgbClr val="FFFFFF"/>
+                  </a:solidFill>
+                </a:rPr>
+                <a:t>tomb_cryptwalk</a:t>
+              </a:r>
+            </a:p>
+          </p:txBody>
+        </p:sp>
+        <p:sp>
+          <p:nvSpPr>
+            <p:cNvPr id="125" name="TextBox 124"/>
+            <p:cNvSpPr txBox="1"/>
+            <p:nvPr/>
+          </p:nvSpPr>
+          <p:spPr>
+            <a:xfrm>
+              <a:off x="21300000" y="25870000"/>
+              <a:ext cx="1280000" cy="300000"/>
+            </a:xfrm>
+            <a:prstGeom prst="rect">
+              <a:avLst/>
+            </a:prstGeom>
+            <a:noFill/>
+          </p:spPr>
+          <p:txBody>
+            <a:bodyPr wrap="square" anchor="t">
+              <a:spAutoFit/>
+            </a:bodyPr>
+            <a:lstStyle/>
+            <a:p>
+              <a:pPr algn="ctr"/>
+              <a:r>
+                <a:rPr sz="1300" b="1"/>
+                <a:t>墓道</a:t>
+              </a:r>
+            </a:p>
+            <a:p>
+              <a:pPr algn="ctr"/>
+              <a:r>
+                <a:rPr sz="800">
+                  <a:solidFill>
+                    <a:srgbClr val="9A989E"/>
+                  </a:solidFill>
+                </a:rPr>
+                <a:t>cryptwalk</a:t>
+              </a:r>
+            </a:p>
+          </p:txBody>
+        </p:sp>
+      </p:grpSp>
+      <p:grpSp>
+        <p:nvGrpSpPr>
+          <p:cNvPr id="126" name="Group 125"/>
+          <p:cNvGrpSpPr/>
+          <p:nvPr/>
+        </p:nvGrpSpPr>
+        <p:grpSpPr>
+          <a:xfrm>
+            <a:off x="21300000" y="26300000"/>
+            <a:ext cx="1280000" cy="1020000"/>
+            <a:chOff x="21300000" y="26300000"/>
             <a:chExt cx="1280000" cy="1020000"/>
           </a:xfrm>
         </p:grpSpPr>
         <p:pic>
           <p:nvPicPr>
-            <p:cNvPr id="112" name="Picture 111" descr="tomb_stair2.webp.jpg"/>
+            <p:cNvPr id="127" name="Picture 126" descr="tomb_stair2.webp.jpg"/>
             <p:cNvPicPr>
               <a:picLocks noChangeAspect="1"/>
             </p:cNvPicPr>
@@ -6037,7 +6931,7 @@
           </p:blipFill>
           <p:spPr>
             <a:xfrm>
-              <a:off x="9300000" y="6750000"/>
+              <a:off x="21300000" y="26300000"/>
               <a:ext cx="1280000" cy="720000"/>
             </a:xfrm>
             <a:prstGeom prst="rect">
@@ -6047,13 +6941,13 @@
         </p:pic>
         <p:sp>
           <p:nvSpPr>
-            <p:cNvPr id="113" name="TextBox 112"/>
+            <p:cNvPr id="128" name="TextBox 127"/>
             <p:cNvSpPr txBox="1"/>
             <p:nvPr/>
           </p:nvSpPr>
           <p:spPr>
             <a:xfrm>
-              <a:off x="9300000" y="7470000"/>
+              <a:off x="21300000" y="27020000"/>
               <a:ext cx="1280000" cy="300000"/>
             </a:xfrm>
             <a:prstGeom prst="rect">
@@ -6089,21 +6983,21 @@
       </p:grpSp>
       <p:grpSp>
         <p:nvGrpSpPr>
-          <p:cNvPr id="114" name="Group 113"/>
+          <p:cNvPr id="129" name="Group 128"/>
           <p:cNvGrpSpPr/>
           <p:nvPr/>
         </p:nvGrpSpPr>
         <p:grpSpPr>
           <a:xfrm>
-            <a:off x="9300000" y="4450000"/>
+            <a:off x="21300000" y="27450000"/>
             <a:ext cx="1280000" cy="1020000"/>
-            <a:chOff x="9300000" y="4450000"/>
+            <a:chOff x="21300000" y="27450000"/>
             <a:chExt cx="1280000" cy="1020000"/>
           </a:xfrm>
         </p:grpSpPr>
         <p:pic>
           <p:nvPicPr>
-            <p:cNvPr id="115" name="Picture 114" descr="tomb_landing3.webp.jpg"/>
+            <p:cNvPr id="130" name="Picture 129" descr="tomb_landing3.webp.jpg"/>
             <p:cNvPicPr>
               <a:picLocks noChangeAspect="1"/>
             </p:cNvPicPr>
@@ -6117,7 +7011,7 @@
           </p:blipFill>
           <p:spPr>
             <a:xfrm>
-              <a:off x="9300000" y="4450000"/>
+              <a:off x="21300000" y="27450000"/>
               <a:ext cx="1280000" cy="720000"/>
             </a:xfrm>
             <a:prstGeom prst="rect">
@@ -6127,13 +7021,13 @@
         </p:pic>
         <p:sp>
           <p:nvSpPr>
-            <p:cNvPr id="116" name="TextBox 115"/>
+            <p:cNvPr id="131" name="TextBox 130"/>
             <p:cNvSpPr txBox="1"/>
             <p:nvPr/>
           </p:nvSpPr>
           <p:spPr>
             <a:xfrm>
-              <a:off x="9300000" y="5170000"/>
+              <a:off x="21300000" y="28170000"/>
               <a:ext cx="1280000" cy="300000"/>
             </a:xfrm>
             <a:prstGeom prst="rect">
@@ -6169,21 +7063,21 @@
       </p:grpSp>
       <p:grpSp>
         <p:nvGrpSpPr>
-          <p:cNvPr id="117" name="Group 116"/>
+          <p:cNvPr id="132" name="Group 131"/>
           <p:cNvGrpSpPr/>
           <p:nvPr/>
         </p:nvGrpSpPr>
         <p:grpSpPr>
           <a:xfrm>
-            <a:off x="9300000" y="3300000"/>
+            <a:off x="21300000" y="28600000"/>
             <a:ext cx="1280000" cy="1020000"/>
-            <a:chOff x="9300000" y="3300000"/>
+            <a:chOff x="21300000" y="28600000"/>
             <a:chExt cx="1280000" cy="1020000"/>
           </a:xfrm>
         </p:grpSpPr>
         <p:pic>
           <p:nvPicPr>
-            <p:cNvPr id="118" name="Picture 117" descr="tomb_gallery3.webp.jpg"/>
+            <p:cNvPr id="133" name="Picture 132" descr="tomb_gallery3.webp.jpg"/>
             <p:cNvPicPr>
               <a:picLocks noChangeAspect="1"/>
             </p:cNvPicPr>
@@ -6197,7 +7091,7 @@
           </p:blipFill>
           <p:spPr>
             <a:xfrm>
-              <a:off x="9300000" y="3300000"/>
+              <a:off x="21300000" y="28600000"/>
               <a:ext cx="1280000" cy="720000"/>
             </a:xfrm>
             <a:prstGeom prst="rect">
@@ -6207,13 +7101,13 @@
         </p:pic>
         <p:sp>
           <p:nvSpPr>
-            <p:cNvPr id="119" name="TextBox 118"/>
+            <p:cNvPr id="134" name="TextBox 133"/>
             <p:cNvSpPr txBox="1"/>
             <p:nvPr/>
           </p:nvSpPr>
           <p:spPr>
             <a:xfrm>
-              <a:off x="9300000" y="4020000"/>
+              <a:off x="21300000" y="29320000"/>
               <a:ext cx="1280000" cy="300000"/>
             </a:xfrm>
             <a:prstGeom prst="rect">
@@ -6249,21 +7143,21 @@
       </p:grpSp>
       <p:grpSp>
         <p:nvGrpSpPr>
-          <p:cNvPr id="120" name="Group 119"/>
+          <p:cNvPr id="135" name="Group 134"/>
           <p:cNvGrpSpPr/>
           <p:nvPr/>
         </p:nvGrpSpPr>
         <p:grpSpPr>
           <a:xfrm>
-            <a:off x="6300000" y="3300000"/>
+            <a:off x="22800000" y="28600000"/>
             <a:ext cx="1280000" cy="1020000"/>
-            <a:chOff x="6300000" y="3300000"/>
+            <a:chOff x="22800000" y="28600000"/>
             <a:chExt cx="1280000" cy="1020000"/>
           </a:xfrm>
         </p:grpSpPr>
         <p:pic>
           <p:nvPicPr>
-            <p:cNvPr id="121" name="Picture 120" descr="tomb_vaultw.webp.jpg"/>
+            <p:cNvPr id="136" name="Picture 135" descr="tomb_vaultw.webp.jpg"/>
             <p:cNvPicPr>
               <a:picLocks noChangeAspect="1"/>
             </p:cNvPicPr>
@@ -6277,7 +7171,7 @@
           </p:blipFill>
           <p:spPr>
             <a:xfrm>
-              <a:off x="6300000" y="3300000"/>
+              <a:off x="22800000" y="28600000"/>
               <a:ext cx="1280000" cy="720000"/>
             </a:xfrm>
             <a:prstGeom prst="rect">
@@ -6287,13 +7181,13 @@
         </p:pic>
         <p:sp>
           <p:nvSpPr>
-            <p:cNvPr id="122" name="TextBox 121"/>
+            <p:cNvPr id="137" name="TextBox 136"/>
             <p:cNvSpPr txBox="1"/>
             <p:nvPr/>
           </p:nvSpPr>
           <p:spPr>
             <a:xfrm>
-              <a:off x="6300000" y="4020000"/>
+              <a:off x="22800000" y="29320000"/>
               <a:ext cx="1280000" cy="300000"/>
             </a:xfrm>
             <a:prstGeom prst="rect">
@@ -6329,21 +7223,21 @@
       </p:grpSp>
       <p:grpSp>
         <p:nvGrpSpPr>
-          <p:cNvPr id="123" name="Group 122"/>
+          <p:cNvPr id="138" name="Group 137"/>
           <p:cNvGrpSpPr/>
           <p:nvPr/>
         </p:nvGrpSpPr>
         <p:grpSpPr>
           <a:xfrm>
-            <a:off x="6300000" y="2150000"/>
+            <a:off x="22800000" y="29750000"/>
             <a:ext cx="1280000" cy="1020000"/>
-            <a:chOff x="6300000" y="2150000"/>
+            <a:chOff x="22800000" y="29750000"/>
             <a:chExt cx="1280000" cy="1020000"/>
           </a:xfrm>
         </p:grpSpPr>
         <p:pic>
           <p:nvPicPr>
-            <p:cNvPr id="124" name="Picture 123" descr="tomb_bonepit.webp.jpg"/>
+            <p:cNvPr id="139" name="Picture 138" descr="tomb_bonepit.webp.jpg"/>
             <p:cNvPicPr>
               <a:picLocks noChangeAspect="1"/>
             </p:cNvPicPr>
@@ -6357,7 +7251,7 @@
           </p:blipFill>
           <p:spPr>
             <a:xfrm>
-              <a:off x="6300000" y="2150000"/>
+              <a:off x="22800000" y="29750000"/>
               <a:ext cx="1280000" cy="720000"/>
             </a:xfrm>
             <a:prstGeom prst="rect">
@@ -6367,13 +7261,13 @@
         </p:pic>
         <p:sp>
           <p:nvSpPr>
-            <p:cNvPr id="125" name="TextBox 124"/>
+            <p:cNvPr id="140" name="TextBox 139"/>
             <p:cNvSpPr txBox="1"/>
             <p:nvPr/>
           </p:nvSpPr>
           <p:spPr>
             <a:xfrm>
-              <a:off x="6300000" y="2870000"/>
+              <a:off x="22800000" y="30470000"/>
               <a:ext cx="1280000" cy="300000"/>
             </a:xfrm>
             <a:prstGeom prst="rect">
@@ -6409,21 +7303,21 @@
       </p:grpSp>
       <p:grpSp>
         <p:nvGrpSpPr>
-          <p:cNvPr id="126" name="Group 125"/>
+          <p:cNvPr id="141" name="Group 140"/>
           <p:cNvGrpSpPr/>
           <p:nvPr/>
         </p:nvGrpSpPr>
         <p:grpSpPr>
           <a:xfrm>
-            <a:off x="6300000" y="1000000"/>
+            <a:off x="22800000" y="30900000"/>
             <a:ext cx="1280000" cy="1020000"/>
-            <a:chOff x="6300000" y="1000000"/>
+            <a:chOff x="22800000" y="30900000"/>
             <a:chExt cx="1280000" cy="1020000"/>
           </a:xfrm>
         </p:grpSpPr>
         <p:pic>
           <p:nvPicPr>
-            <p:cNvPr id="127" name="Picture 126" descr="tomb_bonepit.webp.jpg"/>
+            <p:cNvPr id="142" name="Picture 141" descr="tomb_bonepit.webp.jpg"/>
             <p:cNvPicPr>
               <a:picLocks noChangeAspect="1"/>
             </p:cNvPicPr>
@@ -6437,7 +7331,7 @@
           </p:blipFill>
           <p:spPr>
             <a:xfrm>
-              <a:off x="6300000" y="1000000"/>
+              <a:off x="22800000" y="30900000"/>
               <a:ext cx="1280000" cy="720000"/>
             </a:xfrm>
             <a:prstGeom prst="rect">
@@ -6447,13 +7341,13 @@
         </p:pic>
         <p:sp>
           <p:nvSpPr>
-            <p:cNvPr id="128" name="TextBox 127"/>
+            <p:cNvPr id="143" name="TextBox 142"/>
             <p:cNvSpPr txBox="1"/>
             <p:nvPr/>
           </p:nvSpPr>
           <p:spPr>
             <a:xfrm>
-              <a:off x="6300000" y="1720000"/>
+              <a:off x="22800000" y="31620000"/>
               <a:ext cx="1280000" cy="300000"/>
             </a:xfrm>
             <a:prstGeom prst="rect">
@@ -6489,21 +7383,21 @@
       </p:grpSp>
       <p:grpSp>
         <p:nvGrpSpPr>
-          <p:cNvPr id="129" name="Group 128"/>
+          <p:cNvPr id="144" name="Group 143"/>
           <p:cNvGrpSpPr/>
           <p:nvPr/>
         </p:nvGrpSpPr>
         <p:grpSpPr>
           <a:xfrm>
-            <a:off x="9300000" y="2150000"/>
+            <a:off x="21300000" y="29750000"/>
             <a:ext cx="1280000" cy="1020000"/>
-            <a:chOff x="9300000" y="2150000"/>
+            <a:chOff x="21300000" y="29750000"/>
             <a:chExt cx="1280000" cy="1020000"/>
           </a:xfrm>
         </p:grpSpPr>
         <p:pic>
           <p:nvPicPr>
-            <p:cNvPr id="130" name="Picture 129" descr="tomb_crypt.webp.jpg"/>
+            <p:cNvPr id="145" name="Picture 144" descr="tomb_crypt.webp.jpg"/>
             <p:cNvPicPr>
               <a:picLocks noChangeAspect="1"/>
             </p:cNvPicPr>
@@ -6517,7 +7411,7 @@
           </p:blipFill>
           <p:spPr>
             <a:xfrm>
-              <a:off x="9300000" y="2150000"/>
+              <a:off x="21300000" y="29750000"/>
               <a:ext cx="1280000" cy="720000"/>
             </a:xfrm>
             <a:prstGeom prst="rect">
@@ -6527,13 +7421,13 @@
         </p:pic>
         <p:sp>
           <p:nvSpPr>
-            <p:cNvPr id="131" name="TextBox 130"/>
+            <p:cNvPr id="146" name="TextBox 145"/>
             <p:cNvSpPr txBox="1"/>
             <p:nvPr/>
           </p:nvSpPr>
           <p:spPr>
             <a:xfrm>
-              <a:off x="9300000" y="2870000"/>
+              <a:off x="21300000" y="30470000"/>
               <a:ext cx="1280000" cy="300000"/>
             </a:xfrm>
             <a:prstGeom prst="rect">
@@ -6569,7 +7463,7 @@
       </p:grpSp>
       <p:cxnSp>
         <p:nvCxnSpPr>
-          <p:cNvPr id="132" name="Connector 131"/>
+          <p:cNvPr id="147" name="Connector 146"/>
           <p:cNvCxnSpPr/>
           <p:nvPr/>
         </p:nvCxnSpPr>
@@ -6604,7 +7498,7 @@
       </p:cxnSp>
       <p:cxnSp>
         <p:nvCxnSpPr>
-          <p:cNvPr id="133" name="Connector 132"/>
+          <p:cNvPr id="148" name="Connector 147"/>
           <p:cNvCxnSpPr/>
           <p:nvPr/>
         </p:nvCxnSpPr>
@@ -6639,7 +7533,7 @@
       </p:cxnSp>
       <p:cxnSp>
         <p:nvCxnSpPr>
-          <p:cNvPr id="134" name="Connector 133"/>
+          <p:cNvPr id="149" name="Connector 148"/>
           <p:cNvCxnSpPr/>
           <p:nvPr/>
         </p:nvCxnSpPr>
@@ -6674,7 +7568,7 @@
       </p:cxnSp>
       <p:cxnSp>
         <p:nvCxnSpPr>
-          <p:cNvPr id="135" name="Connector 134"/>
+          <p:cNvPr id="150" name="Connector 149"/>
           <p:cNvCxnSpPr/>
           <p:nvPr/>
         </p:nvCxnSpPr>
@@ -6709,7 +7603,7 @@
       </p:cxnSp>
       <p:cxnSp>
         <p:nvCxnSpPr>
-          <p:cNvPr id="136" name="Connector 135"/>
+          <p:cNvPr id="151" name="Connector 150"/>
           <p:cNvCxnSpPr/>
           <p:nvPr/>
         </p:nvCxnSpPr>
@@ -6744,7 +7638,7 @@
       </p:cxnSp>
       <p:cxnSp>
         <p:nvCxnSpPr>
-          <p:cNvPr id="137" name="Connector 136"/>
+          <p:cNvPr id="152" name="Connector 151"/>
           <p:cNvCxnSpPr/>
           <p:nvPr/>
         </p:nvCxnSpPr>
@@ -6779,7 +7673,7 @@
       </p:cxnSp>
       <p:cxnSp>
         <p:nvCxnSpPr>
-          <p:cNvPr id="138" name="Connector 137"/>
+          <p:cNvPr id="153" name="Connector 152"/>
           <p:cNvCxnSpPr/>
           <p:nvPr/>
         </p:nvCxnSpPr>
@@ -6814,7 +7708,7 @@
       </p:cxnSp>
       <p:cxnSp>
         <p:nvCxnSpPr>
-          <p:cNvPr id="139" name="Connector 138"/>
+          <p:cNvPr id="154" name="Connector 153"/>
           <p:cNvCxnSpPr/>
           <p:nvPr/>
         </p:nvCxnSpPr>
@@ -6849,7 +7743,7 @@
       </p:cxnSp>
       <p:cxnSp>
         <p:nvCxnSpPr>
-          <p:cNvPr id="140" name="Connector 139"/>
+          <p:cNvPr id="155" name="Connector 154"/>
           <p:cNvCxnSpPr/>
           <p:nvPr/>
         </p:nvCxnSpPr>
@@ -6884,7 +7778,7 @@
       </p:cxnSp>
       <p:cxnSp>
         <p:nvCxnSpPr>
-          <p:cNvPr id="141" name="Connector 140"/>
+          <p:cNvPr id="156" name="Connector 155"/>
           <p:cNvCxnSpPr/>
           <p:nvPr/>
         </p:nvCxnSpPr>
@@ -6919,7 +7813,7 @@
       </p:cxnSp>
       <p:cxnSp>
         <p:nvCxnSpPr>
-          <p:cNvPr id="142" name="Connector 141"/>
+          <p:cNvPr id="157" name="Connector 156"/>
           <p:cNvCxnSpPr/>
           <p:nvPr/>
         </p:nvCxnSpPr>
@@ -6954,7 +7848,7 @@
       </p:cxnSp>
       <p:cxnSp>
         <p:nvCxnSpPr>
-          <p:cNvPr id="143" name="Connector 142"/>
+          <p:cNvPr id="158" name="Connector 157"/>
           <p:cNvCxnSpPr/>
           <p:nvPr/>
         </p:nvCxnSpPr>
@@ -6989,7 +7883,7 @@
       </p:cxnSp>
       <p:cxnSp>
         <p:nvCxnSpPr>
-          <p:cNvPr id="144" name="Connector 143"/>
+          <p:cNvPr id="159" name="Connector 158"/>
           <p:cNvCxnSpPr/>
           <p:nvPr/>
         </p:nvCxnSpPr>
@@ -7024,7 +7918,7 @@
       </p:cxnSp>
       <p:cxnSp>
         <p:nvCxnSpPr>
-          <p:cNvPr id="145" name="Connector 144"/>
+          <p:cNvPr id="160" name="Connector 159"/>
           <p:cNvCxnSpPr/>
           <p:nvPr/>
         </p:nvCxnSpPr>
@@ -7059,7 +7953,7 @@
       </p:cxnSp>
       <p:cxnSp>
         <p:nvCxnSpPr>
-          <p:cNvPr id="146" name="Connector 145"/>
+          <p:cNvPr id="161" name="Connector 160"/>
           <p:cNvCxnSpPr/>
           <p:nvPr/>
         </p:nvCxnSpPr>
@@ -7094,7 +7988,7 @@
       </p:cxnSp>
       <p:cxnSp>
         <p:nvCxnSpPr>
-          <p:cNvPr id="147" name="Connector 146"/>
+          <p:cNvPr id="162" name="Connector 161"/>
           <p:cNvCxnSpPr/>
           <p:nvPr/>
         </p:nvCxnSpPr>
@@ -7129,7 +8023,7 @@
       </p:cxnSp>
       <p:cxnSp>
         <p:nvCxnSpPr>
-          <p:cNvPr id="148" name="Connector 147"/>
+          <p:cNvPr id="163" name="Connector 162"/>
           <p:cNvCxnSpPr/>
           <p:nvPr/>
         </p:nvCxnSpPr>
@@ -7164,7 +8058,7 @@
       </p:cxnSp>
       <p:cxnSp>
         <p:nvCxnSpPr>
-          <p:cNvPr id="149" name="Connector 148"/>
+          <p:cNvPr id="164" name="Connector 163"/>
           <p:cNvCxnSpPr/>
           <p:nvPr/>
         </p:nvCxnSpPr>
@@ -7199,7 +8093,7 @@
       </p:cxnSp>
       <p:cxnSp>
         <p:nvCxnSpPr>
-          <p:cNvPr id="150" name="Connector 149"/>
+          <p:cNvPr id="165" name="Connector 164"/>
           <p:cNvCxnSpPr/>
           <p:nvPr/>
         </p:nvCxnSpPr>
@@ -7234,7 +8128,7 @@
       </p:cxnSp>
       <p:cxnSp>
         <p:nvCxnSpPr>
-          <p:cNvPr id="151" name="Connector 150"/>
+          <p:cNvPr id="166" name="Connector 165"/>
           <p:cNvCxnSpPr/>
           <p:nvPr/>
         </p:nvCxnSpPr>
@@ -7269,14 +8163,14 @@
       </p:cxnSp>
       <p:cxnSp>
         <p:nvCxnSpPr>
-          <p:cNvPr id="152" name="Connector 151"/>
+          <p:cNvPr id="167" name="Connector 166"/>
           <p:cNvCxnSpPr/>
           <p:nvPr/>
         </p:nvCxnSpPr>
         <p:spPr>
-          <a:xfrm flipV="1">
-            <a:off x="6940000" y="10560000"/>
-            <a:ext cx="0" cy="3450000"/>
+          <a:xfrm>
+            <a:off x="6940000" y="14010000"/>
+            <a:ext cx="15000000" cy="1150000"/>
           </a:xfrm>
           <a:prstGeom prst="line">
             <a:avLst/>
@@ -7304,13 +8198,13 @@
       </p:cxnSp>
       <p:cxnSp>
         <p:nvCxnSpPr>
-          <p:cNvPr id="153" name="Connector 152"/>
+          <p:cNvPr id="168" name="Connector 167"/>
           <p:cNvCxnSpPr/>
           <p:nvPr/>
         </p:nvCxnSpPr>
         <p:spPr>
-          <a:xfrm flipV="1">
-            <a:off x="6940000" y="9410000"/>
+          <a:xfrm>
+            <a:off x="21940000" y="15160000"/>
             <a:ext cx="0" cy="1150000"/>
           </a:xfrm>
           <a:prstGeom prst="line">
@@ -7339,13 +8233,13 @@
       </p:cxnSp>
       <p:cxnSp>
         <p:nvCxnSpPr>
-          <p:cNvPr id="154" name="Connector 153"/>
+          <p:cNvPr id="169" name="Connector 168"/>
           <p:cNvCxnSpPr/>
           <p:nvPr/>
         </p:nvCxnSpPr>
         <p:spPr>
-          <a:xfrm flipV="1">
-            <a:off x="6940000" y="8260000"/>
+          <a:xfrm>
+            <a:off x="21940000" y="16310000"/>
             <a:ext cx="0" cy="1150000"/>
           </a:xfrm>
           <a:prstGeom prst="line">
@@ -7374,14 +8268,14 @@
       </p:cxnSp>
       <p:cxnSp>
         <p:nvCxnSpPr>
-          <p:cNvPr id="155" name="Connector 154"/>
+          <p:cNvPr id="170" name="Connector 169"/>
           <p:cNvCxnSpPr/>
           <p:nvPr/>
         </p:nvCxnSpPr>
         <p:spPr>
-          <a:xfrm>
-            <a:off x="6940000" y="9410000"/>
-            <a:ext cx="3000000" cy="0"/>
+          <a:xfrm flipH="1">
+            <a:off x="20440000" y="16310000"/>
+            <a:ext cx="1500000" cy="0"/>
           </a:xfrm>
           <a:prstGeom prst="line">
             <a:avLst/>
@@ -7409,14 +8303,14 @@
       </p:cxnSp>
       <p:cxnSp>
         <p:nvCxnSpPr>
-          <p:cNvPr id="156" name="Connector 155"/>
+          <p:cNvPr id="171" name="Connector 170"/>
           <p:cNvCxnSpPr/>
           <p:nvPr/>
         </p:nvCxnSpPr>
         <p:spPr>
-          <a:xfrm flipH="1">
-            <a:off x="3940000" y="9410000"/>
-            <a:ext cx="3000000" cy="0"/>
+          <a:xfrm>
+            <a:off x="21940000" y="17460000"/>
+            <a:ext cx="0" cy="1150000"/>
           </a:xfrm>
           <a:prstGeom prst="line">
             <a:avLst/>
@@ -7444,14 +8338,14 @@
       </p:cxnSp>
       <p:cxnSp>
         <p:nvCxnSpPr>
-          <p:cNvPr id="157" name="Connector 156"/>
+          <p:cNvPr id="172" name="Connector 171"/>
           <p:cNvCxnSpPr/>
           <p:nvPr/>
         </p:nvCxnSpPr>
         <p:spPr>
-          <a:xfrm flipV="1">
-            <a:off x="3940000" y="8260000"/>
-            <a:ext cx="0" cy="1150000"/>
+          <a:xfrm>
+            <a:off x="21940000" y="17460000"/>
+            <a:ext cx="1500000" cy="0"/>
           </a:xfrm>
           <a:prstGeom prst="line">
             <a:avLst/>
@@ -7479,13 +8373,13 @@
       </p:cxnSp>
       <p:cxnSp>
         <p:nvCxnSpPr>
-          <p:cNvPr id="158" name="Connector 157"/>
+          <p:cNvPr id="173" name="Connector 172"/>
           <p:cNvCxnSpPr/>
           <p:nvPr/>
         </p:nvCxnSpPr>
         <p:spPr>
-          <a:xfrm flipV="1">
-            <a:off x="6940000" y="7110000"/>
+          <a:xfrm>
+            <a:off x="20440000" y="16310000"/>
             <a:ext cx="0" cy="1150000"/>
           </a:xfrm>
           <a:prstGeom prst="line">
@@ -7514,13 +8408,13 @@
       </p:cxnSp>
       <p:cxnSp>
         <p:nvCxnSpPr>
-          <p:cNvPr id="159" name="Connector 158"/>
+          <p:cNvPr id="174" name="Connector 173"/>
           <p:cNvCxnSpPr/>
           <p:nvPr/>
         </p:nvCxnSpPr>
         <p:spPr>
           <a:xfrm>
-            <a:off x="9940000" y="9410000"/>
+            <a:off x="21940000" y="18610000"/>
             <a:ext cx="0" cy="1150000"/>
           </a:xfrm>
           <a:prstGeom prst="line">
@@ -7549,14 +8443,14 @@
       </p:cxnSp>
       <p:cxnSp>
         <p:nvCxnSpPr>
-          <p:cNvPr id="160" name="Connector 159"/>
+          <p:cNvPr id="175" name="Connector 174"/>
           <p:cNvCxnSpPr/>
           <p:nvPr/>
         </p:nvCxnSpPr>
         <p:spPr>
-          <a:xfrm>
-            <a:off x="9940000" y="9410000"/>
-            <a:ext cx="3000000" cy="0"/>
+          <a:xfrm flipH="1">
+            <a:off x="20440000" y="18610000"/>
+            <a:ext cx="1500000" cy="0"/>
           </a:xfrm>
           <a:prstGeom prst="line">
             <a:avLst/>
@@ -7584,13 +8478,13 @@
       </p:cxnSp>
       <p:cxnSp>
         <p:nvCxnSpPr>
-          <p:cNvPr id="161" name="Connector 160"/>
+          <p:cNvPr id="176" name="Connector 175"/>
           <p:cNvCxnSpPr/>
           <p:nvPr/>
         </p:nvCxnSpPr>
         <p:spPr>
-          <a:xfrm flipV="1">
-            <a:off x="12940000" y="8260000"/>
+          <a:xfrm>
+            <a:off x="21940000" y="19760000"/>
             <a:ext cx="0" cy="1150000"/>
           </a:xfrm>
           <a:prstGeom prst="line">
@@ -7619,14 +8513,14 @@
       </p:cxnSp>
       <p:cxnSp>
         <p:nvCxnSpPr>
-          <p:cNvPr id="162" name="Connector 161"/>
+          <p:cNvPr id="177" name="Connector 176"/>
           <p:cNvCxnSpPr/>
           <p:nvPr/>
         </p:nvCxnSpPr>
         <p:spPr>
           <a:xfrm>
-            <a:off x="12940000" y="9410000"/>
-            <a:ext cx="3000000" cy="0"/>
+            <a:off x="21940000" y="19760000"/>
+            <a:ext cx="1500000" cy="0"/>
           </a:xfrm>
           <a:prstGeom prst="line">
             <a:avLst/>
@@ -7654,13 +8548,13 @@
       </p:cxnSp>
       <p:cxnSp>
         <p:nvCxnSpPr>
-          <p:cNvPr id="163" name="Connector 162"/>
+          <p:cNvPr id="178" name="Connector 177"/>
           <p:cNvCxnSpPr/>
           <p:nvPr/>
         </p:nvCxnSpPr>
         <p:spPr>
-          <a:xfrm>
-            <a:off x="12940000" y="9410000"/>
+          <a:xfrm flipV="1">
+            <a:off x="21940000" y="20910000"/>
             <a:ext cx="0" cy="1150000"/>
           </a:xfrm>
           <a:prstGeom prst="line">
@@ -7689,14 +8583,14 @@
       </p:cxnSp>
       <p:cxnSp>
         <p:nvCxnSpPr>
-          <p:cNvPr id="164" name="Connector 163"/>
+          <p:cNvPr id="179" name="Connector 178"/>
           <p:cNvCxnSpPr/>
           <p:nvPr/>
         </p:nvCxnSpPr>
         <p:spPr>
           <a:xfrm>
-            <a:off x="15940000" y="9410000"/>
-            <a:ext cx="3000000" cy="0"/>
+            <a:off x="21940000" y="22060000"/>
+            <a:ext cx="0" cy="1150000"/>
           </a:xfrm>
           <a:prstGeom prst="line">
             <a:avLst/>
@@ -7724,14 +8618,14 @@
       </p:cxnSp>
       <p:cxnSp>
         <p:nvCxnSpPr>
-          <p:cNvPr id="165" name="Connector 164"/>
+          <p:cNvPr id="180" name="Connector 179"/>
           <p:cNvCxnSpPr/>
           <p:nvPr/>
         </p:nvCxnSpPr>
         <p:spPr>
-          <a:xfrm flipV="1">
-            <a:off x="18940000" y="8260000"/>
-            <a:ext cx="0" cy="1150000"/>
+          <a:xfrm>
+            <a:off x="21940000" y="22060000"/>
+            <a:ext cx="1500000" cy="0"/>
           </a:xfrm>
           <a:prstGeom prst="line">
             <a:avLst/>
@@ -7759,14 +8653,14 @@
       </p:cxnSp>
       <p:cxnSp>
         <p:nvCxnSpPr>
-          <p:cNvPr id="166" name="Connector 165"/>
+          <p:cNvPr id="181" name="Connector 180"/>
           <p:cNvCxnSpPr/>
           <p:nvPr/>
         </p:nvCxnSpPr>
         <p:spPr>
-          <a:xfrm flipH="1">
-            <a:off x="9940000" y="8260000"/>
-            <a:ext cx="3000000" cy="0"/>
+          <a:xfrm>
+            <a:off x="21940000" y="23210000"/>
+            <a:ext cx="0" cy="1150000"/>
           </a:xfrm>
           <a:prstGeom prst="line">
             <a:avLst/>
@@ -7794,14 +8688,14 @@
       </p:cxnSp>
       <p:cxnSp>
         <p:nvCxnSpPr>
-          <p:cNvPr id="167" name="Connector 166"/>
+          <p:cNvPr id="182" name="Connector 181"/>
           <p:cNvCxnSpPr/>
           <p:nvPr/>
         </p:nvCxnSpPr>
         <p:spPr>
-          <a:xfrm flipV="1">
-            <a:off x="9940000" y="7110000"/>
-            <a:ext cx="0" cy="1150000"/>
+          <a:xfrm flipH="1">
+            <a:off x="20440000" y="23210000"/>
+            <a:ext cx="1500000" cy="0"/>
           </a:xfrm>
           <a:prstGeom prst="line">
             <a:avLst/>
@@ -7829,14 +8723,14 @@
       </p:cxnSp>
       <p:cxnSp>
         <p:nvCxnSpPr>
-          <p:cNvPr id="168" name="Connector 167"/>
+          <p:cNvPr id="183" name="Connector 182"/>
           <p:cNvCxnSpPr/>
           <p:nvPr/>
         </p:nvCxnSpPr>
         <p:spPr>
-          <a:xfrm flipV="1">
-            <a:off x="9940000" y="4810000"/>
-            <a:ext cx="0" cy="2300000"/>
+          <a:xfrm>
+            <a:off x="20440000" y="20910000"/>
+            <a:ext cx="1500000" cy="0"/>
           </a:xfrm>
           <a:prstGeom prst="line">
             <a:avLst/>
@@ -7864,13 +8758,13 @@
       </p:cxnSp>
       <p:cxnSp>
         <p:nvCxnSpPr>
-          <p:cNvPr id="169" name="Connector 168"/>
+          <p:cNvPr id="184" name="Connector 183"/>
           <p:cNvCxnSpPr/>
           <p:nvPr/>
         </p:nvCxnSpPr>
         <p:spPr>
-          <a:xfrm flipV="1">
-            <a:off x="9940000" y="3660000"/>
+          <a:xfrm>
+            <a:off x="21940000" y="24360000"/>
             <a:ext cx="0" cy="1150000"/>
           </a:xfrm>
           <a:prstGeom prst="line">
@@ -7899,14 +8793,14 @@
       </p:cxnSp>
       <p:cxnSp>
         <p:nvCxnSpPr>
-          <p:cNvPr id="170" name="Connector 169"/>
+          <p:cNvPr id="185" name="Connector 184"/>
           <p:cNvCxnSpPr/>
           <p:nvPr/>
         </p:nvCxnSpPr>
         <p:spPr>
-          <a:xfrm flipV="1">
-            <a:off x="9940000" y="2510000"/>
-            <a:ext cx="0" cy="1150000"/>
+          <a:xfrm>
+            <a:off x="21940000" y="24360000"/>
+            <a:ext cx="1500000" cy="0"/>
           </a:xfrm>
           <a:prstGeom prst="line">
             <a:avLst/>
@@ -7934,14 +8828,14 @@
       </p:cxnSp>
       <p:cxnSp>
         <p:nvCxnSpPr>
-          <p:cNvPr id="171" name="Connector 170"/>
+          <p:cNvPr id="186" name="Connector 185"/>
           <p:cNvCxnSpPr/>
           <p:nvPr/>
         </p:nvCxnSpPr>
         <p:spPr>
-          <a:xfrm flipH="1">
-            <a:off x="6940000" y="3660000"/>
-            <a:ext cx="3000000" cy="0"/>
+          <a:xfrm>
+            <a:off x="20440000" y="23210000"/>
+            <a:ext cx="0" cy="1150000"/>
           </a:xfrm>
           <a:prstGeom prst="line">
             <a:avLst/>
@@ -7969,13 +8863,13 @@
       </p:cxnSp>
       <p:cxnSp>
         <p:nvCxnSpPr>
-          <p:cNvPr id="172" name="Connector 171"/>
+          <p:cNvPr id="187" name="Connector 186"/>
           <p:cNvCxnSpPr/>
           <p:nvPr/>
         </p:nvCxnSpPr>
         <p:spPr>
-          <a:xfrm flipV="1">
-            <a:off x="6940000" y="2510000"/>
+          <a:xfrm>
+            <a:off x="21940000" y="25510000"/>
             <a:ext cx="0" cy="1150000"/>
           </a:xfrm>
           <a:prstGeom prst="line">
@@ -8004,13 +8898,188 @@
       </p:cxnSp>
       <p:cxnSp>
         <p:nvCxnSpPr>
-          <p:cNvPr id="173" name="Connector 172"/>
+          <p:cNvPr id="188" name="Connector 187"/>
           <p:cNvCxnSpPr/>
           <p:nvPr/>
         </p:nvCxnSpPr>
         <p:spPr>
-          <a:xfrm flipV="1">
-            <a:off x="6940000" y="1360000"/>
+          <a:xfrm>
+            <a:off x="21940000" y="26660000"/>
+            <a:ext cx="0" cy="1150000"/>
+          </a:xfrm>
+          <a:prstGeom prst="line">
+            <a:avLst/>
+          </a:prstGeom>
+          <a:ln w="19050">
+            <a:solidFill>
+              <a:srgbClr val="333338"/>
+            </a:solidFill>
+          </a:ln>
+        </p:spPr>
+        <p:style>
+          <a:lnRef idx="2">
+            <a:schemeClr val="accent1"/>
+          </a:lnRef>
+          <a:fillRef idx="0">
+            <a:schemeClr val="accent1"/>
+          </a:fillRef>
+          <a:effectRef idx="1">
+            <a:schemeClr val="accent1"/>
+          </a:effectRef>
+          <a:fontRef idx="minor">
+            <a:schemeClr val="tx1"/>
+          </a:fontRef>
+        </p:style>
+      </p:cxnSp>
+      <p:cxnSp>
+        <p:nvCxnSpPr>
+          <p:cNvPr id="189" name="Connector 188"/>
+          <p:cNvCxnSpPr/>
+          <p:nvPr/>
+        </p:nvCxnSpPr>
+        <p:spPr>
+          <a:xfrm>
+            <a:off x="21940000" y="27810000"/>
+            <a:ext cx="0" cy="1150000"/>
+          </a:xfrm>
+          <a:prstGeom prst="line">
+            <a:avLst/>
+          </a:prstGeom>
+          <a:ln w="19050">
+            <a:solidFill>
+              <a:srgbClr val="333338"/>
+            </a:solidFill>
+          </a:ln>
+        </p:spPr>
+        <p:style>
+          <a:lnRef idx="2">
+            <a:schemeClr val="accent1"/>
+          </a:lnRef>
+          <a:fillRef idx="0">
+            <a:schemeClr val="accent1"/>
+          </a:fillRef>
+          <a:effectRef idx="1">
+            <a:schemeClr val="accent1"/>
+          </a:effectRef>
+          <a:fontRef idx="minor">
+            <a:schemeClr val="tx1"/>
+          </a:fontRef>
+        </p:style>
+      </p:cxnSp>
+      <p:cxnSp>
+        <p:nvCxnSpPr>
+          <p:cNvPr id="190" name="Connector 189"/>
+          <p:cNvCxnSpPr/>
+          <p:nvPr/>
+        </p:nvCxnSpPr>
+        <p:spPr>
+          <a:xfrm>
+            <a:off x="21940000" y="28960000"/>
+            <a:ext cx="0" cy="1150000"/>
+          </a:xfrm>
+          <a:prstGeom prst="line">
+            <a:avLst/>
+          </a:prstGeom>
+          <a:ln w="19050">
+            <a:solidFill>
+              <a:srgbClr val="333338"/>
+            </a:solidFill>
+          </a:ln>
+        </p:spPr>
+        <p:style>
+          <a:lnRef idx="2">
+            <a:schemeClr val="accent1"/>
+          </a:lnRef>
+          <a:fillRef idx="0">
+            <a:schemeClr val="accent1"/>
+          </a:fillRef>
+          <a:effectRef idx="1">
+            <a:schemeClr val="accent1"/>
+          </a:effectRef>
+          <a:fontRef idx="minor">
+            <a:schemeClr val="tx1"/>
+          </a:fontRef>
+        </p:style>
+      </p:cxnSp>
+      <p:cxnSp>
+        <p:nvCxnSpPr>
+          <p:cNvPr id="191" name="Connector 190"/>
+          <p:cNvCxnSpPr/>
+          <p:nvPr/>
+        </p:nvCxnSpPr>
+        <p:spPr>
+          <a:xfrm>
+            <a:off x="21940000" y="28960000"/>
+            <a:ext cx="1500000" cy="0"/>
+          </a:xfrm>
+          <a:prstGeom prst="line">
+            <a:avLst/>
+          </a:prstGeom>
+          <a:ln w="19050">
+            <a:solidFill>
+              <a:srgbClr val="333338"/>
+            </a:solidFill>
+          </a:ln>
+        </p:spPr>
+        <p:style>
+          <a:lnRef idx="2">
+            <a:schemeClr val="accent1"/>
+          </a:lnRef>
+          <a:fillRef idx="0">
+            <a:schemeClr val="accent1"/>
+          </a:fillRef>
+          <a:effectRef idx="1">
+            <a:schemeClr val="accent1"/>
+          </a:effectRef>
+          <a:fontRef idx="minor">
+            <a:schemeClr val="tx1"/>
+          </a:fontRef>
+        </p:style>
+      </p:cxnSp>
+      <p:cxnSp>
+        <p:nvCxnSpPr>
+          <p:cNvPr id="192" name="Connector 191"/>
+          <p:cNvCxnSpPr/>
+          <p:nvPr/>
+        </p:nvCxnSpPr>
+        <p:spPr>
+          <a:xfrm>
+            <a:off x="23440000" y="28960000"/>
+            <a:ext cx="0" cy="1150000"/>
+          </a:xfrm>
+          <a:prstGeom prst="line">
+            <a:avLst/>
+          </a:prstGeom>
+          <a:ln w="19050">
+            <a:solidFill>
+              <a:srgbClr val="333338"/>
+            </a:solidFill>
+          </a:ln>
+        </p:spPr>
+        <p:style>
+          <a:lnRef idx="2">
+            <a:schemeClr val="accent1"/>
+          </a:lnRef>
+          <a:fillRef idx="0">
+            <a:schemeClr val="accent1"/>
+          </a:fillRef>
+          <a:effectRef idx="1">
+            <a:schemeClr val="accent1"/>
+          </a:effectRef>
+          <a:fontRef idx="minor">
+            <a:schemeClr val="tx1"/>
+          </a:fontRef>
+        </p:style>
+      </p:cxnSp>
+      <p:cxnSp>
+        <p:nvCxnSpPr>
+          <p:cNvPr id="193" name="Connector 192"/>
+          <p:cNvCxnSpPr/>
+          <p:nvPr/>
+        </p:nvCxnSpPr>
+        <p:spPr>
+          <a:xfrm>
+            <a:off x="23440000" y="30110000"/>
             <a:ext cx="0" cy="1150000"/>
           </a:xfrm>
           <a:prstGeom prst="line">

--- a/resources/map/_layout_tomb.pptx
+++ b/resources/map/_layout_tomb.pptx
@@ -7,7 +7,7 @@
   <p:sldIdLst>
     <p:sldId id="256" r:id="rId7"/>
   </p:sldIdLst>
-  <p:sldSz cx="24600000" cy="32050000" type="screen4x3"/>
+  <p:sldSz cx="26100000" cy="19400000" type="screen4x3"/>
   <p:notesSz cx="6858000" cy="9144000"/>
   <p:defaultTextStyle>
     <a:defPPr>
@@ -3097,7 +3097,7 @@
         <p:spPr>
           <a:xfrm>
             <a:off x="300000" y="160000"/>
-            <a:ext cx="24000000" cy="420000"/>
+            <a:ext cx="25500000" cy="420000"/>
           </a:xfrm>
           <a:prstGeom prst="rect">
             <a:avLst/>
@@ -4967,9 +4967,9 @@
         </p:nvGrpSpPr>
         <p:grpSpPr>
           <a:xfrm>
-            <a:off x="21300000" y="14800000"/>
+            <a:off x="6300000" y="10200000"/>
             <a:ext cx="1280000" cy="1020000"/>
-            <a:chOff x="21300000" y="14800000"/>
+            <a:chOff x="6300000" y="10200000"/>
             <a:chExt cx="1280000" cy="1020000"/>
           </a:xfrm>
         </p:grpSpPr>
@@ -4989,7 +4989,7 @@
           </p:blipFill>
           <p:spPr>
             <a:xfrm>
-              <a:off x="21300000" y="14800000"/>
+              <a:off x="6300000" y="10200000"/>
               <a:ext cx="1280000" cy="720000"/>
             </a:xfrm>
             <a:prstGeom prst="rect">
@@ -5005,7 +5005,7 @@
           </p:nvSpPr>
           <p:spPr>
             <a:xfrm>
-              <a:off x="21300000" y="15520000"/>
+              <a:off x="6300000" y="10920000"/>
               <a:ext cx="1280000" cy="300000"/>
             </a:xfrm>
             <a:prstGeom prst="rect">
@@ -5047,9 +5047,9 @@
         </p:nvGrpSpPr>
         <p:grpSpPr>
           <a:xfrm>
-            <a:off x="21300000" y="15950000"/>
+            <a:off x="6300000" y="9050000"/>
             <a:ext cx="1280000" cy="1020000"/>
-            <a:chOff x="21300000" y="15950000"/>
+            <a:chOff x="6300000" y="9050000"/>
             <a:chExt cx="1280000" cy="1020000"/>
           </a:xfrm>
         </p:grpSpPr>
@@ -5069,7 +5069,7 @@
           </p:blipFill>
           <p:spPr>
             <a:xfrm>
-              <a:off x="21300000" y="15950000"/>
+              <a:off x="6300000" y="9050000"/>
               <a:ext cx="1280000" cy="720000"/>
             </a:xfrm>
             <a:prstGeom prst="rect">
@@ -5085,7 +5085,7 @@
           </p:nvSpPr>
           <p:spPr>
             <a:xfrm>
-              <a:off x="21300000" y="16670000"/>
+              <a:off x="6300000" y="9770000"/>
               <a:ext cx="1280000" cy="300000"/>
             </a:xfrm>
             <a:prstGeom prst="rect">
@@ -5127,9 +5127,9 @@
         </p:nvGrpSpPr>
         <p:grpSpPr>
           <a:xfrm>
-            <a:off x="21300000" y="17100000"/>
+            <a:off x="3300000" y="9050000"/>
             <a:ext cx="1280000" cy="1020000"/>
-            <a:chOff x="21300000" y="17100000"/>
+            <a:chOff x="3300000" y="9050000"/>
             <a:chExt cx="1280000" cy="1020000"/>
           </a:xfrm>
         </p:grpSpPr>
@@ -5141,7 +5141,7 @@
           </p:nvSpPr>
           <p:spPr>
             <a:xfrm>
-              <a:off x="21300000" y="17100000"/>
+              <a:off x="3300000" y="9050000"/>
               <a:ext cx="1280000" cy="720000"/>
             </a:xfrm>
             <a:prstGeom prst="rect">
@@ -5203,7 +5203,7 @@
           </p:nvSpPr>
           <p:spPr>
             <a:xfrm>
-              <a:off x="21300000" y="17820000"/>
+              <a:off x="3300000" y="9770000"/>
               <a:ext cx="1280000" cy="300000"/>
             </a:xfrm>
             <a:prstGeom prst="rect">
@@ -5245,9 +5245,9 @@
         </p:nvGrpSpPr>
         <p:grpSpPr>
           <a:xfrm>
-            <a:off x="22800000" y="17100000"/>
+            <a:off x="3300000" y="7900000"/>
             <a:ext cx="1280000" cy="1020000"/>
-            <a:chOff x="22800000" y="17100000"/>
+            <a:chOff x="3300000" y="7900000"/>
             <a:chExt cx="1280000" cy="1020000"/>
           </a:xfrm>
         </p:grpSpPr>
@@ -5259,7 +5259,7 @@
           </p:nvSpPr>
           <p:spPr>
             <a:xfrm>
-              <a:off x="22800000" y="17100000"/>
+              <a:off x="3300000" y="7900000"/>
               <a:ext cx="1280000" cy="720000"/>
             </a:xfrm>
             <a:prstGeom prst="rect">
@@ -5321,7 +5321,7 @@
           </p:nvSpPr>
           <p:spPr>
             <a:xfrm>
-              <a:off x="22800000" y="17820000"/>
+              <a:off x="3300000" y="8620000"/>
               <a:ext cx="1280000" cy="300000"/>
             </a:xfrm>
             <a:prstGeom prst="rect">
@@ -5363,9 +5363,9 @@
         </p:nvGrpSpPr>
         <p:grpSpPr>
           <a:xfrm>
-            <a:off x="19800000" y="15950000"/>
+            <a:off x="6300000" y="7900000"/>
             <a:ext cx="1280000" cy="1020000"/>
-            <a:chOff x="19800000" y="15950000"/>
+            <a:chOff x="6300000" y="7900000"/>
             <a:chExt cx="1280000" cy="1020000"/>
           </a:xfrm>
         </p:grpSpPr>
@@ -5385,7 +5385,7 @@
           </p:blipFill>
           <p:spPr>
             <a:xfrm>
-              <a:off x="19800000" y="15950000"/>
+              <a:off x="6300000" y="7900000"/>
               <a:ext cx="1280000" cy="720000"/>
             </a:xfrm>
             <a:prstGeom prst="rect">
@@ -5401,7 +5401,7 @@
           </p:nvSpPr>
           <p:spPr>
             <a:xfrm>
-              <a:off x="19800000" y="16670000"/>
+              <a:off x="6300000" y="8620000"/>
               <a:ext cx="1280000" cy="300000"/>
             </a:xfrm>
             <a:prstGeom prst="rect">
@@ -5443,9 +5443,9 @@
         </p:nvGrpSpPr>
         <p:grpSpPr>
           <a:xfrm>
-            <a:off x="19800000" y="17100000"/>
+            <a:off x="6300000" y="6750000"/>
             <a:ext cx="1280000" cy="1020000"/>
-            <a:chOff x="19800000" y="17100000"/>
+            <a:chOff x="6300000" y="6750000"/>
             <a:chExt cx="1280000" cy="1020000"/>
           </a:xfrm>
         </p:grpSpPr>
@@ -5457,7 +5457,7 @@
           </p:nvSpPr>
           <p:spPr>
             <a:xfrm>
-              <a:off x="19800000" y="17100000"/>
+              <a:off x="6300000" y="6750000"/>
               <a:ext cx="1280000" cy="720000"/>
             </a:xfrm>
             <a:prstGeom prst="rect">
@@ -5519,7 +5519,7 @@
           </p:nvSpPr>
           <p:spPr>
             <a:xfrm>
-              <a:off x="19800000" y="17820000"/>
+              <a:off x="6300000" y="7470000"/>
               <a:ext cx="1280000" cy="300000"/>
             </a:xfrm>
             <a:prstGeom prst="rect">
@@ -5561,9 +5561,9 @@
         </p:nvGrpSpPr>
         <p:grpSpPr>
           <a:xfrm>
-            <a:off x="21300000" y="18250000"/>
+            <a:off x="9300000" y="9050000"/>
             <a:ext cx="1280000" cy="1020000"/>
-            <a:chOff x="21300000" y="18250000"/>
+            <a:chOff x="9300000" y="9050000"/>
             <a:chExt cx="1280000" cy="1020000"/>
           </a:xfrm>
         </p:grpSpPr>
@@ -5583,7 +5583,7 @@
           </p:blipFill>
           <p:spPr>
             <a:xfrm>
-              <a:off x="21300000" y="18250000"/>
+              <a:off x="9300000" y="9050000"/>
               <a:ext cx="1280000" cy="720000"/>
             </a:xfrm>
             <a:prstGeom prst="rect">
@@ -5599,7 +5599,7 @@
           </p:nvSpPr>
           <p:spPr>
             <a:xfrm>
-              <a:off x="21300000" y="18970000"/>
+              <a:off x="9300000" y="9770000"/>
               <a:ext cx="1280000" cy="300000"/>
             </a:xfrm>
             <a:prstGeom prst="rect">
@@ -5641,9 +5641,9 @@
         </p:nvGrpSpPr>
         <p:grpSpPr>
           <a:xfrm>
-            <a:off x="19800000" y="18250000"/>
+            <a:off x="9300000" y="10200000"/>
             <a:ext cx="1280000" cy="1020000"/>
-            <a:chOff x="19800000" y="18250000"/>
+            <a:chOff x="9300000" y="10200000"/>
             <a:chExt cx="1280000" cy="1020000"/>
           </a:xfrm>
         </p:grpSpPr>
@@ -5663,7 +5663,7 @@
           </p:blipFill>
           <p:spPr>
             <a:xfrm>
-              <a:off x="19800000" y="18250000"/>
+              <a:off x="9300000" y="10200000"/>
               <a:ext cx="1280000" cy="720000"/>
             </a:xfrm>
             <a:prstGeom prst="rect">
@@ -5679,7 +5679,7 @@
           </p:nvSpPr>
           <p:spPr>
             <a:xfrm>
-              <a:off x="19800000" y="18970000"/>
+              <a:off x="9300000" y="10920000"/>
               <a:ext cx="1280000" cy="300000"/>
             </a:xfrm>
             <a:prstGeom prst="rect">
@@ -5721,9 +5721,9 @@
         </p:nvGrpSpPr>
         <p:grpSpPr>
           <a:xfrm>
-            <a:off x="21300000" y="19400000"/>
+            <a:off x="12300000" y="9050000"/>
             <a:ext cx="1280000" cy="1020000"/>
-            <a:chOff x="21300000" y="19400000"/>
+            <a:chOff x="12300000" y="9050000"/>
             <a:chExt cx="1280000" cy="1020000"/>
           </a:xfrm>
         </p:grpSpPr>
@@ -5743,7 +5743,7 @@
           </p:blipFill>
           <p:spPr>
             <a:xfrm>
-              <a:off x="21300000" y="19400000"/>
+              <a:off x="12300000" y="9050000"/>
               <a:ext cx="1280000" cy="720000"/>
             </a:xfrm>
             <a:prstGeom prst="rect">
@@ -5759,7 +5759,7 @@
           </p:nvSpPr>
           <p:spPr>
             <a:xfrm>
-              <a:off x="21300000" y="20120000"/>
+              <a:off x="12300000" y="9770000"/>
               <a:ext cx="1280000" cy="300000"/>
             </a:xfrm>
             <a:prstGeom prst="rect">
@@ -5801,9 +5801,9 @@
         </p:nvGrpSpPr>
         <p:grpSpPr>
           <a:xfrm>
-            <a:off x="22800000" y="19400000"/>
+            <a:off x="12300000" y="10200000"/>
             <a:ext cx="1280000" cy="1020000"/>
-            <a:chOff x="22800000" y="19400000"/>
+            <a:chOff x="12300000" y="10200000"/>
             <a:chExt cx="1280000" cy="1020000"/>
           </a:xfrm>
         </p:grpSpPr>
@@ -5815,7 +5815,7 @@
           </p:nvSpPr>
           <p:spPr>
             <a:xfrm>
-              <a:off x="22800000" y="19400000"/>
+              <a:off x="12300000" y="10200000"/>
               <a:ext cx="1280000" cy="720000"/>
             </a:xfrm>
             <a:prstGeom prst="rect">
@@ -5877,7 +5877,7 @@
           </p:nvSpPr>
           <p:spPr>
             <a:xfrm>
-              <a:off x="22800000" y="20120000"/>
+              <a:off x="12300000" y="10920000"/>
               <a:ext cx="1280000" cy="300000"/>
             </a:xfrm>
             <a:prstGeom prst="rect">
@@ -5919,9 +5919,9 @@
         </p:nvGrpSpPr>
         <p:grpSpPr>
           <a:xfrm>
-            <a:off x="21300000" y="21700000"/>
+            <a:off x="15300000" y="9050000"/>
             <a:ext cx="1280000" cy="1020000"/>
-            <a:chOff x="21300000" y="21700000"/>
+            <a:chOff x="15300000" y="9050000"/>
             <a:chExt cx="1280000" cy="1020000"/>
           </a:xfrm>
         </p:grpSpPr>
@@ -5941,7 +5941,7 @@
           </p:blipFill>
           <p:spPr>
             <a:xfrm>
-              <a:off x="21300000" y="21700000"/>
+              <a:off x="15300000" y="9050000"/>
               <a:ext cx="1280000" cy="720000"/>
             </a:xfrm>
             <a:prstGeom prst="rect">
@@ -5957,7 +5957,7 @@
           </p:nvSpPr>
           <p:spPr>
             <a:xfrm>
-              <a:off x="21300000" y="22420000"/>
+              <a:off x="15300000" y="9770000"/>
               <a:ext cx="1280000" cy="300000"/>
             </a:xfrm>
             <a:prstGeom prst="rect">
@@ -5999,9 +5999,9 @@
         </p:nvGrpSpPr>
         <p:grpSpPr>
           <a:xfrm>
-            <a:off x="21300000" y="22850000"/>
+            <a:off x="18300000" y="9050000"/>
             <a:ext cx="1280000" cy="1020000"/>
-            <a:chOff x="21300000" y="22850000"/>
+            <a:chOff x="18300000" y="9050000"/>
             <a:chExt cx="1280000" cy="1020000"/>
           </a:xfrm>
         </p:grpSpPr>
@@ -6021,7 +6021,7 @@
           </p:blipFill>
           <p:spPr>
             <a:xfrm>
-              <a:off x="21300000" y="22850000"/>
+              <a:off x="18300000" y="9050000"/>
               <a:ext cx="1280000" cy="720000"/>
             </a:xfrm>
             <a:prstGeom prst="rect">
@@ -6037,7 +6037,7 @@
           </p:nvSpPr>
           <p:spPr>
             <a:xfrm>
-              <a:off x="21300000" y="23570000"/>
+              <a:off x="18300000" y="9770000"/>
               <a:ext cx="1280000" cy="300000"/>
             </a:xfrm>
             <a:prstGeom prst="rect">
@@ -6079,9 +6079,9 @@
         </p:nvGrpSpPr>
         <p:grpSpPr>
           <a:xfrm>
-            <a:off x="19800000" y="20550000"/>
+            <a:off x="18300000" y="7900000"/>
             <a:ext cx="1280000" cy="1020000"/>
-            <a:chOff x="19800000" y="20550000"/>
+            <a:chOff x="18300000" y="7900000"/>
             <a:chExt cx="1280000" cy="1020000"/>
           </a:xfrm>
         </p:grpSpPr>
@@ -6101,7 +6101,7 @@
           </p:blipFill>
           <p:spPr>
             <a:xfrm>
-              <a:off x="19800000" y="20550000"/>
+              <a:off x="18300000" y="7900000"/>
               <a:ext cx="1280000" cy="720000"/>
             </a:xfrm>
             <a:prstGeom prst="rect">
@@ -6117,7 +6117,7 @@
           </p:nvSpPr>
           <p:spPr>
             <a:xfrm>
-              <a:off x="19800000" y="21270000"/>
+              <a:off x="18300000" y="8620000"/>
               <a:ext cx="1280000" cy="300000"/>
             </a:xfrm>
             <a:prstGeom prst="rect">
@@ -6159,9 +6159,9 @@
         </p:nvGrpSpPr>
         <p:grpSpPr>
           <a:xfrm>
-            <a:off x="21300000" y="20550000"/>
+            <a:off x="12300000" y="7900000"/>
             <a:ext cx="1280000" cy="1020000"/>
-            <a:chOff x="21300000" y="20550000"/>
+            <a:chOff x="12300000" y="7900000"/>
             <a:chExt cx="1280000" cy="1020000"/>
           </a:xfrm>
         </p:grpSpPr>
@@ -6181,7 +6181,7 @@
           </p:blipFill>
           <p:spPr>
             <a:xfrm>
-              <a:off x="21300000" y="20550000"/>
+              <a:off x="12300000" y="7900000"/>
               <a:ext cx="1280000" cy="720000"/>
             </a:xfrm>
             <a:prstGeom prst="rect">
@@ -6197,7 +6197,7 @@
           </p:nvSpPr>
           <p:spPr>
             <a:xfrm>
-              <a:off x="21300000" y="21270000"/>
+              <a:off x="12300000" y="8620000"/>
               <a:ext cx="1280000" cy="300000"/>
             </a:xfrm>
             <a:prstGeom prst="rect">
@@ -6239,9 +6239,9 @@
         </p:nvGrpSpPr>
         <p:grpSpPr>
           <a:xfrm>
-            <a:off x="21300000" y="24000000"/>
+            <a:off x="9300000" y="7900000"/>
             <a:ext cx="1280000" cy="1020000"/>
-            <a:chOff x="21300000" y="24000000"/>
+            <a:chOff x="9300000" y="7900000"/>
             <a:chExt cx="1280000" cy="1020000"/>
           </a:xfrm>
         </p:grpSpPr>
@@ -6261,7 +6261,7 @@
           </p:blipFill>
           <p:spPr>
             <a:xfrm>
-              <a:off x="21300000" y="24000000"/>
+              <a:off x="9300000" y="7900000"/>
               <a:ext cx="1280000" cy="720000"/>
             </a:xfrm>
             <a:prstGeom prst="rect">
@@ -6277,7 +6277,7 @@
           </p:nvSpPr>
           <p:spPr>
             <a:xfrm>
-              <a:off x="21300000" y="24720000"/>
+              <a:off x="9300000" y="8620000"/>
               <a:ext cx="1280000" cy="300000"/>
             </a:xfrm>
             <a:prstGeom prst="rect">
@@ -6319,9 +6319,9 @@
         </p:nvGrpSpPr>
         <p:grpSpPr>
           <a:xfrm>
-            <a:off x="22800000" y="21700000"/>
+            <a:off x="15300000" y="10200000"/>
             <a:ext cx="1280000" cy="1020000"/>
-            <a:chOff x="22800000" y="21700000"/>
+            <a:chOff x="15300000" y="10200000"/>
             <a:chExt cx="1280000" cy="1020000"/>
           </a:xfrm>
         </p:grpSpPr>
@@ -6333,7 +6333,7 @@
           </p:nvSpPr>
           <p:spPr>
             <a:xfrm>
-              <a:off x="22800000" y="21700000"/>
+              <a:off x="15300000" y="10200000"/>
               <a:ext cx="1280000" cy="720000"/>
             </a:xfrm>
             <a:prstGeom prst="rect">
@@ -6395,7 +6395,7 @@
           </p:nvSpPr>
           <p:spPr>
             <a:xfrm>
-              <a:off x="22800000" y="22420000"/>
+              <a:off x="15300000" y="10920000"/>
               <a:ext cx="1280000" cy="300000"/>
             </a:xfrm>
             <a:prstGeom prst="rect">
@@ -6437,9 +6437,9 @@
         </p:nvGrpSpPr>
         <p:grpSpPr>
           <a:xfrm>
-            <a:off x="19800000" y="22850000"/>
+            <a:off x="21300000" y="9050000"/>
             <a:ext cx="1280000" cy="1020000"/>
-            <a:chOff x="19800000" y="22850000"/>
+            <a:chOff x="21300000" y="9050000"/>
             <a:chExt cx="1280000" cy="1020000"/>
           </a:xfrm>
         </p:grpSpPr>
@@ -6451,7 +6451,7 @@
           </p:nvSpPr>
           <p:spPr>
             <a:xfrm>
-              <a:off x="19800000" y="22850000"/>
+              <a:off x="21300000" y="9050000"/>
               <a:ext cx="1280000" cy="720000"/>
             </a:xfrm>
             <a:prstGeom prst="rect">
@@ -6513,7 +6513,7 @@
           </p:nvSpPr>
           <p:spPr>
             <a:xfrm>
-              <a:off x="19800000" y="23570000"/>
+              <a:off x="21300000" y="9770000"/>
               <a:ext cx="1280000" cy="300000"/>
             </a:xfrm>
             <a:prstGeom prst="rect">
@@ -6555,9 +6555,9 @@
         </p:nvGrpSpPr>
         <p:grpSpPr>
           <a:xfrm>
-            <a:off x="19800000" y="24000000"/>
+            <a:off x="21300000" y="10200000"/>
             <a:ext cx="1280000" cy="1020000"/>
-            <a:chOff x="19800000" y="24000000"/>
+            <a:chOff x="21300000" y="10200000"/>
             <a:chExt cx="1280000" cy="1020000"/>
           </a:xfrm>
         </p:grpSpPr>
@@ -6569,7 +6569,7 @@
           </p:nvSpPr>
           <p:spPr>
             <a:xfrm>
-              <a:off x="19800000" y="24000000"/>
+              <a:off x="21300000" y="10200000"/>
               <a:ext cx="1280000" cy="720000"/>
             </a:xfrm>
             <a:prstGeom prst="rect">
@@ -6631,7 +6631,7 @@
           </p:nvSpPr>
           <p:spPr>
             <a:xfrm>
-              <a:off x="19800000" y="24720000"/>
+              <a:off x="21300000" y="10920000"/>
               <a:ext cx="1280000" cy="300000"/>
             </a:xfrm>
             <a:prstGeom prst="rect">
@@ -6673,9 +6673,9 @@
         </p:nvGrpSpPr>
         <p:grpSpPr>
           <a:xfrm>
-            <a:off x="22800000" y="24000000"/>
+            <a:off x="24300000" y="10200000"/>
             <a:ext cx="1280000" cy="1020000"/>
-            <a:chOff x="22800000" y="24000000"/>
+            <a:chOff x="24300000" y="10200000"/>
             <a:chExt cx="1280000" cy="1020000"/>
           </a:xfrm>
         </p:grpSpPr>
@@ -6687,7 +6687,7 @@
           </p:nvSpPr>
           <p:spPr>
             <a:xfrm>
-              <a:off x="22800000" y="24000000"/>
+              <a:off x="24300000" y="10200000"/>
               <a:ext cx="1280000" cy="720000"/>
             </a:xfrm>
             <a:prstGeom prst="rect">
@@ -6749,7 +6749,7 @@
           </p:nvSpPr>
           <p:spPr>
             <a:xfrm>
-              <a:off x="22800000" y="24720000"/>
+              <a:off x="24300000" y="10920000"/>
               <a:ext cx="1280000" cy="300000"/>
             </a:xfrm>
             <a:prstGeom prst="rect">
@@ -6791,9 +6791,9 @@
         </p:nvGrpSpPr>
         <p:grpSpPr>
           <a:xfrm>
-            <a:off x="21300000" y="25150000"/>
+            <a:off x="21300000" y="11350000"/>
             <a:ext cx="1280000" cy="1020000"/>
-            <a:chOff x="21300000" y="25150000"/>
+            <a:chOff x="21300000" y="11350000"/>
             <a:chExt cx="1280000" cy="1020000"/>
           </a:xfrm>
         </p:grpSpPr>
@@ -6805,7 +6805,7 @@
           </p:nvSpPr>
           <p:spPr>
             <a:xfrm>
-              <a:off x="21300000" y="25150000"/>
+              <a:off x="21300000" y="11350000"/>
               <a:ext cx="1280000" cy="720000"/>
             </a:xfrm>
             <a:prstGeom prst="rect">
@@ -6867,7 +6867,7 @@
           </p:nvSpPr>
           <p:spPr>
             <a:xfrm>
-              <a:off x="21300000" y="25870000"/>
+              <a:off x="21300000" y="12070000"/>
               <a:ext cx="1280000" cy="300000"/>
             </a:xfrm>
             <a:prstGeom prst="rect">
@@ -6909,9 +6909,9 @@
         </p:nvGrpSpPr>
         <p:grpSpPr>
           <a:xfrm>
-            <a:off x="21300000" y="26300000"/>
+            <a:off x="21300000" y="12500000"/>
             <a:ext cx="1280000" cy="1020000"/>
-            <a:chOff x="21300000" y="26300000"/>
+            <a:chOff x="21300000" y="12500000"/>
             <a:chExt cx="1280000" cy="1020000"/>
           </a:xfrm>
         </p:grpSpPr>
@@ -6931,7 +6931,7 @@
           </p:blipFill>
           <p:spPr>
             <a:xfrm>
-              <a:off x="21300000" y="26300000"/>
+              <a:off x="21300000" y="12500000"/>
               <a:ext cx="1280000" cy="720000"/>
             </a:xfrm>
             <a:prstGeom prst="rect">
@@ -6947,7 +6947,7 @@
           </p:nvSpPr>
           <p:spPr>
             <a:xfrm>
-              <a:off x="21300000" y="27020000"/>
+              <a:off x="21300000" y="13220000"/>
               <a:ext cx="1280000" cy="300000"/>
             </a:xfrm>
             <a:prstGeom prst="rect">
@@ -6989,9 +6989,9 @@
         </p:nvGrpSpPr>
         <p:grpSpPr>
           <a:xfrm>
-            <a:off x="21300000" y="27450000"/>
+            <a:off x="21300000" y="13650000"/>
             <a:ext cx="1280000" cy="1020000"/>
-            <a:chOff x="21300000" y="27450000"/>
+            <a:chOff x="21300000" y="13650000"/>
             <a:chExt cx="1280000" cy="1020000"/>
           </a:xfrm>
         </p:grpSpPr>
@@ -7011,7 +7011,7 @@
           </p:blipFill>
           <p:spPr>
             <a:xfrm>
-              <a:off x="21300000" y="27450000"/>
+              <a:off x="21300000" y="13650000"/>
               <a:ext cx="1280000" cy="720000"/>
             </a:xfrm>
             <a:prstGeom prst="rect">
@@ -7027,7 +7027,7 @@
           </p:nvSpPr>
           <p:spPr>
             <a:xfrm>
-              <a:off x="21300000" y="28170000"/>
+              <a:off x="21300000" y="14370000"/>
               <a:ext cx="1280000" cy="300000"/>
             </a:xfrm>
             <a:prstGeom prst="rect">
@@ -7069,9 +7069,9 @@
         </p:nvGrpSpPr>
         <p:grpSpPr>
           <a:xfrm>
-            <a:off x="21300000" y="28600000"/>
+            <a:off x="21300000" y="14800000"/>
             <a:ext cx="1280000" cy="1020000"/>
-            <a:chOff x="21300000" y="28600000"/>
+            <a:chOff x="21300000" y="14800000"/>
             <a:chExt cx="1280000" cy="1020000"/>
           </a:xfrm>
         </p:grpSpPr>
@@ -7091,7 +7091,7 @@
           </p:blipFill>
           <p:spPr>
             <a:xfrm>
-              <a:off x="21300000" y="28600000"/>
+              <a:off x="21300000" y="14800000"/>
               <a:ext cx="1280000" cy="720000"/>
             </a:xfrm>
             <a:prstGeom prst="rect">
@@ -7107,7 +7107,7 @@
           </p:nvSpPr>
           <p:spPr>
             <a:xfrm>
-              <a:off x="21300000" y="29320000"/>
+              <a:off x="21300000" y="15520000"/>
               <a:ext cx="1280000" cy="300000"/>
             </a:xfrm>
             <a:prstGeom prst="rect">
@@ -7149,9 +7149,9 @@
         </p:nvGrpSpPr>
         <p:grpSpPr>
           <a:xfrm>
-            <a:off x="22800000" y="28600000"/>
+            <a:off x="24300000" y="14800000"/>
             <a:ext cx="1280000" cy="1020000"/>
-            <a:chOff x="22800000" y="28600000"/>
+            <a:chOff x="24300000" y="14800000"/>
             <a:chExt cx="1280000" cy="1020000"/>
           </a:xfrm>
         </p:grpSpPr>
@@ -7171,7 +7171,7 @@
           </p:blipFill>
           <p:spPr>
             <a:xfrm>
-              <a:off x="22800000" y="28600000"/>
+              <a:off x="24300000" y="14800000"/>
               <a:ext cx="1280000" cy="720000"/>
             </a:xfrm>
             <a:prstGeom prst="rect">
@@ -7187,7 +7187,7 @@
           </p:nvSpPr>
           <p:spPr>
             <a:xfrm>
-              <a:off x="22800000" y="29320000"/>
+              <a:off x="24300000" y="15520000"/>
               <a:ext cx="1280000" cy="300000"/>
             </a:xfrm>
             <a:prstGeom prst="rect">
@@ -7229,9 +7229,9 @@
         </p:nvGrpSpPr>
         <p:grpSpPr>
           <a:xfrm>
-            <a:off x="22800000" y="29750000"/>
+            <a:off x="24300000" y="15950000"/>
             <a:ext cx="1280000" cy="1020000"/>
-            <a:chOff x="22800000" y="29750000"/>
+            <a:chOff x="24300000" y="15950000"/>
             <a:chExt cx="1280000" cy="1020000"/>
           </a:xfrm>
         </p:grpSpPr>
@@ -7251,7 +7251,7 @@
           </p:blipFill>
           <p:spPr>
             <a:xfrm>
-              <a:off x="22800000" y="29750000"/>
+              <a:off x="24300000" y="15950000"/>
               <a:ext cx="1280000" cy="720000"/>
             </a:xfrm>
             <a:prstGeom prst="rect">
@@ -7267,7 +7267,7 @@
           </p:nvSpPr>
           <p:spPr>
             <a:xfrm>
-              <a:off x="22800000" y="30470000"/>
+              <a:off x="24300000" y="16670000"/>
               <a:ext cx="1280000" cy="300000"/>
             </a:xfrm>
             <a:prstGeom prst="rect">
@@ -7309,9 +7309,9 @@
         </p:nvGrpSpPr>
         <p:grpSpPr>
           <a:xfrm>
-            <a:off x="22800000" y="30900000"/>
+            <a:off x="24300000" y="17100000"/>
             <a:ext cx="1280000" cy="1020000"/>
-            <a:chOff x="22800000" y="30900000"/>
+            <a:chOff x="24300000" y="17100000"/>
             <a:chExt cx="1280000" cy="1020000"/>
           </a:xfrm>
         </p:grpSpPr>
@@ -7331,7 +7331,7 @@
           </p:blipFill>
           <p:spPr>
             <a:xfrm>
-              <a:off x="22800000" y="30900000"/>
+              <a:off x="24300000" y="17100000"/>
               <a:ext cx="1280000" cy="720000"/>
             </a:xfrm>
             <a:prstGeom prst="rect">
@@ -7347,7 +7347,7 @@
           </p:nvSpPr>
           <p:spPr>
             <a:xfrm>
-              <a:off x="22800000" y="31620000"/>
+              <a:off x="24300000" y="17820000"/>
               <a:ext cx="1280000" cy="300000"/>
             </a:xfrm>
             <a:prstGeom prst="rect">
@@ -7389,9 +7389,9 @@
         </p:nvGrpSpPr>
         <p:grpSpPr>
           <a:xfrm>
-            <a:off x="21300000" y="29750000"/>
+            <a:off x="21300000" y="15950000"/>
             <a:ext cx="1280000" cy="1020000"/>
-            <a:chOff x="21300000" y="29750000"/>
+            <a:chOff x="21300000" y="15950000"/>
             <a:chExt cx="1280000" cy="1020000"/>
           </a:xfrm>
         </p:grpSpPr>
@@ -7411,7 +7411,7 @@
           </p:blipFill>
           <p:spPr>
             <a:xfrm>
-              <a:off x="21300000" y="29750000"/>
+              <a:off x="21300000" y="15950000"/>
               <a:ext cx="1280000" cy="720000"/>
             </a:xfrm>
             <a:prstGeom prst="rect">
@@ -7427,7 +7427,7 @@
           </p:nvSpPr>
           <p:spPr>
             <a:xfrm>
-              <a:off x="21300000" y="30470000"/>
+              <a:off x="21300000" y="16670000"/>
               <a:ext cx="1280000" cy="300000"/>
             </a:xfrm>
             <a:prstGeom prst="rect">
@@ -8168,9 +8168,9 @@
           <p:nvPr/>
         </p:nvCxnSpPr>
         <p:spPr>
-          <a:xfrm>
-            <a:off x="6940000" y="14010000"/>
-            <a:ext cx="15000000" cy="1150000"/>
+          <a:xfrm flipV="1">
+            <a:off x="6940000" y="10560000"/>
+            <a:ext cx="0" cy="3450000"/>
           </a:xfrm>
           <a:prstGeom prst="line">
             <a:avLst/>
@@ -8203,8 +8203,8 @@
           <p:nvPr/>
         </p:nvCxnSpPr>
         <p:spPr>
-          <a:xfrm>
-            <a:off x="21940000" y="15160000"/>
+          <a:xfrm flipV="1">
+            <a:off x="6940000" y="9410000"/>
             <a:ext cx="0" cy="1150000"/>
           </a:xfrm>
           <a:prstGeom prst="line">
@@ -8238,8 +8238,8 @@
           <p:nvPr/>
         </p:nvCxnSpPr>
         <p:spPr>
-          <a:xfrm>
-            <a:off x="21940000" y="16310000"/>
+          <a:xfrm flipV="1">
+            <a:off x="6940000" y="8260000"/>
             <a:ext cx="0" cy="1150000"/>
           </a:xfrm>
           <a:prstGeom prst="line">
@@ -8273,9 +8273,9 @@
           <p:nvPr/>
         </p:nvCxnSpPr>
         <p:spPr>
-          <a:xfrm flipH="1">
-            <a:off x="20440000" y="16310000"/>
-            <a:ext cx="1500000" cy="0"/>
+          <a:xfrm>
+            <a:off x="6940000" y="9410000"/>
+            <a:ext cx="3000000" cy="0"/>
           </a:xfrm>
           <a:prstGeom prst="line">
             <a:avLst/>
@@ -8308,9 +8308,9 @@
           <p:nvPr/>
         </p:nvCxnSpPr>
         <p:spPr>
-          <a:xfrm>
-            <a:off x="21940000" y="17460000"/>
-            <a:ext cx="0" cy="1150000"/>
+          <a:xfrm flipH="1">
+            <a:off x="3940000" y="9410000"/>
+            <a:ext cx="3000000" cy="0"/>
           </a:xfrm>
           <a:prstGeom prst="line">
             <a:avLst/>
@@ -8343,9 +8343,9 @@
           <p:nvPr/>
         </p:nvCxnSpPr>
         <p:spPr>
-          <a:xfrm>
-            <a:off x="21940000" y="17460000"/>
-            <a:ext cx="1500000" cy="0"/>
+          <a:xfrm flipV="1">
+            <a:off x="3940000" y="8260000"/>
+            <a:ext cx="0" cy="1150000"/>
           </a:xfrm>
           <a:prstGeom prst="line">
             <a:avLst/>
@@ -8378,8 +8378,8 @@
           <p:nvPr/>
         </p:nvCxnSpPr>
         <p:spPr>
-          <a:xfrm>
-            <a:off x="20440000" y="16310000"/>
+          <a:xfrm flipV="1">
+            <a:off x="6940000" y="7110000"/>
             <a:ext cx="0" cy="1150000"/>
           </a:xfrm>
           <a:prstGeom prst="line">
@@ -8414,7 +8414,7 @@
         </p:nvCxnSpPr>
         <p:spPr>
           <a:xfrm>
-            <a:off x="21940000" y="18610000"/>
+            <a:off x="9940000" y="9410000"/>
             <a:ext cx="0" cy="1150000"/>
           </a:xfrm>
           <a:prstGeom prst="line">
@@ -8448,9 +8448,9 @@
           <p:nvPr/>
         </p:nvCxnSpPr>
         <p:spPr>
-          <a:xfrm flipH="1">
-            <a:off x="20440000" y="18610000"/>
-            <a:ext cx="1500000" cy="0"/>
+          <a:xfrm>
+            <a:off x="9940000" y="9410000"/>
+            <a:ext cx="3000000" cy="0"/>
           </a:xfrm>
           <a:prstGeom prst="line">
             <a:avLst/>
@@ -8483,8 +8483,8 @@
           <p:nvPr/>
         </p:nvCxnSpPr>
         <p:spPr>
-          <a:xfrm>
-            <a:off x="21940000" y="19760000"/>
+          <a:xfrm flipV="1">
+            <a:off x="12940000" y="8260000"/>
             <a:ext cx="0" cy="1150000"/>
           </a:xfrm>
           <a:prstGeom prst="line">
@@ -8519,8 +8519,8 @@
         </p:nvCxnSpPr>
         <p:spPr>
           <a:xfrm>
-            <a:off x="21940000" y="19760000"/>
-            <a:ext cx="1500000" cy="0"/>
+            <a:off x="12940000" y="9410000"/>
+            <a:ext cx="3000000" cy="0"/>
           </a:xfrm>
           <a:prstGeom prst="line">
             <a:avLst/>
@@ -8553,8 +8553,8 @@
           <p:nvPr/>
         </p:nvCxnSpPr>
         <p:spPr>
-          <a:xfrm flipV="1">
-            <a:off x="21940000" y="20910000"/>
+          <a:xfrm>
+            <a:off x="12940000" y="9410000"/>
             <a:ext cx="0" cy="1150000"/>
           </a:xfrm>
           <a:prstGeom prst="line">
@@ -8589,8 +8589,8 @@
         </p:nvCxnSpPr>
         <p:spPr>
           <a:xfrm>
-            <a:off x="21940000" y="22060000"/>
-            <a:ext cx="0" cy="1150000"/>
+            <a:off x="15940000" y="9410000"/>
+            <a:ext cx="3000000" cy="0"/>
           </a:xfrm>
           <a:prstGeom prst="line">
             <a:avLst/>
@@ -8624,8 +8624,8 @@
         </p:nvCxnSpPr>
         <p:spPr>
           <a:xfrm>
-            <a:off x="21940000" y="22060000"/>
-            <a:ext cx="1500000" cy="0"/>
+            <a:off x="15940000" y="9410000"/>
+            <a:ext cx="0" cy="1150000"/>
           </a:xfrm>
           <a:prstGeom prst="line">
             <a:avLst/>
@@ -8658,8 +8658,8 @@
           <p:nvPr/>
         </p:nvCxnSpPr>
         <p:spPr>
-          <a:xfrm>
-            <a:off x="21940000" y="23210000"/>
+          <a:xfrm flipV="1">
+            <a:off x="18940000" y="8260000"/>
             <a:ext cx="0" cy="1150000"/>
           </a:xfrm>
           <a:prstGeom prst="line">
@@ -8693,9 +8693,9 @@
           <p:nvPr/>
         </p:nvCxnSpPr>
         <p:spPr>
-          <a:xfrm flipH="1">
-            <a:off x="20440000" y="23210000"/>
-            <a:ext cx="1500000" cy="0"/>
+          <a:xfrm>
+            <a:off x="18940000" y="9410000"/>
+            <a:ext cx="3000000" cy="0"/>
           </a:xfrm>
           <a:prstGeom prst="line">
             <a:avLst/>
@@ -8728,9 +8728,9 @@
           <p:nvPr/>
         </p:nvCxnSpPr>
         <p:spPr>
-          <a:xfrm>
-            <a:off x="20440000" y="20910000"/>
-            <a:ext cx="1500000" cy="0"/>
+          <a:xfrm flipH="1">
+            <a:off x="9940000" y="8260000"/>
+            <a:ext cx="3000000" cy="0"/>
           </a:xfrm>
           <a:prstGeom prst="line">
             <a:avLst/>
@@ -8764,7 +8764,7 @@
         </p:nvCxnSpPr>
         <p:spPr>
           <a:xfrm>
-            <a:off x="21940000" y="24360000"/>
+            <a:off x="21940000" y="9410000"/>
             <a:ext cx="0" cy="1150000"/>
           </a:xfrm>
           <a:prstGeom prst="line">
@@ -8799,8 +8799,8 @@
         </p:nvCxnSpPr>
         <p:spPr>
           <a:xfrm>
-            <a:off x="21940000" y="24360000"/>
-            <a:ext cx="1500000" cy="0"/>
+            <a:off x="21940000" y="10560000"/>
+            <a:ext cx="0" cy="1150000"/>
           </a:xfrm>
           <a:prstGeom prst="line">
             <a:avLst/>
@@ -8834,8 +8834,8 @@
         </p:nvCxnSpPr>
         <p:spPr>
           <a:xfrm>
-            <a:off x="20440000" y="23210000"/>
-            <a:ext cx="0" cy="1150000"/>
+            <a:off x="21940000" y="10560000"/>
+            <a:ext cx="3000000" cy="0"/>
           </a:xfrm>
           <a:prstGeom prst="line">
             <a:avLst/>
@@ -8869,7 +8869,7 @@
         </p:nvCxnSpPr>
         <p:spPr>
           <a:xfrm>
-            <a:off x="21940000" y="25510000"/>
+            <a:off x="21940000" y="11710000"/>
             <a:ext cx="0" cy="1150000"/>
           </a:xfrm>
           <a:prstGeom prst="line">
@@ -8904,7 +8904,7 @@
         </p:nvCxnSpPr>
         <p:spPr>
           <a:xfrm>
-            <a:off x="21940000" y="26660000"/>
+            <a:off x="21940000" y="12860000"/>
             <a:ext cx="0" cy="1150000"/>
           </a:xfrm>
           <a:prstGeom prst="line">
@@ -8939,7 +8939,7 @@
         </p:nvCxnSpPr>
         <p:spPr>
           <a:xfrm>
-            <a:off x="21940000" y="27810000"/>
+            <a:off x="21940000" y="14010000"/>
             <a:ext cx="0" cy="1150000"/>
           </a:xfrm>
           <a:prstGeom prst="line">
@@ -8974,7 +8974,7 @@
         </p:nvCxnSpPr>
         <p:spPr>
           <a:xfrm>
-            <a:off x="21940000" y="28960000"/>
+            <a:off x="21940000" y="15160000"/>
             <a:ext cx="0" cy="1150000"/>
           </a:xfrm>
           <a:prstGeom prst="line">
@@ -9009,8 +9009,8 @@
         </p:nvCxnSpPr>
         <p:spPr>
           <a:xfrm>
-            <a:off x="21940000" y="28960000"/>
-            <a:ext cx="1500000" cy="0"/>
+            <a:off x="21940000" y="15160000"/>
+            <a:ext cx="3000000" cy="0"/>
           </a:xfrm>
           <a:prstGeom prst="line">
             <a:avLst/>
@@ -9044,7 +9044,7 @@
         </p:nvCxnSpPr>
         <p:spPr>
           <a:xfrm>
-            <a:off x="23440000" y="28960000"/>
+            <a:off x="24940000" y="15160000"/>
             <a:ext cx="0" cy="1150000"/>
           </a:xfrm>
           <a:prstGeom prst="line">
@@ -9079,7 +9079,7 @@
         </p:nvCxnSpPr>
         <p:spPr>
           <a:xfrm>
-            <a:off x="23440000" y="30110000"/>
+            <a:off x="24940000" y="16310000"/>
             <a:ext cx="0" cy="1150000"/>
           </a:xfrm>
           <a:prstGeom prst="line">

--- a/resources/map/_layout_tomb.pptx
+++ b/resources/map/_layout_tomb.pptx
@@ -7,7 +7,7 @@
   <p:sldIdLst>
     <p:sldId id="256" r:id="rId7"/>
   </p:sldIdLst>
-  <p:sldSz cx="26100000" cy="19400000" type="screen4x3"/>
+  <p:sldSz cx="29100000" cy="19400000" type="screen4x3"/>
   <p:notesSz cx="6858000" cy="9144000"/>
   <p:defaultTextStyle>
     <a:defPPr>
@@ -3097,7 +3097,7 @@
         <p:spPr>
           <a:xfrm>
             <a:off x="300000" y="160000"/>
-            <a:ext cx="25500000" cy="420000"/>
+            <a:ext cx="28500000" cy="420000"/>
           </a:xfrm>
           <a:prstGeom prst="rect">
             <a:avLst/>
@@ -3122,7 +3122,7 @@
                   <a:srgbClr val="7A787E"/>
                 </a:solidFill>
               </a:rPr>
-              <a:t>48 格・每一格是「縮圖＋地名」的群組，可以直接拖；連線是 connector，拖格子時會跟著走</a:t>
+              <a:t>54 格・每一格是「縮圖＋地名」的群組，可以直接拖；連線是 connector，拖格子時會跟著走</a:t>
             </a:r>
           </a:p>
         </p:txBody>
@@ -6673,9 +6673,9 @@
         </p:nvGrpSpPr>
         <p:grpSpPr>
           <a:xfrm>
-            <a:off x="24300000" y="10200000"/>
+            <a:off x="18300000" y="10200000"/>
             <a:ext cx="1280000" cy="1020000"/>
-            <a:chOff x="24300000" y="10200000"/>
+            <a:chOff x="18300000" y="10200000"/>
             <a:chExt cx="1280000" cy="1020000"/>
           </a:xfrm>
         </p:grpSpPr>
@@ -6687,7 +6687,7 @@
           </p:nvSpPr>
           <p:spPr>
             <a:xfrm>
-              <a:off x="24300000" y="10200000"/>
+              <a:off x="18300000" y="10200000"/>
               <a:ext cx="1280000" cy="720000"/>
             </a:xfrm>
             <a:prstGeom prst="rect">
@@ -6749,7 +6749,7 @@
           </p:nvSpPr>
           <p:spPr>
             <a:xfrm>
-              <a:off x="24300000" y="10920000"/>
+              <a:off x="18300000" y="10920000"/>
               <a:ext cx="1280000" cy="300000"/>
             </a:xfrm>
             <a:prstGeom prst="rect">
@@ -6791,9 +6791,9 @@
         </p:nvGrpSpPr>
         <p:grpSpPr>
           <a:xfrm>
-            <a:off x="21300000" y="11350000"/>
+            <a:off x="21300000" y="7900000"/>
             <a:ext cx="1280000" cy="1020000"/>
-            <a:chOff x="21300000" y="11350000"/>
+            <a:chOff x="21300000" y="7900000"/>
             <a:chExt cx="1280000" cy="1020000"/>
           </a:xfrm>
         </p:grpSpPr>
@@ -6805,7 +6805,7 @@
           </p:nvSpPr>
           <p:spPr>
             <a:xfrm>
-              <a:off x="21300000" y="11350000"/>
+              <a:off x="21300000" y="7900000"/>
               <a:ext cx="1280000" cy="720000"/>
             </a:xfrm>
             <a:prstGeom prst="rect">
@@ -6854,7 +6854,7 @@
                     <a:srgbClr val="FFFFFF"/>
                   </a:solidFill>
                 </a:rPr>
-                <a:t>tomb_cryptwalk</a:t>
+                <a:t>tomb_saltroom</a:t>
               </a:r>
             </a:p>
           </p:txBody>
@@ -6867,7 +6867,7 @@
           </p:nvSpPr>
           <p:spPr>
             <a:xfrm>
-              <a:off x="21300000" y="12070000"/>
+              <a:off x="21300000" y="8620000"/>
               <a:ext cx="1280000" cy="300000"/>
             </a:xfrm>
             <a:prstGeom prst="rect">
@@ -6884,7 +6884,7 @@
               <a:pPr algn="ctr"/>
               <a:r>
                 <a:rPr sz="1300" b="1"/>
-                <a:t>墓道</a:t>
+                <a:t>硝室</a:t>
               </a:r>
             </a:p>
             <a:p>
@@ -6895,7 +6895,7 @@
                     <a:srgbClr val="9A989E"/>
                   </a:solidFill>
                 </a:rPr>
-                <a:t>cryptwalk</a:t>
+                <a:t>saltroom</a:t>
               </a:r>
             </a:p>
           </p:txBody>
@@ -6909,6 +6909,714 @@
         </p:nvGrpSpPr>
         <p:grpSpPr>
           <a:xfrm>
+            <a:off x="21300000" y="6750000"/>
+            <a:ext cx="1280000" cy="1020000"/>
+            <a:chOff x="21300000" y="6750000"/>
+            <a:chExt cx="1280000" cy="1020000"/>
+          </a:xfrm>
+        </p:grpSpPr>
+        <p:sp>
+          <p:nvSpPr>
+            <p:cNvPr id="127" name="Rectangle 126"/>
+            <p:cNvSpPr/>
+            <p:nvPr/>
+          </p:nvSpPr>
+          <p:spPr>
+            <a:xfrm>
+              <a:off x="21300000" y="6750000"/>
+              <a:ext cx="1280000" cy="720000"/>
+            </a:xfrm>
+            <a:prstGeom prst="rect">
+              <a:avLst/>
+            </a:prstGeom>
+            <a:solidFill>
+              <a:srgbClr val="3FB950"/>
+            </a:solidFill>
+            <a:ln>
+              <a:solidFill>
+                <a:srgbClr val="2B8A3A"/>
+              </a:solidFill>
+            </a:ln>
+          </p:spPr>
+          <p:style>
+            <a:lnRef idx="1">
+              <a:schemeClr val="accent1"/>
+            </a:lnRef>
+            <a:fillRef idx="3">
+              <a:schemeClr val="accent1"/>
+            </a:fillRef>
+            <a:effectRef idx="2">
+              <a:schemeClr val="accent1"/>
+            </a:effectRef>
+            <a:fontRef idx="minor">
+              <a:schemeClr val="lt1"/>
+            </a:fontRef>
+          </p:style>
+          <p:txBody>
+            <a:bodyPr rtlCol="0" anchor="ctr"/>
+            <a:lstStyle/>
+            <a:p>
+              <a:r>
+                <a:rPr sz="900" b="1">
+                  <a:solidFill>
+                    <a:srgbClr val="FFFFFF"/>
+                  </a:solidFill>
+                </a:rPr>
+                <a:t>要補圖</a:t>
+              </a:r>
+            </a:p>
+            <a:p>
+              <a:r>
+                <a:rPr sz="900" b="1">
+                  <a:solidFill>
+                    <a:srgbClr val="FFFFFF"/>
+                  </a:solidFill>
+                </a:rPr>
+                <a:t>tomb_chimney</a:t>
+              </a:r>
+            </a:p>
+          </p:txBody>
+        </p:sp>
+        <p:sp>
+          <p:nvSpPr>
+            <p:cNvPr id="128" name="TextBox 127"/>
+            <p:cNvSpPr txBox="1"/>
+            <p:nvPr/>
+          </p:nvSpPr>
+          <p:spPr>
+            <a:xfrm>
+              <a:off x="21300000" y="7470000"/>
+              <a:ext cx="1280000" cy="300000"/>
+            </a:xfrm>
+            <a:prstGeom prst="rect">
+              <a:avLst/>
+            </a:prstGeom>
+            <a:noFill/>
+          </p:spPr>
+          <p:txBody>
+            <a:bodyPr wrap="square" anchor="t">
+              <a:spAutoFit/>
+            </a:bodyPr>
+            <a:lstStyle/>
+            <a:p>
+              <a:pPr algn="ctr"/>
+              <a:r>
+                <a:rPr sz="1300" b="1"/>
+                <a:t>排煙井</a:t>
+              </a:r>
+            </a:p>
+            <a:p>
+              <a:pPr algn="ctr"/>
+              <a:r>
+                <a:rPr sz="800">
+                  <a:solidFill>
+                    <a:srgbClr val="9A989E"/>
+                  </a:solidFill>
+                </a:rPr>
+                <a:t>chimney</a:t>
+              </a:r>
+            </a:p>
+          </p:txBody>
+        </p:sp>
+      </p:grpSp>
+      <p:grpSp>
+        <p:nvGrpSpPr>
+          <p:cNvPr id="129" name="Group 128"/>
+          <p:cNvGrpSpPr/>
+          <p:nvPr/>
+        </p:nvGrpSpPr>
+        <p:grpSpPr>
+          <a:xfrm>
+            <a:off x="24300000" y="7900000"/>
+            <a:ext cx="1280000" cy="1020000"/>
+            <a:chOff x="24300000" y="7900000"/>
+            <a:chExt cx="1280000" cy="1020000"/>
+          </a:xfrm>
+        </p:grpSpPr>
+        <p:sp>
+          <p:nvSpPr>
+            <p:cNvPr id="130" name="Rectangle 129"/>
+            <p:cNvSpPr/>
+            <p:nvPr/>
+          </p:nvSpPr>
+          <p:spPr>
+            <a:xfrm>
+              <a:off x="24300000" y="7900000"/>
+              <a:ext cx="1280000" cy="720000"/>
+            </a:xfrm>
+            <a:prstGeom prst="rect">
+              <a:avLst/>
+            </a:prstGeom>
+            <a:solidFill>
+              <a:srgbClr val="3FB950"/>
+            </a:solidFill>
+            <a:ln>
+              <a:solidFill>
+                <a:srgbClr val="2B8A3A"/>
+              </a:solidFill>
+            </a:ln>
+          </p:spPr>
+          <p:style>
+            <a:lnRef idx="1">
+              <a:schemeClr val="accent1"/>
+            </a:lnRef>
+            <a:fillRef idx="3">
+              <a:schemeClr val="accent1"/>
+            </a:fillRef>
+            <a:effectRef idx="2">
+              <a:schemeClr val="accent1"/>
+            </a:effectRef>
+            <a:fontRef idx="minor">
+              <a:schemeClr val="lt1"/>
+            </a:fontRef>
+          </p:style>
+          <p:txBody>
+            <a:bodyPr rtlCol="0" anchor="ctr"/>
+            <a:lstStyle/>
+            <a:p>
+              <a:r>
+                <a:rPr sz="900" b="1">
+                  <a:solidFill>
+                    <a:srgbClr val="FFFFFF"/>
+                  </a:solidFill>
+                </a:rPr>
+                <a:t>要補圖</a:t>
+              </a:r>
+            </a:p>
+            <a:p>
+              <a:r>
+                <a:rPr sz="900" b="1">
+                  <a:solidFill>
+                    <a:srgbClr val="FFFFFF"/>
+                  </a:solidFill>
+                </a:rPr>
+                <a:t>tomb_nitrepit</a:t>
+              </a:r>
+            </a:p>
+          </p:txBody>
+        </p:sp>
+        <p:sp>
+          <p:nvSpPr>
+            <p:cNvPr id="131" name="TextBox 130"/>
+            <p:cNvSpPr txBox="1"/>
+            <p:nvPr/>
+          </p:nvSpPr>
+          <p:spPr>
+            <a:xfrm>
+              <a:off x="24300000" y="8620000"/>
+              <a:ext cx="1280000" cy="300000"/>
+            </a:xfrm>
+            <a:prstGeom prst="rect">
+              <a:avLst/>
+            </a:prstGeom>
+            <a:noFill/>
+          </p:spPr>
+          <p:txBody>
+            <a:bodyPr wrap="square" anchor="t">
+              <a:spAutoFit/>
+            </a:bodyPr>
+            <a:lstStyle/>
+            <a:p>
+              <a:pPr algn="ctr"/>
+              <a:r>
+                <a:rPr sz="1300" b="1"/>
+                <a:t>硝坑</a:t>
+              </a:r>
+            </a:p>
+            <a:p>
+              <a:pPr algn="ctr"/>
+              <a:r>
+                <a:rPr sz="800">
+                  <a:solidFill>
+                    <a:srgbClr val="9A989E"/>
+                  </a:solidFill>
+                </a:rPr>
+                <a:t>nitrepit</a:t>
+              </a:r>
+            </a:p>
+          </p:txBody>
+        </p:sp>
+      </p:grpSp>
+      <p:grpSp>
+        <p:nvGrpSpPr>
+          <p:cNvPr id="132" name="Group 131"/>
+          <p:cNvGrpSpPr/>
+          <p:nvPr/>
+        </p:nvGrpSpPr>
+        <p:grpSpPr>
+          <a:xfrm>
+            <a:off x="24300000" y="9050000"/>
+            <a:ext cx="1280000" cy="1020000"/>
+            <a:chOff x="24300000" y="9050000"/>
+            <a:chExt cx="1280000" cy="1020000"/>
+          </a:xfrm>
+        </p:grpSpPr>
+        <p:sp>
+          <p:nvSpPr>
+            <p:cNvPr id="133" name="Rectangle 132"/>
+            <p:cNvSpPr/>
+            <p:nvPr/>
+          </p:nvSpPr>
+          <p:spPr>
+            <a:xfrm>
+              <a:off x="24300000" y="9050000"/>
+              <a:ext cx="1280000" cy="720000"/>
+            </a:xfrm>
+            <a:prstGeom prst="rect">
+              <a:avLst/>
+            </a:prstGeom>
+            <a:solidFill>
+              <a:srgbClr val="3FB950"/>
+            </a:solidFill>
+            <a:ln>
+              <a:solidFill>
+                <a:srgbClr val="2B8A3A"/>
+              </a:solidFill>
+            </a:ln>
+          </p:spPr>
+          <p:style>
+            <a:lnRef idx="1">
+              <a:schemeClr val="accent1"/>
+            </a:lnRef>
+            <a:fillRef idx="3">
+              <a:schemeClr val="accent1"/>
+            </a:fillRef>
+            <a:effectRef idx="2">
+              <a:schemeClr val="accent1"/>
+            </a:effectRef>
+            <a:fontRef idx="minor">
+              <a:schemeClr val="lt1"/>
+            </a:fontRef>
+          </p:style>
+          <p:txBody>
+            <a:bodyPr rtlCol="0" anchor="ctr"/>
+            <a:lstStyle/>
+            <a:p>
+              <a:r>
+                <a:rPr sz="900" b="1">
+                  <a:solidFill>
+                    <a:srgbClr val="FFFFFF"/>
+                  </a:solidFill>
+                </a:rPr>
+                <a:t>要補圖</a:t>
+              </a:r>
+            </a:p>
+            <a:p>
+              <a:r>
+                <a:rPr sz="900" b="1">
+                  <a:solidFill>
+                    <a:srgbClr val="FFFFFF"/>
+                  </a:solidFill>
+                </a:rPr>
+                <a:t>tomb_masonhall</a:t>
+              </a:r>
+            </a:p>
+          </p:txBody>
+        </p:sp>
+        <p:sp>
+          <p:nvSpPr>
+            <p:cNvPr id="134" name="TextBox 133"/>
+            <p:cNvSpPr txBox="1"/>
+            <p:nvPr/>
+          </p:nvSpPr>
+          <p:spPr>
+            <a:xfrm>
+              <a:off x="24300000" y="9770000"/>
+              <a:ext cx="1280000" cy="300000"/>
+            </a:xfrm>
+            <a:prstGeom prst="rect">
+              <a:avLst/>
+            </a:prstGeom>
+            <a:noFill/>
+          </p:spPr>
+          <p:txBody>
+            <a:bodyPr wrap="square" anchor="t">
+              <a:spAutoFit/>
+            </a:bodyPr>
+            <a:lstStyle/>
+            <a:p>
+              <a:pPr algn="ctr"/>
+              <a:r>
+                <a:rPr sz="1300" b="1"/>
+                <a:t>石工長廳</a:t>
+              </a:r>
+            </a:p>
+            <a:p>
+              <a:pPr algn="ctr"/>
+              <a:r>
+                <a:rPr sz="800">
+                  <a:solidFill>
+                    <a:srgbClr val="9A989E"/>
+                  </a:solidFill>
+                </a:rPr>
+                <a:t>masonhall</a:t>
+              </a:r>
+            </a:p>
+          </p:txBody>
+        </p:sp>
+      </p:grpSp>
+      <p:grpSp>
+        <p:nvGrpSpPr>
+          <p:cNvPr id="135" name="Group 134"/>
+          <p:cNvGrpSpPr/>
+          <p:nvPr/>
+        </p:nvGrpSpPr>
+        <p:grpSpPr>
+          <a:xfrm>
+            <a:off x="27300000" y="9050000"/>
+            <a:ext cx="1280000" cy="1020000"/>
+            <a:chOff x="27300000" y="9050000"/>
+            <a:chExt cx="1280000" cy="1020000"/>
+          </a:xfrm>
+        </p:grpSpPr>
+        <p:sp>
+          <p:nvSpPr>
+            <p:cNvPr id="136" name="Rectangle 135"/>
+            <p:cNvSpPr/>
+            <p:nvPr/>
+          </p:nvSpPr>
+          <p:spPr>
+            <a:xfrm>
+              <a:off x="27300000" y="9050000"/>
+              <a:ext cx="1280000" cy="720000"/>
+            </a:xfrm>
+            <a:prstGeom prst="rect">
+              <a:avLst/>
+            </a:prstGeom>
+            <a:solidFill>
+              <a:srgbClr val="3FB950"/>
+            </a:solidFill>
+            <a:ln>
+              <a:solidFill>
+                <a:srgbClr val="2B8A3A"/>
+              </a:solidFill>
+            </a:ln>
+          </p:spPr>
+          <p:style>
+            <a:lnRef idx="1">
+              <a:schemeClr val="accent1"/>
+            </a:lnRef>
+            <a:fillRef idx="3">
+              <a:schemeClr val="accent1"/>
+            </a:fillRef>
+            <a:effectRef idx="2">
+              <a:schemeClr val="accent1"/>
+            </a:effectRef>
+            <a:fontRef idx="minor">
+              <a:schemeClr val="lt1"/>
+            </a:fontRef>
+          </p:style>
+          <p:txBody>
+            <a:bodyPr rtlCol="0" anchor="ctr"/>
+            <a:lstStyle/>
+            <a:p>
+              <a:r>
+                <a:rPr sz="900" b="1">
+                  <a:solidFill>
+                    <a:srgbClr val="FFFFFF"/>
+                  </a:solidFill>
+                </a:rPr>
+                <a:t>要補圖</a:t>
+              </a:r>
+            </a:p>
+            <a:p>
+              <a:r>
+                <a:rPr sz="900" b="1">
+                  <a:solidFill>
+                    <a:srgbClr val="FFFFFF"/>
+                  </a:solidFill>
+                </a:rPr>
+                <a:t>tomb_toolniche</a:t>
+              </a:r>
+            </a:p>
+          </p:txBody>
+        </p:sp>
+        <p:sp>
+          <p:nvSpPr>
+            <p:cNvPr id="137" name="TextBox 136"/>
+            <p:cNvSpPr txBox="1"/>
+            <p:nvPr/>
+          </p:nvSpPr>
+          <p:spPr>
+            <a:xfrm>
+              <a:off x="27300000" y="9770000"/>
+              <a:ext cx="1280000" cy="300000"/>
+            </a:xfrm>
+            <a:prstGeom prst="rect">
+              <a:avLst/>
+            </a:prstGeom>
+            <a:noFill/>
+          </p:spPr>
+          <p:txBody>
+            <a:bodyPr wrap="square" anchor="t">
+              <a:spAutoFit/>
+            </a:bodyPr>
+            <a:lstStyle/>
+            <a:p>
+              <a:pPr algn="ctr"/>
+              <a:r>
+                <a:rPr sz="1300" b="1"/>
+                <a:t>工具龕</a:t>
+              </a:r>
+            </a:p>
+            <a:p>
+              <a:pPr algn="ctr"/>
+              <a:r>
+                <a:rPr sz="800">
+                  <a:solidFill>
+                    <a:srgbClr val="9A989E"/>
+                  </a:solidFill>
+                </a:rPr>
+                <a:t>toolniche</a:t>
+              </a:r>
+            </a:p>
+          </p:txBody>
+        </p:sp>
+      </p:grpSp>
+      <p:grpSp>
+        <p:nvGrpSpPr>
+          <p:cNvPr id="138" name="Group 137"/>
+          <p:cNvGrpSpPr/>
+          <p:nvPr/>
+        </p:nvGrpSpPr>
+        <p:grpSpPr>
+          <a:xfrm>
+            <a:off x="24300000" y="10200000"/>
+            <a:ext cx="1280000" cy="1020000"/>
+            <a:chOff x="24300000" y="10200000"/>
+            <a:chExt cx="1280000" cy="1020000"/>
+          </a:xfrm>
+        </p:grpSpPr>
+        <p:sp>
+          <p:nvSpPr>
+            <p:cNvPr id="139" name="Rectangle 138"/>
+            <p:cNvSpPr/>
+            <p:nvPr/>
+          </p:nvSpPr>
+          <p:spPr>
+            <a:xfrm>
+              <a:off x="24300000" y="10200000"/>
+              <a:ext cx="1280000" cy="720000"/>
+            </a:xfrm>
+            <a:prstGeom prst="rect">
+              <a:avLst/>
+            </a:prstGeom>
+            <a:solidFill>
+              <a:srgbClr val="3FB950"/>
+            </a:solidFill>
+            <a:ln>
+              <a:solidFill>
+                <a:srgbClr val="2B8A3A"/>
+              </a:solidFill>
+            </a:ln>
+          </p:spPr>
+          <p:style>
+            <a:lnRef idx="1">
+              <a:schemeClr val="accent1"/>
+            </a:lnRef>
+            <a:fillRef idx="3">
+              <a:schemeClr val="accent1"/>
+            </a:fillRef>
+            <a:effectRef idx="2">
+              <a:schemeClr val="accent1"/>
+            </a:effectRef>
+            <a:fontRef idx="minor">
+              <a:schemeClr val="lt1"/>
+            </a:fontRef>
+          </p:style>
+          <p:txBody>
+            <a:bodyPr rtlCol="0" anchor="ctr"/>
+            <a:lstStyle/>
+            <a:p>
+              <a:r>
+                <a:rPr sz="900" b="1">
+                  <a:solidFill>
+                    <a:srgbClr val="FFFFFF"/>
+                  </a:solidFill>
+                </a:rPr>
+                <a:t>要補圖</a:t>
+              </a:r>
+            </a:p>
+            <a:p>
+              <a:r>
+                <a:rPr sz="900" b="1">
+                  <a:solidFill>
+                    <a:srgbClr val="FFFFFF"/>
+                  </a:solidFill>
+                </a:rPr>
+                <a:t>tomb_rubble</a:t>
+              </a:r>
+            </a:p>
+          </p:txBody>
+        </p:sp>
+        <p:sp>
+          <p:nvSpPr>
+            <p:cNvPr id="140" name="TextBox 139"/>
+            <p:cNvSpPr txBox="1"/>
+            <p:nvPr/>
+          </p:nvSpPr>
+          <p:spPr>
+            <a:xfrm>
+              <a:off x="24300000" y="10920000"/>
+              <a:ext cx="1280000" cy="300000"/>
+            </a:xfrm>
+            <a:prstGeom prst="rect">
+              <a:avLst/>
+            </a:prstGeom>
+            <a:noFill/>
+          </p:spPr>
+          <p:txBody>
+            <a:bodyPr wrap="square" anchor="t">
+              <a:spAutoFit/>
+            </a:bodyPr>
+            <a:lstStyle/>
+            <a:p>
+              <a:pPr algn="ctr"/>
+              <a:r>
+                <a:rPr sz="1300" b="1"/>
+                <a:t>落石堆</a:t>
+              </a:r>
+            </a:p>
+            <a:p>
+              <a:pPr algn="ctr"/>
+              <a:r>
+                <a:rPr sz="800">
+                  <a:solidFill>
+                    <a:srgbClr val="9A989E"/>
+                  </a:solidFill>
+                </a:rPr>
+                <a:t>rubble</a:t>
+              </a:r>
+            </a:p>
+          </p:txBody>
+        </p:sp>
+      </p:grpSp>
+      <p:grpSp>
+        <p:nvGrpSpPr>
+          <p:cNvPr id="141" name="Group 140"/>
+          <p:cNvGrpSpPr/>
+          <p:nvPr/>
+        </p:nvGrpSpPr>
+        <p:grpSpPr>
+          <a:xfrm>
+            <a:off x="21300000" y="11350000"/>
+            <a:ext cx="1280000" cy="1020000"/>
+            <a:chOff x="21300000" y="11350000"/>
+            <a:chExt cx="1280000" cy="1020000"/>
+          </a:xfrm>
+        </p:grpSpPr>
+        <p:sp>
+          <p:nvSpPr>
+            <p:cNvPr id="142" name="Rectangle 141"/>
+            <p:cNvSpPr/>
+            <p:nvPr/>
+          </p:nvSpPr>
+          <p:spPr>
+            <a:xfrm>
+              <a:off x="21300000" y="11350000"/>
+              <a:ext cx="1280000" cy="720000"/>
+            </a:xfrm>
+            <a:prstGeom prst="rect">
+              <a:avLst/>
+            </a:prstGeom>
+            <a:solidFill>
+              <a:srgbClr val="3FB950"/>
+            </a:solidFill>
+            <a:ln>
+              <a:solidFill>
+                <a:srgbClr val="2B8A3A"/>
+              </a:solidFill>
+            </a:ln>
+          </p:spPr>
+          <p:style>
+            <a:lnRef idx="1">
+              <a:schemeClr val="accent1"/>
+            </a:lnRef>
+            <a:fillRef idx="3">
+              <a:schemeClr val="accent1"/>
+            </a:fillRef>
+            <a:effectRef idx="2">
+              <a:schemeClr val="accent1"/>
+            </a:effectRef>
+            <a:fontRef idx="minor">
+              <a:schemeClr val="lt1"/>
+            </a:fontRef>
+          </p:style>
+          <p:txBody>
+            <a:bodyPr rtlCol="0" anchor="ctr"/>
+            <a:lstStyle/>
+            <a:p>
+              <a:r>
+                <a:rPr sz="900" b="1">
+                  <a:solidFill>
+                    <a:srgbClr val="FFFFFF"/>
+                  </a:solidFill>
+                </a:rPr>
+                <a:t>要補圖</a:t>
+              </a:r>
+            </a:p>
+            <a:p>
+              <a:r>
+                <a:rPr sz="900" b="1">
+                  <a:solidFill>
+                    <a:srgbClr val="FFFFFF"/>
+                  </a:solidFill>
+                </a:rPr>
+                <a:t>tomb_cryptwalk</a:t>
+              </a:r>
+            </a:p>
+          </p:txBody>
+        </p:sp>
+        <p:sp>
+          <p:nvSpPr>
+            <p:cNvPr id="143" name="TextBox 142"/>
+            <p:cNvSpPr txBox="1"/>
+            <p:nvPr/>
+          </p:nvSpPr>
+          <p:spPr>
+            <a:xfrm>
+              <a:off x="21300000" y="12070000"/>
+              <a:ext cx="1280000" cy="300000"/>
+            </a:xfrm>
+            <a:prstGeom prst="rect">
+              <a:avLst/>
+            </a:prstGeom>
+            <a:noFill/>
+          </p:spPr>
+          <p:txBody>
+            <a:bodyPr wrap="square" anchor="t">
+              <a:spAutoFit/>
+            </a:bodyPr>
+            <a:lstStyle/>
+            <a:p>
+              <a:pPr algn="ctr"/>
+              <a:r>
+                <a:rPr sz="1300" b="1"/>
+                <a:t>墓道</a:t>
+              </a:r>
+            </a:p>
+            <a:p>
+              <a:pPr algn="ctr"/>
+              <a:r>
+                <a:rPr sz="800">
+                  <a:solidFill>
+                    <a:srgbClr val="9A989E"/>
+                  </a:solidFill>
+                </a:rPr>
+                <a:t>cryptwalk</a:t>
+              </a:r>
+            </a:p>
+          </p:txBody>
+        </p:sp>
+      </p:grpSp>
+      <p:grpSp>
+        <p:nvGrpSpPr>
+          <p:cNvPr id="144" name="Group 143"/>
+          <p:cNvGrpSpPr/>
+          <p:nvPr/>
+        </p:nvGrpSpPr>
+        <p:grpSpPr>
+          <a:xfrm>
             <a:off x="21300000" y="12500000"/>
             <a:ext cx="1280000" cy="1020000"/>
             <a:chOff x="21300000" y="12500000"/>
@@ -6917,7 +7625,7 @@
         </p:grpSpPr>
         <p:pic>
           <p:nvPicPr>
-            <p:cNvPr id="127" name="Picture 126" descr="tomb_stair2.webp.jpg"/>
+            <p:cNvPr id="145" name="Picture 144" descr="tomb_stair2.webp.jpg"/>
             <p:cNvPicPr>
               <a:picLocks noChangeAspect="1"/>
             </p:cNvPicPr>
@@ -6941,7 +7649,7 @@
         </p:pic>
         <p:sp>
           <p:nvSpPr>
-            <p:cNvPr id="128" name="TextBox 127"/>
+            <p:cNvPr id="146" name="TextBox 145"/>
             <p:cNvSpPr txBox="1"/>
             <p:nvPr/>
           </p:nvSpPr>
@@ -6983,7 +7691,7 @@
       </p:grpSp>
       <p:grpSp>
         <p:nvGrpSpPr>
-          <p:cNvPr id="129" name="Group 128"/>
+          <p:cNvPr id="147" name="Group 146"/>
           <p:cNvGrpSpPr/>
           <p:nvPr/>
         </p:nvGrpSpPr>
@@ -6997,7 +7705,7 @@
         </p:grpSpPr>
         <p:pic>
           <p:nvPicPr>
-            <p:cNvPr id="130" name="Picture 129" descr="tomb_landing3.webp.jpg"/>
+            <p:cNvPr id="148" name="Picture 147" descr="tomb_landing3.webp.jpg"/>
             <p:cNvPicPr>
               <a:picLocks noChangeAspect="1"/>
             </p:cNvPicPr>
@@ -7021,7 +7729,7 @@
         </p:pic>
         <p:sp>
           <p:nvSpPr>
-            <p:cNvPr id="131" name="TextBox 130"/>
+            <p:cNvPr id="149" name="TextBox 148"/>
             <p:cNvSpPr txBox="1"/>
             <p:nvPr/>
           </p:nvSpPr>
@@ -7063,7 +7771,7 @@
       </p:grpSp>
       <p:grpSp>
         <p:nvGrpSpPr>
-          <p:cNvPr id="132" name="Group 131"/>
+          <p:cNvPr id="150" name="Group 149"/>
           <p:cNvGrpSpPr/>
           <p:nvPr/>
         </p:nvGrpSpPr>
@@ -7077,7 +7785,7 @@
         </p:grpSpPr>
         <p:pic>
           <p:nvPicPr>
-            <p:cNvPr id="133" name="Picture 132" descr="tomb_gallery3.webp.jpg"/>
+            <p:cNvPr id="151" name="Picture 150" descr="tomb_gallery3.webp.jpg"/>
             <p:cNvPicPr>
               <a:picLocks noChangeAspect="1"/>
             </p:cNvPicPr>
@@ -7101,7 +7809,7 @@
         </p:pic>
         <p:sp>
           <p:nvSpPr>
-            <p:cNvPr id="134" name="TextBox 133"/>
+            <p:cNvPr id="152" name="TextBox 151"/>
             <p:cNvSpPr txBox="1"/>
             <p:nvPr/>
           </p:nvSpPr>
@@ -7143,7 +7851,7 @@
       </p:grpSp>
       <p:grpSp>
         <p:nvGrpSpPr>
-          <p:cNvPr id="135" name="Group 134"/>
+          <p:cNvPr id="153" name="Group 152"/>
           <p:cNvGrpSpPr/>
           <p:nvPr/>
         </p:nvGrpSpPr>
@@ -7157,7 +7865,7 @@
         </p:grpSpPr>
         <p:pic>
           <p:nvPicPr>
-            <p:cNvPr id="136" name="Picture 135" descr="tomb_vaultw.webp.jpg"/>
+            <p:cNvPr id="154" name="Picture 153" descr="tomb_vaultw.webp.jpg"/>
             <p:cNvPicPr>
               <a:picLocks noChangeAspect="1"/>
             </p:cNvPicPr>
@@ -7181,7 +7889,7 @@
         </p:pic>
         <p:sp>
           <p:nvSpPr>
-            <p:cNvPr id="137" name="TextBox 136"/>
+            <p:cNvPr id="155" name="TextBox 154"/>
             <p:cNvSpPr txBox="1"/>
             <p:nvPr/>
           </p:nvSpPr>
@@ -7223,7 +7931,7 @@
       </p:grpSp>
       <p:grpSp>
         <p:nvGrpSpPr>
-          <p:cNvPr id="138" name="Group 137"/>
+          <p:cNvPr id="156" name="Group 155"/>
           <p:cNvGrpSpPr/>
           <p:nvPr/>
         </p:nvGrpSpPr>
@@ -7237,7 +7945,7 @@
         </p:grpSpPr>
         <p:pic>
           <p:nvPicPr>
-            <p:cNvPr id="139" name="Picture 138" descr="tomb_bonepit.webp.jpg"/>
+            <p:cNvPr id="157" name="Picture 156" descr="tomb_bonepit.webp.jpg"/>
             <p:cNvPicPr>
               <a:picLocks noChangeAspect="1"/>
             </p:cNvPicPr>
@@ -7261,7 +7969,7 @@
         </p:pic>
         <p:sp>
           <p:nvSpPr>
-            <p:cNvPr id="140" name="TextBox 139"/>
+            <p:cNvPr id="158" name="TextBox 157"/>
             <p:cNvSpPr txBox="1"/>
             <p:nvPr/>
           </p:nvSpPr>
@@ -7303,7 +8011,7 @@
       </p:grpSp>
       <p:grpSp>
         <p:nvGrpSpPr>
-          <p:cNvPr id="141" name="Group 140"/>
+          <p:cNvPr id="159" name="Group 158"/>
           <p:cNvGrpSpPr/>
           <p:nvPr/>
         </p:nvGrpSpPr>
@@ -7317,7 +8025,7 @@
         </p:grpSpPr>
         <p:pic>
           <p:nvPicPr>
-            <p:cNvPr id="142" name="Picture 141" descr="tomb_bonepit.webp.jpg"/>
+            <p:cNvPr id="160" name="Picture 159" descr="tomb_bonepit.webp.jpg"/>
             <p:cNvPicPr>
               <a:picLocks noChangeAspect="1"/>
             </p:cNvPicPr>
@@ -7341,7 +8049,7 @@
         </p:pic>
         <p:sp>
           <p:nvSpPr>
-            <p:cNvPr id="143" name="TextBox 142"/>
+            <p:cNvPr id="161" name="TextBox 160"/>
             <p:cNvSpPr txBox="1"/>
             <p:nvPr/>
           </p:nvSpPr>
@@ -7383,7 +8091,7 @@
       </p:grpSp>
       <p:grpSp>
         <p:nvGrpSpPr>
-          <p:cNvPr id="144" name="Group 143"/>
+          <p:cNvPr id="162" name="Group 161"/>
           <p:cNvGrpSpPr/>
           <p:nvPr/>
         </p:nvGrpSpPr>
@@ -7397,7 +8105,7 @@
         </p:grpSpPr>
         <p:pic>
           <p:nvPicPr>
-            <p:cNvPr id="145" name="Picture 144" descr="tomb_crypt.webp.jpg"/>
+            <p:cNvPr id="163" name="Picture 162" descr="tomb_crypt.webp.jpg"/>
             <p:cNvPicPr>
               <a:picLocks noChangeAspect="1"/>
             </p:cNvPicPr>
@@ -7421,7 +8129,7 @@
         </p:pic>
         <p:sp>
           <p:nvSpPr>
-            <p:cNvPr id="146" name="TextBox 145"/>
+            <p:cNvPr id="164" name="TextBox 163"/>
             <p:cNvSpPr txBox="1"/>
             <p:nvPr/>
           </p:nvSpPr>
@@ -7463,7 +8171,7 @@
       </p:grpSp>
       <p:cxnSp>
         <p:nvCxnSpPr>
-          <p:cNvPr id="147" name="Connector 146"/>
+          <p:cNvPr id="165" name="Connector 164"/>
           <p:cNvCxnSpPr/>
           <p:nvPr/>
         </p:nvCxnSpPr>
@@ -7498,7 +8206,7 @@
       </p:cxnSp>
       <p:cxnSp>
         <p:nvCxnSpPr>
-          <p:cNvPr id="148" name="Connector 147"/>
+          <p:cNvPr id="166" name="Connector 165"/>
           <p:cNvCxnSpPr/>
           <p:nvPr/>
         </p:nvCxnSpPr>
@@ -7533,7 +8241,7 @@
       </p:cxnSp>
       <p:cxnSp>
         <p:nvCxnSpPr>
-          <p:cNvPr id="149" name="Connector 148"/>
+          <p:cNvPr id="167" name="Connector 166"/>
           <p:cNvCxnSpPr/>
           <p:nvPr/>
         </p:nvCxnSpPr>
@@ -7568,7 +8276,7 @@
       </p:cxnSp>
       <p:cxnSp>
         <p:nvCxnSpPr>
-          <p:cNvPr id="150" name="Connector 149"/>
+          <p:cNvPr id="168" name="Connector 167"/>
           <p:cNvCxnSpPr/>
           <p:nvPr/>
         </p:nvCxnSpPr>
@@ -7603,7 +8311,7 @@
       </p:cxnSp>
       <p:cxnSp>
         <p:nvCxnSpPr>
-          <p:cNvPr id="151" name="Connector 150"/>
+          <p:cNvPr id="169" name="Connector 168"/>
           <p:cNvCxnSpPr/>
           <p:nvPr/>
         </p:nvCxnSpPr>
@@ -7638,7 +8346,7 @@
       </p:cxnSp>
       <p:cxnSp>
         <p:nvCxnSpPr>
-          <p:cNvPr id="152" name="Connector 151"/>
+          <p:cNvPr id="170" name="Connector 169"/>
           <p:cNvCxnSpPr/>
           <p:nvPr/>
         </p:nvCxnSpPr>
@@ -7673,7 +8381,7 @@
       </p:cxnSp>
       <p:cxnSp>
         <p:nvCxnSpPr>
-          <p:cNvPr id="153" name="Connector 152"/>
+          <p:cNvPr id="171" name="Connector 170"/>
           <p:cNvCxnSpPr/>
           <p:nvPr/>
         </p:nvCxnSpPr>
@@ -7708,7 +8416,7 @@
       </p:cxnSp>
       <p:cxnSp>
         <p:nvCxnSpPr>
-          <p:cNvPr id="154" name="Connector 153"/>
+          <p:cNvPr id="172" name="Connector 171"/>
           <p:cNvCxnSpPr/>
           <p:nvPr/>
         </p:nvCxnSpPr>
@@ -7743,7 +8451,7 @@
       </p:cxnSp>
       <p:cxnSp>
         <p:nvCxnSpPr>
-          <p:cNvPr id="155" name="Connector 154"/>
+          <p:cNvPr id="173" name="Connector 172"/>
           <p:cNvCxnSpPr/>
           <p:nvPr/>
         </p:nvCxnSpPr>
@@ -7778,7 +8486,7 @@
       </p:cxnSp>
       <p:cxnSp>
         <p:nvCxnSpPr>
-          <p:cNvPr id="156" name="Connector 155"/>
+          <p:cNvPr id="174" name="Connector 173"/>
           <p:cNvCxnSpPr/>
           <p:nvPr/>
         </p:nvCxnSpPr>
@@ -7813,7 +8521,7 @@
       </p:cxnSp>
       <p:cxnSp>
         <p:nvCxnSpPr>
-          <p:cNvPr id="157" name="Connector 156"/>
+          <p:cNvPr id="175" name="Connector 174"/>
           <p:cNvCxnSpPr/>
           <p:nvPr/>
         </p:nvCxnSpPr>
@@ -7848,7 +8556,7 @@
       </p:cxnSp>
       <p:cxnSp>
         <p:nvCxnSpPr>
-          <p:cNvPr id="158" name="Connector 157"/>
+          <p:cNvPr id="176" name="Connector 175"/>
           <p:cNvCxnSpPr/>
           <p:nvPr/>
         </p:nvCxnSpPr>
@@ -7883,7 +8591,7 @@
       </p:cxnSp>
       <p:cxnSp>
         <p:nvCxnSpPr>
-          <p:cNvPr id="159" name="Connector 158"/>
+          <p:cNvPr id="177" name="Connector 176"/>
           <p:cNvCxnSpPr/>
           <p:nvPr/>
         </p:nvCxnSpPr>
@@ -7918,7 +8626,7 @@
       </p:cxnSp>
       <p:cxnSp>
         <p:nvCxnSpPr>
-          <p:cNvPr id="160" name="Connector 159"/>
+          <p:cNvPr id="178" name="Connector 177"/>
           <p:cNvCxnSpPr/>
           <p:nvPr/>
         </p:nvCxnSpPr>
@@ -7953,7 +8661,7 @@
       </p:cxnSp>
       <p:cxnSp>
         <p:nvCxnSpPr>
-          <p:cNvPr id="161" name="Connector 160"/>
+          <p:cNvPr id="179" name="Connector 178"/>
           <p:cNvCxnSpPr/>
           <p:nvPr/>
         </p:nvCxnSpPr>
@@ -7988,7 +8696,7 @@
       </p:cxnSp>
       <p:cxnSp>
         <p:nvCxnSpPr>
-          <p:cNvPr id="162" name="Connector 161"/>
+          <p:cNvPr id="180" name="Connector 179"/>
           <p:cNvCxnSpPr/>
           <p:nvPr/>
         </p:nvCxnSpPr>
@@ -8023,7 +8731,7 @@
       </p:cxnSp>
       <p:cxnSp>
         <p:nvCxnSpPr>
-          <p:cNvPr id="163" name="Connector 162"/>
+          <p:cNvPr id="181" name="Connector 180"/>
           <p:cNvCxnSpPr/>
           <p:nvPr/>
         </p:nvCxnSpPr>
@@ -8058,7 +8766,7 @@
       </p:cxnSp>
       <p:cxnSp>
         <p:nvCxnSpPr>
-          <p:cNvPr id="164" name="Connector 163"/>
+          <p:cNvPr id="182" name="Connector 181"/>
           <p:cNvCxnSpPr/>
           <p:nvPr/>
         </p:nvCxnSpPr>
@@ -8093,7 +8801,7 @@
       </p:cxnSp>
       <p:cxnSp>
         <p:nvCxnSpPr>
-          <p:cNvPr id="165" name="Connector 164"/>
+          <p:cNvPr id="183" name="Connector 182"/>
           <p:cNvCxnSpPr/>
           <p:nvPr/>
         </p:nvCxnSpPr>
@@ -8128,7 +8836,7 @@
       </p:cxnSp>
       <p:cxnSp>
         <p:nvCxnSpPr>
-          <p:cNvPr id="166" name="Connector 165"/>
+          <p:cNvPr id="184" name="Connector 183"/>
           <p:cNvCxnSpPr/>
           <p:nvPr/>
         </p:nvCxnSpPr>
@@ -8163,7 +8871,7 @@
       </p:cxnSp>
       <p:cxnSp>
         <p:nvCxnSpPr>
-          <p:cNvPr id="167" name="Connector 166"/>
+          <p:cNvPr id="185" name="Connector 184"/>
           <p:cNvCxnSpPr/>
           <p:nvPr/>
         </p:nvCxnSpPr>
@@ -8198,7 +8906,7 @@
       </p:cxnSp>
       <p:cxnSp>
         <p:nvCxnSpPr>
-          <p:cNvPr id="168" name="Connector 167"/>
+          <p:cNvPr id="186" name="Connector 185"/>
           <p:cNvCxnSpPr/>
           <p:nvPr/>
         </p:nvCxnSpPr>
@@ -8233,7 +8941,7 @@
       </p:cxnSp>
       <p:cxnSp>
         <p:nvCxnSpPr>
-          <p:cNvPr id="169" name="Connector 168"/>
+          <p:cNvPr id="187" name="Connector 186"/>
           <p:cNvCxnSpPr/>
           <p:nvPr/>
         </p:nvCxnSpPr>
@@ -8268,7 +8976,7 @@
       </p:cxnSp>
       <p:cxnSp>
         <p:nvCxnSpPr>
-          <p:cNvPr id="170" name="Connector 169"/>
+          <p:cNvPr id="188" name="Connector 187"/>
           <p:cNvCxnSpPr/>
           <p:nvPr/>
         </p:nvCxnSpPr>
@@ -8303,7 +9011,7 @@
       </p:cxnSp>
       <p:cxnSp>
         <p:nvCxnSpPr>
-          <p:cNvPr id="171" name="Connector 170"/>
+          <p:cNvPr id="189" name="Connector 188"/>
           <p:cNvCxnSpPr/>
           <p:nvPr/>
         </p:nvCxnSpPr>
@@ -8338,7 +9046,7 @@
       </p:cxnSp>
       <p:cxnSp>
         <p:nvCxnSpPr>
-          <p:cNvPr id="172" name="Connector 171"/>
+          <p:cNvPr id="190" name="Connector 189"/>
           <p:cNvCxnSpPr/>
           <p:nvPr/>
         </p:nvCxnSpPr>
@@ -8373,7 +9081,7 @@
       </p:cxnSp>
       <p:cxnSp>
         <p:nvCxnSpPr>
-          <p:cNvPr id="173" name="Connector 172"/>
+          <p:cNvPr id="191" name="Connector 190"/>
           <p:cNvCxnSpPr/>
           <p:nvPr/>
         </p:nvCxnSpPr>
@@ -8408,7 +9116,7 @@
       </p:cxnSp>
       <p:cxnSp>
         <p:nvCxnSpPr>
-          <p:cNvPr id="174" name="Connector 173"/>
+          <p:cNvPr id="192" name="Connector 191"/>
           <p:cNvCxnSpPr/>
           <p:nvPr/>
         </p:nvCxnSpPr>
@@ -8443,7 +9151,7 @@
       </p:cxnSp>
       <p:cxnSp>
         <p:nvCxnSpPr>
-          <p:cNvPr id="175" name="Connector 174"/>
+          <p:cNvPr id="193" name="Connector 192"/>
           <p:cNvCxnSpPr/>
           <p:nvPr/>
         </p:nvCxnSpPr>
@@ -8478,7 +9186,7 @@
       </p:cxnSp>
       <p:cxnSp>
         <p:nvCxnSpPr>
-          <p:cNvPr id="176" name="Connector 175"/>
+          <p:cNvPr id="194" name="Connector 193"/>
           <p:cNvCxnSpPr/>
           <p:nvPr/>
         </p:nvCxnSpPr>
@@ -8513,7 +9221,7 @@
       </p:cxnSp>
       <p:cxnSp>
         <p:nvCxnSpPr>
-          <p:cNvPr id="177" name="Connector 176"/>
+          <p:cNvPr id="195" name="Connector 194"/>
           <p:cNvCxnSpPr/>
           <p:nvPr/>
         </p:nvCxnSpPr>
@@ -8548,7 +9256,7 @@
       </p:cxnSp>
       <p:cxnSp>
         <p:nvCxnSpPr>
-          <p:cNvPr id="178" name="Connector 177"/>
+          <p:cNvPr id="196" name="Connector 195"/>
           <p:cNvCxnSpPr/>
           <p:nvPr/>
         </p:nvCxnSpPr>
@@ -8583,7 +9291,7 @@
       </p:cxnSp>
       <p:cxnSp>
         <p:nvCxnSpPr>
-          <p:cNvPr id="179" name="Connector 178"/>
+          <p:cNvPr id="197" name="Connector 196"/>
           <p:cNvCxnSpPr/>
           <p:nvPr/>
         </p:nvCxnSpPr>
@@ -8618,7 +9326,7 @@
       </p:cxnSp>
       <p:cxnSp>
         <p:nvCxnSpPr>
-          <p:cNvPr id="180" name="Connector 179"/>
+          <p:cNvPr id="198" name="Connector 197"/>
           <p:cNvCxnSpPr/>
           <p:nvPr/>
         </p:nvCxnSpPr>
@@ -8653,7 +9361,7 @@
       </p:cxnSp>
       <p:cxnSp>
         <p:nvCxnSpPr>
-          <p:cNvPr id="181" name="Connector 180"/>
+          <p:cNvPr id="199" name="Connector 198"/>
           <p:cNvCxnSpPr/>
           <p:nvPr/>
         </p:nvCxnSpPr>
@@ -8688,7 +9396,7 @@
       </p:cxnSp>
       <p:cxnSp>
         <p:nvCxnSpPr>
-          <p:cNvPr id="182" name="Connector 181"/>
+          <p:cNvPr id="200" name="Connector 199"/>
           <p:cNvCxnSpPr/>
           <p:nvPr/>
         </p:nvCxnSpPr>
@@ -8723,7 +9431,7 @@
       </p:cxnSp>
       <p:cxnSp>
         <p:nvCxnSpPr>
-          <p:cNvPr id="183" name="Connector 182"/>
+          <p:cNvPr id="201" name="Connector 200"/>
           <p:cNvCxnSpPr/>
           <p:nvPr/>
         </p:nvCxnSpPr>
@@ -8758,13 +9466,13 @@
       </p:cxnSp>
       <p:cxnSp>
         <p:nvCxnSpPr>
-          <p:cNvPr id="184" name="Connector 183"/>
+          <p:cNvPr id="202" name="Connector 201"/>
           <p:cNvCxnSpPr/>
           <p:nvPr/>
         </p:nvCxnSpPr>
         <p:spPr>
-          <a:xfrm>
-            <a:off x="21940000" y="9410000"/>
+          <a:xfrm flipV="1">
+            <a:off x="21940000" y="8260000"/>
             <a:ext cx="0" cy="1150000"/>
           </a:xfrm>
           <a:prstGeom prst="line">
@@ -8793,14 +9501,14 @@
       </p:cxnSp>
       <p:cxnSp>
         <p:nvCxnSpPr>
-          <p:cNvPr id="185" name="Connector 184"/>
+          <p:cNvPr id="203" name="Connector 202"/>
           <p:cNvCxnSpPr/>
           <p:nvPr/>
         </p:nvCxnSpPr>
         <p:spPr>
           <a:xfrm>
-            <a:off x="21940000" y="10560000"/>
-            <a:ext cx="0" cy="1150000"/>
+            <a:off x="21940000" y="9410000"/>
+            <a:ext cx="3000000" cy="0"/>
           </a:xfrm>
           <a:prstGeom prst="line">
             <a:avLst/>
@@ -8828,14 +9536,14 @@
       </p:cxnSp>
       <p:cxnSp>
         <p:nvCxnSpPr>
-          <p:cNvPr id="186" name="Connector 185"/>
+          <p:cNvPr id="204" name="Connector 203"/>
           <p:cNvCxnSpPr/>
           <p:nvPr/>
         </p:nvCxnSpPr>
         <p:spPr>
           <a:xfrm>
-            <a:off x="21940000" y="10560000"/>
-            <a:ext cx="3000000" cy="0"/>
+            <a:off x="21940000" y="9410000"/>
+            <a:ext cx="0" cy="1150000"/>
           </a:xfrm>
           <a:prstGeom prst="line">
             <a:avLst/>
@@ -8863,13 +9571,13 @@
       </p:cxnSp>
       <p:cxnSp>
         <p:nvCxnSpPr>
-          <p:cNvPr id="187" name="Connector 186"/>
+          <p:cNvPr id="205" name="Connector 204"/>
           <p:cNvCxnSpPr/>
           <p:nvPr/>
         </p:nvCxnSpPr>
         <p:spPr>
           <a:xfrm>
-            <a:off x="21940000" y="11710000"/>
+            <a:off x="21940000" y="10560000"/>
             <a:ext cx="0" cy="1150000"/>
           </a:xfrm>
           <a:prstGeom prst="line">
@@ -8898,14 +9606,14 @@
       </p:cxnSp>
       <p:cxnSp>
         <p:nvCxnSpPr>
-          <p:cNvPr id="188" name="Connector 187"/>
+          <p:cNvPr id="206" name="Connector 205"/>
           <p:cNvCxnSpPr/>
           <p:nvPr/>
         </p:nvCxnSpPr>
         <p:spPr>
-          <a:xfrm>
-            <a:off x="21940000" y="12860000"/>
-            <a:ext cx="0" cy="1150000"/>
+          <a:xfrm flipH="1">
+            <a:off x="18940000" y="10560000"/>
+            <a:ext cx="3000000" cy="0"/>
           </a:xfrm>
           <a:prstGeom prst="line">
             <a:avLst/>
@@ -8933,13 +9641,13 @@
       </p:cxnSp>
       <p:cxnSp>
         <p:nvCxnSpPr>
-          <p:cNvPr id="189" name="Connector 188"/>
+          <p:cNvPr id="207" name="Connector 206"/>
           <p:cNvCxnSpPr/>
           <p:nvPr/>
         </p:nvCxnSpPr>
         <p:spPr>
-          <a:xfrm>
-            <a:off x="21940000" y="14010000"/>
+          <a:xfrm flipV="1">
+            <a:off x="21940000" y="7110000"/>
             <a:ext cx="0" cy="1150000"/>
           </a:xfrm>
           <a:prstGeom prst="line">
@@ -8968,14 +9676,14 @@
       </p:cxnSp>
       <p:cxnSp>
         <p:nvCxnSpPr>
-          <p:cNvPr id="190" name="Connector 189"/>
+          <p:cNvPr id="208" name="Connector 207"/>
           <p:cNvCxnSpPr/>
           <p:nvPr/>
         </p:nvCxnSpPr>
         <p:spPr>
           <a:xfrm>
-            <a:off x="21940000" y="15160000"/>
-            <a:ext cx="0" cy="1150000"/>
+            <a:off x="21940000" y="8260000"/>
+            <a:ext cx="3000000" cy="0"/>
           </a:xfrm>
           <a:prstGeom prst="line">
             <a:avLst/>
@@ -9003,13 +9711,13 @@
       </p:cxnSp>
       <p:cxnSp>
         <p:nvCxnSpPr>
-          <p:cNvPr id="191" name="Connector 190"/>
+          <p:cNvPr id="209" name="Connector 208"/>
           <p:cNvCxnSpPr/>
           <p:nvPr/>
         </p:nvCxnSpPr>
         <p:spPr>
           <a:xfrm>
-            <a:off x="21940000" y="15160000"/>
+            <a:off x="24940000" y="9410000"/>
             <a:ext cx="3000000" cy="0"/>
           </a:xfrm>
           <a:prstGeom prst="line">
@@ -9038,13 +9746,13 @@
       </p:cxnSp>
       <p:cxnSp>
         <p:nvCxnSpPr>
-          <p:cNvPr id="192" name="Connector 191"/>
+          <p:cNvPr id="210" name="Connector 209"/>
           <p:cNvCxnSpPr/>
           <p:nvPr/>
         </p:nvCxnSpPr>
         <p:spPr>
           <a:xfrm>
-            <a:off x="24940000" y="15160000"/>
+            <a:off x="24940000" y="9410000"/>
             <a:ext cx="0" cy="1150000"/>
           </a:xfrm>
           <a:prstGeom prst="line">
@@ -9073,7 +9781,217 @@
       </p:cxnSp>
       <p:cxnSp>
         <p:nvCxnSpPr>
-          <p:cNvPr id="193" name="Connector 192"/>
+          <p:cNvPr id="211" name="Connector 210"/>
+          <p:cNvCxnSpPr/>
+          <p:nvPr/>
+        </p:nvCxnSpPr>
+        <p:spPr>
+          <a:xfrm>
+            <a:off x="21940000" y="11710000"/>
+            <a:ext cx="0" cy="1150000"/>
+          </a:xfrm>
+          <a:prstGeom prst="line">
+            <a:avLst/>
+          </a:prstGeom>
+          <a:ln w="19050">
+            <a:solidFill>
+              <a:srgbClr val="333338"/>
+            </a:solidFill>
+          </a:ln>
+        </p:spPr>
+        <p:style>
+          <a:lnRef idx="2">
+            <a:schemeClr val="accent1"/>
+          </a:lnRef>
+          <a:fillRef idx="0">
+            <a:schemeClr val="accent1"/>
+          </a:fillRef>
+          <a:effectRef idx="1">
+            <a:schemeClr val="accent1"/>
+          </a:effectRef>
+          <a:fontRef idx="minor">
+            <a:schemeClr val="tx1"/>
+          </a:fontRef>
+        </p:style>
+      </p:cxnSp>
+      <p:cxnSp>
+        <p:nvCxnSpPr>
+          <p:cNvPr id="212" name="Connector 211"/>
+          <p:cNvCxnSpPr/>
+          <p:nvPr/>
+        </p:nvCxnSpPr>
+        <p:spPr>
+          <a:xfrm>
+            <a:off x="21940000" y="12860000"/>
+            <a:ext cx="0" cy="1150000"/>
+          </a:xfrm>
+          <a:prstGeom prst="line">
+            <a:avLst/>
+          </a:prstGeom>
+          <a:ln w="19050">
+            <a:solidFill>
+              <a:srgbClr val="333338"/>
+            </a:solidFill>
+          </a:ln>
+        </p:spPr>
+        <p:style>
+          <a:lnRef idx="2">
+            <a:schemeClr val="accent1"/>
+          </a:lnRef>
+          <a:fillRef idx="0">
+            <a:schemeClr val="accent1"/>
+          </a:fillRef>
+          <a:effectRef idx="1">
+            <a:schemeClr val="accent1"/>
+          </a:effectRef>
+          <a:fontRef idx="minor">
+            <a:schemeClr val="tx1"/>
+          </a:fontRef>
+        </p:style>
+      </p:cxnSp>
+      <p:cxnSp>
+        <p:nvCxnSpPr>
+          <p:cNvPr id="213" name="Connector 212"/>
+          <p:cNvCxnSpPr/>
+          <p:nvPr/>
+        </p:nvCxnSpPr>
+        <p:spPr>
+          <a:xfrm>
+            <a:off x="21940000" y="14010000"/>
+            <a:ext cx="0" cy="1150000"/>
+          </a:xfrm>
+          <a:prstGeom prst="line">
+            <a:avLst/>
+          </a:prstGeom>
+          <a:ln w="19050">
+            <a:solidFill>
+              <a:srgbClr val="333338"/>
+            </a:solidFill>
+          </a:ln>
+        </p:spPr>
+        <p:style>
+          <a:lnRef idx="2">
+            <a:schemeClr val="accent1"/>
+          </a:lnRef>
+          <a:fillRef idx="0">
+            <a:schemeClr val="accent1"/>
+          </a:fillRef>
+          <a:effectRef idx="1">
+            <a:schemeClr val="accent1"/>
+          </a:effectRef>
+          <a:fontRef idx="minor">
+            <a:schemeClr val="tx1"/>
+          </a:fontRef>
+        </p:style>
+      </p:cxnSp>
+      <p:cxnSp>
+        <p:nvCxnSpPr>
+          <p:cNvPr id="214" name="Connector 213"/>
+          <p:cNvCxnSpPr/>
+          <p:nvPr/>
+        </p:nvCxnSpPr>
+        <p:spPr>
+          <a:xfrm>
+            <a:off x="21940000" y="15160000"/>
+            <a:ext cx="0" cy="1150000"/>
+          </a:xfrm>
+          <a:prstGeom prst="line">
+            <a:avLst/>
+          </a:prstGeom>
+          <a:ln w="19050">
+            <a:solidFill>
+              <a:srgbClr val="333338"/>
+            </a:solidFill>
+          </a:ln>
+        </p:spPr>
+        <p:style>
+          <a:lnRef idx="2">
+            <a:schemeClr val="accent1"/>
+          </a:lnRef>
+          <a:fillRef idx="0">
+            <a:schemeClr val="accent1"/>
+          </a:fillRef>
+          <a:effectRef idx="1">
+            <a:schemeClr val="accent1"/>
+          </a:effectRef>
+          <a:fontRef idx="minor">
+            <a:schemeClr val="tx1"/>
+          </a:fontRef>
+        </p:style>
+      </p:cxnSp>
+      <p:cxnSp>
+        <p:nvCxnSpPr>
+          <p:cNvPr id="215" name="Connector 214"/>
+          <p:cNvCxnSpPr/>
+          <p:nvPr/>
+        </p:nvCxnSpPr>
+        <p:spPr>
+          <a:xfrm>
+            <a:off x="21940000" y="15160000"/>
+            <a:ext cx="3000000" cy="0"/>
+          </a:xfrm>
+          <a:prstGeom prst="line">
+            <a:avLst/>
+          </a:prstGeom>
+          <a:ln w="19050">
+            <a:solidFill>
+              <a:srgbClr val="333338"/>
+            </a:solidFill>
+          </a:ln>
+        </p:spPr>
+        <p:style>
+          <a:lnRef idx="2">
+            <a:schemeClr val="accent1"/>
+          </a:lnRef>
+          <a:fillRef idx="0">
+            <a:schemeClr val="accent1"/>
+          </a:fillRef>
+          <a:effectRef idx="1">
+            <a:schemeClr val="accent1"/>
+          </a:effectRef>
+          <a:fontRef idx="minor">
+            <a:schemeClr val="tx1"/>
+          </a:fontRef>
+        </p:style>
+      </p:cxnSp>
+      <p:cxnSp>
+        <p:nvCxnSpPr>
+          <p:cNvPr id="216" name="Connector 215"/>
+          <p:cNvCxnSpPr/>
+          <p:nvPr/>
+        </p:nvCxnSpPr>
+        <p:spPr>
+          <a:xfrm>
+            <a:off x="24940000" y="15160000"/>
+            <a:ext cx="0" cy="1150000"/>
+          </a:xfrm>
+          <a:prstGeom prst="line">
+            <a:avLst/>
+          </a:prstGeom>
+          <a:ln w="19050">
+            <a:solidFill>
+              <a:srgbClr val="333338"/>
+            </a:solidFill>
+          </a:ln>
+        </p:spPr>
+        <p:style>
+          <a:lnRef idx="2">
+            <a:schemeClr val="accent1"/>
+          </a:lnRef>
+          <a:fillRef idx="0">
+            <a:schemeClr val="accent1"/>
+          </a:fillRef>
+          <a:effectRef idx="1">
+            <a:schemeClr val="accent1"/>
+          </a:effectRef>
+          <a:fontRef idx="minor">
+            <a:schemeClr val="tx1"/>
+          </a:fontRef>
+        </p:style>
+      </p:cxnSp>
+      <p:cxnSp>
+        <p:nvCxnSpPr>
+          <p:cNvPr id="217" name="Connector 216"/>
           <p:cNvCxnSpPr/>
           <p:nvPr/>
         </p:nvCxnSpPr>

--- a/resources/map/_layout_tomb.pptx
+++ b/resources/map/_layout_tomb.pptx
@@ -3122,7 +3122,7 @@
                   <a:srgbClr val="7A787E"/>
                 </a:solidFill>
               </a:rPr>
-              <a:t>54 格・每一格是「縮圖＋地名」的群組，可以直接拖；連線是 connector，拖格子時會跟著走</a:t>
+              <a:t>57 格・每一格是「縮圖＋地名」的群組，可以直接拖；連線是 connector，拖格子時會跟著走</a:t>
             </a:r>
           </a:p>
         </p:txBody>
@@ -7623,9 +7623,363 @@
             <a:chExt cx="1280000" cy="1020000"/>
           </a:xfrm>
         </p:grpSpPr>
+        <p:sp>
+          <p:nvSpPr>
+            <p:cNvPr id="145" name="Rectangle 144"/>
+            <p:cNvSpPr/>
+            <p:nvPr/>
+          </p:nvSpPr>
+          <p:spPr>
+            <a:xfrm>
+              <a:off x="21300000" y="12500000"/>
+              <a:ext cx="1280000" cy="720000"/>
+            </a:xfrm>
+            <a:prstGeom prst="rect">
+              <a:avLst/>
+            </a:prstGeom>
+            <a:solidFill>
+              <a:srgbClr val="3FB950"/>
+            </a:solidFill>
+            <a:ln>
+              <a:solidFill>
+                <a:srgbClr val="2B8A3A"/>
+              </a:solidFill>
+            </a:ln>
+          </p:spPr>
+          <p:style>
+            <a:lnRef idx="1">
+              <a:schemeClr val="accent1"/>
+            </a:lnRef>
+            <a:fillRef idx="3">
+              <a:schemeClr val="accent1"/>
+            </a:fillRef>
+            <a:effectRef idx="2">
+              <a:schemeClr val="accent1"/>
+            </a:effectRef>
+            <a:fontRef idx="minor">
+              <a:schemeClr val="lt1"/>
+            </a:fontRef>
+          </p:style>
+          <p:txBody>
+            <a:bodyPr rtlCol="0" anchor="ctr"/>
+            <a:lstStyle/>
+            <a:p>
+              <a:r>
+                <a:rPr sz="900" b="1">
+                  <a:solidFill>
+                    <a:srgbClr val="FFFFFF"/>
+                  </a:solidFill>
+                </a:rPr>
+                <a:t>要補圖</a:t>
+              </a:r>
+            </a:p>
+            <a:p>
+              <a:r>
+                <a:rPr sz="900" b="1">
+                  <a:solidFill>
+                    <a:srgbClr val="FFFFFF"/>
+                  </a:solidFill>
+                </a:rPr>
+                <a:t>tomb_deepwalk</a:t>
+              </a:r>
+            </a:p>
+          </p:txBody>
+        </p:sp>
+        <p:sp>
+          <p:nvSpPr>
+            <p:cNvPr id="146" name="TextBox 145"/>
+            <p:cNvSpPr txBox="1"/>
+            <p:nvPr/>
+          </p:nvSpPr>
+          <p:spPr>
+            <a:xfrm>
+              <a:off x="21300000" y="13220000"/>
+              <a:ext cx="1280000" cy="300000"/>
+            </a:xfrm>
+            <a:prstGeom prst="rect">
+              <a:avLst/>
+            </a:prstGeom>
+            <a:noFill/>
+          </p:spPr>
+          <p:txBody>
+            <a:bodyPr wrap="square" anchor="t">
+              <a:spAutoFit/>
+            </a:bodyPr>
+            <a:lstStyle/>
+            <a:p>
+              <a:pPr algn="ctr"/>
+              <a:r>
+                <a:rPr sz="1300" b="1"/>
+                <a:t>墓道深處</a:t>
+              </a:r>
+            </a:p>
+            <a:p>
+              <a:pPr algn="ctr"/>
+              <a:r>
+                <a:rPr sz="800">
+                  <a:solidFill>
+                    <a:srgbClr val="9A989E"/>
+                  </a:solidFill>
+                </a:rPr>
+                <a:t>deepwalk</a:t>
+              </a:r>
+            </a:p>
+          </p:txBody>
+        </p:sp>
+      </p:grpSp>
+      <p:grpSp>
+        <p:nvGrpSpPr>
+          <p:cNvPr id="147" name="Group 146"/>
+          <p:cNvGrpSpPr/>
+          <p:nvPr/>
+        </p:nvGrpSpPr>
+        <p:grpSpPr>
+          <a:xfrm>
+            <a:off x="21300000" y="13650000"/>
+            <a:ext cx="1280000" cy="1020000"/>
+            <a:chOff x="21300000" y="13650000"/>
+            <a:chExt cx="1280000" cy="1020000"/>
+          </a:xfrm>
+        </p:grpSpPr>
+        <p:sp>
+          <p:nvSpPr>
+            <p:cNvPr id="148" name="Rectangle 147"/>
+            <p:cNvSpPr/>
+            <p:nvPr/>
+          </p:nvSpPr>
+          <p:spPr>
+            <a:xfrm>
+              <a:off x="21300000" y="13650000"/>
+              <a:ext cx="1280000" cy="720000"/>
+            </a:xfrm>
+            <a:prstGeom prst="rect">
+              <a:avLst/>
+            </a:prstGeom>
+            <a:solidFill>
+              <a:srgbClr val="3FB950"/>
+            </a:solidFill>
+            <a:ln>
+              <a:solidFill>
+                <a:srgbClr val="2B8A3A"/>
+              </a:solidFill>
+            </a:ln>
+          </p:spPr>
+          <p:style>
+            <a:lnRef idx="1">
+              <a:schemeClr val="accent1"/>
+            </a:lnRef>
+            <a:fillRef idx="3">
+              <a:schemeClr val="accent1"/>
+            </a:fillRef>
+            <a:effectRef idx="2">
+              <a:schemeClr val="accent1"/>
+            </a:effectRef>
+            <a:fontRef idx="minor">
+              <a:schemeClr val="lt1"/>
+            </a:fontRef>
+          </p:style>
+          <p:txBody>
+            <a:bodyPr rtlCol="0" anchor="ctr"/>
+            <a:lstStyle/>
+            <a:p>
+              <a:r>
+                <a:rPr sz="900" b="1">
+                  <a:solidFill>
+                    <a:srgbClr val="FFFFFF"/>
+                  </a:solidFill>
+                </a:rPr>
+                <a:t>要補圖</a:t>
+              </a:r>
+            </a:p>
+            <a:p>
+              <a:r>
+                <a:rPr sz="900" b="1">
+                  <a:solidFill>
+                    <a:srgbClr val="FFFFFF"/>
+                  </a:solidFill>
+                </a:rPr>
+                <a:t>tomb_crossvault</a:t>
+              </a:r>
+            </a:p>
+          </p:txBody>
+        </p:sp>
+        <p:sp>
+          <p:nvSpPr>
+            <p:cNvPr id="149" name="TextBox 148"/>
+            <p:cNvSpPr txBox="1"/>
+            <p:nvPr/>
+          </p:nvSpPr>
+          <p:spPr>
+            <a:xfrm>
+              <a:off x="21300000" y="14370000"/>
+              <a:ext cx="1280000" cy="300000"/>
+            </a:xfrm>
+            <a:prstGeom prst="rect">
+              <a:avLst/>
+            </a:prstGeom>
+            <a:noFill/>
+          </p:spPr>
+          <p:txBody>
+            <a:bodyPr wrap="square" anchor="t">
+              <a:spAutoFit/>
+            </a:bodyPr>
+            <a:lstStyle/>
+            <a:p>
+              <a:pPr algn="ctr"/>
+              <a:r>
+                <a:rPr sz="1300" b="1"/>
+                <a:t>十字墓窖</a:t>
+              </a:r>
+            </a:p>
+            <a:p>
+              <a:pPr algn="ctr"/>
+              <a:r>
+                <a:rPr sz="800">
+                  <a:solidFill>
+                    <a:srgbClr val="9A989E"/>
+                  </a:solidFill>
+                </a:rPr>
+                <a:t>crossvault</a:t>
+              </a:r>
+            </a:p>
+          </p:txBody>
+        </p:sp>
+      </p:grpSp>
+      <p:grpSp>
+        <p:nvGrpSpPr>
+          <p:cNvPr id="150" name="Group 149"/>
+          <p:cNvGrpSpPr/>
+          <p:nvPr/>
+        </p:nvGrpSpPr>
+        <p:grpSpPr>
+          <a:xfrm>
+            <a:off x="18300000" y="13650000"/>
+            <a:ext cx="1280000" cy="1020000"/>
+            <a:chOff x="18300000" y="13650000"/>
+            <a:chExt cx="1280000" cy="1020000"/>
+          </a:xfrm>
+        </p:grpSpPr>
+        <p:sp>
+          <p:nvSpPr>
+            <p:cNvPr id="151" name="Rectangle 150"/>
+            <p:cNvSpPr/>
+            <p:nvPr/>
+          </p:nvSpPr>
+          <p:spPr>
+            <a:xfrm>
+              <a:off x="18300000" y="13650000"/>
+              <a:ext cx="1280000" cy="720000"/>
+            </a:xfrm>
+            <a:prstGeom prst="rect">
+              <a:avLst/>
+            </a:prstGeom>
+            <a:solidFill>
+              <a:srgbClr val="3FB950"/>
+            </a:solidFill>
+            <a:ln>
+              <a:solidFill>
+                <a:srgbClr val="2B8A3A"/>
+              </a:solidFill>
+            </a:ln>
+          </p:spPr>
+          <p:style>
+            <a:lnRef idx="1">
+              <a:schemeClr val="accent1"/>
+            </a:lnRef>
+            <a:fillRef idx="3">
+              <a:schemeClr val="accent1"/>
+            </a:fillRef>
+            <a:effectRef idx="2">
+              <a:schemeClr val="accent1"/>
+            </a:effectRef>
+            <a:fontRef idx="minor">
+              <a:schemeClr val="lt1"/>
+            </a:fontRef>
+          </p:style>
+          <p:txBody>
+            <a:bodyPr rtlCol="0" anchor="ctr"/>
+            <a:lstStyle/>
+            <a:p>
+              <a:r>
+                <a:rPr sz="900" b="1">
+                  <a:solidFill>
+                    <a:srgbClr val="FFFFFF"/>
+                  </a:solidFill>
+                </a:rPr>
+                <a:t>要補圖</a:t>
+              </a:r>
+            </a:p>
+            <a:p>
+              <a:r>
+                <a:rPr sz="900" b="1">
+                  <a:solidFill>
+                    <a:srgbClr val="FFFFFF"/>
+                  </a:solidFill>
+                </a:rPr>
+                <a:t>tomb_falsestair</a:t>
+              </a:r>
+            </a:p>
+          </p:txBody>
+        </p:sp>
+        <p:sp>
+          <p:nvSpPr>
+            <p:cNvPr id="152" name="TextBox 151"/>
+            <p:cNvSpPr txBox="1"/>
+            <p:nvPr/>
+          </p:nvSpPr>
+          <p:spPr>
+            <a:xfrm>
+              <a:off x="18300000" y="14370000"/>
+              <a:ext cx="1280000" cy="300000"/>
+            </a:xfrm>
+            <a:prstGeom prst="rect">
+              <a:avLst/>
+            </a:prstGeom>
+            <a:noFill/>
+          </p:spPr>
+          <p:txBody>
+            <a:bodyPr wrap="square" anchor="t">
+              <a:spAutoFit/>
+            </a:bodyPr>
+            <a:lstStyle/>
+            <a:p>
+              <a:pPr algn="ctr"/>
+              <a:r>
+                <a:rPr sz="1300" b="1"/>
+                <a:t>塌陷的階梯</a:t>
+              </a:r>
+            </a:p>
+            <a:p>
+              <a:pPr algn="ctr"/>
+              <a:r>
+                <a:rPr sz="800">
+                  <a:solidFill>
+                    <a:srgbClr val="9A989E"/>
+                  </a:solidFill>
+                </a:rPr>
+                <a:t>falsestair</a:t>
+              </a:r>
+            </a:p>
+          </p:txBody>
+        </p:sp>
+      </p:grpSp>
+      <p:grpSp>
+        <p:nvGrpSpPr>
+          <p:cNvPr id="153" name="Group 152"/>
+          <p:cNvGrpSpPr/>
+          <p:nvPr/>
+        </p:nvGrpSpPr>
+        <p:grpSpPr>
+          <a:xfrm>
+            <a:off x="24300000" y="13650000"/>
+            <a:ext cx="1280000" cy="1020000"/>
+            <a:chOff x="24300000" y="13650000"/>
+            <a:chExt cx="1280000" cy="1020000"/>
+          </a:xfrm>
+        </p:grpSpPr>
         <p:pic>
           <p:nvPicPr>
-            <p:cNvPr id="145" name="Picture 144" descr="tomb_stair2.webp.jpg"/>
+            <p:cNvPr id="154" name="Picture 153" descr="tomb_stair2.webp.jpg"/>
             <p:cNvPicPr>
               <a:picLocks noChangeAspect="1"/>
             </p:cNvPicPr>
@@ -7639,7 +7993,7 @@
           </p:blipFill>
           <p:spPr>
             <a:xfrm>
-              <a:off x="21300000" y="12500000"/>
+              <a:off x="24300000" y="13650000"/>
               <a:ext cx="1280000" cy="720000"/>
             </a:xfrm>
             <a:prstGeom prst="rect">
@@ -7649,13 +8003,13 @@
         </p:pic>
         <p:sp>
           <p:nvSpPr>
-            <p:cNvPr id="146" name="TextBox 145"/>
+            <p:cNvPr id="155" name="TextBox 154"/>
             <p:cNvSpPr txBox="1"/>
             <p:nvPr/>
           </p:nvSpPr>
           <p:spPr>
             <a:xfrm>
-              <a:off x="21300000" y="13220000"/>
+              <a:off x="24300000" y="14370000"/>
               <a:ext cx="1280000" cy="300000"/>
             </a:xfrm>
             <a:prstGeom prst="rect">
@@ -7691,21 +8045,21 @@
       </p:grpSp>
       <p:grpSp>
         <p:nvGrpSpPr>
-          <p:cNvPr id="147" name="Group 146"/>
+          <p:cNvPr id="156" name="Group 155"/>
           <p:cNvGrpSpPr/>
           <p:nvPr/>
         </p:nvGrpSpPr>
         <p:grpSpPr>
           <a:xfrm>
-            <a:off x="21300000" y="13650000"/>
+            <a:off x="24300000" y="14800000"/>
             <a:ext cx="1280000" cy="1020000"/>
-            <a:chOff x="21300000" y="13650000"/>
+            <a:chOff x="24300000" y="14800000"/>
             <a:chExt cx="1280000" cy="1020000"/>
           </a:xfrm>
         </p:grpSpPr>
         <p:pic>
           <p:nvPicPr>
-            <p:cNvPr id="148" name="Picture 147" descr="tomb_landing3.webp.jpg"/>
+            <p:cNvPr id="157" name="Picture 156" descr="tomb_landing3.webp.jpg"/>
             <p:cNvPicPr>
               <a:picLocks noChangeAspect="1"/>
             </p:cNvPicPr>
@@ -7719,7 +8073,7 @@
           </p:blipFill>
           <p:spPr>
             <a:xfrm>
-              <a:off x="21300000" y="13650000"/>
+              <a:off x="24300000" y="14800000"/>
               <a:ext cx="1280000" cy="720000"/>
             </a:xfrm>
             <a:prstGeom prst="rect">
@@ -7729,13 +8083,13 @@
         </p:pic>
         <p:sp>
           <p:nvSpPr>
-            <p:cNvPr id="149" name="TextBox 148"/>
+            <p:cNvPr id="158" name="TextBox 157"/>
             <p:cNvSpPr txBox="1"/>
             <p:nvPr/>
           </p:nvSpPr>
           <p:spPr>
             <a:xfrm>
-              <a:off x="21300000" y="14370000"/>
+              <a:off x="24300000" y="15520000"/>
               <a:ext cx="1280000" cy="300000"/>
             </a:xfrm>
             <a:prstGeom prst="rect">
@@ -7771,21 +8125,21 @@
       </p:grpSp>
       <p:grpSp>
         <p:nvGrpSpPr>
-          <p:cNvPr id="150" name="Group 149"/>
+          <p:cNvPr id="159" name="Group 158"/>
           <p:cNvGrpSpPr/>
           <p:nvPr/>
         </p:nvGrpSpPr>
         <p:grpSpPr>
           <a:xfrm>
-            <a:off x="21300000" y="14800000"/>
+            <a:off x="24300000" y="15950000"/>
             <a:ext cx="1280000" cy="1020000"/>
-            <a:chOff x="21300000" y="14800000"/>
+            <a:chOff x="24300000" y="15950000"/>
             <a:chExt cx="1280000" cy="1020000"/>
           </a:xfrm>
         </p:grpSpPr>
         <p:pic>
           <p:nvPicPr>
-            <p:cNvPr id="151" name="Picture 150" descr="tomb_gallery3.webp.jpg"/>
+            <p:cNvPr id="160" name="Picture 159" descr="tomb_gallery3.webp.jpg"/>
             <p:cNvPicPr>
               <a:picLocks noChangeAspect="1"/>
             </p:cNvPicPr>
@@ -7799,7 +8153,7 @@
           </p:blipFill>
           <p:spPr>
             <a:xfrm>
-              <a:off x="21300000" y="14800000"/>
+              <a:off x="24300000" y="15950000"/>
               <a:ext cx="1280000" cy="720000"/>
             </a:xfrm>
             <a:prstGeom prst="rect">
@@ -7809,13 +8163,13 @@
         </p:pic>
         <p:sp>
           <p:nvSpPr>
-            <p:cNvPr id="152" name="TextBox 151"/>
+            <p:cNvPr id="161" name="TextBox 160"/>
             <p:cNvSpPr txBox="1"/>
             <p:nvPr/>
           </p:nvSpPr>
           <p:spPr>
             <a:xfrm>
-              <a:off x="21300000" y="15520000"/>
+              <a:off x="24300000" y="16670000"/>
               <a:ext cx="1280000" cy="300000"/>
             </a:xfrm>
             <a:prstGeom prst="rect">
@@ -7851,21 +8205,21 @@
       </p:grpSp>
       <p:grpSp>
         <p:nvGrpSpPr>
-          <p:cNvPr id="153" name="Group 152"/>
+          <p:cNvPr id="162" name="Group 161"/>
           <p:cNvGrpSpPr/>
           <p:nvPr/>
         </p:nvGrpSpPr>
         <p:grpSpPr>
           <a:xfrm>
-            <a:off x="24300000" y="14800000"/>
+            <a:off x="27300000" y="15950000"/>
             <a:ext cx="1280000" cy="1020000"/>
-            <a:chOff x="24300000" y="14800000"/>
+            <a:chOff x="27300000" y="15950000"/>
             <a:chExt cx="1280000" cy="1020000"/>
           </a:xfrm>
         </p:grpSpPr>
         <p:pic>
           <p:nvPicPr>
-            <p:cNvPr id="154" name="Picture 153" descr="tomb_vaultw.webp.jpg"/>
+            <p:cNvPr id="163" name="Picture 162" descr="tomb_vaultw.webp.jpg"/>
             <p:cNvPicPr>
               <a:picLocks noChangeAspect="1"/>
             </p:cNvPicPr>
@@ -7879,7 +8233,7 @@
           </p:blipFill>
           <p:spPr>
             <a:xfrm>
-              <a:off x="24300000" y="14800000"/>
+              <a:off x="27300000" y="15950000"/>
               <a:ext cx="1280000" cy="720000"/>
             </a:xfrm>
             <a:prstGeom prst="rect">
@@ -7889,13 +8243,13 @@
         </p:pic>
         <p:sp>
           <p:nvSpPr>
-            <p:cNvPr id="155" name="TextBox 154"/>
+            <p:cNvPr id="164" name="TextBox 163"/>
             <p:cNvSpPr txBox="1"/>
             <p:nvPr/>
           </p:nvSpPr>
           <p:spPr>
             <a:xfrm>
-              <a:off x="24300000" y="15520000"/>
+              <a:off x="27300000" y="16670000"/>
               <a:ext cx="1280000" cy="300000"/>
             </a:xfrm>
             <a:prstGeom prst="rect">
@@ -7931,21 +8285,21 @@
       </p:grpSp>
       <p:grpSp>
         <p:nvGrpSpPr>
-          <p:cNvPr id="156" name="Group 155"/>
+          <p:cNvPr id="165" name="Group 164"/>
           <p:cNvGrpSpPr/>
           <p:nvPr/>
         </p:nvGrpSpPr>
         <p:grpSpPr>
           <a:xfrm>
-            <a:off x="24300000" y="15950000"/>
+            <a:off x="27300000" y="17100000"/>
             <a:ext cx="1280000" cy="1020000"/>
-            <a:chOff x="24300000" y="15950000"/>
+            <a:chOff x="27300000" y="17100000"/>
             <a:chExt cx="1280000" cy="1020000"/>
           </a:xfrm>
         </p:grpSpPr>
         <p:pic>
           <p:nvPicPr>
-            <p:cNvPr id="157" name="Picture 156" descr="tomb_bonepit.webp.jpg"/>
+            <p:cNvPr id="166" name="Picture 165" descr="tomb_bonepit.webp.jpg"/>
             <p:cNvPicPr>
               <a:picLocks noChangeAspect="1"/>
             </p:cNvPicPr>
@@ -7959,7 +8313,7 @@
           </p:blipFill>
           <p:spPr>
             <a:xfrm>
-              <a:off x="24300000" y="15950000"/>
+              <a:off x="27300000" y="17100000"/>
               <a:ext cx="1280000" cy="720000"/>
             </a:xfrm>
             <a:prstGeom prst="rect">
@@ -7969,13 +8323,13 @@
         </p:pic>
         <p:sp>
           <p:nvSpPr>
-            <p:cNvPr id="158" name="TextBox 157"/>
+            <p:cNvPr id="167" name="TextBox 166"/>
             <p:cNvSpPr txBox="1"/>
             <p:nvPr/>
           </p:nvSpPr>
           <p:spPr>
             <a:xfrm>
-              <a:off x="24300000" y="16670000"/>
+              <a:off x="27300000" y="17820000"/>
               <a:ext cx="1280000" cy="300000"/>
             </a:xfrm>
             <a:prstGeom prst="rect">
@@ -8011,7 +8365,87 @@
       </p:grpSp>
       <p:grpSp>
         <p:nvGrpSpPr>
-          <p:cNvPr id="159" name="Group 158"/>
+          <p:cNvPr id="168" name="Group 167"/>
+          <p:cNvGrpSpPr/>
+          <p:nvPr/>
+        </p:nvGrpSpPr>
+        <p:grpSpPr>
+          <a:xfrm>
+            <a:off x="27300000" y="18250000"/>
+            <a:ext cx="1280000" cy="1020000"/>
+            <a:chOff x="27300000" y="18250000"/>
+            <a:chExt cx="1280000" cy="1020000"/>
+          </a:xfrm>
+        </p:grpSpPr>
+        <p:pic>
+          <p:nvPicPr>
+            <p:cNvPr id="169" name="Picture 168" descr="tomb_bonepit.webp.jpg"/>
+            <p:cNvPicPr>
+              <a:picLocks noChangeAspect="1"/>
+            </p:cNvPicPr>
+            <p:nvPr/>
+          </p:nvPicPr>
+          <p:blipFill>
+            <a:blip r:embed="rId34"/>
+            <a:stretch>
+              <a:fillRect/>
+            </a:stretch>
+          </p:blipFill>
+          <p:spPr>
+            <a:xfrm>
+              <a:off x="27300000" y="18250000"/>
+              <a:ext cx="1280000" cy="720000"/>
+            </a:xfrm>
+            <a:prstGeom prst="rect">
+              <a:avLst/>
+            </a:prstGeom>
+          </p:spPr>
+        </p:pic>
+        <p:sp>
+          <p:nvSpPr>
+            <p:cNvPr id="170" name="TextBox 169"/>
+            <p:cNvSpPr txBox="1"/>
+            <p:nvPr/>
+          </p:nvSpPr>
+          <p:spPr>
+            <a:xfrm>
+              <a:off x="27300000" y="18970000"/>
+              <a:ext cx="1280000" cy="300000"/>
+            </a:xfrm>
+            <a:prstGeom prst="rect">
+              <a:avLst/>
+            </a:prstGeom>
+            <a:noFill/>
+          </p:spPr>
+          <p:txBody>
+            <a:bodyPr wrap="square" anchor="t">
+              <a:spAutoFit/>
+            </a:bodyPr>
+            <a:lstStyle/>
+            <a:p>
+              <a:pPr algn="ctr"/>
+              <a:r>
+                <a:rPr sz="1300" b="1"/>
+                <a:t>底層祭壇</a:t>
+              </a:r>
+            </a:p>
+            <a:p>
+              <a:pPr algn="ctr"/>
+              <a:r>
+                <a:rPr sz="800">
+                  <a:solidFill>
+                    <a:srgbClr val="9A989E"/>
+                  </a:solidFill>
+                </a:rPr>
+                <a:t>lowaltar</a:t>
+              </a:r>
+            </a:p>
+          </p:txBody>
+        </p:sp>
+      </p:grpSp>
+      <p:grpSp>
+        <p:nvGrpSpPr>
+          <p:cNvPr id="171" name="Group 170"/>
           <p:cNvGrpSpPr/>
           <p:nvPr/>
         </p:nvGrpSpPr>
@@ -8025,87 +8459,7 @@
         </p:grpSpPr>
         <p:pic>
           <p:nvPicPr>
-            <p:cNvPr id="160" name="Picture 159" descr="tomb_bonepit.webp.jpg"/>
-            <p:cNvPicPr>
-              <a:picLocks noChangeAspect="1"/>
-            </p:cNvPicPr>
-            <p:nvPr/>
-          </p:nvPicPr>
-          <p:blipFill>
-            <a:blip r:embed="rId34"/>
-            <a:stretch>
-              <a:fillRect/>
-            </a:stretch>
-          </p:blipFill>
-          <p:spPr>
-            <a:xfrm>
-              <a:off x="24300000" y="17100000"/>
-              <a:ext cx="1280000" cy="720000"/>
-            </a:xfrm>
-            <a:prstGeom prst="rect">
-              <a:avLst/>
-            </a:prstGeom>
-          </p:spPr>
-        </p:pic>
-        <p:sp>
-          <p:nvSpPr>
-            <p:cNvPr id="161" name="TextBox 160"/>
-            <p:cNvSpPr txBox="1"/>
-            <p:nvPr/>
-          </p:nvSpPr>
-          <p:spPr>
-            <a:xfrm>
-              <a:off x="24300000" y="17820000"/>
-              <a:ext cx="1280000" cy="300000"/>
-            </a:xfrm>
-            <a:prstGeom prst="rect">
-              <a:avLst/>
-            </a:prstGeom>
-            <a:noFill/>
-          </p:spPr>
-          <p:txBody>
-            <a:bodyPr wrap="square" anchor="t">
-              <a:spAutoFit/>
-            </a:bodyPr>
-            <a:lstStyle/>
-            <a:p>
-              <a:pPr algn="ctr"/>
-              <a:r>
-                <a:rPr sz="1300" b="1"/>
-                <a:t>底層祭壇</a:t>
-              </a:r>
-            </a:p>
-            <a:p>
-              <a:pPr algn="ctr"/>
-              <a:r>
-                <a:rPr sz="800">
-                  <a:solidFill>
-                    <a:srgbClr val="9A989E"/>
-                  </a:solidFill>
-                </a:rPr>
-                <a:t>lowaltar</a:t>
-              </a:r>
-            </a:p>
-          </p:txBody>
-        </p:sp>
-      </p:grpSp>
-      <p:grpSp>
-        <p:nvGrpSpPr>
-          <p:cNvPr id="162" name="Group 161"/>
-          <p:cNvGrpSpPr/>
-          <p:nvPr/>
-        </p:nvGrpSpPr>
-        <p:grpSpPr>
-          <a:xfrm>
-            <a:off x="21300000" y="15950000"/>
-            <a:ext cx="1280000" cy="1020000"/>
-            <a:chOff x="21300000" y="15950000"/>
-            <a:chExt cx="1280000" cy="1020000"/>
-          </a:xfrm>
-        </p:grpSpPr>
-        <p:pic>
-          <p:nvPicPr>
-            <p:cNvPr id="163" name="Picture 162" descr="tomb_crypt.webp.jpg"/>
+            <p:cNvPr id="172" name="Picture 171" descr="tomb_crypt.webp.jpg"/>
             <p:cNvPicPr>
               <a:picLocks noChangeAspect="1"/>
             </p:cNvPicPr>
@@ -8119,7 +8473,7 @@
           </p:blipFill>
           <p:spPr>
             <a:xfrm>
-              <a:off x="21300000" y="15950000"/>
+              <a:off x="24300000" y="17100000"/>
               <a:ext cx="1280000" cy="720000"/>
             </a:xfrm>
             <a:prstGeom prst="rect">
@@ -8129,13 +8483,13 @@
         </p:pic>
         <p:sp>
           <p:nvSpPr>
-            <p:cNvPr id="164" name="TextBox 163"/>
+            <p:cNvPr id="173" name="TextBox 172"/>
             <p:cNvSpPr txBox="1"/>
             <p:nvPr/>
           </p:nvSpPr>
           <p:spPr>
             <a:xfrm>
-              <a:off x="21300000" y="16670000"/>
+              <a:off x="24300000" y="17820000"/>
               <a:ext cx="1280000" cy="300000"/>
             </a:xfrm>
             <a:prstGeom prst="rect">
@@ -8171,7 +8525,7 @@
       </p:grpSp>
       <p:cxnSp>
         <p:nvCxnSpPr>
-          <p:cNvPr id="165" name="Connector 164"/>
+          <p:cNvPr id="174" name="Connector 173"/>
           <p:cNvCxnSpPr/>
           <p:nvPr/>
         </p:nvCxnSpPr>
@@ -8206,7 +8560,7 @@
       </p:cxnSp>
       <p:cxnSp>
         <p:nvCxnSpPr>
-          <p:cNvPr id="166" name="Connector 165"/>
+          <p:cNvPr id="175" name="Connector 174"/>
           <p:cNvCxnSpPr/>
           <p:nvPr/>
         </p:nvCxnSpPr>
@@ -8241,7 +8595,7 @@
       </p:cxnSp>
       <p:cxnSp>
         <p:nvCxnSpPr>
-          <p:cNvPr id="167" name="Connector 166"/>
+          <p:cNvPr id="176" name="Connector 175"/>
           <p:cNvCxnSpPr/>
           <p:nvPr/>
         </p:nvCxnSpPr>
@@ -8276,7 +8630,7 @@
       </p:cxnSp>
       <p:cxnSp>
         <p:nvCxnSpPr>
-          <p:cNvPr id="168" name="Connector 167"/>
+          <p:cNvPr id="177" name="Connector 176"/>
           <p:cNvCxnSpPr/>
           <p:nvPr/>
         </p:nvCxnSpPr>
@@ -8311,7 +8665,7 @@
       </p:cxnSp>
       <p:cxnSp>
         <p:nvCxnSpPr>
-          <p:cNvPr id="169" name="Connector 168"/>
+          <p:cNvPr id="178" name="Connector 177"/>
           <p:cNvCxnSpPr/>
           <p:nvPr/>
         </p:nvCxnSpPr>
@@ -8346,7 +8700,7 @@
       </p:cxnSp>
       <p:cxnSp>
         <p:nvCxnSpPr>
-          <p:cNvPr id="170" name="Connector 169"/>
+          <p:cNvPr id="179" name="Connector 178"/>
           <p:cNvCxnSpPr/>
           <p:nvPr/>
         </p:nvCxnSpPr>
@@ -8381,7 +8735,7 @@
       </p:cxnSp>
       <p:cxnSp>
         <p:nvCxnSpPr>
-          <p:cNvPr id="171" name="Connector 170"/>
+          <p:cNvPr id="180" name="Connector 179"/>
           <p:cNvCxnSpPr/>
           <p:nvPr/>
         </p:nvCxnSpPr>
@@ -8416,7 +8770,7 @@
       </p:cxnSp>
       <p:cxnSp>
         <p:nvCxnSpPr>
-          <p:cNvPr id="172" name="Connector 171"/>
+          <p:cNvPr id="181" name="Connector 180"/>
           <p:cNvCxnSpPr/>
           <p:nvPr/>
         </p:nvCxnSpPr>
@@ -8451,7 +8805,7 @@
       </p:cxnSp>
       <p:cxnSp>
         <p:nvCxnSpPr>
-          <p:cNvPr id="173" name="Connector 172"/>
+          <p:cNvPr id="182" name="Connector 181"/>
           <p:cNvCxnSpPr/>
           <p:nvPr/>
         </p:nvCxnSpPr>
@@ -8486,7 +8840,7 @@
       </p:cxnSp>
       <p:cxnSp>
         <p:nvCxnSpPr>
-          <p:cNvPr id="174" name="Connector 173"/>
+          <p:cNvPr id="183" name="Connector 182"/>
           <p:cNvCxnSpPr/>
           <p:nvPr/>
         </p:nvCxnSpPr>
@@ -8521,7 +8875,7 @@
       </p:cxnSp>
       <p:cxnSp>
         <p:nvCxnSpPr>
-          <p:cNvPr id="175" name="Connector 174"/>
+          <p:cNvPr id="184" name="Connector 183"/>
           <p:cNvCxnSpPr/>
           <p:nvPr/>
         </p:nvCxnSpPr>
@@ -8556,7 +8910,7 @@
       </p:cxnSp>
       <p:cxnSp>
         <p:nvCxnSpPr>
-          <p:cNvPr id="176" name="Connector 175"/>
+          <p:cNvPr id="185" name="Connector 184"/>
           <p:cNvCxnSpPr/>
           <p:nvPr/>
         </p:nvCxnSpPr>
@@ -8591,7 +8945,7 @@
       </p:cxnSp>
       <p:cxnSp>
         <p:nvCxnSpPr>
-          <p:cNvPr id="177" name="Connector 176"/>
+          <p:cNvPr id="186" name="Connector 185"/>
           <p:cNvCxnSpPr/>
           <p:nvPr/>
         </p:nvCxnSpPr>
@@ -8626,7 +8980,7 @@
       </p:cxnSp>
       <p:cxnSp>
         <p:nvCxnSpPr>
-          <p:cNvPr id="178" name="Connector 177"/>
+          <p:cNvPr id="187" name="Connector 186"/>
           <p:cNvCxnSpPr/>
           <p:nvPr/>
         </p:nvCxnSpPr>
@@ -8661,7 +9015,7 @@
       </p:cxnSp>
       <p:cxnSp>
         <p:nvCxnSpPr>
-          <p:cNvPr id="179" name="Connector 178"/>
+          <p:cNvPr id="188" name="Connector 187"/>
           <p:cNvCxnSpPr/>
           <p:nvPr/>
         </p:nvCxnSpPr>
@@ -8696,7 +9050,7 @@
       </p:cxnSp>
       <p:cxnSp>
         <p:nvCxnSpPr>
-          <p:cNvPr id="180" name="Connector 179"/>
+          <p:cNvPr id="189" name="Connector 188"/>
           <p:cNvCxnSpPr/>
           <p:nvPr/>
         </p:nvCxnSpPr>
@@ -8731,7 +9085,7 @@
       </p:cxnSp>
       <p:cxnSp>
         <p:nvCxnSpPr>
-          <p:cNvPr id="181" name="Connector 180"/>
+          <p:cNvPr id="190" name="Connector 189"/>
           <p:cNvCxnSpPr/>
           <p:nvPr/>
         </p:nvCxnSpPr>
@@ -8766,7 +9120,7 @@
       </p:cxnSp>
       <p:cxnSp>
         <p:nvCxnSpPr>
-          <p:cNvPr id="182" name="Connector 181"/>
+          <p:cNvPr id="191" name="Connector 190"/>
           <p:cNvCxnSpPr/>
           <p:nvPr/>
         </p:nvCxnSpPr>
@@ -8801,7 +9155,7 @@
       </p:cxnSp>
       <p:cxnSp>
         <p:nvCxnSpPr>
-          <p:cNvPr id="183" name="Connector 182"/>
+          <p:cNvPr id="192" name="Connector 191"/>
           <p:cNvCxnSpPr/>
           <p:nvPr/>
         </p:nvCxnSpPr>
@@ -8836,7 +9190,7 @@
       </p:cxnSp>
       <p:cxnSp>
         <p:nvCxnSpPr>
-          <p:cNvPr id="184" name="Connector 183"/>
+          <p:cNvPr id="193" name="Connector 192"/>
           <p:cNvCxnSpPr/>
           <p:nvPr/>
         </p:nvCxnSpPr>
@@ -8871,7 +9225,7 @@
       </p:cxnSp>
       <p:cxnSp>
         <p:nvCxnSpPr>
-          <p:cNvPr id="185" name="Connector 184"/>
+          <p:cNvPr id="194" name="Connector 193"/>
           <p:cNvCxnSpPr/>
           <p:nvPr/>
         </p:nvCxnSpPr>
@@ -8906,7 +9260,7 @@
       </p:cxnSp>
       <p:cxnSp>
         <p:nvCxnSpPr>
-          <p:cNvPr id="186" name="Connector 185"/>
+          <p:cNvPr id="195" name="Connector 194"/>
           <p:cNvCxnSpPr/>
           <p:nvPr/>
         </p:nvCxnSpPr>
@@ -8941,7 +9295,7 @@
       </p:cxnSp>
       <p:cxnSp>
         <p:nvCxnSpPr>
-          <p:cNvPr id="187" name="Connector 186"/>
+          <p:cNvPr id="196" name="Connector 195"/>
           <p:cNvCxnSpPr/>
           <p:nvPr/>
         </p:nvCxnSpPr>
@@ -8976,7 +9330,7 @@
       </p:cxnSp>
       <p:cxnSp>
         <p:nvCxnSpPr>
-          <p:cNvPr id="188" name="Connector 187"/>
+          <p:cNvPr id="197" name="Connector 196"/>
           <p:cNvCxnSpPr/>
           <p:nvPr/>
         </p:nvCxnSpPr>
@@ -9011,7 +9365,7 @@
       </p:cxnSp>
       <p:cxnSp>
         <p:nvCxnSpPr>
-          <p:cNvPr id="189" name="Connector 188"/>
+          <p:cNvPr id="198" name="Connector 197"/>
           <p:cNvCxnSpPr/>
           <p:nvPr/>
         </p:nvCxnSpPr>
@@ -9046,7 +9400,7 @@
       </p:cxnSp>
       <p:cxnSp>
         <p:nvCxnSpPr>
-          <p:cNvPr id="190" name="Connector 189"/>
+          <p:cNvPr id="199" name="Connector 198"/>
           <p:cNvCxnSpPr/>
           <p:nvPr/>
         </p:nvCxnSpPr>
@@ -9081,7 +9435,7 @@
       </p:cxnSp>
       <p:cxnSp>
         <p:nvCxnSpPr>
-          <p:cNvPr id="191" name="Connector 190"/>
+          <p:cNvPr id="200" name="Connector 199"/>
           <p:cNvCxnSpPr/>
           <p:nvPr/>
         </p:nvCxnSpPr>
@@ -9116,7 +9470,7 @@
       </p:cxnSp>
       <p:cxnSp>
         <p:nvCxnSpPr>
-          <p:cNvPr id="192" name="Connector 191"/>
+          <p:cNvPr id="201" name="Connector 200"/>
           <p:cNvCxnSpPr/>
           <p:nvPr/>
         </p:nvCxnSpPr>
@@ -9151,7 +9505,7 @@
       </p:cxnSp>
       <p:cxnSp>
         <p:nvCxnSpPr>
-          <p:cNvPr id="193" name="Connector 192"/>
+          <p:cNvPr id="202" name="Connector 201"/>
           <p:cNvCxnSpPr/>
           <p:nvPr/>
         </p:nvCxnSpPr>
@@ -9186,7 +9540,7 @@
       </p:cxnSp>
       <p:cxnSp>
         <p:nvCxnSpPr>
-          <p:cNvPr id="194" name="Connector 193"/>
+          <p:cNvPr id="203" name="Connector 202"/>
           <p:cNvCxnSpPr/>
           <p:nvPr/>
         </p:nvCxnSpPr>
@@ -9221,7 +9575,7 @@
       </p:cxnSp>
       <p:cxnSp>
         <p:nvCxnSpPr>
-          <p:cNvPr id="195" name="Connector 194"/>
+          <p:cNvPr id="204" name="Connector 203"/>
           <p:cNvCxnSpPr/>
           <p:nvPr/>
         </p:nvCxnSpPr>
@@ -9256,7 +9610,7 @@
       </p:cxnSp>
       <p:cxnSp>
         <p:nvCxnSpPr>
-          <p:cNvPr id="196" name="Connector 195"/>
+          <p:cNvPr id="205" name="Connector 204"/>
           <p:cNvCxnSpPr/>
           <p:nvPr/>
         </p:nvCxnSpPr>
@@ -9291,7 +9645,7 @@
       </p:cxnSp>
       <p:cxnSp>
         <p:nvCxnSpPr>
-          <p:cNvPr id="197" name="Connector 196"/>
+          <p:cNvPr id="206" name="Connector 205"/>
           <p:cNvCxnSpPr/>
           <p:nvPr/>
         </p:nvCxnSpPr>
@@ -9326,7 +9680,7 @@
       </p:cxnSp>
       <p:cxnSp>
         <p:nvCxnSpPr>
-          <p:cNvPr id="198" name="Connector 197"/>
+          <p:cNvPr id="207" name="Connector 206"/>
           <p:cNvCxnSpPr/>
           <p:nvPr/>
         </p:nvCxnSpPr>
@@ -9361,7 +9715,7 @@
       </p:cxnSp>
       <p:cxnSp>
         <p:nvCxnSpPr>
-          <p:cNvPr id="199" name="Connector 198"/>
+          <p:cNvPr id="208" name="Connector 207"/>
           <p:cNvCxnSpPr/>
           <p:nvPr/>
         </p:nvCxnSpPr>
@@ -9396,7 +9750,7 @@
       </p:cxnSp>
       <p:cxnSp>
         <p:nvCxnSpPr>
-          <p:cNvPr id="200" name="Connector 199"/>
+          <p:cNvPr id="209" name="Connector 208"/>
           <p:cNvCxnSpPr/>
           <p:nvPr/>
         </p:nvCxnSpPr>
@@ -9431,7 +9785,7 @@
       </p:cxnSp>
       <p:cxnSp>
         <p:nvCxnSpPr>
-          <p:cNvPr id="201" name="Connector 200"/>
+          <p:cNvPr id="210" name="Connector 209"/>
           <p:cNvCxnSpPr/>
           <p:nvPr/>
         </p:nvCxnSpPr>
@@ -9466,7 +9820,7 @@
       </p:cxnSp>
       <p:cxnSp>
         <p:nvCxnSpPr>
-          <p:cNvPr id="202" name="Connector 201"/>
+          <p:cNvPr id="211" name="Connector 210"/>
           <p:cNvCxnSpPr/>
           <p:nvPr/>
         </p:nvCxnSpPr>
@@ -9501,7 +9855,7 @@
       </p:cxnSp>
       <p:cxnSp>
         <p:nvCxnSpPr>
-          <p:cNvPr id="203" name="Connector 202"/>
+          <p:cNvPr id="212" name="Connector 211"/>
           <p:cNvCxnSpPr/>
           <p:nvPr/>
         </p:nvCxnSpPr>
@@ -9536,7 +9890,7 @@
       </p:cxnSp>
       <p:cxnSp>
         <p:nvCxnSpPr>
-          <p:cNvPr id="204" name="Connector 203"/>
+          <p:cNvPr id="213" name="Connector 212"/>
           <p:cNvCxnSpPr/>
           <p:nvPr/>
         </p:nvCxnSpPr>
@@ -9571,7 +9925,7 @@
       </p:cxnSp>
       <p:cxnSp>
         <p:nvCxnSpPr>
-          <p:cNvPr id="205" name="Connector 204"/>
+          <p:cNvPr id="214" name="Connector 213"/>
           <p:cNvCxnSpPr/>
           <p:nvPr/>
         </p:nvCxnSpPr>
@@ -9606,7 +9960,7 @@
       </p:cxnSp>
       <p:cxnSp>
         <p:nvCxnSpPr>
-          <p:cNvPr id="206" name="Connector 205"/>
+          <p:cNvPr id="215" name="Connector 214"/>
           <p:cNvCxnSpPr/>
           <p:nvPr/>
         </p:nvCxnSpPr>
@@ -9641,7 +9995,7 @@
       </p:cxnSp>
       <p:cxnSp>
         <p:nvCxnSpPr>
-          <p:cNvPr id="207" name="Connector 206"/>
+          <p:cNvPr id="216" name="Connector 215"/>
           <p:cNvCxnSpPr/>
           <p:nvPr/>
         </p:nvCxnSpPr>
@@ -9676,7 +10030,7 @@
       </p:cxnSp>
       <p:cxnSp>
         <p:nvCxnSpPr>
-          <p:cNvPr id="208" name="Connector 207"/>
+          <p:cNvPr id="217" name="Connector 216"/>
           <p:cNvCxnSpPr/>
           <p:nvPr/>
         </p:nvCxnSpPr>
@@ -9711,7 +10065,7 @@
       </p:cxnSp>
       <p:cxnSp>
         <p:nvCxnSpPr>
-          <p:cNvPr id="209" name="Connector 208"/>
+          <p:cNvPr id="218" name="Connector 217"/>
           <p:cNvCxnSpPr/>
           <p:nvPr/>
         </p:nvCxnSpPr>
@@ -9746,7 +10100,7 @@
       </p:cxnSp>
       <p:cxnSp>
         <p:nvCxnSpPr>
-          <p:cNvPr id="210" name="Connector 209"/>
+          <p:cNvPr id="219" name="Connector 218"/>
           <p:cNvCxnSpPr/>
           <p:nvPr/>
         </p:nvCxnSpPr>
@@ -9781,7 +10135,7 @@
       </p:cxnSp>
       <p:cxnSp>
         <p:nvCxnSpPr>
-          <p:cNvPr id="211" name="Connector 210"/>
+          <p:cNvPr id="220" name="Connector 219"/>
           <p:cNvCxnSpPr/>
           <p:nvPr/>
         </p:nvCxnSpPr>
@@ -9816,7 +10170,7 @@
       </p:cxnSp>
       <p:cxnSp>
         <p:nvCxnSpPr>
-          <p:cNvPr id="212" name="Connector 211"/>
+          <p:cNvPr id="221" name="Connector 220"/>
           <p:cNvCxnSpPr/>
           <p:nvPr/>
         </p:nvCxnSpPr>
@@ -9851,14 +10205,14 @@
       </p:cxnSp>
       <p:cxnSp>
         <p:nvCxnSpPr>
-          <p:cNvPr id="213" name="Connector 212"/>
+          <p:cNvPr id="222" name="Connector 221"/>
           <p:cNvCxnSpPr/>
           <p:nvPr/>
         </p:nvCxnSpPr>
         <p:spPr>
-          <a:xfrm>
-            <a:off x="21940000" y="14010000"/>
-            <a:ext cx="0" cy="1150000"/>
+          <a:xfrm flipH="1">
+            <a:off x="18940000" y="14010000"/>
+            <a:ext cx="3000000" cy="0"/>
           </a:xfrm>
           <a:prstGeom prst="line">
             <a:avLst/>
@@ -9886,14 +10240,14 @@
       </p:cxnSp>
       <p:cxnSp>
         <p:nvCxnSpPr>
-          <p:cNvPr id="214" name="Connector 213"/>
+          <p:cNvPr id="223" name="Connector 222"/>
           <p:cNvCxnSpPr/>
           <p:nvPr/>
         </p:nvCxnSpPr>
         <p:spPr>
           <a:xfrm>
-            <a:off x="21940000" y="15160000"/>
-            <a:ext cx="0" cy="1150000"/>
+            <a:off x="21940000" y="14010000"/>
+            <a:ext cx="3000000" cy="0"/>
           </a:xfrm>
           <a:prstGeom prst="line">
             <a:avLst/>
@@ -9921,14 +10275,14 @@
       </p:cxnSp>
       <p:cxnSp>
         <p:nvCxnSpPr>
-          <p:cNvPr id="215" name="Connector 214"/>
+          <p:cNvPr id="224" name="Connector 223"/>
           <p:cNvCxnSpPr/>
           <p:nvPr/>
         </p:nvCxnSpPr>
         <p:spPr>
           <a:xfrm>
-            <a:off x="21940000" y="15160000"/>
-            <a:ext cx="3000000" cy="0"/>
+            <a:off x="24940000" y="14010000"/>
+            <a:ext cx="0" cy="1150000"/>
           </a:xfrm>
           <a:prstGeom prst="line">
             <a:avLst/>
@@ -9956,7 +10310,7 @@
       </p:cxnSp>
       <p:cxnSp>
         <p:nvCxnSpPr>
-          <p:cNvPr id="216" name="Connector 215"/>
+          <p:cNvPr id="225" name="Connector 224"/>
           <p:cNvCxnSpPr/>
           <p:nvPr/>
         </p:nvCxnSpPr>
@@ -9991,13 +10345,118 @@
       </p:cxnSp>
       <p:cxnSp>
         <p:nvCxnSpPr>
-          <p:cNvPr id="217" name="Connector 216"/>
+          <p:cNvPr id="226" name="Connector 225"/>
           <p:cNvCxnSpPr/>
           <p:nvPr/>
         </p:nvCxnSpPr>
         <p:spPr>
           <a:xfrm>
             <a:off x="24940000" y="16310000"/>
+            <a:ext cx="0" cy="1150000"/>
+          </a:xfrm>
+          <a:prstGeom prst="line">
+            <a:avLst/>
+          </a:prstGeom>
+          <a:ln w="19050">
+            <a:solidFill>
+              <a:srgbClr val="333338"/>
+            </a:solidFill>
+          </a:ln>
+        </p:spPr>
+        <p:style>
+          <a:lnRef idx="2">
+            <a:schemeClr val="accent1"/>
+          </a:lnRef>
+          <a:fillRef idx="0">
+            <a:schemeClr val="accent1"/>
+          </a:fillRef>
+          <a:effectRef idx="1">
+            <a:schemeClr val="accent1"/>
+          </a:effectRef>
+          <a:fontRef idx="minor">
+            <a:schemeClr val="tx1"/>
+          </a:fontRef>
+        </p:style>
+      </p:cxnSp>
+      <p:cxnSp>
+        <p:nvCxnSpPr>
+          <p:cNvPr id="227" name="Connector 226"/>
+          <p:cNvCxnSpPr/>
+          <p:nvPr/>
+        </p:nvCxnSpPr>
+        <p:spPr>
+          <a:xfrm>
+            <a:off x="24940000" y="16310000"/>
+            <a:ext cx="3000000" cy="0"/>
+          </a:xfrm>
+          <a:prstGeom prst="line">
+            <a:avLst/>
+          </a:prstGeom>
+          <a:ln w="19050">
+            <a:solidFill>
+              <a:srgbClr val="333338"/>
+            </a:solidFill>
+          </a:ln>
+        </p:spPr>
+        <p:style>
+          <a:lnRef idx="2">
+            <a:schemeClr val="accent1"/>
+          </a:lnRef>
+          <a:fillRef idx="0">
+            <a:schemeClr val="accent1"/>
+          </a:fillRef>
+          <a:effectRef idx="1">
+            <a:schemeClr val="accent1"/>
+          </a:effectRef>
+          <a:fontRef idx="minor">
+            <a:schemeClr val="tx1"/>
+          </a:fontRef>
+        </p:style>
+      </p:cxnSp>
+      <p:cxnSp>
+        <p:nvCxnSpPr>
+          <p:cNvPr id="228" name="Connector 227"/>
+          <p:cNvCxnSpPr/>
+          <p:nvPr/>
+        </p:nvCxnSpPr>
+        <p:spPr>
+          <a:xfrm>
+            <a:off x="27940000" y="16310000"/>
+            <a:ext cx="0" cy="1150000"/>
+          </a:xfrm>
+          <a:prstGeom prst="line">
+            <a:avLst/>
+          </a:prstGeom>
+          <a:ln w="19050">
+            <a:solidFill>
+              <a:srgbClr val="333338"/>
+            </a:solidFill>
+          </a:ln>
+        </p:spPr>
+        <p:style>
+          <a:lnRef idx="2">
+            <a:schemeClr val="accent1"/>
+          </a:lnRef>
+          <a:fillRef idx="0">
+            <a:schemeClr val="accent1"/>
+          </a:fillRef>
+          <a:effectRef idx="1">
+            <a:schemeClr val="accent1"/>
+          </a:effectRef>
+          <a:fontRef idx="minor">
+            <a:schemeClr val="tx1"/>
+          </a:fontRef>
+        </p:style>
+      </p:cxnSp>
+      <p:cxnSp>
+        <p:nvCxnSpPr>
+          <p:cNvPr id="229" name="Connector 228"/>
+          <p:cNvCxnSpPr/>
+          <p:nvPr/>
+        </p:nvCxnSpPr>
+        <p:spPr>
+          <a:xfrm>
+            <a:off x="27940000" y="17460000"/>
             <a:ext cx="0" cy="1150000"/>
           </a:xfrm>
           <a:prstGeom prst="line">

--- a/resources/map/_layout_tomb.pptx
+++ b/resources/map/_layout_tomb.pptx
@@ -3122,7 +3122,7 @@
                   <a:srgbClr val="7A787E"/>
                 </a:solidFill>
               </a:rPr>
-              <a:t>57 格・每一格是「縮圖＋地名」的群組，可以直接拖；連線是 connector，拖格子時會跟著走</a:t>
+              <a:t>61 格・每一格是「縮圖＋地名」的群組，可以直接拖；連線是 connector，拖格子時會跟著走</a:t>
             </a:r>
           </a:p>
         </p:txBody>
@@ -4942,7 +4942,7 @@
               <a:pPr algn="ctr"/>
               <a:r>
                 <a:rPr sz="1300" b="1"/>
-                <a:t>第一道階梯</a:t>
+                <a:t>表層階梯</a:t>
               </a:r>
             </a:p>
             <a:p>
@@ -7735,9 +7735,9 @@
         </p:nvGrpSpPr>
         <p:grpSpPr>
           <a:xfrm>
-            <a:off x="21300000" y="13650000"/>
+            <a:off x="18300000" y="12500000"/>
             <a:ext cx="1280000" cy="1020000"/>
-            <a:chOff x="21300000" y="13650000"/>
+            <a:chOff x="18300000" y="12500000"/>
             <a:chExt cx="1280000" cy="1020000"/>
           </a:xfrm>
         </p:grpSpPr>
@@ -7749,7 +7749,7 @@
           </p:nvSpPr>
           <p:spPr>
             <a:xfrm>
-              <a:off x="21300000" y="13650000"/>
+              <a:off x="18300000" y="12500000"/>
               <a:ext cx="1280000" cy="720000"/>
             </a:xfrm>
             <a:prstGeom prst="rect">
@@ -7798,7 +7798,7 @@
                     <a:srgbClr val="FFFFFF"/>
                   </a:solidFill>
                 </a:rPr>
-                <a:t>tomb_crossvault</a:t>
+                <a:t>tomb_brokenhall</a:t>
               </a:r>
             </a:p>
           </p:txBody>
@@ -7811,7 +7811,7 @@
           </p:nvSpPr>
           <p:spPr>
             <a:xfrm>
-              <a:off x="21300000" y="14370000"/>
+              <a:off x="18300000" y="13220000"/>
               <a:ext cx="1280000" cy="300000"/>
             </a:xfrm>
             <a:prstGeom prst="rect">
@@ -7828,7 +7828,7 @@
               <a:pPr algn="ctr"/>
               <a:r>
                 <a:rPr sz="1300" b="1"/>
-                <a:t>十字墓窖</a:t>
+                <a:t>破碎廊道</a:t>
               </a:r>
             </a:p>
             <a:p>
@@ -7839,7 +7839,7 @@
                     <a:srgbClr val="9A989E"/>
                   </a:solidFill>
                 </a:rPr>
-                <a:t>crossvault</a:t>
+                <a:t>brokenhall</a:t>
               </a:r>
             </a:p>
           </p:txBody>
@@ -7853,9 +7853,9 @@
         </p:nvGrpSpPr>
         <p:grpSpPr>
           <a:xfrm>
-            <a:off x="18300000" y="13650000"/>
+            <a:off x="21300000" y="14800000"/>
             <a:ext cx="1280000" cy="1020000"/>
-            <a:chOff x="18300000" y="13650000"/>
+            <a:chOff x="21300000" y="14800000"/>
             <a:chExt cx="1280000" cy="1020000"/>
           </a:xfrm>
         </p:grpSpPr>
@@ -7867,7 +7867,7 @@
           </p:nvSpPr>
           <p:spPr>
             <a:xfrm>
-              <a:off x="18300000" y="13650000"/>
+              <a:off x="21300000" y="14800000"/>
               <a:ext cx="1280000" cy="720000"/>
             </a:xfrm>
             <a:prstGeom prst="rect">
@@ -7916,7 +7916,7 @@
                     <a:srgbClr val="FFFFFF"/>
                   </a:solidFill>
                 </a:rPr>
-                <a:t>tomb_falsestair</a:t>
+                <a:t>tomb_sunkhall</a:t>
               </a:r>
             </a:p>
           </p:txBody>
@@ -7929,7 +7929,7 @@
           </p:nvSpPr>
           <p:spPr>
             <a:xfrm>
-              <a:off x="18300000" y="14370000"/>
+              <a:off x="21300000" y="15520000"/>
               <a:ext cx="1280000" cy="300000"/>
             </a:xfrm>
             <a:prstGeom prst="rect">
@@ -7946,7 +7946,7 @@
               <a:pPr algn="ctr"/>
               <a:r>
                 <a:rPr sz="1300" b="1"/>
-                <a:t>塌陷的階梯</a:t>
+                <a:t>沉陷廳</a:t>
               </a:r>
             </a:p>
             <a:p>
@@ -7957,7 +7957,7 @@
                     <a:srgbClr val="9A989E"/>
                   </a:solidFill>
                 </a:rPr>
-                <a:t>falsestair</a:t>
+                <a:t>sunkhall</a:t>
               </a:r>
             </a:p>
           </p:txBody>
@@ -7971,6 +7971,360 @@
         </p:nvGrpSpPr>
         <p:grpSpPr>
           <a:xfrm>
+            <a:off x="21300000" y="15950000"/>
+            <a:ext cx="1280000" cy="1020000"/>
+            <a:chOff x="21300000" y="15950000"/>
+            <a:chExt cx="1280000" cy="1020000"/>
+          </a:xfrm>
+        </p:grpSpPr>
+        <p:sp>
+          <p:nvSpPr>
+            <p:cNvPr id="154" name="Rectangle 153"/>
+            <p:cNvSpPr/>
+            <p:nvPr/>
+          </p:nvSpPr>
+          <p:spPr>
+            <a:xfrm>
+              <a:off x="21300000" y="15950000"/>
+              <a:ext cx="1280000" cy="720000"/>
+            </a:xfrm>
+            <a:prstGeom prst="rect">
+              <a:avLst/>
+            </a:prstGeom>
+            <a:solidFill>
+              <a:srgbClr val="3FB950"/>
+            </a:solidFill>
+            <a:ln>
+              <a:solidFill>
+                <a:srgbClr val="2B8A3A"/>
+              </a:solidFill>
+            </a:ln>
+          </p:spPr>
+          <p:style>
+            <a:lnRef idx="1">
+              <a:schemeClr val="accent1"/>
+            </a:lnRef>
+            <a:fillRef idx="3">
+              <a:schemeClr val="accent1"/>
+            </a:fillRef>
+            <a:effectRef idx="2">
+              <a:schemeClr val="accent1"/>
+            </a:effectRef>
+            <a:fontRef idx="minor">
+              <a:schemeClr val="lt1"/>
+            </a:fontRef>
+          </p:style>
+          <p:txBody>
+            <a:bodyPr rtlCol="0" anchor="ctr"/>
+            <a:lstStyle/>
+            <a:p>
+              <a:r>
+                <a:rPr sz="900" b="1">
+                  <a:solidFill>
+                    <a:srgbClr val="FFFFFF"/>
+                  </a:solidFill>
+                </a:rPr>
+                <a:t>要補圖</a:t>
+              </a:r>
+            </a:p>
+            <a:p>
+              <a:r>
+                <a:rPr sz="900" b="1">
+                  <a:solidFill>
+                    <a:srgbClr val="FFFFFF"/>
+                  </a:solidFill>
+                </a:rPr>
+                <a:t>tomb_mudpit</a:t>
+              </a:r>
+            </a:p>
+          </p:txBody>
+        </p:sp>
+        <p:sp>
+          <p:nvSpPr>
+            <p:cNvPr id="155" name="TextBox 154"/>
+            <p:cNvSpPr txBox="1"/>
+            <p:nvPr/>
+          </p:nvSpPr>
+          <p:spPr>
+            <a:xfrm>
+              <a:off x="21300000" y="16670000"/>
+              <a:ext cx="1280000" cy="300000"/>
+            </a:xfrm>
+            <a:prstGeom prst="rect">
+              <a:avLst/>
+            </a:prstGeom>
+            <a:noFill/>
+          </p:spPr>
+          <p:txBody>
+            <a:bodyPr wrap="square" anchor="t">
+              <a:spAutoFit/>
+            </a:bodyPr>
+            <a:lstStyle/>
+            <a:p>
+              <a:pPr algn="ctr"/>
+              <a:r>
+                <a:rPr sz="1300" b="1"/>
+                <a:t>淤泥坑</a:t>
+              </a:r>
+            </a:p>
+            <a:p>
+              <a:pPr algn="ctr"/>
+              <a:r>
+                <a:rPr sz="800">
+                  <a:solidFill>
+                    <a:srgbClr val="9A989E"/>
+                  </a:solidFill>
+                </a:rPr>
+                <a:t>mudpit</a:t>
+              </a:r>
+            </a:p>
+          </p:txBody>
+        </p:sp>
+      </p:grpSp>
+      <p:grpSp>
+        <p:nvGrpSpPr>
+          <p:cNvPr id="156" name="Group 155"/>
+          <p:cNvGrpSpPr/>
+          <p:nvPr/>
+        </p:nvGrpSpPr>
+        <p:grpSpPr>
+          <a:xfrm>
+            <a:off x="21300000" y="13650000"/>
+            <a:ext cx="1280000" cy="1020000"/>
+            <a:chOff x="21300000" y="13650000"/>
+            <a:chExt cx="1280000" cy="1020000"/>
+          </a:xfrm>
+        </p:grpSpPr>
+        <p:sp>
+          <p:nvSpPr>
+            <p:cNvPr id="157" name="Rectangle 156"/>
+            <p:cNvSpPr/>
+            <p:nvPr/>
+          </p:nvSpPr>
+          <p:spPr>
+            <a:xfrm>
+              <a:off x="21300000" y="13650000"/>
+              <a:ext cx="1280000" cy="720000"/>
+            </a:xfrm>
+            <a:prstGeom prst="rect">
+              <a:avLst/>
+            </a:prstGeom>
+            <a:solidFill>
+              <a:srgbClr val="3FB950"/>
+            </a:solidFill>
+            <a:ln>
+              <a:solidFill>
+                <a:srgbClr val="2B8A3A"/>
+              </a:solidFill>
+            </a:ln>
+          </p:spPr>
+          <p:style>
+            <a:lnRef idx="1">
+              <a:schemeClr val="accent1"/>
+            </a:lnRef>
+            <a:fillRef idx="3">
+              <a:schemeClr val="accent1"/>
+            </a:fillRef>
+            <a:effectRef idx="2">
+              <a:schemeClr val="accent1"/>
+            </a:effectRef>
+            <a:fontRef idx="minor">
+              <a:schemeClr val="lt1"/>
+            </a:fontRef>
+          </p:style>
+          <p:txBody>
+            <a:bodyPr rtlCol="0" anchor="ctr"/>
+            <a:lstStyle/>
+            <a:p>
+              <a:r>
+                <a:rPr sz="900" b="1">
+                  <a:solidFill>
+                    <a:srgbClr val="FFFFFF"/>
+                  </a:solidFill>
+                </a:rPr>
+                <a:t>要補圖</a:t>
+              </a:r>
+            </a:p>
+            <a:p>
+              <a:r>
+                <a:rPr sz="900" b="1">
+                  <a:solidFill>
+                    <a:srgbClr val="FFFFFF"/>
+                  </a:solidFill>
+                </a:rPr>
+                <a:t>tomb_crossvault</a:t>
+              </a:r>
+            </a:p>
+          </p:txBody>
+        </p:sp>
+        <p:sp>
+          <p:nvSpPr>
+            <p:cNvPr id="158" name="TextBox 157"/>
+            <p:cNvSpPr txBox="1"/>
+            <p:nvPr/>
+          </p:nvSpPr>
+          <p:spPr>
+            <a:xfrm>
+              <a:off x="21300000" y="14370000"/>
+              <a:ext cx="1280000" cy="300000"/>
+            </a:xfrm>
+            <a:prstGeom prst="rect">
+              <a:avLst/>
+            </a:prstGeom>
+            <a:noFill/>
+          </p:spPr>
+          <p:txBody>
+            <a:bodyPr wrap="square" anchor="t">
+              <a:spAutoFit/>
+            </a:bodyPr>
+            <a:lstStyle/>
+            <a:p>
+              <a:pPr algn="ctr"/>
+              <a:r>
+                <a:rPr sz="1300" b="1"/>
+                <a:t>十字墓窖</a:t>
+              </a:r>
+            </a:p>
+            <a:p>
+              <a:pPr algn="ctr"/>
+              <a:r>
+                <a:rPr sz="800">
+                  <a:solidFill>
+                    <a:srgbClr val="9A989E"/>
+                  </a:solidFill>
+                </a:rPr>
+                <a:t>crossvault</a:t>
+              </a:r>
+            </a:p>
+          </p:txBody>
+        </p:sp>
+      </p:grpSp>
+      <p:grpSp>
+        <p:nvGrpSpPr>
+          <p:cNvPr id="159" name="Group 158"/>
+          <p:cNvGrpSpPr/>
+          <p:nvPr/>
+        </p:nvGrpSpPr>
+        <p:grpSpPr>
+          <a:xfrm>
+            <a:off x="18300000" y="13650000"/>
+            <a:ext cx="1280000" cy="1020000"/>
+            <a:chOff x="18300000" y="13650000"/>
+            <a:chExt cx="1280000" cy="1020000"/>
+          </a:xfrm>
+        </p:grpSpPr>
+        <p:sp>
+          <p:nvSpPr>
+            <p:cNvPr id="160" name="Rectangle 159"/>
+            <p:cNvSpPr/>
+            <p:nvPr/>
+          </p:nvSpPr>
+          <p:spPr>
+            <a:xfrm>
+              <a:off x="18300000" y="13650000"/>
+              <a:ext cx="1280000" cy="720000"/>
+            </a:xfrm>
+            <a:prstGeom prst="rect">
+              <a:avLst/>
+            </a:prstGeom>
+            <a:solidFill>
+              <a:srgbClr val="3FB950"/>
+            </a:solidFill>
+            <a:ln>
+              <a:solidFill>
+                <a:srgbClr val="2B8A3A"/>
+              </a:solidFill>
+            </a:ln>
+          </p:spPr>
+          <p:style>
+            <a:lnRef idx="1">
+              <a:schemeClr val="accent1"/>
+            </a:lnRef>
+            <a:fillRef idx="3">
+              <a:schemeClr val="accent1"/>
+            </a:fillRef>
+            <a:effectRef idx="2">
+              <a:schemeClr val="accent1"/>
+            </a:effectRef>
+            <a:fontRef idx="minor">
+              <a:schemeClr val="lt1"/>
+            </a:fontRef>
+          </p:style>
+          <p:txBody>
+            <a:bodyPr rtlCol="0" anchor="ctr"/>
+            <a:lstStyle/>
+            <a:p>
+              <a:r>
+                <a:rPr sz="900" b="1">
+                  <a:solidFill>
+                    <a:srgbClr val="FFFFFF"/>
+                  </a:solidFill>
+                </a:rPr>
+                <a:t>要補圖</a:t>
+              </a:r>
+            </a:p>
+            <a:p>
+              <a:r>
+                <a:rPr sz="900" b="1">
+                  <a:solidFill>
+                    <a:srgbClr val="FFFFFF"/>
+                  </a:solidFill>
+                </a:rPr>
+                <a:t>tomb_falsestair</a:t>
+              </a:r>
+            </a:p>
+          </p:txBody>
+        </p:sp>
+        <p:sp>
+          <p:nvSpPr>
+            <p:cNvPr id="161" name="TextBox 160"/>
+            <p:cNvSpPr txBox="1"/>
+            <p:nvPr/>
+          </p:nvSpPr>
+          <p:spPr>
+            <a:xfrm>
+              <a:off x="18300000" y="14370000"/>
+              <a:ext cx="1280000" cy="300000"/>
+            </a:xfrm>
+            <a:prstGeom prst="rect">
+              <a:avLst/>
+            </a:prstGeom>
+            <a:noFill/>
+          </p:spPr>
+          <p:txBody>
+            <a:bodyPr wrap="square" anchor="t">
+              <a:spAutoFit/>
+            </a:bodyPr>
+            <a:lstStyle/>
+            <a:p>
+              <a:pPr algn="ctr"/>
+              <a:r>
+                <a:rPr sz="1300" b="1"/>
+                <a:t>塌陷的階梯</a:t>
+              </a:r>
+            </a:p>
+            <a:p>
+              <a:pPr algn="ctr"/>
+              <a:r>
+                <a:rPr sz="800">
+                  <a:solidFill>
+                    <a:srgbClr val="9A989E"/>
+                  </a:solidFill>
+                </a:rPr>
+                <a:t>falsestair</a:t>
+              </a:r>
+            </a:p>
+          </p:txBody>
+        </p:sp>
+      </p:grpSp>
+      <p:grpSp>
+        <p:nvGrpSpPr>
+          <p:cNvPr id="162" name="Group 161"/>
+          <p:cNvGrpSpPr/>
+          <p:nvPr/>
+        </p:nvGrpSpPr>
+        <p:grpSpPr>
+          <a:xfrm>
             <a:off x="24300000" y="13650000"/>
             <a:ext cx="1280000" cy="1020000"/>
             <a:chOff x="24300000" y="13650000"/>
@@ -7979,7 +8333,7 @@
         </p:grpSpPr>
         <p:pic>
           <p:nvPicPr>
-            <p:cNvPr id="154" name="Picture 153" descr="tomb_stair2.webp.jpg"/>
+            <p:cNvPr id="163" name="Picture 162" descr="tomb_stair2.webp.jpg"/>
             <p:cNvPicPr>
               <a:picLocks noChangeAspect="1"/>
             </p:cNvPicPr>
@@ -8003,7 +8357,7 @@
         </p:pic>
         <p:sp>
           <p:nvSpPr>
-            <p:cNvPr id="155" name="TextBox 154"/>
+            <p:cNvPr id="164" name="TextBox 163"/>
             <p:cNvSpPr txBox="1"/>
             <p:nvPr/>
           </p:nvSpPr>
@@ -8026,7 +8380,7 @@
               <a:pPr algn="ctr"/>
               <a:r>
                 <a:rPr sz="1300" b="1"/>
-                <a:t>第二道階梯</a:t>
+                <a:t>底層階梯</a:t>
               </a:r>
             </a:p>
             <a:p>
@@ -8045,7 +8399,7 @@
       </p:grpSp>
       <p:grpSp>
         <p:nvGrpSpPr>
-          <p:cNvPr id="156" name="Group 155"/>
+          <p:cNvPr id="165" name="Group 164"/>
           <p:cNvGrpSpPr/>
           <p:nvPr/>
         </p:nvGrpSpPr>
@@ -8059,7 +8413,7 @@
         </p:grpSpPr>
         <p:pic>
           <p:nvPicPr>
-            <p:cNvPr id="157" name="Picture 156" descr="tomb_landing3.webp.jpg"/>
+            <p:cNvPr id="166" name="Picture 165" descr="tomb_landing3.webp.jpg"/>
             <p:cNvPicPr>
               <a:picLocks noChangeAspect="1"/>
             </p:cNvPicPr>
@@ -8083,7 +8437,7 @@
         </p:pic>
         <p:sp>
           <p:nvSpPr>
-            <p:cNvPr id="158" name="TextBox 157"/>
+            <p:cNvPr id="167" name="TextBox 166"/>
             <p:cNvSpPr txBox="1"/>
             <p:nvPr/>
           </p:nvSpPr>
@@ -8125,7 +8479,7 @@
       </p:grpSp>
       <p:grpSp>
         <p:nvGrpSpPr>
-          <p:cNvPr id="159" name="Group 158"/>
+          <p:cNvPr id="168" name="Group 167"/>
           <p:cNvGrpSpPr/>
           <p:nvPr/>
         </p:nvGrpSpPr>
@@ -8139,7 +8493,7 @@
         </p:grpSpPr>
         <p:pic>
           <p:nvPicPr>
-            <p:cNvPr id="160" name="Picture 159" descr="tomb_gallery3.webp.jpg"/>
+            <p:cNvPr id="169" name="Picture 168" descr="tomb_gallery3.webp.jpg"/>
             <p:cNvPicPr>
               <a:picLocks noChangeAspect="1"/>
             </p:cNvPicPr>
@@ -8163,7 +8517,7 @@
         </p:pic>
         <p:sp>
           <p:nvSpPr>
-            <p:cNvPr id="161" name="TextBox 160"/>
+            <p:cNvPr id="170" name="TextBox 169"/>
             <p:cNvSpPr txBox="1"/>
             <p:nvPr/>
           </p:nvSpPr>
@@ -8205,7 +8559,7 @@
       </p:grpSp>
       <p:grpSp>
         <p:nvGrpSpPr>
-          <p:cNvPr id="162" name="Group 161"/>
+          <p:cNvPr id="171" name="Group 170"/>
           <p:cNvGrpSpPr/>
           <p:nvPr/>
         </p:nvGrpSpPr>
@@ -8219,7 +8573,7 @@
         </p:grpSpPr>
         <p:pic>
           <p:nvPicPr>
-            <p:cNvPr id="163" name="Picture 162" descr="tomb_vaultw.webp.jpg"/>
+            <p:cNvPr id="172" name="Picture 171" descr="tomb_vaultw.webp.jpg"/>
             <p:cNvPicPr>
               <a:picLocks noChangeAspect="1"/>
             </p:cNvPicPr>
@@ -8243,7 +8597,7 @@
         </p:pic>
         <p:sp>
           <p:nvSpPr>
-            <p:cNvPr id="164" name="TextBox 163"/>
+            <p:cNvPr id="173" name="TextBox 172"/>
             <p:cNvSpPr txBox="1"/>
             <p:nvPr/>
           </p:nvSpPr>
@@ -8285,7 +8639,7 @@
       </p:grpSp>
       <p:grpSp>
         <p:nvGrpSpPr>
-          <p:cNvPr id="165" name="Group 164"/>
+          <p:cNvPr id="174" name="Group 173"/>
           <p:cNvGrpSpPr/>
           <p:nvPr/>
         </p:nvGrpSpPr>
@@ -8299,7 +8653,7 @@
         </p:grpSpPr>
         <p:pic>
           <p:nvPicPr>
-            <p:cNvPr id="166" name="Picture 165" descr="tomb_bonepit.webp.jpg"/>
+            <p:cNvPr id="175" name="Picture 174" descr="tomb_bonepit.webp.jpg"/>
             <p:cNvPicPr>
               <a:picLocks noChangeAspect="1"/>
             </p:cNvPicPr>
@@ -8323,7 +8677,7 @@
         </p:pic>
         <p:sp>
           <p:nvSpPr>
-            <p:cNvPr id="167" name="TextBox 166"/>
+            <p:cNvPr id="176" name="TextBox 175"/>
             <p:cNvSpPr txBox="1"/>
             <p:nvPr/>
           </p:nvSpPr>
@@ -8365,7 +8719,7 @@
       </p:grpSp>
       <p:grpSp>
         <p:nvGrpSpPr>
-          <p:cNvPr id="168" name="Group 167"/>
+          <p:cNvPr id="177" name="Group 176"/>
           <p:cNvGrpSpPr/>
           <p:nvPr/>
         </p:nvGrpSpPr>
@@ -8377,20 +8731,12 @@
             <a:chExt cx="1280000" cy="1020000"/>
           </a:xfrm>
         </p:grpSpPr>
-        <p:pic>
-          <p:nvPicPr>
-            <p:cNvPr id="169" name="Picture 168" descr="tomb_bonepit.webp.jpg"/>
-            <p:cNvPicPr>
-              <a:picLocks noChangeAspect="1"/>
-            </p:cNvPicPr>
-            <p:nvPr/>
-          </p:nvPicPr>
-          <p:blipFill>
-            <a:blip r:embed="rId34"/>
-            <a:stretch>
-              <a:fillRect/>
-            </a:stretch>
-          </p:blipFill>
+        <p:sp>
+          <p:nvSpPr>
+            <p:cNvPr id="178" name="Rectangle 177"/>
+            <p:cNvSpPr/>
+            <p:nvPr/>
+          </p:nvSpPr>
           <p:spPr>
             <a:xfrm>
               <a:off x="27300000" y="18250000"/>
@@ -8399,11 +8745,57 @@
             <a:prstGeom prst="rect">
               <a:avLst/>
             </a:prstGeom>
-          </p:spPr>
-        </p:pic>
+            <a:solidFill>
+              <a:srgbClr val="3FB950"/>
+            </a:solidFill>
+            <a:ln>
+              <a:solidFill>
+                <a:srgbClr val="2B8A3A"/>
+              </a:solidFill>
+            </a:ln>
+          </p:spPr>
+          <p:style>
+            <a:lnRef idx="1">
+              <a:schemeClr val="accent1"/>
+            </a:lnRef>
+            <a:fillRef idx="3">
+              <a:schemeClr val="accent1"/>
+            </a:fillRef>
+            <a:effectRef idx="2">
+              <a:schemeClr val="accent1"/>
+            </a:effectRef>
+            <a:fontRef idx="minor">
+              <a:schemeClr val="lt1"/>
+            </a:fontRef>
+          </p:style>
+          <p:txBody>
+            <a:bodyPr rtlCol="0" anchor="ctr"/>
+            <a:lstStyle/>
+            <a:p>
+              <a:r>
+                <a:rPr sz="900" b="1">
+                  <a:solidFill>
+                    <a:srgbClr val="FFFFFF"/>
+                  </a:solidFill>
+                </a:rPr>
+                <a:t>要補圖</a:t>
+              </a:r>
+            </a:p>
+            <a:p>
+              <a:r>
+                <a:rPr sz="900" b="1">
+                  <a:solidFill>
+                    <a:srgbClr val="FFFFFF"/>
+                  </a:solidFill>
+                </a:rPr>
+                <a:t>tomb_lowaltar</a:t>
+              </a:r>
+            </a:p>
+          </p:txBody>
+        </p:sp>
         <p:sp>
           <p:nvSpPr>
-            <p:cNvPr id="170" name="TextBox 169"/>
+            <p:cNvPr id="179" name="TextBox 178"/>
             <p:cNvSpPr txBox="1"/>
             <p:nvPr/>
           </p:nvSpPr>
@@ -8445,7 +8837,125 @@
       </p:grpSp>
       <p:grpSp>
         <p:nvGrpSpPr>
-          <p:cNvPr id="171" name="Group 170"/>
+          <p:cNvPr id="180" name="Group 179"/>
+          <p:cNvGrpSpPr/>
+          <p:nvPr/>
+        </p:nvGrpSpPr>
+        <p:grpSpPr>
+          <a:xfrm>
+            <a:off x="24300000" y="18250000"/>
+            <a:ext cx="1280000" cy="1020000"/>
+            <a:chOff x="24300000" y="18250000"/>
+            <a:chExt cx="1280000" cy="1020000"/>
+          </a:xfrm>
+        </p:grpSpPr>
+        <p:sp>
+          <p:nvSpPr>
+            <p:cNvPr id="181" name="Rectangle 180"/>
+            <p:cNvSpPr/>
+            <p:nvPr/>
+          </p:nvSpPr>
+          <p:spPr>
+            <a:xfrm>
+              <a:off x="24300000" y="18250000"/>
+              <a:ext cx="1280000" cy="720000"/>
+            </a:xfrm>
+            <a:prstGeom prst="rect">
+              <a:avLst/>
+            </a:prstGeom>
+            <a:solidFill>
+              <a:srgbClr val="3FB950"/>
+            </a:solidFill>
+            <a:ln>
+              <a:solidFill>
+                <a:srgbClr val="2B8A3A"/>
+              </a:solidFill>
+            </a:ln>
+          </p:spPr>
+          <p:style>
+            <a:lnRef idx="1">
+              <a:schemeClr val="accent1"/>
+            </a:lnRef>
+            <a:fillRef idx="3">
+              <a:schemeClr val="accent1"/>
+            </a:fillRef>
+            <a:effectRef idx="2">
+              <a:schemeClr val="accent1"/>
+            </a:effectRef>
+            <a:fontRef idx="minor">
+              <a:schemeClr val="lt1"/>
+            </a:fontRef>
+          </p:style>
+          <p:txBody>
+            <a:bodyPr rtlCol="0" anchor="ctr"/>
+            <a:lstStyle/>
+            <a:p>
+              <a:r>
+                <a:rPr sz="900" b="1">
+                  <a:solidFill>
+                    <a:srgbClr val="FFFFFF"/>
+                  </a:solidFill>
+                </a:rPr>
+                <a:t>要補圖</a:t>
+              </a:r>
+            </a:p>
+            <a:p>
+              <a:r>
+                <a:rPr sz="900" b="1">
+                  <a:solidFill>
+                    <a:srgbClr val="FFFFFF"/>
+                  </a:solidFill>
+                </a:rPr>
+                <a:t>tomb_adit</a:t>
+              </a:r>
+            </a:p>
+          </p:txBody>
+        </p:sp>
+        <p:sp>
+          <p:nvSpPr>
+            <p:cNvPr id="182" name="TextBox 181"/>
+            <p:cNvSpPr txBox="1"/>
+            <p:nvPr/>
+          </p:nvSpPr>
+          <p:spPr>
+            <a:xfrm>
+              <a:off x="24300000" y="18970000"/>
+              <a:ext cx="1280000" cy="300000"/>
+            </a:xfrm>
+            <a:prstGeom prst="rect">
+              <a:avLst/>
+            </a:prstGeom>
+            <a:noFill/>
+          </p:spPr>
+          <p:txBody>
+            <a:bodyPr wrap="square" anchor="t">
+              <a:spAutoFit/>
+            </a:bodyPr>
+            <a:lstStyle/>
+            <a:p>
+              <a:pPr algn="ctr"/>
+              <a:r>
+                <a:rPr sz="1300" b="1"/>
+                <a:t>廢坑道</a:t>
+              </a:r>
+            </a:p>
+            <a:p>
+              <a:pPr algn="ctr"/>
+              <a:r>
+                <a:rPr sz="800">
+                  <a:solidFill>
+                    <a:srgbClr val="9A989E"/>
+                  </a:solidFill>
+                </a:rPr>
+                <a:t>adit</a:t>
+              </a:r>
+            </a:p>
+          </p:txBody>
+        </p:sp>
+      </p:grpSp>
+      <p:grpSp>
+        <p:nvGrpSpPr>
+          <p:cNvPr id="183" name="Group 182"/>
           <p:cNvGrpSpPr/>
           <p:nvPr/>
         </p:nvGrpSpPr>
@@ -8459,7 +8969,7 @@
         </p:grpSpPr>
         <p:pic>
           <p:nvPicPr>
-            <p:cNvPr id="172" name="Picture 171" descr="tomb_crypt.webp.jpg"/>
+            <p:cNvPr id="184" name="Picture 183" descr="tomb_crypt.webp.jpg"/>
             <p:cNvPicPr>
               <a:picLocks noChangeAspect="1"/>
             </p:cNvPicPr>
@@ -8483,7 +8993,7 @@
         </p:pic>
         <p:sp>
           <p:nvSpPr>
-            <p:cNvPr id="173" name="TextBox 172"/>
+            <p:cNvPr id="185" name="TextBox 184"/>
             <p:cNvSpPr txBox="1"/>
             <p:nvPr/>
           </p:nvSpPr>
@@ -8525,7 +9035,7 @@
       </p:grpSp>
       <p:cxnSp>
         <p:nvCxnSpPr>
-          <p:cNvPr id="174" name="Connector 173"/>
+          <p:cNvPr id="186" name="Connector 185"/>
           <p:cNvCxnSpPr/>
           <p:nvPr/>
         </p:nvCxnSpPr>
@@ -8560,14 +9070,14 @@
       </p:cxnSp>
       <p:cxnSp>
         <p:nvCxnSpPr>
-          <p:cNvPr id="175" name="Connector 174"/>
+          <p:cNvPr id="187" name="Connector 186"/>
           <p:cNvCxnSpPr/>
           <p:nvPr/>
         </p:nvCxnSpPr>
         <p:spPr>
-          <a:xfrm flipV="1">
-            <a:off x="12940000" y="16310000"/>
-            <a:ext cx="0" cy="1150000"/>
+          <a:xfrm>
+            <a:off x="12940000" y="18610000"/>
+            <a:ext cx="12000000" cy="0"/>
           </a:xfrm>
           <a:prstGeom prst="line">
             <a:avLst/>
@@ -8595,14 +9105,14 @@
       </p:cxnSp>
       <p:cxnSp>
         <p:nvCxnSpPr>
-          <p:cNvPr id="176" name="Connector 175"/>
+          <p:cNvPr id="188" name="Connector 187"/>
           <p:cNvCxnSpPr/>
           <p:nvPr/>
         </p:nvCxnSpPr>
         <p:spPr>
-          <a:xfrm>
-            <a:off x="12940000" y="17460000"/>
-            <a:ext cx="3000000" cy="0"/>
+          <a:xfrm flipV="1">
+            <a:off x="12940000" y="16310000"/>
+            <a:ext cx="0" cy="1150000"/>
           </a:xfrm>
           <a:prstGeom prst="line">
             <a:avLst/>
@@ -8630,13 +9140,13 @@
       </p:cxnSp>
       <p:cxnSp>
         <p:nvCxnSpPr>
-          <p:cNvPr id="177" name="Connector 176"/>
+          <p:cNvPr id="189" name="Connector 188"/>
           <p:cNvCxnSpPr/>
           <p:nvPr/>
         </p:nvCxnSpPr>
         <p:spPr>
           <a:xfrm>
-            <a:off x="15940000" y="17460000"/>
+            <a:off x="12940000" y="17460000"/>
             <a:ext cx="3000000" cy="0"/>
           </a:xfrm>
           <a:prstGeom prst="line">
@@ -8665,14 +9175,14 @@
       </p:cxnSp>
       <p:cxnSp>
         <p:nvCxnSpPr>
-          <p:cNvPr id="178" name="Connector 177"/>
+          <p:cNvPr id="190" name="Connector 189"/>
           <p:cNvCxnSpPr/>
           <p:nvPr/>
         </p:nvCxnSpPr>
         <p:spPr>
-          <a:xfrm flipV="1">
-            <a:off x="18940000" y="16310000"/>
-            <a:ext cx="0" cy="1150000"/>
+          <a:xfrm>
+            <a:off x="15940000" y="17460000"/>
+            <a:ext cx="3000000" cy="0"/>
           </a:xfrm>
           <a:prstGeom prst="line">
             <a:avLst/>
@@ -8700,13 +9210,13 @@
       </p:cxnSp>
       <p:cxnSp>
         <p:nvCxnSpPr>
-          <p:cNvPr id="179" name="Connector 178"/>
+          <p:cNvPr id="191" name="Connector 190"/>
           <p:cNvCxnSpPr/>
           <p:nvPr/>
         </p:nvCxnSpPr>
         <p:spPr>
           <a:xfrm flipV="1">
-            <a:off x="12940000" y="15160000"/>
+            <a:off x="18940000" y="16310000"/>
             <a:ext cx="0" cy="1150000"/>
           </a:xfrm>
           <a:prstGeom prst="line">
@@ -8735,14 +9245,14 @@
       </p:cxnSp>
       <p:cxnSp>
         <p:nvCxnSpPr>
-          <p:cNvPr id="180" name="Connector 179"/>
+          <p:cNvPr id="192" name="Connector 191"/>
           <p:cNvCxnSpPr/>
           <p:nvPr/>
         </p:nvCxnSpPr>
         <p:spPr>
-          <a:xfrm flipH="1">
-            <a:off x="9940000" y="16310000"/>
-            <a:ext cx="3000000" cy="0"/>
+          <a:xfrm flipV="1">
+            <a:off x="12940000" y="15160000"/>
+            <a:ext cx="0" cy="1150000"/>
           </a:xfrm>
           <a:prstGeom prst="line">
             <a:avLst/>
@@ -8770,13 +9280,13 @@
       </p:cxnSp>
       <p:cxnSp>
         <p:nvCxnSpPr>
-          <p:cNvPr id="181" name="Connector 180"/>
+          <p:cNvPr id="193" name="Connector 192"/>
           <p:cNvCxnSpPr/>
           <p:nvPr/>
         </p:nvCxnSpPr>
         <p:spPr>
           <a:xfrm flipH="1">
-            <a:off x="6940000" y="16310000"/>
+            <a:off x="9940000" y="16310000"/>
             <a:ext cx="3000000" cy="0"/>
           </a:xfrm>
           <a:prstGeom prst="line">
@@ -8805,14 +9315,14 @@
       </p:cxnSp>
       <p:cxnSp>
         <p:nvCxnSpPr>
-          <p:cNvPr id="182" name="Connector 181"/>
+          <p:cNvPr id="194" name="Connector 193"/>
           <p:cNvCxnSpPr/>
           <p:nvPr/>
         </p:nvCxnSpPr>
         <p:spPr>
-          <a:xfrm>
+          <a:xfrm flipH="1">
             <a:off x="6940000" y="16310000"/>
-            <a:ext cx="0" cy="1150000"/>
+            <a:ext cx="3000000" cy="0"/>
           </a:xfrm>
           <a:prstGeom prst="line">
             <a:avLst/>
@@ -8840,14 +9350,14 @@
       </p:cxnSp>
       <p:cxnSp>
         <p:nvCxnSpPr>
-          <p:cNvPr id="183" name="Connector 182"/>
+          <p:cNvPr id="195" name="Connector 194"/>
           <p:cNvCxnSpPr/>
           <p:nvPr/>
         </p:nvCxnSpPr>
         <p:spPr>
           <a:xfrm>
-            <a:off x="12940000" y="15160000"/>
-            <a:ext cx="3000000" cy="0"/>
+            <a:off x="6940000" y="16310000"/>
+            <a:ext cx="0" cy="1150000"/>
           </a:xfrm>
           <a:prstGeom prst="line">
             <a:avLst/>
@@ -8875,13 +9385,13 @@
       </p:cxnSp>
       <p:cxnSp>
         <p:nvCxnSpPr>
-          <p:cNvPr id="184" name="Connector 183"/>
+          <p:cNvPr id="196" name="Connector 195"/>
           <p:cNvCxnSpPr/>
           <p:nvPr/>
         </p:nvCxnSpPr>
         <p:spPr>
-          <a:xfrm flipH="1">
-            <a:off x="9940000" y="15160000"/>
+          <a:xfrm>
+            <a:off x="12940000" y="15160000"/>
             <a:ext cx="3000000" cy="0"/>
           </a:xfrm>
           <a:prstGeom prst="line">
@@ -8910,13 +9420,13 @@
       </p:cxnSp>
       <p:cxnSp>
         <p:nvCxnSpPr>
-          <p:cNvPr id="185" name="Connector 184"/>
+          <p:cNvPr id="197" name="Connector 196"/>
           <p:cNvCxnSpPr/>
           <p:nvPr/>
         </p:nvCxnSpPr>
         <p:spPr>
           <a:xfrm flipH="1">
-            <a:off x="6940000" y="15160000"/>
+            <a:off x="9940000" y="15160000"/>
             <a:ext cx="3000000" cy="0"/>
           </a:xfrm>
           <a:prstGeom prst="line">
@@ -8945,14 +9455,14 @@
       </p:cxnSp>
       <p:cxnSp>
         <p:nvCxnSpPr>
-          <p:cNvPr id="186" name="Connector 185"/>
+          <p:cNvPr id="198" name="Connector 197"/>
           <p:cNvCxnSpPr/>
           <p:nvPr/>
         </p:nvCxnSpPr>
         <p:spPr>
-          <a:xfrm flipV="1">
-            <a:off x="15940000" y="14010000"/>
-            <a:ext cx="0" cy="1150000"/>
+          <a:xfrm flipH="1">
+            <a:off x="6940000" y="15160000"/>
+            <a:ext cx="3000000" cy="0"/>
           </a:xfrm>
           <a:prstGeom prst="line">
             <a:avLst/>
@@ -8980,14 +9490,14 @@
       </p:cxnSp>
       <p:cxnSp>
         <p:nvCxnSpPr>
-          <p:cNvPr id="187" name="Connector 186"/>
+          <p:cNvPr id="199" name="Connector 198"/>
           <p:cNvCxnSpPr/>
           <p:nvPr/>
         </p:nvCxnSpPr>
         <p:spPr>
-          <a:xfrm>
-            <a:off x="15940000" y="15160000"/>
-            <a:ext cx="3000000" cy="0"/>
+          <a:xfrm flipV="1">
+            <a:off x="15940000" y="14010000"/>
+            <a:ext cx="0" cy="1150000"/>
           </a:xfrm>
           <a:prstGeom prst="line">
             <a:avLst/>
@@ -9015,13 +9525,13 @@
       </p:cxnSp>
       <p:cxnSp>
         <p:nvCxnSpPr>
-          <p:cNvPr id="188" name="Connector 187"/>
+          <p:cNvPr id="200" name="Connector 199"/>
           <p:cNvCxnSpPr/>
           <p:nvPr/>
         </p:nvCxnSpPr>
         <p:spPr>
-          <a:xfrm flipH="1">
-            <a:off x="12940000" y="14010000"/>
+          <a:xfrm>
+            <a:off x="15940000" y="15160000"/>
             <a:ext cx="3000000" cy="0"/>
           </a:xfrm>
           <a:prstGeom prst="line">
@@ -9050,14 +9560,14 @@
       </p:cxnSp>
       <p:cxnSp>
         <p:nvCxnSpPr>
-          <p:cNvPr id="189" name="Connector 188"/>
+          <p:cNvPr id="201" name="Connector 200"/>
           <p:cNvCxnSpPr/>
           <p:nvPr/>
         </p:nvCxnSpPr>
         <p:spPr>
-          <a:xfrm flipV="1">
-            <a:off x="15940000" y="12860000"/>
-            <a:ext cx="0" cy="1150000"/>
+          <a:xfrm flipH="1">
+            <a:off x="12940000" y="14010000"/>
+            <a:ext cx="3000000" cy="0"/>
           </a:xfrm>
           <a:prstGeom prst="line">
             <a:avLst/>
@@ -9085,13 +9595,13 @@
       </p:cxnSp>
       <p:cxnSp>
         <p:nvCxnSpPr>
-          <p:cNvPr id="190" name="Connector 189"/>
+          <p:cNvPr id="202" name="Connector 201"/>
           <p:cNvCxnSpPr/>
           <p:nvPr/>
         </p:nvCxnSpPr>
         <p:spPr>
           <a:xfrm flipV="1">
-            <a:off x="12940000" y="12860000"/>
+            <a:off x="15940000" y="12860000"/>
             <a:ext cx="0" cy="1150000"/>
           </a:xfrm>
           <a:prstGeom prst="line">
@@ -9120,14 +9630,14 @@
       </p:cxnSp>
       <p:cxnSp>
         <p:nvCxnSpPr>
-          <p:cNvPr id="191" name="Connector 190"/>
+          <p:cNvPr id="203" name="Connector 202"/>
           <p:cNvCxnSpPr/>
           <p:nvPr/>
         </p:nvCxnSpPr>
         <p:spPr>
-          <a:xfrm flipH="1">
-            <a:off x="9940000" y="14010000"/>
-            <a:ext cx="3000000" cy="0"/>
+          <a:xfrm flipV="1">
+            <a:off x="12940000" y="12860000"/>
+            <a:ext cx="0" cy="1150000"/>
           </a:xfrm>
           <a:prstGeom prst="line">
             <a:avLst/>
@@ -9155,13 +9665,13 @@
       </p:cxnSp>
       <p:cxnSp>
         <p:nvCxnSpPr>
-          <p:cNvPr id="192" name="Connector 191"/>
+          <p:cNvPr id="204" name="Connector 203"/>
           <p:cNvCxnSpPr/>
           <p:nvPr/>
         </p:nvCxnSpPr>
         <p:spPr>
           <a:xfrm flipH="1">
-            <a:off x="6940000" y="14010000"/>
+            <a:off x="9940000" y="14010000"/>
             <a:ext cx="3000000" cy="0"/>
           </a:xfrm>
           <a:prstGeom prst="line">
@@ -9190,14 +9700,14 @@
       </p:cxnSp>
       <p:cxnSp>
         <p:nvCxnSpPr>
-          <p:cNvPr id="193" name="Connector 192"/>
+          <p:cNvPr id="205" name="Connector 204"/>
           <p:cNvCxnSpPr/>
           <p:nvPr/>
         </p:nvCxnSpPr>
         <p:spPr>
-          <a:xfrm flipV="1">
-            <a:off x="9940000" y="12860000"/>
-            <a:ext cx="0" cy="1150000"/>
+          <a:xfrm flipH="1">
+            <a:off x="6940000" y="14010000"/>
+            <a:ext cx="3000000" cy="0"/>
           </a:xfrm>
           <a:prstGeom prst="line">
             <a:avLst/>
@@ -9225,14 +9735,14 @@
       </p:cxnSp>
       <p:cxnSp>
         <p:nvCxnSpPr>
-          <p:cNvPr id="194" name="Connector 193"/>
+          <p:cNvPr id="206" name="Connector 205"/>
           <p:cNvCxnSpPr/>
           <p:nvPr/>
         </p:nvCxnSpPr>
         <p:spPr>
           <a:xfrm flipV="1">
-            <a:off x="6940000" y="10560000"/>
-            <a:ext cx="0" cy="3450000"/>
+            <a:off x="9940000" y="12860000"/>
+            <a:ext cx="0" cy="1150000"/>
           </a:xfrm>
           <a:prstGeom prst="line">
             <a:avLst/>
@@ -9260,14 +9770,14 @@
       </p:cxnSp>
       <p:cxnSp>
         <p:nvCxnSpPr>
-          <p:cNvPr id="195" name="Connector 194"/>
+          <p:cNvPr id="207" name="Connector 206"/>
           <p:cNvCxnSpPr/>
           <p:nvPr/>
         </p:nvCxnSpPr>
         <p:spPr>
           <a:xfrm flipV="1">
-            <a:off x="6940000" y="9410000"/>
-            <a:ext cx="0" cy="1150000"/>
+            <a:off x="6940000" y="10560000"/>
+            <a:ext cx="0" cy="3450000"/>
           </a:xfrm>
           <a:prstGeom prst="line">
             <a:avLst/>
@@ -9295,13 +9805,13 @@
       </p:cxnSp>
       <p:cxnSp>
         <p:nvCxnSpPr>
-          <p:cNvPr id="196" name="Connector 195"/>
+          <p:cNvPr id="208" name="Connector 207"/>
           <p:cNvCxnSpPr/>
           <p:nvPr/>
         </p:nvCxnSpPr>
         <p:spPr>
           <a:xfrm flipV="1">
-            <a:off x="6940000" y="8260000"/>
+            <a:off x="6940000" y="9410000"/>
             <a:ext cx="0" cy="1150000"/>
           </a:xfrm>
           <a:prstGeom prst="line">
@@ -9330,14 +9840,14 @@
       </p:cxnSp>
       <p:cxnSp>
         <p:nvCxnSpPr>
-          <p:cNvPr id="197" name="Connector 196"/>
+          <p:cNvPr id="209" name="Connector 208"/>
           <p:cNvCxnSpPr/>
           <p:nvPr/>
         </p:nvCxnSpPr>
         <p:spPr>
-          <a:xfrm>
-            <a:off x="6940000" y="9410000"/>
-            <a:ext cx="3000000" cy="0"/>
+          <a:xfrm flipV="1">
+            <a:off x="6940000" y="8260000"/>
+            <a:ext cx="0" cy="1150000"/>
           </a:xfrm>
           <a:prstGeom prst="line">
             <a:avLst/>
@@ -9365,13 +9875,13 @@
       </p:cxnSp>
       <p:cxnSp>
         <p:nvCxnSpPr>
-          <p:cNvPr id="198" name="Connector 197"/>
+          <p:cNvPr id="210" name="Connector 209"/>
           <p:cNvCxnSpPr/>
           <p:nvPr/>
         </p:nvCxnSpPr>
         <p:spPr>
-          <a:xfrm flipH="1">
-            <a:off x="3940000" y="9410000"/>
+          <a:xfrm>
+            <a:off x="6940000" y="9410000"/>
             <a:ext cx="3000000" cy="0"/>
           </a:xfrm>
           <a:prstGeom prst="line">
@@ -9400,14 +9910,14 @@
       </p:cxnSp>
       <p:cxnSp>
         <p:nvCxnSpPr>
-          <p:cNvPr id="199" name="Connector 198"/>
+          <p:cNvPr id="211" name="Connector 210"/>
           <p:cNvCxnSpPr/>
           <p:nvPr/>
         </p:nvCxnSpPr>
         <p:spPr>
-          <a:xfrm flipV="1">
-            <a:off x="3940000" y="8260000"/>
-            <a:ext cx="0" cy="1150000"/>
+          <a:xfrm flipH="1">
+            <a:off x="3940000" y="9410000"/>
+            <a:ext cx="3000000" cy="0"/>
           </a:xfrm>
           <a:prstGeom prst="line">
             <a:avLst/>
@@ -9435,13 +9945,13 @@
       </p:cxnSp>
       <p:cxnSp>
         <p:nvCxnSpPr>
-          <p:cNvPr id="200" name="Connector 199"/>
+          <p:cNvPr id="212" name="Connector 211"/>
           <p:cNvCxnSpPr/>
           <p:nvPr/>
         </p:nvCxnSpPr>
         <p:spPr>
           <a:xfrm flipV="1">
-            <a:off x="6940000" y="7110000"/>
+            <a:off x="3940000" y="8260000"/>
             <a:ext cx="0" cy="1150000"/>
           </a:xfrm>
           <a:prstGeom prst="line">
@@ -9470,13 +9980,13 @@
       </p:cxnSp>
       <p:cxnSp>
         <p:nvCxnSpPr>
-          <p:cNvPr id="201" name="Connector 200"/>
+          <p:cNvPr id="213" name="Connector 212"/>
           <p:cNvCxnSpPr/>
           <p:nvPr/>
         </p:nvCxnSpPr>
         <p:spPr>
-          <a:xfrm>
-            <a:off x="9940000" y="9410000"/>
+          <a:xfrm flipV="1">
+            <a:off x="6940000" y="7110000"/>
             <a:ext cx="0" cy="1150000"/>
           </a:xfrm>
           <a:prstGeom prst="line">
@@ -9505,14 +10015,14 @@
       </p:cxnSp>
       <p:cxnSp>
         <p:nvCxnSpPr>
-          <p:cNvPr id="202" name="Connector 201"/>
+          <p:cNvPr id="214" name="Connector 213"/>
           <p:cNvCxnSpPr/>
           <p:nvPr/>
         </p:nvCxnSpPr>
         <p:spPr>
           <a:xfrm>
             <a:off x="9940000" y="9410000"/>
-            <a:ext cx="3000000" cy="0"/>
+            <a:ext cx="0" cy="1150000"/>
           </a:xfrm>
           <a:prstGeom prst="line">
             <a:avLst/>
@@ -9540,14 +10050,14 @@
       </p:cxnSp>
       <p:cxnSp>
         <p:nvCxnSpPr>
-          <p:cNvPr id="203" name="Connector 202"/>
+          <p:cNvPr id="215" name="Connector 214"/>
           <p:cNvCxnSpPr/>
           <p:nvPr/>
         </p:nvCxnSpPr>
         <p:spPr>
-          <a:xfrm flipV="1">
-            <a:off x="12940000" y="8260000"/>
-            <a:ext cx="0" cy="1150000"/>
+          <a:xfrm>
+            <a:off x="9940000" y="9410000"/>
+            <a:ext cx="3000000" cy="0"/>
           </a:xfrm>
           <a:prstGeom prst="line">
             <a:avLst/>
@@ -9575,14 +10085,14 @@
       </p:cxnSp>
       <p:cxnSp>
         <p:nvCxnSpPr>
-          <p:cNvPr id="204" name="Connector 203"/>
+          <p:cNvPr id="216" name="Connector 215"/>
           <p:cNvCxnSpPr/>
           <p:nvPr/>
         </p:nvCxnSpPr>
         <p:spPr>
-          <a:xfrm>
-            <a:off x="12940000" y="9410000"/>
-            <a:ext cx="3000000" cy="0"/>
+          <a:xfrm flipV="1">
+            <a:off x="12940000" y="8260000"/>
+            <a:ext cx="0" cy="1150000"/>
           </a:xfrm>
           <a:prstGeom prst="line">
             <a:avLst/>
@@ -9610,14 +10120,14 @@
       </p:cxnSp>
       <p:cxnSp>
         <p:nvCxnSpPr>
-          <p:cNvPr id="205" name="Connector 204"/>
+          <p:cNvPr id="217" name="Connector 216"/>
           <p:cNvCxnSpPr/>
           <p:nvPr/>
         </p:nvCxnSpPr>
         <p:spPr>
           <a:xfrm>
             <a:off x="12940000" y="9410000"/>
-            <a:ext cx="0" cy="1150000"/>
+            <a:ext cx="3000000" cy="0"/>
           </a:xfrm>
           <a:prstGeom prst="line">
             <a:avLst/>
@@ -9645,14 +10155,14 @@
       </p:cxnSp>
       <p:cxnSp>
         <p:nvCxnSpPr>
-          <p:cNvPr id="206" name="Connector 205"/>
+          <p:cNvPr id="218" name="Connector 217"/>
           <p:cNvCxnSpPr/>
           <p:nvPr/>
         </p:nvCxnSpPr>
         <p:spPr>
           <a:xfrm>
-            <a:off x="15940000" y="9410000"/>
-            <a:ext cx="3000000" cy="0"/>
+            <a:off x="12940000" y="9410000"/>
+            <a:ext cx="0" cy="1150000"/>
           </a:xfrm>
           <a:prstGeom prst="line">
             <a:avLst/>
@@ -9680,14 +10190,14 @@
       </p:cxnSp>
       <p:cxnSp>
         <p:nvCxnSpPr>
-          <p:cNvPr id="207" name="Connector 206"/>
+          <p:cNvPr id="219" name="Connector 218"/>
           <p:cNvCxnSpPr/>
           <p:nvPr/>
         </p:nvCxnSpPr>
         <p:spPr>
           <a:xfrm>
             <a:off x="15940000" y="9410000"/>
-            <a:ext cx="0" cy="1150000"/>
+            <a:ext cx="3000000" cy="0"/>
           </a:xfrm>
           <a:prstGeom prst="line">
             <a:avLst/>
@@ -9715,13 +10225,13 @@
       </p:cxnSp>
       <p:cxnSp>
         <p:nvCxnSpPr>
-          <p:cNvPr id="208" name="Connector 207"/>
+          <p:cNvPr id="220" name="Connector 219"/>
           <p:cNvCxnSpPr/>
           <p:nvPr/>
         </p:nvCxnSpPr>
         <p:spPr>
-          <a:xfrm flipV="1">
-            <a:off x="18940000" y="8260000"/>
+          <a:xfrm>
+            <a:off x="15940000" y="9410000"/>
             <a:ext cx="0" cy="1150000"/>
           </a:xfrm>
           <a:prstGeom prst="line">
@@ -9750,14 +10260,14 @@
       </p:cxnSp>
       <p:cxnSp>
         <p:nvCxnSpPr>
-          <p:cNvPr id="209" name="Connector 208"/>
+          <p:cNvPr id="221" name="Connector 220"/>
           <p:cNvCxnSpPr/>
           <p:nvPr/>
         </p:nvCxnSpPr>
         <p:spPr>
-          <a:xfrm>
-            <a:off x="18940000" y="9410000"/>
-            <a:ext cx="3000000" cy="0"/>
+          <a:xfrm flipV="1">
+            <a:off x="18940000" y="8260000"/>
+            <a:ext cx="0" cy="1150000"/>
           </a:xfrm>
           <a:prstGeom prst="line">
             <a:avLst/>
@@ -9785,13 +10295,13 @@
       </p:cxnSp>
       <p:cxnSp>
         <p:nvCxnSpPr>
-          <p:cNvPr id="210" name="Connector 209"/>
+          <p:cNvPr id="222" name="Connector 221"/>
           <p:cNvCxnSpPr/>
           <p:nvPr/>
         </p:nvCxnSpPr>
         <p:spPr>
-          <a:xfrm flipH="1">
-            <a:off x="9940000" y="8260000"/>
+          <a:xfrm>
+            <a:off x="18940000" y="9410000"/>
             <a:ext cx="3000000" cy="0"/>
           </a:xfrm>
           <a:prstGeom prst="line">
@@ -9820,14 +10330,14 @@
       </p:cxnSp>
       <p:cxnSp>
         <p:nvCxnSpPr>
-          <p:cNvPr id="211" name="Connector 210"/>
+          <p:cNvPr id="223" name="Connector 222"/>
           <p:cNvCxnSpPr/>
           <p:nvPr/>
         </p:nvCxnSpPr>
         <p:spPr>
-          <a:xfrm flipV="1">
-            <a:off x="21940000" y="8260000"/>
-            <a:ext cx="0" cy="1150000"/>
+          <a:xfrm flipH="1">
+            <a:off x="9940000" y="8260000"/>
+            <a:ext cx="3000000" cy="0"/>
           </a:xfrm>
           <a:prstGeom prst="line">
             <a:avLst/>
@@ -9855,13 +10365,13 @@
       </p:cxnSp>
       <p:cxnSp>
         <p:nvCxnSpPr>
-          <p:cNvPr id="212" name="Connector 211"/>
+          <p:cNvPr id="224" name="Connector 223"/>
           <p:cNvCxnSpPr/>
           <p:nvPr/>
         </p:nvCxnSpPr>
         <p:spPr>
           <a:xfrm>
-            <a:off x="21940000" y="9410000"/>
+            <a:off x="15940000" y="10560000"/>
             <a:ext cx="3000000" cy="0"/>
           </a:xfrm>
           <a:prstGeom prst="line">
@@ -9890,13 +10400,13 @@
       </p:cxnSp>
       <p:cxnSp>
         <p:nvCxnSpPr>
-          <p:cNvPr id="213" name="Connector 212"/>
+          <p:cNvPr id="225" name="Connector 224"/>
           <p:cNvCxnSpPr/>
           <p:nvPr/>
         </p:nvCxnSpPr>
         <p:spPr>
-          <a:xfrm>
-            <a:off x="21940000" y="9410000"/>
+          <a:xfrm flipV="1">
+            <a:off x="21940000" y="8260000"/>
             <a:ext cx="0" cy="1150000"/>
           </a:xfrm>
           <a:prstGeom prst="line">
@@ -9925,14 +10435,14 @@
       </p:cxnSp>
       <p:cxnSp>
         <p:nvCxnSpPr>
-          <p:cNvPr id="214" name="Connector 213"/>
+          <p:cNvPr id="226" name="Connector 225"/>
           <p:cNvCxnSpPr/>
           <p:nvPr/>
         </p:nvCxnSpPr>
         <p:spPr>
           <a:xfrm>
-            <a:off x="21940000" y="10560000"/>
-            <a:ext cx="0" cy="1150000"/>
+            <a:off x="21940000" y="9410000"/>
+            <a:ext cx="3000000" cy="0"/>
           </a:xfrm>
           <a:prstGeom prst="line">
             <a:avLst/>
@@ -9960,14 +10470,14 @@
       </p:cxnSp>
       <p:cxnSp>
         <p:nvCxnSpPr>
-          <p:cNvPr id="215" name="Connector 214"/>
+          <p:cNvPr id="227" name="Connector 226"/>
           <p:cNvCxnSpPr/>
           <p:nvPr/>
         </p:nvCxnSpPr>
         <p:spPr>
-          <a:xfrm flipH="1">
-            <a:off x="18940000" y="10560000"/>
-            <a:ext cx="3000000" cy="0"/>
+          <a:xfrm>
+            <a:off x="21940000" y="9410000"/>
+            <a:ext cx="0" cy="1150000"/>
           </a:xfrm>
           <a:prstGeom prst="line">
             <a:avLst/>
@@ -9995,13 +10505,13 @@
       </p:cxnSp>
       <p:cxnSp>
         <p:nvCxnSpPr>
-          <p:cNvPr id="216" name="Connector 215"/>
+          <p:cNvPr id="228" name="Connector 227"/>
           <p:cNvCxnSpPr/>
           <p:nvPr/>
         </p:nvCxnSpPr>
         <p:spPr>
-          <a:xfrm flipV="1">
-            <a:off x="21940000" y="7110000"/>
+          <a:xfrm>
+            <a:off x="21940000" y="10560000"/>
             <a:ext cx="0" cy="1150000"/>
           </a:xfrm>
           <a:prstGeom prst="line">
@@ -10030,13 +10540,13 @@
       </p:cxnSp>
       <p:cxnSp>
         <p:nvCxnSpPr>
-          <p:cNvPr id="217" name="Connector 216"/>
+          <p:cNvPr id="229" name="Connector 228"/>
           <p:cNvCxnSpPr/>
           <p:nvPr/>
         </p:nvCxnSpPr>
         <p:spPr>
-          <a:xfrm>
-            <a:off x="21940000" y="8260000"/>
+          <a:xfrm flipH="1">
+            <a:off x="18940000" y="10560000"/>
             <a:ext cx="3000000" cy="0"/>
           </a:xfrm>
           <a:prstGeom prst="line">
@@ -10065,14 +10575,14 @@
       </p:cxnSp>
       <p:cxnSp>
         <p:nvCxnSpPr>
-          <p:cNvPr id="218" name="Connector 217"/>
+          <p:cNvPr id="230" name="Connector 229"/>
           <p:cNvCxnSpPr/>
           <p:nvPr/>
         </p:nvCxnSpPr>
         <p:spPr>
           <a:xfrm>
-            <a:off x="24940000" y="9410000"/>
-            <a:ext cx="3000000" cy="0"/>
+            <a:off x="18940000" y="10560000"/>
+            <a:ext cx="0" cy="2300000"/>
           </a:xfrm>
           <a:prstGeom prst="line">
             <a:avLst/>
@@ -10100,13 +10610,13 @@
       </p:cxnSp>
       <p:cxnSp>
         <p:nvCxnSpPr>
-          <p:cNvPr id="219" name="Connector 218"/>
+          <p:cNvPr id="231" name="Connector 230"/>
           <p:cNvCxnSpPr/>
           <p:nvPr/>
         </p:nvCxnSpPr>
         <p:spPr>
-          <a:xfrm>
-            <a:off x="24940000" y="9410000"/>
+          <a:xfrm flipV="1">
+            <a:off x="21940000" y="7110000"/>
             <a:ext cx="0" cy="1150000"/>
           </a:xfrm>
           <a:prstGeom prst="line">
@@ -10135,14 +10645,14 @@
       </p:cxnSp>
       <p:cxnSp>
         <p:nvCxnSpPr>
-          <p:cNvPr id="220" name="Connector 219"/>
+          <p:cNvPr id="232" name="Connector 231"/>
           <p:cNvCxnSpPr/>
           <p:nvPr/>
         </p:nvCxnSpPr>
         <p:spPr>
           <a:xfrm>
-            <a:off x="21940000" y="11710000"/>
-            <a:ext cx="0" cy="1150000"/>
+            <a:off x="21940000" y="8260000"/>
+            <a:ext cx="3000000" cy="0"/>
           </a:xfrm>
           <a:prstGeom prst="line">
             <a:avLst/>
@@ -10170,14 +10680,14 @@
       </p:cxnSp>
       <p:cxnSp>
         <p:nvCxnSpPr>
-          <p:cNvPr id="221" name="Connector 220"/>
+          <p:cNvPr id="233" name="Connector 232"/>
           <p:cNvCxnSpPr/>
           <p:nvPr/>
         </p:nvCxnSpPr>
         <p:spPr>
           <a:xfrm>
-            <a:off x="21940000" y="12860000"/>
-            <a:ext cx="0" cy="1150000"/>
+            <a:off x="24940000" y="9410000"/>
+            <a:ext cx="3000000" cy="0"/>
           </a:xfrm>
           <a:prstGeom prst="line">
             <a:avLst/>
@@ -10205,14 +10715,14 @@
       </p:cxnSp>
       <p:cxnSp>
         <p:nvCxnSpPr>
-          <p:cNvPr id="222" name="Connector 221"/>
+          <p:cNvPr id="234" name="Connector 233"/>
           <p:cNvCxnSpPr/>
           <p:nvPr/>
         </p:nvCxnSpPr>
         <p:spPr>
-          <a:xfrm flipH="1">
-            <a:off x="18940000" y="14010000"/>
-            <a:ext cx="3000000" cy="0"/>
+          <a:xfrm>
+            <a:off x="24940000" y="9410000"/>
+            <a:ext cx="0" cy="1150000"/>
           </a:xfrm>
           <a:prstGeom prst="line">
             <a:avLst/>
@@ -10240,14 +10750,14 @@
       </p:cxnSp>
       <p:cxnSp>
         <p:nvCxnSpPr>
-          <p:cNvPr id="223" name="Connector 222"/>
+          <p:cNvPr id="235" name="Connector 234"/>
           <p:cNvCxnSpPr/>
           <p:nvPr/>
         </p:nvCxnSpPr>
         <p:spPr>
           <a:xfrm>
-            <a:off x="21940000" y="14010000"/>
-            <a:ext cx="3000000" cy="0"/>
+            <a:off x="21940000" y="11710000"/>
+            <a:ext cx="0" cy="1150000"/>
           </a:xfrm>
           <a:prstGeom prst="line">
             <a:avLst/>
@@ -10275,13 +10785,13 @@
       </p:cxnSp>
       <p:cxnSp>
         <p:nvCxnSpPr>
-          <p:cNvPr id="224" name="Connector 223"/>
+          <p:cNvPr id="236" name="Connector 235"/>
           <p:cNvCxnSpPr/>
           <p:nvPr/>
         </p:nvCxnSpPr>
         <p:spPr>
           <a:xfrm>
-            <a:off x="24940000" y="14010000"/>
+            <a:off x="21940000" y="12860000"/>
             <a:ext cx="0" cy="1150000"/>
           </a:xfrm>
           <a:prstGeom prst="line">
@@ -10310,13 +10820,13 @@
       </p:cxnSp>
       <p:cxnSp>
         <p:nvCxnSpPr>
-          <p:cNvPr id="225" name="Connector 224"/>
+          <p:cNvPr id="237" name="Connector 236"/>
           <p:cNvCxnSpPr/>
           <p:nvPr/>
         </p:nvCxnSpPr>
         <p:spPr>
           <a:xfrm>
-            <a:off x="24940000" y="15160000"/>
+            <a:off x="18940000" y="12860000"/>
             <a:ext cx="0" cy="1150000"/>
           </a:xfrm>
           <a:prstGeom prst="line">
@@ -10345,13 +10855,13 @@
       </p:cxnSp>
       <p:cxnSp>
         <p:nvCxnSpPr>
-          <p:cNvPr id="226" name="Connector 225"/>
+          <p:cNvPr id="238" name="Connector 237"/>
           <p:cNvCxnSpPr/>
           <p:nvPr/>
         </p:nvCxnSpPr>
         <p:spPr>
-          <a:xfrm>
-            <a:off x="24940000" y="16310000"/>
+          <a:xfrm flipV="1">
+            <a:off x="21940000" y="14010000"/>
             <a:ext cx="0" cy="1150000"/>
           </a:xfrm>
           <a:prstGeom prst="line">
@@ -10380,14 +10890,14 @@
       </p:cxnSp>
       <p:cxnSp>
         <p:nvCxnSpPr>
-          <p:cNvPr id="227" name="Connector 226"/>
+          <p:cNvPr id="239" name="Connector 238"/>
           <p:cNvCxnSpPr/>
           <p:nvPr/>
         </p:nvCxnSpPr>
         <p:spPr>
           <a:xfrm>
-            <a:off x="24940000" y="16310000"/>
-            <a:ext cx="3000000" cy="0"/>
+            <a:off x="21940000" y="15160000"/>
+            <a:ext cx="0" cy="1150000"/>
           </a:xfrm>
           <a:prstGeom prst="line">
             <a:avLst/>
@@ -10415,14 +10925,14 @@
       </p:cxnSp>
       <p:cxnSp>
         <p:nvCxnSpPr>
-          <p:cNvPr id="228" name="Connector 227"/>
+          <p:cNvPr id="240" name="Connector 239"/>
           <p:cNvCxnSpPr/>
           <p:nvPr/>
         </p:nvCxnSpPr>
         <p:spPr>
-          <a:xfrm>
-            <a:off x="27940000" y="16310000"/>
-            <a:ext cx="0" cy="1150000"/>
+          <a:xfrm flipH="1">
+            <a:off x="18940000" y="14010000"/>
+            <a:ext cx="3000000" cy="0"/>
           </a:xfrm>
           <a:prstGeom prst="line">
             <a:avLst/>
@@ -10450,14 +10960,259 @@
       </p:cxnSp>
       <p:cxnSp>
         <p:nvCxnSpPr>
-          <p:cNvPr id="229" name="Connector 228"/>
+          <p:cNvPr id="241" name="Connector 240"/>
           <p:cNvCxnSpPr/>
           <p:nvPr/>
         </p:nvCxnSpPr>
         <p:spPr>
           <a:xfrm>
+            <a:off x="21940000" y="14010000"/>
+            <a:ext cx="3000000" cy="0"/>
+          </a:xfrm>
+          <a:prstGeom prst="line">
+            <a:avLst/>
+          </a:prstGeom>
+          <a:ln w="19050">
+            <a:solidFill>
+              <a:srgbClr val="333338"/>
+            </a:solidFill>
+          </a:ln>
+        </p:spPr>
+        <p:style>
+          <a:lnRef idx="2">
+            <a:schemeClr val="accent1"/>
+          </a:lnRef>
+          <a:fillRef idx="0">
+            <a:schemeClr val="accent1"/>
+          </a:fillRef>
+          <a:effectRef idx="1">
+            <a:schemeClr val="accent1"/>
+          </a:effectRef>
+          <a:fontRef idx="minor">
+            <a:schemeClr val="tx1"/>
+          </a:fontRef>
+        </p:style>
+      </p:cxnSp>
+      <p:cxnSp>
+        <p:nvCxnSpPr>
+          <p:cNvPr id="242" name="Connector 241"/>
+          <p:cNvCxnSpPr/>
+          <p:nvPr/>
+        </p:nvCxnSpPr>
+        <p:spPr>
+          <a:xfrm>
+            <a:off x="24940000" y="14010000"/>
+            <a:ext cx="0" cy="1150000"/>
+          </a:xfrm>
+          <a:prstGeom prst="line">
+            <a:avLst/>
+          </a:prstGeom>
+          <a:ln w="19050">
+            <a:solidFill>
+              <a:srgbClr val="333338"/>
+            </a:solidFill>
+          </a:ln>
+        </p:spPr>
+        <p:style>
+          <a:lnRef idx="2">
+            <a:schemeClr val="accent1"/>
+          </a:lnRef>
+          <a:fillRef idx="0">
+            <a:schemeClr val="accent1"/>
+          </a:fillRef>
+          <a:effectRef idx="1">
+            <a:schemeClr val="accent1"/>
+          </a:effectRef>
+          <a:fontRef idx="minor">
+            <a:schemeClr val="tx1"/>
+          </a:fontRef>
+        </p:style>
+      </p:cxnSp>
+      <p:cxnSp>
+        <p:nvCxnSpPr>
+          <p:cNvPr id="243" name="Connector 242"/>
+          <p:cNvCxnSpPr/>
+          <p:nvPr/>
+        </p:nvCxnSpPr>
+        <p:spPr>
+          <a:xfrm>
+            <a:off x="24940000" y="15160000"/>
+            <a:ext cx="0" cy="1150000"/>
+          </a:xfrm>
+          <a:prstGeom prst="line">
+            <a:avLst/>
+          </a:prstGeom>
+          <a:ln w="19050">
+            <a:solidFill>
+              <a:srgbClr val="333338"/>
+            </a:solidFill>
+          </a:ln>
+        </p:spPr>
+        <p:style>
+          <a:lnRef idx="2">
+            <a:schemeClr val="accent1"/>
+          </a:lnRef>
+          <a:fillRef idx="0">
+            <a:schemeClr val="accent1"/>
+          </a:fillRef>
+          <a:effectRef idx="1">
+            <a:schemeClr val="accent1"/>
+          </a:effectRef>
+          <a:fontRef idx="minor">
+            <a:schemeClr val="tx1"/>
+          </a:fontRef>
+        </p:style>
+      </p:cxnSp>
+      <p:cxnSp>
+        <p:nvCxnSpPr>
+          <p:cNvPr id="244" name="Connector 243"/>
+          <p:cNvCxnSpPr/>
+          <p:nvPr/>
+        </p:nvCxnSpPr>
+        <p:spPr>
+          <a:xfrm>
+            <a:off x="24940000" y="16310000"/>
+            <a:ext cx="0" cy="1150000"/>
+          </a:xfrm>
+          <a:prstGeom prst="line">
+            <a:avLst/>
+          </a:prstGeom>
+          <a:ln w="19050">
+            <a:solidFill>
+              <a:srgbClr val="333338"/>
+            </a:solidFill>
+          </a:ln>
+        </p:spPr>
+        <p:style>
+          <a:lnRef idx="2">
+            <a:schemeClr val="accent1"/>
+          </a:lnRef>
+          <a:fillRef idx="0">
+            <a:schemeClr val="accent1"/>
+          </a:fillRef>
+          <a:effectRef idx="1">
+            <a:schemeClr val="accent1"/>
+          </a:effectRef>
+          <a:fontRef idx="minor">
+            <a:schemeClr val="tx1"/>
+          </a:fontRef>
+        </p:style>
+      </p:cxnSp>
+      <p:cxnSp>
+        <p:nvCxnSpPr>
+          <p:cNvPr id="245" name="Connector 244"/>
+          <p:cNvCxnSpPr/>
+          <p:nvPr/>
+        </p:nvCxnSpPr>
+        <p:spPr>
+          <a:xfrm>
+            <a:off x="24940000" y="16310000"/>
+            <a:ext cx="3000000" cy="0"/>
+          </a:xfrm>
+          <a:prstGeom prst="line">
+            <a:avLst/>
+          </a:prstGeom>
+          <a:ln w="19050">
+            <a:solidFill>
+              <a:srgbClr val="333338"/>
+            </a:solidFill>
+          </a:ln>
+        </p:spPr>
+        <p:style>
+          <a:lnRef idx="2">
+            <a:schemeClr val="accent1"/>
+          </a:lnRef>
+          <a:fillRef idx="0">
+            <a:schemeClr val="accent1"/>
+          </a:fillRef>
+          <a:effectRef idx="1">
+            <a:schemeClr val="accent1"/>
+          </a:effectRef>
+          <a:fontRef idx="minor">
+            <a:schemeClr val="tx1"/>
+          </a:fontRef>
+        </p:style>
+      </p:cxnSp>
+      <p:cxnSp>
+        <p:nvCxnSpPr>
+          <p:cNvPr id="246" name="Connector 245"/>
+          <p:cNvCxnSpPr/>
+          <p:nvPr/>
+        </p:nvCxnSpPr>
+        <p:spPr>
+          <a:xfrm>
+            <a:off x="27940000" y="16310000"/>
+            <a:ext cx="0" cy="1150000"/>
+          </a:xfrm>
+          <a:prstGeom prst="line">
+            <a:avLst/>
+          </a:prstGeom>
+          <a:ln w="19050">
+            <a:solidFill>
+              <a:srgbClr val="333338"/>
+            </a:solidFill>
+          </a:ln>
+        </p:spPr>
+        <p:style>
+          <a:lnRef idx="2">
+            <a:schemeClr val="accent1"/>
+          </a:lnRef>
+          <a:fillRef idx="0">
+            <a:schemeClr val="accent1"/>
+          </a:fillRef>
+          <a:effectRef idx="1">
+            <a:schemeClr val="accent1"/>
+          </a:effectRef>
+          <a:fontRef idx="minor">
+            <a:schemeClr val="tx1"/>
+          </a:fontRef>
+        </p:style>
+      </p:cxnSp>
+      <p:cxnSp>
+        <p:nvCxnSpPr>
+          <p:cNvPr id="247" name="Connector 246"/>
+          <p:cNvCxnSpPr/>
+          <p:nvPr/>
+        </p:nvCxnSpPr>
+        <p:spPr>
+          <a:xfrm>
             <a:off x="27940000" y="17460000"/>
             <a:ext cx="0" cy="1150000"/>
+          </a:xfrm>
+          <a:prstGeom prst="line">
+            <a:avLst/>
+          </a:prstGeom>
+          <a:ln w="19050">
+            <a:solidFill>
+              <a:srgbClr val="333338"/>
+            </a:solidFill>
+          </a:ln>
+        </p:spPr>
+        <p:style>
+          <a:lnRef idx="2">
+            <a:schemeClr val="accent1"/>
+          </a:lnRef>
+          <a:fillRef idx="0">
+            <a:schemeClr val="accent1"/>
+          </a:fillRef>
+          <a:effectRef idx="1">
+            <a:schemeClr val="accent1"/>
+          </a:effectRef>
+          <a:fontRef idx="minor">
+            <a:schemeClr val="tx1"/>
+          </a:fontRef>
+        </p:style>
+      </p:cxnSp>
+      <p:cxnSp>
+        <p:nvCxnSpPr>
+          <p:cNvPr id="248" name="Connector 247"/>
+          <p:cNvCxnSpPr/>
+          <p:nvPr/>
+        </p:nvCxnSpPr>
+        <p:spPr>
+          <a:xfrm flipH="1">
+            <a:off x="24940000" y="18610000"/>
+            <a:ext cx="3000000" cy="0"/>
           </a:xfrm>
           <a:prstGeom prst="line">
             <a:avLst/>

--- a/resources/map/_layout_tomb.pptx
+++ b/resources/map/_layout_tomb.pptx
@@ -4021,12 +4021,20 @@
             <a:chExt cx="1280000" cy="1020000"/>
           </a:xfrm>
         </p:grpSpPr>
-        <p:sp>
-          <p:nvSpPr>
-            <p:cNvPr id="37" name="Rectangle 36"/>
-            <p:cNvSpPr/>
-            <p:nvPr/>
-          </p:nvSpPr>
+        <p:pic>
+          <p:nvPicPr>
+            <p:cNvPr id="37" name="Picture 36" descr="tomb_scriptorium.webp.jpg"/>
+            <p:cNvPicPr>
+              <a:picLocks noChangeAspect="1"/>
+            </p:cNvPicPr>
+            <p:nvPr/>
+          </p:nvPicPr>
+          <p:blipFill>
+            <a:blip r:embed="rId13"/>
+            <a:stretch>
+              <a:fillRect/>
+            </a:stretch>
+          </p:blipFill>
           <p:spPr>
             <a:xfrm>
               <a:off x="6300000" y="14800000"/>
@@ -4035,54 +4043,8 @@
             <a:prstGeom prst="rect">
               <a:avLst/>
             </a:prstGeom>
-            <a:solidFill>
-              <a:srgbClr val="3FB950"/>
-            </a:solidFill>
-            <a:ln>
-              <a:solidFill>
-                <a:srgbClr val="2B8A3A"/>
-              </a:solidFill>
-            </a:ln>
-          </p:spPr>
-          <p:style>
-            <a:lnRef idx="1">
-              <a:schemeClr val="accent1"/>
-            </a:lnRef>
-            <a:fillRef idx="3">
-              <a:schemeClr val="accent1"/>
-            </a:fillRef>
-            <a:effectRef idx="2">
-              <a:schemeClr val="accent1"/>
-            </a:effectRef>
-            <a:fontRef idx="minor">
-              <a:schemeClr val="lt1"/>
-            </a:fontRef>
-          </p:style>
-          <p:txBody>
-            <a:bodyPr rtlCol="0" anchor="ctr"/>
-            <a:lstStyle/>
-            <a:p>
-              <a:r>
-                <a:rPr sz="900" b="1">
-                  <a:solidFill>
-                    <a:srgbClr val="FFFFFF"/>
-                  </a:solidFill>
-                </a:rPr>
-                <a:t>要補圖</a:t>
-              </a:r>
-            </a:p>
-            <a:p>
-              <a:r>
-                <a:rPr sz="900" b="1">
-                  <a:solidFill>
-                    <a:srgbClr val="FFFFFF"/>
-                  </a:solidFill>
-                </a:rPr>
-                <a:t>tomb_scriptorium</a:t>
-              </a:r>
-            </a:p>
-          </p:txBody>
-        </p:sp>
+          </p:spPr>
+        </p:pic>
         <p:sp>
           <p:nvSpPr>
             <p:cNvPr id="38" name="TextBox 37"/>
@@ -4148,7 +4110,7 @@
             <p:nvPr/>
           </p:nvPicPr>
           <p:blipFill>
-            <a:blip r:embed="rId13"/>
+            <a:blip r:embed="rId14"/>
             <a:stretch>
               <a:fillRect/>
             </a:stretch>
@@ -4219,12 +4181,20 @@
             <a:chExt cx="1280000" cy="1020000"/>
           </a:xfrm>
         </p:grpSpPr>
-        <p:sp>
-          <p:nvSpPr>
-            <p:cNvPr id="43" name="Rectangle 42"/>
-            <p:cNvSpPr/>
-            <p:nvPr/>
-          </p:nvSpPr>
+        <p:pic>
+          <p:nvPicPr>
+            <p:cNvPr id="43" name="Picture 42" descr="tomb_confessio.webp.jpg"/>
+            <p:cNvPicPr>
+              <a:picLocks noChangeAspect="1"/>
+            </p:cNvPicPr>
+            <p:nvPr/>
+          </p:nvPicPr>
+          <p:blipFill>
+            <a:blip r:embed="rId15"/>
+            <a:stretch>
+              <a:fillRect/>
+            </a:stretch>
+          </p:blipFill>
           <p:spPr>
             <a:xfrm>
               <a:off x="18300000" y="14800000"/>
@@ -4233,54 +4203,8 @@
             <a:prstGeom prst="rect">
               <a:avLst/>
             </a:prstGeom>
-            <a:solidFill>
-              <a:srgbClr val="3FB950"/>
-            </a:solidFill>
-            <a:ln>
-              <a:solidFill>
-                <a:srgbClr val="2B8A3A"/>
-              </a:solidFill>
-            </a:ln>
-          </p:spPr>
-          <p:style>
-            <a:lnRef idx="1">
-              <a:schemeClr val="accent1"/>
-            </a:lnRef>
-            <a:fillRef idx="3">
-              <a:schemeClr val="accent1"/>
-            </a:fillRef>
-            <a:effectRef idx="2">
-              <a:schemeClr val="accent1"/>
-            </a:effectRef>
-            <a:fontRef idx="minor">
-              <a:schemeClr val="lt1"/>
-            </a:fontRef>
-          </p:style>
-          <p:txBody>
-            <a:bodyPr rtlCol="0" anchor="ctr"/>
-            <a:lstStyle/>
-            <a:p>
-              <a:r>
-                <a:rPr sz="900" b="1">
-                  <a:solidFill>
-                    <a:srgbClr val="FFFFFF"/>
-                  </a:solidFill>
-                </a:rPr>
-                <a:t>要補圖</a:t>
-              </a:r>
-            </a:p>
-            <a:p>
-              <a:r>
-                <a:rPr sz="900" b="1">
-                  <a:solidFill>
-                    <a:srgbClr val="FFFFFF"/>
-                  </a:solidFill>
-                </a:rPr>
-                <a:t>tomb_confessio</a:t>
-              </a:r>
-            </a:p>
-          </p:txBody>
-        </p:sp>
+          </p:spPr>
+        </p:pic>
         <p:sp>
           <p:nvSpPr>
             <p:cNvPr id="44" name="TextBox 43"/>
@@ -4346,7 +4270,7 @@
             <p:nvPr/>
           </p:nvPicPr>
           <p:blipFill>
-            <a:blip r:embed="rId14"/>
+            <a:blip r:embed="rId16"/>
             <a:stretch>
               <a:fillRect/>
             </a:stretch>
@@ -4417,12 +4341,20 @@
             <a:chExt cx="1280000" cy="1020000"/>
           </a:xfrm>
         </p:grpSpPr>
-        <p:sp>
-          <p:nvSpPr>
-            <p:cNvPr id="49" name="Rectangle 48"/>
-            <p:cNvSpPr/>
-            <p:nvPr/>
-          </p:nvSpPr>
+        <p:pic>
+          <p:nvPicPr>
+            <p:cNvPr id="49" name="Picture 48" descr="tomb_sacristy.webp.jpg"/>
+            <p:cNvPicPr>
+              <a:picLocks noChangeAspect="1"/>
+            </p:cNvPicPr>
+            <p:nvPr/>
+          </p:nvPicPr>
+          <p:blipFill>
+            <a:blip r:embed="rId17"/>
+            <a:stretch>
+              <a:fillRect/>
+            </a:stretch>
+          </p:blipFill>
           <p:spPr>
             <a:xfrm>
               <a:off x="15300000" y="12500000"/>
@@ -4431,54 +4363,8 @@
             <a:prstGeom prst="rect">
               <a:avLst/>
             </a:prstGeom>
-            <a:solidFill>
-              <a:srgbClr val="3FB950"/>
-            </a:solidFill>
-            <a:ln>
-              <a:solidFill>
-                <a:srgbClr val="2B8A3A"/>
-              </a:solidFill>
-            </a:ln>
-          </p:spPr>
-          <p:style>
-            <a:lnRef idx="1">
-              <a:schemeClr val="accent1"/>
-            </a:lnRef>
-            <a:fillRef idx="3">
-              <a:schemeClr val="accent1"/>
-            </a:fillRef>
-            <a:effectRef idx="2">
-              <a:schemeClr val="accent1"/>
-            </a:effectRef>
-            <a:fontRef idx="minor">
-              <a:schemeClr val="lt1"/>
-            </a:fontRef>
-          </p:style>
-          <p:txBody>
-            <a:bodyPr rtlCol="0" anchor="ctr"/>
-            <a:lstStyle/>
-            <a:p>
-              <a:r>
-                <a:rPr sz="900" b="1">
-                  <a:solidFill>
-                    <a:srgbClr val="FFFFFF"/>
-                  </a:solidFill>
-                </a:rPr>
-                <a:t>要補圖</a:t>
-              </a:r>
-            </a:p>
-            <a:p>
-              <a:r>
-                <a:rPr sz="900" b="1">
-                  <a:solidFill>
-                    <a:srgbClr val="FFFFFF"/>
-                  </a:solidFill>
-                </a:rPr>
-                <a:t>tomb_sacristy</a:t>
-              </a:r>
-            </a:p>
-          </p:txBody>
-        </p:sp>
+          </p:spPr>
+        </p:pic>
         <p:sp>
           <p:nvSpPr>
             <p:cNvPr id="50" name="TextBox 49"/>
@@ -4544,7 +4430,7 @@
             <p:nvPr/>
           </p:nvPicPr>
           <p:blipFill>
-            <a:blip r:embed="rId15"/>
+            <a:blip r:embed="rId18"/>
             <a:stretch>
               <a:fillRect/>
             </a:stretch>
@@ -4624,7 +4510,7 @@
             <p:nvPr/>
           </p:nvPicPr>
           <p:blipFill>
-            <a:blip r:embed="rId16"/>
+            <a:blip r:embed="rId19"/>
             <a:stretch>
               <a:fillRect/>
             </a:stretch>
@@ -4704,7 +4590,7 @@
             <p:nvPr/>
           </p:nvPicPr>
           <p:blipFill>
-            <a:blip r:embed="rId17"/>
+            <a:blip r:embed="rId20"/>
             <a:stretch>
               <a:fillRect/>
             </a:stretch>
@@ -4775,12 +4661,20 @@
             <a:chExt cx="1280000" cy="1020000"/>
           </a:xfrm>
         </p:grpSpPr>
-        <p:sp>
-          <p:nvSpPr>
-            <p:cNvPr id="61" name="Rectangle 60"/>
-            <p:cNvSpPr/>
-            <p:nvPr/>
-          </p:nvSpPr>
+        <p:pic>
+          <p:nvPicPr>
+            <p:cNvPr id="61" name="Picture 60" descr="tomb_wellyard.webp.jpg"/>
+            <p:cNvPicPr>
+              <a:picLocks noChangeAspect="1"/>
+            </p:cNvPicPr>
+            <p:nvPr/>
+          </p:nvPicPr>
+          <p:blipFill>
+            <a:blip r:embed="rId21"/>
+            <a:stretch>
+              <a:fillRect/>
+            </a:stretch>
+          </p:blipFill>
           <p:spPr>
             <a:xfrm>
               <a:off x="9300000" y="12500000"/>
@@ -4789,54 +4683,8 @@
             <a:prstGeom prst="rect">
               <a:avLst/>
             </a:prstGeom>
-            <a:solidFill>
-              <a:srgbClr val="3FB950"/>
-            </a:solidFill>
-            <a:ln>
-              <a:solidFill>
-                <a:srgbClr val="2B8A3A"/>
-              </a:solidFill>
-            </a:ln>
-          </p:spPr>
-          <p:style>
-            <a:lnRef idx="1">
-              <a:schemeClr val="accent1"/>
-            </a:lnRef>
-            <a:fillRef idx="3">
-              <a:schemeClr val="accent1"/>
-            </a:fillRef>
-            <a:effectRef idx="2">
-              <a:schemeClr val="accent1"/>
-            </a:effectRef>
-            <a:fontRef idx="minor">
-              <a:schemeClr val="lt1"/>
-            </a:fontRef>
-          </p:style>
-          <p:txBody>
-            <a:bodyPr rtlCol="0" anchor="ctr"/>
-            <a:lstStyle/>
-            <a:p>
-              <a:r>
-                <a:rPr sz="900" b="1">
-                  <a:solidFill>
-                    <a:srgbClr val="FFFFFF"/>
-                  </a:solidFill>
-                </a:rPr>
-                <a:t>要補圖</a:t>
-              </a:r>
-            </a:p>
-            <a:p>
-              <a:r>
-                <a:rPr sz="900" b="1">
-                  <a:solidFill>
-                    <a:srgbClr val="FFFFFF"/>
-                  </a:solidFill>
-                </a:rPr>
-                <a:t>tomb_wellyard</a:t>
-              </a:r>
-            </a:p>
-          </p:txBody>
-        </p:sp>
+          </p:spPr>
+        </p:pic>
         <p:sp>
           <p:nvSpPr>
             <p:cNvPr id="62" name="TextBox 61"/>
@@ -4902,7 +4750,7 @@
             <p:nvPr/>
           </p:nvPicPr>
           <p:blipFill>
-            <a:blip r:embed="rId18"/>
+            <a:blip r:embed="rId22"/>
             <a:stretch>
               <a:fillRect/>
             </a:stretch>
@@ -4982,7 +4830,7 @@
             <p:nvPr/>
           </p:nvPicPr>
           <p:blipFill>
-            <a:blip r:embed="rId19"/>
+            <a:blip r:embed="rId23"/>
             <a:stretch>
               <a:fillRect/>
             </a:stretch>
@@ -5062,7 +4910,7 @@
             <p:nvPr/>
           </p:nvPicPr>
           <p:blipFill>
-            <a:blip r:embed="rId20"/>
+            <a:blip r:embed="rId24"/>
             <a:stretch>
               <a:fillRect/>
             </a:stretch>
@@ -5133,12 +4981,20 @@
             <a:chExt cx="1280000" cy="1020000"/>
           </a:xfrm>
         </p:grpSpPr>
-        <p:sp>
-          <p:nvSpPr>
-            <p:cNvPr id="73" name="Rectangle 72"/>
-            <p:cNvSpPr/>
-            <p:nvPr/>
-          </p:nvSpPr>
+        <p:pic>
+          <p:nvPicPr>
+            <p:cNvPr id="73" name="Picture 72" descr="tomb_colonnade.webp.jpg"/>
+            <p:cNvPicPr>
+              <a:picLocks noChangeAspect="1"/>
+            </p:cNvPicPr>
+            <p:nvPr/>
+          </p:nvPicPr>
+          <p:blipFill>
+            <a:blip r:embed="rId25"/>
+            <a:stretch>
+              <a:fillRect/>
+            </a:stretch>
+          </p:blipFill>
           <p:spPr>
             <a:xfrm>
               <a:off x="3300000" y="9050000"/>
@@ -5147,54 +5003,8 @@
             <a:prstGeom prst="rect">
               <a:avLst/>
             </a:prstGeom>
-            <a:solidFill>
-              <a:srgbClr val="3FB950"/>
-            </a:solidFill>
-            <a:ln>
-              <a:solidFill>
-                <a:srgbClr val="2B8A3A"/>
-              </a:solidFill>
-            </a:ln>
-          </p:spPr>
-          <p:style>
-            <a:lnRef idx="1">
-              <a:schemeClr val="accent1"/>
-            </a:lnRef>
-            <a:fillRef idx="3">
-              <a:schemeClr val="accent1"/>
-            </a:fillRef>
-            <a:effectRef idx="2">
-              <a:schemeClr val="accent1"/>
-            </a:effectRef>
-            <a:fontRef idx="minor">
-              <a:schemeClr val="lt1"/>
-            </a:fontRef>
-          </p:style>
-          <p:txBody>
-            <a:bodyPr rtlCol="0" anchor="ctr"/>
-            <a:lstStyle/>
-            <a:p>
-              <a:r>
-                <a:rPr sz="900" b="1">
-                  <a:solidFill>
-                    <a:srgbClr val="FFFFFF"/>
-                  </a:solidFill>
-                </a:rPr>
-                <a:t>要補圖</a:t>
-              </a:r>
-            </a:p>
-            <a:p>
-              <a:r>
-                <a:rPr sz="900" b="1">
-                  <a:solidFill>
-                    <a:srgbClr val="FFFFFF"/>
-                  </a:solidFill>
-                </a:rPr>
-                <a:t>tomb_colonnade</a:t>
-              </a:r>
-            </a:p>
-          </p:txBody>
-        </p:sp>
+          </p:spPr>
+        </p:pic>
         <p:sp>
           <p:nvSpPr>
             <p:cNvPr id="74" name="TextBox 73"/>
@@ -5251,12 +5061,20 @@
             <a:chExt cx="1280000" cy="1020000"/>
           </a:xfrm>
         </p:grpSpPr>
-        <p:sp>
-          <p:nvSpPr>
-            <p:cNvPr id="76" name="Rectangle 75"/>
-            <p:cNvSpPr/>
-            <p:nvPr/>
-          </p:nvSpPr>
+        <p:pic>
+          <p:nvPicPr>
+            <p:cNvPr id="76" name="Picture 75" descr="tomb_mason.webp.jpg"/>
+            <p:cNvPicPr>
+              <a:picLocks noChangeAspect="1"/>
+            </p:cNvPicPr>
+            <p:nvPr/>
+          </p:nvPicPr>
+          <p:blipFill>
+            <a:blip r:embed="rId26"/>
+            <a:stretch>
+              <a:fillRect/>
+            </a:stretch>
+          </p:blipFill>
           <p:spPr>
             <a:xfrm>
               <a:off x="3300000" y="7900000"/>
@@ -5265,54 +5083,8 @@
             <a:prstGeom prst="rect">
               <a:avLst/>
             </a:prstGeom>
-            <a:solidFill>
-              <a:srgbClr val="3FB950"/>
-            </a:solidFill>
-            <a:ln>
-              <a:solidFill>
-                <a:srgbClr val="2B8A3A"/>
-              </a:solidFill>
-            </a:ln>
-          </p:spPr>
-          <p:style>
-            <a:lnRef idx="1">
-              <a:schemeClr val="accent1"/>
-            </a:lnRef>
-            <a:fillRef idx="3">
-              <a:schemeClr val="accent1"/>
-            </a:fillRef>
-            <a:effectRef idx="2">
-              <a:schemeClr val="accent1"/>
-            </a:effectRef>
-            <a:fontRef idx="minor">
-              <a:schemeClr val="lt1"/>
-            </a:fontRef>
-          </p:style>
-          <p:txBody>
-            <a:bodyPr rtlCol="0" anchor="ctr"/>
-            <a:lstStyle/>
-            <a:p>
-              <a:r>
-                <a:rPr sz="900" b="1">
-                  <a:solidFill>
-                    <a:srgbClr val="FFFFFF"/>
-                  </a:solidFill>
-                </a:rPr>
-                <a:t>要補圖</a:t>
-              </a:r>
-            </a:p>
-            <a:p>
-              <a:r>
-                <a:rPr sz="900" b="1">
-                  <a:solidFill>
-                    <a:srgbClr val="FFFFFF"/>
-                  </a:solidFill>
-                </a:rPr>
-                <a:t>tomb_mason</a:t>
-              </a:r>
-            </a:p>
-          </p:txBody>
-        </p:sp>
+          </p:spPr>
+        </p:pic>
         <p:sp>
           <p:nvSpPr>
             <p:cNvPr id="77" name="TextBox 76"/>
@@ -5378,7 +5150,7 @@
             <p:nvPr/>
           </p:nvPicPr>
           <p:blipFill>
-            <a:blip r:embed="rId21"/>
+            <a:blip r:embed="rId27"/>
             <a:stretch>
               <a:fillRect/>
             </a:stretch>
@@ -5449,12 +5221,20 @@
             <a:chExt cx="1280000" cy="1020000"/>
           </a:xfrm>
         </p:grpSpPr>
-        <p:sp>
-          <p:nvSpPr>
-            <p:cNvPr id="82" name="Rectangle 81"/>
-            <p:cNvSpPr/>
-            <p:nvPr/>
-          </p:nvSpPr>
+        <p:pic>
+          <p:nvPicPr>
+            <p:cNvPr id="82" name="Picture 81" descr="tomb_waterstair.webp.jpg"/>
+            <p:cNvPicPr>
+              <a:picLocks noChangeAspect="1"/>
+            </p:cNvPicPr>
+            <p:nvPr/>
+          </p:nvPicPr>
+          <p:blipFill>
+            <a:blip r:embed="rId28"/>
+            <a:stretch>
+              <a:fillRect/>
+            </a:stretch>
+          </p:blipFill>
           <p:spPr>
             <a:xfrm>
               <a:off x="6300000" y="6750000"/>
@@ -5463,54 +5243,8 @@
             <a:prstGeom prst="rect">
               <a:avLst/>
             </a:prstGeom>
-            <a:solidFill>
-              <a:srgbClr val="3FB950"/>
-            </a:solidFill>
-            <a:ln>
-              <a:solidFill>
-                <a:srgbClr val="2B8A3A"/>
-              </a:solidFill>
-            </a:ln>
-          </p:spPr>
-          <p:style>
-            <a:lnRef idx="1">
-              <a:schemeClr val="accent1"/>
-            </a:lnRef>
-            <a:fillRef idx="3">
-              <a:schemeClr val="accent1"/>
-            </a:fillRef>
-            <a:effectRef idx="2">
-              <a:schemeClr val="accent1"/>
-            </a:effectRef>
-            <a:fontRef idx="minor">
-              <a:schemeClr val="lt1"/>
-            </a:fontRef>
-          </p:style>
-          <p:txBody>
-            <a:bodyPr rtlCol="0" anchor="ctr"/>
-            <a:lstStyle/>
-            <a:p>
-              <a:r>
-                <a:rPr sz="900" b="1">
-                  <a:solidFill>
-                    <a:srgbClr val="FFFFFF"/>
-                  </a:solidFill>
-                </a:rPr>
-                <a:t>要補圖</a:t>
-              </a:r>
-            </a:p>
-            <a:p>
-              <a:r>
-                <a:rPr sz="900" b="1">
-                  <a:solidFill>
-                    <a:srgbClr val="FFFFFF"/>
-                  </a:solidFill>
-                </a:rPr>
-                <a:t>tomb_waterstair</a:t>
-              </a:r>
-            </a:p>
-          </p:txBody>
-        </p:sp>
+          </p:spPr>
+        </p:pic>
         <p:sp>
           <p:nvSpPr>
             <p:cNvPr id="83" name="TextBox 82"/>
@@ -5576,7 +5310,7 @@
             <p:nvPr/>
           </p:nvPicPr>
           <p:blipFill>
-            <a:blip r:embed="rId22"/>
+            <a:blip r:embed="rId29"/>
             <a:stretch>
               <a:fillRect/>
             </a:stretch>
@@ -5656,7 +5390,7 @@
             <p:nvPr/>
           </p:nvPicPr>
           <p:blipFill>
-            <a:blip r:embed="rId23"/>
+            <a:blip r:embed="rId30"/>
             <a:stretch>
               <a:fillRect/>
             </a:stretch>
@@ -5736,7 +5470,7 @@
             <p:nvPr/>
           </p:nvPicPr>
           <p:blipFill>
-            <a:blip r:embed="rId24"/>
+            <a:blip r:embed="rId31"/>
             <a:stretch>
               <a:fillRect/>
             </a:stretch>
@@ -5807,12 +5541,20 @@
             <a:chExt cx="1280000" cy="1020000"/>
           </a:xfrm>
         </p:grpSpPr>
-        <p:sp>
-          <p:nvSpPr>
-            <p:cNvPr id="94" name="Rectangle 93"/>
-            <p:cNvSpPr/>
-            <p:nvPr/>
-          </p:nvSpPr>
+        <p:pic>
+          <p:nvPicPr>
+            <p:cNvPr id="94" name="Picture 93" descr="tomb_censerroom.webp.jpg"/>
+            <p:cNvPicPr>
+              <a:picLocks noChangeAspect="1"/>
+            </p:cNvPicPr>
+            <p:nvPr/>
+          </p:nvPicPr>
+          <p:blipFill>
+            <a:blip r:embed="rId32"/>
+            <a:stretch>
+              <a:fillRect/>
+            </a:stretch>
+          </p:blipFill>
           <p:spPr>
             <a:xfrm>
               <a:off x="12300000" y="10200000"/>
@@ -5821,54 +5563,8 @@
             <a:prstGeom prst="rect">
               <a:avLst/>
             </a:prstGeom>
-            <a:solidFill>
-              <a:srgbClr val="3FB950"/>
-            </a:solidFill>
-            <a:ln>
-              <a:solidFill>
-                <a:srgbClr val="2B8A3A"/>
-              </a:solidFill>
-            </a:ln>
-          </p:spPr>
-          <p:style>
-            <a:lnRef idx="1">
-              <a:schemeClr val="accent1"/>
-            </a:lnRef>
-            <a:fillRef idx="3">
-              <a:schemeClr val="accent1"/>
-            </a:fillRef>
-            <a:effectRef idx="2">
-              <a:schemeClr val="accent1"/>
-            </a:effectRef>
-            <a:fontRef idx="minor">
-              <a:schemeClr val="lt1"/>
-            </a:fontRef>
-          </p:style>
-          <p:txBody>
-            <a:bodyPr rtlCol="0" anchor="ctr"/>
-            <a:lstStyle/>
-            <a:p>
-              <a:r>
-                <a:rPr sz="900" b="1">
-                  <a:solidFill>
-                    <a:srgbClr val="FFFFFF"/>
-                  </a:solidFill>
-                </a:rPr>
-                <a:t>要補圖</a:t>
-              </a:r>
-            </a:p>
-            <a:p>
-              <a:r>
-                <a:rPr sz="900" b="1">
-                  <a:solidFill>
-                    <a:srgbClr val="FFFFFF"/>
-                  </a:solidFill>
-                </a:rPr>
-                <a:t>tomb_censerroom</a:t>
-              </a:r>
-            </a:p>
-          </p:txBody>
-        </p:sp>
+          </p:spPr>
+        </p:pic>
         <p:sp>
           <p:nvSpPr>
             <p:cNvPr id="95" name="TextBox 94"/>
@@ -5934,7 +5630,7 @@
             <p:nvPr/>
           </p:nvPicPr>
           <p:blipFill>
-            <a:blip r:embed="rId25"/>
+            <a:blip r:embed="rId33"/>
             <a:stretch>
               <a:fillRect/>
             </a:stretch>
@@ -6014,7 +5710,7 @@
             <p:nvPr/>
           </p:nvPicPr>
           <p:blipFill>
-            <a:blip r:embed="rId26"/>
+            <a:blip r:embed="rId34"/>
             <a:stretch>
               <a:fillRect/>
             </a:stretch>
@@ -6094,7 +5790,7 @@
             <p:nvPr/>
           </p:nvPicPr>
           <p:blipFill>
-            <a:blip r:embed="rId27"/>
+            <a:blip r:embed="rId35"/>
             <a:stretch>
               <a:fillRect/>
             </a:stretch>
@@ -6174,7 +5870,7 @@
             <p:nvPr/>
           </p:nvPicPr>
           <p:blipFill>
-            <a:blip r:embed="rId28"/>
+            <a:blip r:embed="rId36"/>
             <a:stretch>
               <a:fillRect/>
             </a:stretch>
@@ -6254,7 +5950,7 @@
             <p:nvPr/>
           </p:nvPicPr>
           <p:blipFill>
-            <a:blip r:embed="rId29"/>
+            <a:blip r:embed="rId37"/>
             <a:stretch>
               <a:fillRect/>
             </a:stretch>
@@ -6325,12 +6021,20 @@
             <a:chExt cx="1280000" cy="1020000"/>
           </a:xfrm>
         </p:grpSpPr>
-        <p:sp>
-          <p:nvSpPr>
-            <p:cNvPr id="112" name="Rectangle 111"/>
-            <p:cNvSpPr/>
-            <p:nvPr/>
-          </p:nvSpPr>
+        <p:pic>
+          <p:nvPicPr>
+            <p:cNvPr id="112" name="Picture 111" descr="tomb_shaft.webp.jpg"/>
+            <p:cNvPicPr>
+              <a:picLocks noChangeAspect="1"/>
+            </p:cNvPicPr>
+            <p:nvPr/>
+          </p:nvPicPr>
+          <p:blipFill>
+            <a:blip r:embed="rId38"/>
+            <a:stretch>
+              <a:fillRect/>
+            </a:stretch>
+          </p:blipFill>
           <p:spPr>
             <a:xfrm>
               <a:off x="15300000" y="10200000"/>
@@ -6339,54 +6043,8 @@
             <a:prstGeom prst="rect">
               <a:avLst/>
             </a:prstGeom>
-            <a:solidFill>
-              <a:srgbClr val="3FB950"/>
-            </a:solidFill>
-            <a:ln>
-              <a:solidFill>
-                <a:srgbClr val="2B8A3A"/>
-              </a:solidFill>
-            </a:ln>
-          </p:spPr>
-          <p:style>
-            <a:lnRef idx="1">
-              <a:schemeClr val="accent1"/>
-            </a:lnRef>
-            <a:fillRef idx="3">
-              <a:schemeClr val="accent1"/>
-            </a:fillRef>
-            <a:effectRef idx="2">
-              <a:schemeClr val="accent1"/>
-            </a:effectRef>
-            <a:fontRef idx="minor">
-              <a:schemeClr val="lt1"/>
-            </a:fontRef>
-          </p:style>
-          <p:txBody>
-            <a:bodyPr rtlCol="0" anchor="ctr"/>
-            <a:lstStyle/>
-            <a:p>
-              <a:r>
-                <a:rPr sz="900" b="1">
-                  <a:solidFill>
-                    <a:srgbClr val="FFFFFF"/>
-                  </a:solidFill>
-                </a:rPr>
-                <a:t>要補圖</a:t>
-              </a:r>
-            </a:p>
-            <a:p>
-              <a:r>
-                <a:rPr sz="900" b="1">
-                  <a:solidFill>
-                    <a:srgbClr val="FFFFFF"/>
-                  </a:solidFill>
-                </a:rPr>
-                <a:t>tomb_shaft</a:t>
-              </a:r>
-            </a:p>
-          </p:txBody>
-        </p:sp>
+          </p:spPr>
+        </p:pic>
         <p:sp>
           <p:nvSpPr>
             <p:cNvPr id="113" name="TextBox 112"/>
@@ -6443,12 +6101,20 @@
             <a:chExt cx="1280000" cy="1020000"/>
           </a:xfrm>
         </p:grpSpPr>
-        <p:sp>
-          <p:nvSpPr>
-            <p:cNvPr id="115" name="Rectangle 114"/>
-            <p:cNvSpPr/>
-            <p:nvPr/>
-          </p:nvSpPr>
+        <p:pic>
+          <p:nvPicPr>
+            <p:cNvPr id="115" name="Picture 114" descr="tomb_urnvault.webp.jpg"/>
+            <p:cNvPicPr>
+              <a:picLocks noChangeAspect="1"/>
+            </p:cNvPicPr>
+            <p:nvPr/>
+          </p:nvPicPr>
+          <p:blipFill>
+            <a:blip r:embed="rId39"/>
+            <a:stretch>
+              <a:fillRect/>
+            </a:stretch>
+          </p:blipFill>
           <p:spPr>
             <a:xfrm>
               <a:off x="21300000" y="9050000"/>
@@ -6457,54 +6123,8 @@
             <a:prstGeom prst="rect">
               <a:avLst/>
             </a:prstGeom>
-            <a:solidFill>
-              <a:srgbClr val="3FB950"/>
-            </a:solidFill>
-            <a:ln>
-              <a:solidFill>
-                <a:srgbClr val="2B8A3A"/>
-              </a:solidFill>
-            </a:ln>
-          </p:spPr>
-          <p:style>
-            <a:lnRef idx="1">
-              <a:schemeClr val="accent1"/>
-            </a:lnRef>
-            <a:fillRef idx="3">
-              <a:schemeClr val="accent1"/>
-            </a:fillRef>
-            <a:effectRef idx="2">
-              <a:schemeClr val="accent1"/>
-            </a:effectRef>
-            <a:fontRef idx="minor">
-              <a:schemeClr val="lt1"/>
-            </a:fontRef>
-          </p:style>
-          <p:txBody>
-            <a:bodyPr rtlCol="0" anchor="ctr"/>
-            <a:lstStyle/>
-            <a:p>
-              <a:r>
-                <a:rPr sz="900" b="1">
-                  <a:solidFill>
-                    <a:srgbClr val="FFFFFF"/>
-                  </a:solidFill>
-                </a:rPr>
-                <a:t>要補圖</a:t>
-              </a:r>
-            </a:p>
-            <a:p>
-              <a:r>
-                <a:rPr sz="900" b="1">
-                  <a:solidFill>
-                    <a:srgbClr val="FFFFFF"/>
-                  </a:solidFill>
-                </a:rPr>
-                <a:t>tomb_urnvault</a:t>
-              </a:r>
-            </a:p>
-          </p:txBody>
-        </p:sp>
+          </p:spPr>
+        </p:pic>
         <p:sp>
           <p:nvSpPr>
             <p:cNvPr id="116" name="TextBox 115"/>
@@ -6561,12 +6181,20 @@
             <a:chExt cx="1280000" cy="1020000"/>
           </a:xfrm>
         </p:grpSpPr>
-        <p:sp>
-          <p:nvSpPr>
-            <p:cNvPr id="118" name="Rectangle 117"/>
-            <p:cNvSpPr/>
-            <p:nvPr/>
-          </p:nvSpPr>
+        <p:pic>
+          <p:nvPicPr>
+            <p:cNvPr id="118" name="Picture 117" descr="tomb_ashpit.webp.jpg"/>
+            <p:cNvPicPr>
+              <a:picLocks noChangeAspect="1"/>
+            </p:cNvPicPr>
+            <p:nvPr/>
+          </p:nvPicPr>
+          <p:blipFill>
+            <a:blip r:embed="rId40"/>
+            <a:stretch>
+              <a:fillRect/>
+            </a:stretch>
+          </p:blipFill>
           <p:spPr>
             <a:xfrm>
               <a:off x="21300000" y="10200000"/>
@@ -6575,54 +6203,8 @@
             <a:prstGeom prst="rect">
               <a:avLst/>
             </a:prstGeom>
-            <a:solidFill>
-              <a:srgbClr val="3FB950"/>
-            </a:solidFill>
-            <a:ln>
-              <a:solidFill>
-                <a:srgbClr val="2B8A3A"/>
-              </a:solidFill>
-            </a:ln>
-          </p:spPr>
-          <p:style>
-            <a:lnRef idx="1">
-              <a:schemeClr val="accent1"/>
-            </a:lnRef>
-            <a:fillRef idx="3">
-              <a:schemeClr val="accent1"/>
-            </a:fillRef>
-            <a:effectRef idx="2">
-              <a:schemeClr val="accent1"/>
-            </a:effectRef>
-            <a:fontRef idx="minor">
-              <a:schemeClr val="lt1"/>
-            </a:fontRef>
-          </p:style>
-          <p:txBody>
-            <a:bodyPr rtlCol="0" anchor="ctr"/>
-            <a:lstStyle/>
-            <a:p>
-              <a:r>
-                <a:rPr sz="900" b="1">
-                  <a:solidFill>
-                    <a:srgbClr val="FFFFFF"/>
-                  </a:solidFill>
-                </a:rPr>
-                <a:t>要補圖</a:t>
-              </a:r>
-            </a:p>
-            <a:p>
-              <a:r>
-                <a:rPr sz="900" b="1">
-                  <a:solidFill>
-                    <a:srgbClr val="FFFFFF"/>
-                  </a:solidFill>
-                </a:rPr>
-                <a:t>tomb_ashpit</a:t>
-              </a:r>
-            </a:p>
-          </p:txBody>
-        </p:sp>
+          </p:spPr>
+        </p:pic>
         <p:sp>
           <p:nvSpPr>
             <p:cNvPr id="119" name="TextBox 118"/>
@@ -6679,12 +6261,20 @@
             <a:chExt cx="1280000" cy="1020000"/>
           </a:xfrm>
         </p:grpSpPr>
-        <p:sp>
-          <p:nvSpPr>
-            <p:cNvPr id="121" name="Rectangle 120"/>
-            <p:cNvSpPr/>
-            <p:nvPr/>
-          </p:nvSpPr>
+        <p:pic>
+          <p:nvPicPr>
+            <p:cNvPr id="121" name="Picture 120" descr="tomb_graveldrop.webp.jpg"/>
+            <p:cNvPicPr>
+              <a:picLocks noChangeAspect="1"/>
+            </p:cNvPicPr>
+            <p:nvPr/>
+          </p:nvPicPr>
+          <p:blipFill>
+            <a:blip r:embed="rId41"/>
+            <a:stretch>
+              <a:fillRect/>
+            </a:stretch>
+          </p:blipFill>
           <p:spPr>
             <a:xfrm>
               <a:off x="18300000" y="10200000"/>
@@ -6693,54 +6283,8 @@
             <a:prstGeom prst="rect">
               <a:avLst/>
             </a:prstGeom>
-            <a:solidFill>
-              <a:srgbClr val="3FB950"/>
-            </a:solidFill>
-            <a:ln>
-              <a:solidFill>
-                <a:srgbClr val="2B8A3A"/>
-              </a:solidFill>
-            </a:ln>
-          </p:spPr>
-          <p:style>
-            <a:lnRef idx="1">
-              <a:schemeClr val="accent1"/>
-            </a:lnRef>
-            <a:fillRef idx="3">
-              <a:schemeClr val="accent1"/>
-            </a:fillRef>
-            <a:effectRef idx="2">
-              <a:schemeClr val="accent1"/>
-            </a:effectRef>
-            <a:fontRef idx="minor">
-              <a:schemeClr val="lt1"/>
-            </a:fontRef>
-          </p:style>
-          <p:txBody>
-            <a:bodyPr rtlCol="0" anchor="ctr"/>
-            <a:lstStyle/>
-            <a:p>
-              <a:r>
-                <a:rPr sz="900" b="1">
-                  <a:solidFill>
-                    <a:srgbClr val="FFFFFF"/>
-                  </a:solidFill>
-                </a:rPr>
-                <a:t>要補圖</a:t>
-              </a:r>
-            </a:p>
-            <a:p>
-              <a:r>
-                <a:rPr sz="900" b="1">
-                  <a:solidFill>
-                    <a:srgbClr val="FFFFFF"/>
-                  </a:solidFill>
-                </a:rPr>
-                <a:t>tomb_graveldrop</a:t>
-              </a:r>
-            </a:p>
-          </p:txBody>
-        </p:sp>
+          </p:spPr>
+        </p:pic>
         <p:sp>
           <p:nvSpPr>
             <p:cNvPr id="122" name="TextBox 121"/>
@@ -6797,12 +6341,20 @@
             <a:chExt cx="1280000" cy="1020000"/>
           </a:xfrm>
         </p:grpSpPr>
-        <p:sp>
-          <p:nvSpPr>
-            <p:cNvPr id="124" name="Rectangle 123"/>
-            <p:cNvSpPr/>
-            <p:nvPr/>
-          </p:nvSpPr>
+        <p:pic>
+          <p:nvPicPr>
+            <p:cNvPr id="124" name="Picture 123" descr="tomb_saltroom.webp.jpg"/>
+            <p:cNvPicPr>
+              <a:picLocks noChangeAspect="1"/>
+            </p:cNvPicPr>
+            <p:nvPr/>
+          </p:nvPicPr>
+          <p:blipFill>
+            <a:blip r:embed="rId42"/>
+            <a:stretch>
+              <a:fillRect/>
+            </a:stretch>
+          </p:blipFill>
           <p:spPr>
             <a:xfrm>
               <a:off x="21300000" y="7900000"/>
@@ -6811,54 +6363,8 @@
             <a:prstGeom prst="rect">
               <a:avLst/>
             </a:prstGeom>
-            <a:solidFill>
-              <a:srgbClr val="3FB950"/>
-            </a:solidFill>
-            <a:ln>
-              <a:solidFill>
-                <a:srgbClr val="2B8A3A"/>
-              </a:solidFill>
-            </a:ln>
-          </p:spPr>
-          <p:style>
-            <a:lnRef idx="1">
-              <a:schemeClr val="accent1"/>
-            </a:lnRef>
-            <a:fillRef idx="3">
-              <a:schemeClr val="accent1"/>
-            </a:fillRef>
-            <a:effectRef idx="2">
-              <a:schemeClr val="accent1"/>
-            </a:effectRef>
-            <a:fontRef idx="minor">
-              <a:schemeClr val="lt1"/>
-            </a:fontRef>
-          </p:style>
-          <p:txBody>
-            <a:bodyPr rtlCol="0" anchor="ctr"/>
-            <a:lstStyle/>
-            <a:p>
-              <a:r>
-                <a:rPr sz="900" b="1">
-                  <a:solidFill>
-                    <a:srgbClr val="FFFFFF"/>
-                  </a:solidFill>
-                </a:rPr>
-                <a:t>要補圖</a:t>
-              </a:r>
-            </a:p>
-            <a:p>
-              <a:r>
-                <a:rPr sz="900" b="1">
-                  <a:solidFill>
-                    <a:srgbClr val="FFFFFF"/>
-                  </a:solidFill>
-                </a:rPr>
-                <a:t>tomb_saltroom</a:t>
-              </a:r>
-            </a:p>
-          </p:txBody>
-        </p:sp>
+          </p:spPr>
+        </p:pic>
         <p:sp>
           <p:nvSpPr>
             <p:cNvPr id="125" name="TextBox 124"/>
@@ -6915,12 +6421,20 @@
             <a:chExt cx="1280000" cy="1020000"/>
           </a:xfrm>
         </p:grpSpPr>
-        <p:sp>
-          <p:nvSpPr>
-            <p:cNvPr id="127" name="Rectangle 126"/>
-            <p:cNvSpPr/>
-            <p:nvPr/>
-          </p:nvSpPr>
+        <p:pic>
+          <p:nvPicPr>
+            <p:cNvPr id="127" name="Picture 126" descr="tomb_chimney.webp.jpg"/>
+            <p:cNvPicPr>
+              <a:picLocks noChangeAspect="1"/>
+            </p:cNvPicPr>
+            <p:nvPr/>
+          </p:nvPicPr>
+          <p:blipFill>
+            <a:blip r:embed="rId43"/>
+            <a:stretch>
+              <a:fillRect/>
+            </a:stretch>
+          </p:blipFill>
           <p:spPr>
             <a:xfrm>
               <a:off x="21300000" y="6750000"/>
@@ -6929,54 +6443,8 @@
             <a:prstGeom prst="rect">
               <a:avLst/>
             </a:prstGeom>
-            <a:solidFill>
-              <a:srgbClr val="3FB950"/>
-            </a:solidFill>
-            <a:ln>
-              <a:solidFill>
-                <a:srgbClr val="2B8A3A"/>
-              </a:solidFill>
-            </a:ln>
-          </p:spPr>
-          <p:style>
-            <a:lnRef idx="1">
-              <a:schemeClr val="accent1"/>
-            </a:lnRef>
-            <a:fillRef idx="3">
-              <a:schemeClr val="accent1"/>
-            </a:fillRef>
-            <a:effectRef idx="2">
-              <a:schemeClr val="accent1"/>
-            </a:effectRef>
-            <a:fontRef idx="minor">
-              <a:schemeClr val="lt1"/>
-            </a:fontRef>
-          </p:style>
-          <p:txBody>
-            <a:bodyPr rtlCol="0" anchor="ctr"/>
-            <a:lstStyle/>
-            <a:p>
-              <a:r>
-                <a:rPr sz="900" b="1">
-                  <a:solidFill>
-                    <a:srgbClr val="FFFFFF"/>
-                  </a:solidFill>
-                </a:rPr>
-                <a:t>要補圖</a:t>
-              </a:r>
-            </a:p>
-            <a:p>
-              <a:r>
-                <a:rPr sz="900" b="1">
-                  <a:solidFill>
-                    <a:srgbClr val="FFFFFF"/>
-                  </a:solidFill>
-                </a:rPr>
-                <a:t>tomb_chimney</a:t>
-              </a:r>
-            </a:p>
-          </p:txBody>
-        </p:sp>
+          </p:spPr>
+        </p:pic>
         <p:sp>
           <p:nvSpPr>
             <p:cNvPr id="128" name="TextBox 127"/>
@@ -7033,12 +6501,20 @@
             <a:chExt cx="1280000" cy="1020000"/>
           </a:xfrm>
         </p:grpSpPr>
-        <p:sp>
-          <p:nvSpPr>
-            <p:cNvPr id="130" name="Rectangle 129"/>
-            <p:cNvSpPr/>
-            <p:nvPr/>
-          </p:nvSpPr>
+        <p:pic>
+          <p:nvPicPr>
+            <p:cNvPr id="130" name="Picture 129" descr="tomb_nitrepit.webp.jpg"/>
+            <p:cNvPicPr>
+              <a:picLocks noChangeAspect="1"/>
+            </p:cNvPicPr>
+            <p:nvPr/>
+          </p:nvPicPr>
+          <p:blipFill>
+            <a:blip r:embed="rId44"/>
+            <a:stretch>
+              <a:fillRect/>
+            </a:stretch>
+          </p:blipFill>
           <p:spPr>
             <a:xfrm>
               <a:off x="24300000" y="7900000"/>
@@ -7047,54 +6523,8 @@
             <a:prstGeom prst="rect">
               <a:avLst/>
             </a:prstGeom>
-            <a:solidFill>
-              <a:srgbClr val="3FB950"/>
-            </a:solidFill>
-            <a:ln>
-              <a:solidFill>
-                <a:srgbClr val="2B8A3A"/>
-              </a:solidFill>
-            </a:ln>
-          </p:spPr>
-          <p:style>
-            <a:lnRef idx="1">
-              <a:schemeClr val="accent1"/>
-            </a:lnRef>
-            <a:fillRef idx="3">
-              <a:schemeClr val="accent1"/>
-            </a:fillRef>
-            <a:effectRef idx="2">
-              <a:schemeClr val="accent1"/>
-            </a:effectRef>
-            <a:fontRef idx="minor">
-              <a:schemeClr val="lt1"/>
-            </a:fontRef>
-          </p:style>
-          <p:txBody>
-            <a:bodyPr rtlCol="0" anchor="ctr"/>
-            <a:lstStyle/>
-            <a:p>
-              <a:r>
-                <a:rPr sz="900" b="1">
-                  <a:solidFill>
-                    <a:srgbClr val="FFFFFF"/>
-                  </a:solidFill>
-                </a:rPr>
-                <a:t>要補圖</a:t>
-              </a:r>
-            </a:p>
-            <a:p>
-              <a:r>
-                <a:rPr sz="900" b="1">
-                  <a:solidFill>
-                    <a:srgbClr val="FFFFFF"/>
-                  </a:solidFill>
-                </a:rPr>
-                <a:t>tomb_nitrepit</a:t>
-              </a:r>
-            </a:p>
-          </p:txBody>
-        </p:sp>
+          </p:spPr>
+        </p:pic>
         <p:sp>
           <p:nvSpPr>
             <p:cNvPr id="131" name="TextBox 130"/>
@@ -7151,12 +6581,20 @@
             <a:chExt cx="1280000" cy="1020000"/>
           </a:xfrm>
         </p:grpSpPr>
-        <p:sp>
-          <p:nvSpPr>
-            <p:cNvPr id="133" name="Rectangle 132"/>
-            <p:cNvSpPr/>
-            <p:nvPr/>
-          </p:nvSpPr>
+        <p:pic>
+          <p:nvPicPr>
+            <p:cNvPr id="133" name="Picture 132" descr="tomb_masonhall.webp.jpg"/>
+            <p:cNvPicPr>
+              <a:picLocks noChangeAspect="1"/>
+            </p:cNvPicPr>
+            <p:nvPr/>
+          </p:nvPicPr>
+          <p:blipFill>
+            <a:blip r:embed="rId45"/>
+            <a:stretch>
+              <a:fillRect/>
+            </a:stretch>
+          </p:blipFill>
           <p:spPr>
             <a:xfrm>
               <a:off x="24300000" y="9050000"/>
@@ -7165,54 +6603,8 @@
             <a:prstGeom prst="rect">
               <a:avLst/>
             </a:prstGeom>
-            <a:solidFill>
-              <a:srgbClr val="3FB950"/>
-            </a:solidFill>
-            <a:ln>
-              <a:solidFill>
-                <a:srgbClr val="2B8A3A"/>
-              </a:solidFill>
-            </a:ln>
-          </p:spPr>
-          <p:style>
-            <a:lnRef idx="1">
-              <a:schemeClr val="accent1"/>
-            </a:lnRef>
-            <a:fillRef idx="3">
-              <a:schemeClr val="accent1"/>
-            </a:fillRef>
-            <a:effectRef idx="2">
-              <a:schemeClr val="accent1"/>
-            </a:effectRef>
-            <a:fontRef idx="minor">
-              <a:schemeClr val="lt1"/>
-            </a:fontRef>
-          </p:style>
-          <p:txBody>
-            <a:bodyPr rtlCol="0" anchor="ctr"/>
-            <a:lstStyle/>
-            <a:p>
-              <a:r>
-                <a:rPr sz="900" b="1">
-                  <a:solidFill>
-                    <a:srgbClr val="FFFFFF"/>
-                  </a:solidFill>
-                </a:rPr>
-                <a:t>要補圖</a:t>
-              </a:r>
-            </a:p>
-            <a:p>
-              <a:r>
-                <a:rPr sz="900" b="1">
-                  <a:solidFill>
-                    <a:srgbClr val="FFFFFF"/>
-                  </a:solidFill>
-                </a:rPr>
-                <a:t>tomb_masonhall</a:t>
-              </a:r>
-            </a:p>
-          </p:txBody>
-        </p:sp>
+          </p:spPr>
+        </p:pic>
         <p:sp>
           <p:nvSpPr>
             <p:cNvPr id="134" name="TextBox 133"/>
@@ -7269,12 +6661,20 @@
             <a:chExt cx="1280000" cy="1020000"/>
           </a:xfrm>
         </p:grpSpPr>
-        <p:sp>
-          <p:nvSpPr>
-            <p:cNvPr id="136" name="Rectangle 135"/>
-            <p:cNvSpPr/>
-            <p:nvPr/>
-          </p:nvSpPr>
+        <p:pic>
+          <p:nvPicPr>
+            <p:cNvPr id="136" name="Picture 135" descr="tomb_toolniche.webp.jpg"/>
+            <p:cNvPicPr>
+              <a:picLocks noChangeAspect="1"/>
+            </p:cNvPicPr>
+            <p:nvPr/>
+          </p:nvPicPr>
+          <p:blipFill>
+            <a:blip r:embed="rId46"/>
+            <a:stretch>
+              <a:fillRect/>
+            </a:stretch>
+          </p:blipFill>
           <p:spPr>
             <a:xfrm>
               <a:off x="27300000" y="9050000"/>
@@ -7283,54 +6683,8 @@
             <a:prstGeom prst="rect">
               <a:avLst/>
             </a:prstGeom>
-            <a:solidFill>
-              <a:srgbClr val="3FB950"/>
-            </a:solidFill>
-            <a:ln>
-              <a:solidFill>
-                <a:srgbClr val="2B8A3A"/>
-              </a:solidFill>
-            </a:ln>
-          </p:spPr>
-          <p:style>
-            <a:lnRef idx="1">
-              <a:schemeClr val="accent1"/>
-            </a:lnRef>
-            <a:fillRef idx="3">
-              <a:schemeClr val="accent1"/>
-            </a:fillRef>
-            <a:effectRef idx="2">
-              <a:schemeClr val="accent1"/>
-            </a:effectRef>
-            <a:fontRef idx="minor">
-              <a:schemeClr val="lt1"/>
-            </a:fontRef>
-          </p:style>
-          <p:txBody>
-            <a:bodyPr rtlCol="0" anchor="ctr"/>
-            <a:lstStyle/>
-            <a:p>
-              <a:r>
-                <a:rPr sz="900" b="1">
-                  <a:solidFill>
-                    <a:srgbClr val="FFFFFF"/>
-                  </a:solidFill>
-                </a:rPr>
-                <a:t>要補圖</a:t>
-              </a:r>
-            </a:p>
-            <a:p>
-              <a:r>
-                <a:rPr sz="900" b="1">
-                  <a:solidFill>
-                    <a:srgbClr val="FFFFFF"/>
-                  </a:solidFill>
-                </a:rPr>
-                <a:t>tomb_toolniche</a:t>
-              </a:r>
-            </a:p>
-          </p:txBody>
-        </p:sp>
+          </p:spPr>
+        </p:pic>
         <p:sp>
           <p:nvSpPr>
             <p:cNvPr id="137" name="TextBox 136"/>
@@ -7387,12 +6741,20 @@
             <a:chExt cx="1280000" cy="1020000"/>
           </a:xfrm>
         </p:grpSpPr>
-        <p:sp>
-          <p:nvSpPr>
-            <p:cNvPr id="139" name="Rectangle 138"/>
-            <p:cNvSpPr/>
-            <p:nvPr/>
-          </p:nvSpPr>
+        <p:pic>
+          <p:nvPicPr>
+            <p:cNvPr id="139" name="Picture 138" descr="tomb_rubble.webp.jpg"/>
+            <p:cNvPicPr>
+              <a:picLocks noChangeAspect="1"/>
+            </p:cNvPicPr>
+            <p:nvPr/>
+          </p:nvPicPr>
+          <p:blipFill>
+            <a:blip r:embed="rId47"/>
+            <a:stretch>
+              <a:fillRect/>
+            </a:stretch>
+          </p:blipFill>
           <p:spPr>
             <a:xfrm>
               <a:off x="24300000" y="10200000"/>
@@ -7401,54 +6763,8 @@
             <a:prstGeom prst="rect">
               <a:avLst/>
             </a:prstGeom>
-            <a:solidFill>
-              <a:srgbClr val="3FB950"/>
-            </a:solidFill>
-            <a:ln>
-              <a:solidFill>
-                <a:srgbClr val="2B8A3A"/>
-              </a:solidFill>
-            </a:ln>
-          </p:spPr>
-          <p:style>
-            <a:lnRef idx="1">
-              <a:schemeClr val="accent1"/>
-            </a:lnRef>
-            <a:fillRef idx="3">
-              <a:schemeClr val="accent1"/>
-            </a:fillRef>
-            <a:effectRef idx="2">
-              <a:schemeClr val="accent1"/>
-            </a:effectRef>
-            <a:fontRef idx="minor">
-              <a:schemeClr val="lt1"/>
-            </a:fontRef>
-          </p:style>
-          <p:txBody>
-            <a:bodyPr rtlCol="0" anchor="ctr"/>
-            <a:lstStyle/>
-            <a:p>
-              <a:r>
-                <a:rPr sz="900" b="1">
-                  <a:solidFill>
-                    <a:srgbClr val="FFFFFF"/>
-                  </a:solidFill>
-                </a:rPr>
-                <a:t>要補圖</a:t>
-              </a:r>
-            </a:p>
-            <a:p>
-              <a:r>
-                <a:rPr sz="900" b="1">
-                  <a:solidFill>
-                    <a:srgbClr val="FFFFFF"/>
-                  </a:solidFill>
-                </a:rPr>
-                <a:t>tomb_rubble</a:t>
-              </a:r>
-            </a:p>
-          </p:txBody>
-        </p:sp>
+          </p:spPr>
+        </p:pic>
         <p:sp>
           <p:nvSpPr>
             <p:cNvPr id="140" name="TextBox 139"/>
@@ -7505,12 +6821,20 @@
             <a:chExt cx="1280000" cy="1020000"/>
           </a:xfrm>
         </p:grpSpPr>
-        <p:sp>
-          <p:nvSpPr>
-            <p:cNvPr id="142" name="Rectangle 141"/>
-            <p:cNvSpPr/>
-            <p:nvPr/>
-          </p:nvSpPr>
+        <p:pic>
+          <p:nvPicPr>
+            <p:cNvPr id="142" name="Picture 141" descr="tomb_cryptwalk.webp.jpg"/>
+            <p:cNvPicPr>
+              <a:picLocks noChangeAspect="1"/>
+            </p:cNvPicPr>
+            <p:nvPr/>
+          </p:nvPicPr>
+          <p:blipFill>
+            <a:blip r:embed="rId48"/>
+            <a:stretch>
+              <a:fillRect/>
+            </a:stretch>
+          </p:blipFill>
           <p:spPr>
             <a:xfrm>
               <a:off x="21300000" y="11350000"/>
@@ -7519,54 +6843,8 @@
             <a:prstGeom prst="rect">
               <a:avLst/>
             </a:prstGeom>
-            <a:solidFill>
-              <a:srgbClr val="3FB950"/>
-            </a:solidFill>
-            <a:ln>
-              <a:solidFill>
-                <a:srgbClr val="2B8A3A"/>
-              </a:solidFill>
-            </a:ln>
-          </p:spPr>
-          <p:style>
-            <a:lnRef idx="1">
-              <a:schemeClr val="accent1"/>
-            </a:lnRef>
-            <a:fillRef idx="3">
-              <a:schemeClr val="accent1"/>
-            </a:fillRef>
-            <a:effectRef idx="2">
-              <a:schemeClr val="accent1"/>
-            </a:effectRef>
-            <a:fontRef idx="minor">
-              <a:schemeClr val="lt1"/>
-            </a:fontRef>
-          </p:style>
-          <p:txBody>
-            <a:bodyPr rtlCol="0" anchor="ctr"/>
-            <a:lstStyle/>
-            <a:p>
-              <a:r>
-                <a:rPr sz="900" b="1">
-                  <a:solidFill>
-                    <a:srgbClr val="FFFFFF"/>
-                  </a:solidFill>
-                </a:rPr>
-                <a:t>要補圖</a:t>
-              </a:r>
-            </a:p>
-            <a:p>
-              <a:r>
-                <a:rPr sz="900" b="1">
-                  <a:solidFill>
-                    <a:srgbClr val="FFFFFF"/>
-                  </a:solidFill>
-                </a:rPr>
-                <a:t>tomb_cryptwalk</a:t>
-              </a:r>
-            </a:p>
-          </p:txBody>
-        </p:sp>
+          </p:spPr>
+        </p:pic>
         <p:sp>
           <p:nvSpPr>
             <p:cNvPr id="143" name="TextBox 142"/>
@@ -7623,12 +6901,20 @@
             <a:chExt cx="1280000" cy="1020000"/>
           </a:xfrm>
         </p:grpSpPr>
-        <p:sp>
-          <p:nvSpPr>
-            <p:cNvPr id="145" name="Rectangle 144"/>
-            <p:cNvSpPr/>
-            <p:nvPr/>
-          </p:nvSpPr>
+        <p:pic>
+          <p:nvPicPr>
+            <p:cNvPr id="145" name="Picture 144" descr="tomb_deepwalk.webp.jpg"/>
+            <p:cNvPicPr>
+              <a:picLocks noChangeAspect="1"/>
+            </p:cNvPicPr>
+            <p:nvPr/>
+          </p:nvPicPr>
+          <p:blipFill>
+            <a:blip r:embed="rId49"/>
+            <a:stretch>
+              <a:fillRect/>
+            </a:stretch>
+          </p:blipFill>
           <p:spPr>
             <a:xfrm>
               <a:off x="21300000" y="12500000"/>
@@ -7637,54 +6923,8 @@
             <a:prstGeom prst="rect">
               <a:avLst/>
             </a:prstGeom>
-            <a:solidFill>
-              <a:srgbClr val="3FB950"/>
-            </a:solidFill>
-            <a:ln>
-              <a:solidFill>
-                <a:srgbClr val="2B8A3A"/>
-              </a:solidFill>
-            </a:ln>
-          </p:spPr>
-          <p:style>
-            <a:lnRef idx="1">
-              <a:schemeClr val="accent1"/>
-            </a:lnRef>
-            <a:fillRef idx="3">
-              <a:schemeClr val="accent1"/>
-            </a:fillRef>
-            <a:effectRef idx="2">
-              <a:schemeClr val="accent1"/>
-            </a:effectRef>
-            <a:fontRef idx="minor">
-              <a:schemeClr val="lt1"/>
-            </a:fontRef>
-          </p:style>
-          <p:txBody>
-            <a:bodyPr rtlCol="0" anchor="ctr"/>
-            <a:lstStyle/>
-            <a:p>
-              <a:r>
-                <a:rPr sz="900" b="1">
-                  <a:solidFill>
-                    <a:srgbClr val="FFFFFF"/>
-                  </a:solidFill>
-                </a:rPr>
-                <a:t>要補圖</a:t>
-              </a:r>
-            </a:p>
-            <a:p>
-              <a:r>
-                <a:rPr sz="900" b="1">
-                  <a:solidFill>
-                    <a:srgbClr val="FFFFFF"/>
-                  </a:solidFill>
-                </a:rPr>
-                <a:t>tomb_deepwalk</a:t>
-              </a:r>
-            </a:p>
-          </p:txBody>
-        </p:sp>
+          </p:spPr>
+        </p:pic>
         <p:sp>
           <p:nvSpPr>
             <p:cNvPr id="146" name="TextBox 145"/>
@@ -7741,12 +6981,20 @@
             <a:chExt cx="1280000" cy="1020000"/>
           </a:xfrm>
         </p:grpSpPr>
-        <p:sp>
-          <p:nvSpPr>
-            <p:cNvPr id="148" name="Rectangle 147"/>
-            <p:cNvSpPr/>
-            <p:nvPr/>
-          </p:nvSpPr>
+        <p:pic>
+          <p:nvPicPr>
+            <p:cNvPr id="148" name="Picture 147" descr="tomb_brokenhall.webp.jpg"/>
+            <p:cNvPicPr>
+              <a:picLocks noChangeAspect="1"/>
+            </p:cNvPicPr>
+            <p:nvPr/>
+          </p:nvPicPr>
+          <p:blipFill>
+            <a:blip r:embed="rId50"/>
+            <a:stretch>
+              <a:fillRect/>
+            </a:stretch>
+          </p:blipFill>
           <p:spPr>
             <a:xfrm>
               <a:off x="18300000" y="12500000"/>
@@ -7755,54 +7003,8 @@
             <a:prstGeom prst="rect">
               <a:avLst/>
             </a:prstGeom>
-            <a:solidFill>
-              <a:srgbClr val="3FB950"/>
-            </a:solidFill>
-            <a:ln>
-              <a:solidFill>
-                <a:srgbClr val="2B8A3A"/>
-              </a:solidFill>
-            </a:ln>
-          </p:spPr>
-          <p:style>
-            <a:lnRef idx="1">
-              <a:schemeClr val="accent1"/>
-            </a:lnRef>
-            <a:fillRef idx="3">
-              <a:schemeClr val="accent1"/>
-            </a:fillRef>
-            <a:effectRef idx="2">
-              <a:schemeClr val="accent1"/>
-            </a:effectRef>
-            <a:fontRef idx="minor">
-              <a:schemeClr val="lt1"/>
-            </a:fontRef>
-          </p:style>
-          <p:txBody>
-            <a:bodyPr rtlCol="0" anchor="ctr"/>
-            <a:lstStyle/>
-            <a:p>
-              <a:r>
-                <a:rPr sz="900" b="1">
-                  <a:solidFill>
-                    <a:srgbClr val="FFFFFF"/>
-                  </a:solidFill>
-                </a:rPr>
-                <a:t>要補圖</a:t>
-              </a:r>
-            </a:p>
-            <a:p>
-              <a:r>
-                <a:rPr sz="900" b="1">
-                  <a:solidFill>
-                    <a:srgbClr val="FFFFFF"/>
-                  </a:solidFill>
-                </a:rPr>
-                <a:t>tomb_brokenhall</a:t>
-              </a:r>
-            </a:p>
-          </p:txBody>
-        </p:sp>
+          </p:spPr>
+        </p:pic>
         <p:sp>
           <p:nvSpPr>
             <p:cNvPr id="149" name="TextBox 148"/>
@@ -7859,12 +7061,20 @@
             <a:chExt cx="1280000" cy="1020000"/>
           </a:xfrm>
         </p:grpSpPr>
-        <p:sp>
-          <p:nvSpPr>
-            <p:cNvPr id="151" name="Rectangle 150"/>
-            <p:cNvSpPr/>
-            <p:nvPr/>
-          </p:nvSpPr>
+        <p:pic>
+          <p:nvPicPr>
+            <p:cNvPr id="151" name="Picture 150" descr="tomb_sunkhall.webp.jpg"/>
+            <p:cNvPicPr>
+              <a:picLocks noChangeAspect="1"/>
+            </p:cNvPicPr>
+            <p:nvPr/>
+          </p:nvPicPr>
+          <p:blipFill>
+            <a:blip r:embed="rId51"/>
+            <a:stretch>
+              <a:fillRect/>
+            </a:stretch>
+          </p:blipFill>
           <p:spPr>
             <a:xfrm>
               <a:off x="21300000" y="14800000"/>
@@ -7873,54 +7083,8 @@
             <a:prstGeom prst="rect">
               <a:avLst/>
             </a:prstGeom>
-            <a:solidFill>
-              <a:srgbClr val="3FB950"/>
-            </a:solidFill>
-            <a:ln>
-              <a:solidFill>
-                <a:srgbClr val="2B8A3A"/>
-              </a:solidFill>
-            </a:ln>
-          </p:spPr>
-          <p:style>
-            <a:lnRef idx="1">
-              <a:schemeClr val="accent1"/>
-            </a:lnRef>
-            <a:fillRef idx="3">
-              <a:schemeClr val="accent1"/>
-            </a:fillRef>
-            <a:effectRef idx="2">
-              <a:schemeClr val="accent1"/>
-            </a:effectRef>
-            <a:fontRef idx="minor">
-              <a:schemeClr val="lt1"/>
-            </a:fontRef>
-          </p:style>
-          <p:txBody>
-            <a:bodyPr rtlCol="0" anchor="ctr"/>
-            <a:lstStyle/>
-            <a:p>
-              <a:r>
-                <a:rPr sz="900" b="1">
-                  <a:solidFill>
-                    <a:srgbClr val="FFFFFF"/>
-                  </a:solidFill>
-                </a:rPr>
-                <a:t>要補圖</a:t>
-              </a:r>
-            </a:p>
-            <a:p>
-              <a:r>
-                <a:rPr sz="900" b="1">
-                  <a:solidFill>
-                    <a:srgbClr val="FFFFFF"/>
-                  </a:solidFill>
-                </a:rPr>
-                <a:t>tomb_sunkhall</a:t>
-              </a:r>
-            </a:p>
-          </p:txBody>
-        </p:sp>
+          </p:spPr>
+        </p:pic>
         <p:sp>
           <p:nvSpPr>
             <p:cNvPr id="152" name="TextBox 151"/>
@@ -7977,12 +7141,20 @@
             <a:chExt cx="1280000" cy="1020000"/>
           </a:xfrm>
         </p:grpSpPr>
-        <p:sp>
-          <p:nvSpPr>
-            <p:cNvPr id="154" name="Rectangle 153"/>
-            <p:cNvSpPr/>
-            <p:nvPr/>
-          </p:nvSpPr>
+        <p:pic>
+          <p:nvPicPr>
+            <p:cNvPr id="154" name="Picture 153" descr="tomb_mudpit.webp.jpg"/>
+            <p:cNvPicPr>
+              <a:picLocks noChangeAspect="1"/>
+            </p:cNvPicPr>
+            <p:nvPr/>
+          </p:nvPicPr>
+          <p:blipFill>
+            <a:blip r:embed="rId52"/>
+            <a:stretch>
+              <a:fillRect/>
+            </a:stretch>
+          </p:blipFill>
           <p:spPr>
             <a:xfrm>
               <a:off x="21300000" y="15950000"/>
@@ -7991,54 +7163,8 @@
             <a:prstGeom prst="rect">
               <a:avLst/>
             </a:prstGeom>
-            <a:solidFill>
-              <a:srgbClr val="3FB950"/>
-            </a:solidFill>
-            <a:ln>
-              <a:solidFill>
-                <a:srgbClr val="2B8A3A"/>
-              </a:solidFill>
-            </a:ln>
-          </p:spPr>
-          <p:style>
-            <a:lnRef idx="1">
-              <a:schemeClr val="accent1"/>
-            </a:lnRef>
-            <a:fillRef idx="3">
-              <a:schemeClr val="accent1"/>
-            </a:fillRef>
-            <a:effectRef idx="2">
-              <a:schemeClr val="accent1"/>
-            </a:effectRef>
-            <a:fontRef idx="minor">
-              <a:schemeClr val="lt1"/>
-            </a:fontRef>
-          </p:style>
-          <p:txBody>
-            <a:bodyPr rtlCol="0" anchor="ctr"/>
-            <a:lstStyle/>
-            <a:p>
-              <a:r>
-                <a:rPr sz="900" b="1">
-                  <a:solidFill>
-                    <a:srgbClr val="FFFFFF"/>
-                  </a:solidFill>
-                </a:rPr>
-                <a:t>要補圖</a:t>
-              </a:r>
-            </a:p>
-            <a:p>
-              <a:r>
-                <a:rPr sz="900" b="1">
-                  <a:solidFill>
-                    <a:srgbClr val="FFFFFF"/>
-                  </a:solidFill>
-                </a:rPr>
-                <a:t>tomb_mudpit</a:t>
-              </a:r>
-            </a:p>
-          </p:txBody>
-        </p:sp>
+          </p:spPr>
+        </p:pic>
         <p:sp>
           <p:nvSpPr>
             <p:cNvPr id="155" name="TextBox 154"/>
@@ -8095,12 +7221,20 @@
             <a:chExt cx="1280000" cy="1020000"/>
           </a:xfrm>
         </p:grpSpPr>
-        <p:sp>
-          <p:nvSpPr>
-            <p:cNvPr id="157" name="Rectangle 156"/>
-            <p:cNvSpPr/>
-            <p:nvPr/>
-          </p:nvSpPr>
+        <p:pic>
+          <p:nvPicPr>
+            <p:cNvPr id="157" name="Picture 156" descr="tomb_crossvault.webp.jpg"/>
+            <p:cNvPicPr>
+              <a:picLocks noChangeAspect="1"/>
+            </p:cNvPicPr>
+            <p:nvPr/>
+          </p:nvPicPr>
+          <p:blipFill>
+            <a:blip r:embed="rId53"/>
+            <a:stretch>
+              <a:fillRect/>
+            </a:stretch>
+          </p:blipFill>
           <p:spPr>
             <a:xfrm>
               <a:off x="21300000" y="13650000"/>
@@ -8109,54 +7243,8 @@
             <a:prstGeom prst="rect">
               <a:avLst/>
             </a:prstGeom>
-            <a:solidFill>
-              <a:srgbClr val="3FB950"/>
-            </a:solidFill>
-            <a:ln>
-              <a:solidFill>
-                <a:srgbClr val="2B8A3A"/>
-              </a:solidFill>
-            </a:ln>
-          </p:spPr>
-          <p:style>
-            <a:lnRef idx="1">
-              <a:schemeClr val="accent1"/>
-            </a:lnRef>
-            <a:fillRef idx="3">
-              <a:schemeClr val="accent1"/>
-            </a:fillRef>
-            <a:effectRef idx="2">
-              <a:schemeClr val="accent1"/>
-            </a:effectRef>
-            <a:fontRef idx="minor">
-              <a:schemeClr val="lt1"/>
-            </a:fontRef>
-          </p:style>
-          <p:txBody>
-            <a:bodyPr rtlCol="0" anchor="ctr"/>
-            <a:lstStyle/>
-            <a:p>
-              <a:r>
-                <a:rPr sz="900" b="1">
-                  <a:solidFill>
-                    <a:srgbClr val="FFFFFF"/>
-                  </a:solidFill>
-                </a:rPr>
-                <a:t>要補圖</a:t>
-              </a:r>
-            </a:p>
-            <a:p>
-              <a:r>
-                <a:rPr sz="900" b="1">
-                  <a:solidFill>
-                    <a:srgbClr val="FFFFFF"/>
-                  </a:solidFill>
-                </a:rPr>
-                <a:t>tomb_crossvault</a:t>
-              </a:r>
-            </a:p>
-          </p:txBody>
-        </p:sp>
+          </p:spPr>
+        </p:pic>
         <p:sp>
           <p:nvSpPr>
             <p:cNvPr id="158" name="TextBox 157"/>
@@ -8213,12 +7301,20 @@
             <a:chExt cx="1280000" cy="1020000"/>
           </a:xfrm>
         </p:grpSpPr>
-        <p:sp>
-          <p:nvSpPr>
-            <p:cNvPr id="160" name="Rectangle 159"/>
-            <p:cNvSpPr/>
-            <p:nvPr/>
-          </p:nvSpPr>
+        <p:pic>
+          <p:nvPicPr>
+            <p:cNvPr id="160" name="Picture 159" descr="tomb_falsestair.webp.jpg"/>
+            <p:cNvPicPr>
+              <a:picLocks noChangeAspect="1"/>
+            </p:cNvPicPr>
+            <p:nvPr/>
+          </p:nvPicPr>
+          <p:blipFill>
+            <a:blip r:embed="rId54"/>
+            <a:stretch>
+              <a:fillRect/>
+            </a:stretch>
+          </p:blipFill>
           <p:spPr>
             <a:xfrm>
               <a:off x="18300000" y="13650000"/>
@@ -8227,54 +7323,8 @@
             <a:prstGeom prst="rect">
               <a:avLst/>
             </a:prstGeom>
-            <a:solidFill>
-              <a:srgbClr val="3FB950"/>
-            </a:solidFill>
-            <a:ln>
-              <a:solidFill>
-                <a:srgbClr val="2B8A3A"/>
-              </a:solidFill>
-            </a:ln>
-          </p:spPr>
-          <p:style>
-            <a:lnRef idx="1">
-              <a:schemeClr val="accent1"/>
-            </a:lnRef>
-            <a:fillRef idx="3">
-              <a:schemeClr val="accent1"/>
-            </a:fillRef>
-            <a:effectRef idx="2">
-              <a:schemeClr val="accent1"/>
-            </a:effectRef>
-            <a:fontRef idx="minor">
-              <a:schemeClr val="lt1"/>
-            </a:fontRef>
-          </p:style>
-          <p:txBody>
-            <a:bodyPr rtlCol="0" anchor="ctr"/>
-            <a:lstStyle/>
-            <a:p>
-              <a:r>
-                <a:rPr sz="900" b="1">
-                  <a:solidFill>
-                    <a:srgbClr val="FFFFFF"/>
-                  </a:solidFill>
-                </a:rPr>
-                <a:t>要補圖</a:t>
-              </a:r>
-            </a:p>
-            <a:p>
-              <a:r>
-                <a:rPr sz="900" b="1">
-                  <a:solidFill>
-                    <a:srgbClr val="FFFFFF"/>
-                  </a:solidFill>
-                </a:rPr>
-                <a:t>tomb_falsestair</a:t>
-              </a:r>
-            </a:p>
-          </p:txBody>
-        </p:sp>
+          </p:spPr>
+        </p:pic>
         <p:sp>
           <p:nvSpPr>
             <p:cNvPr id="161" name="TextBox 160"/>
@@ -8340,7 +7390,7 @@
             <p:nvPr/>
           </p:nvPicPr>
           <p:blipFill>
-            <a:blip r:embed="rId30"/>
+            <a:blip r:embed="rId55"/>
             <a:stretch>
               <a:fillRect/>
             </a:stretch>
@@ -8420,7 +7470,7 @@
             <p:nvPr/>
           </p:nvPicPr>
           <p:blipFill>
-            <a:blip r:embed="rId31"/>
+            <a:blip r:embed="rId56"/>
             <a:stretch>
               <a:fillRect/>
             </a:stretch>
@@ -8500,7 +7550,7 @@
             <p:nvPr/>
           </p:nvPicPr>
           <p:blipFill>
-            <a:blip r:embed="rId32"/>
+            <a:blip r:embed="rId57"/>
             <a:stretch>
               <a:fillRect/>
             </a:stretch>
@@ -8580,7 +7630,7 @@
             <p:nvPr/>
           </p:nvPicPr>
           <p:blipFill>
-            <a:blip r:embed="rId33"/>
+            <a:blip r:embed="rId58"/>
             <a:stretch>
               <a:fillRect/>
             </a:stretch>
@@ -8660,7 +7710,7 @@
             <p:nvPr/>
           </p:nvPicPr>
           <p:blipFill>
-            <a:blip r:embed="rId34"/>
+            <a:blip r:embed="rId59"/>
             <a:stretch>
               <a:fillRect/>
             </a:stretch>
@@ -8731,12 +7781,20 @@
             <a:chExt cx="1280000" cy="1020000"/>
           </a:xfrm>
         </p:grpSpPr>
-        <p:sp>
-          <p:nvSpPr>
-            <p:cNvPr id="178" name="Rectangle 177"/>
-            <p:cNvSpPr/>
-            <p:nvPr/>
-          </p:nvSpPr>
+        <p:pic>
+          <p:nvPicPr>
+            <p:cNvPr id="178" name="Picture 177" descr="tomb_lowaltar.webp.jpg"/>
+            <p:cNvPicPr>
+              <a:picLocks noChangeAspect="1"/>
+            </p:cNvPicPr>
+            <p:nvPr/>
+          </p:nvPicPr>
+          <p:blipFill>
+            <a:blip r:embed="rId60"/>
+            <a:stretch>
+              <a:fillRect/>
+            </a:stretch>
+          </p:blipFill>
           <p:spPr>
             <a:xfrm>
               <a:off x="27300000" y="18250000"/>
@@ -8745,54 +7803,8 @@
             <a:prstGeom prst="rect">
               <a:avLst/>
             </a:prstGeom>
-            <a:solidFill>
-              <a:srgbClr val="3FB950"/>
-            </a:solidFill>
-            <a:ln>
-              <a:solidFill>
-                <a:srgbClr val="2B8A3A"/>
-              </a:solidFill>
-            </a:ln>
-          </p:spPr>
-          <p:style>
-            <a:lnRef idx="1">
-              <a:schemeClr val="accent1"/>
-            </a:lnRef>
-            <a:fillRef idx="3">
-              <a:schemeClr val="accent1"/>
-            </a:fillRef>
-            <a:effectRef idx="2">
-              <a:schemeClr val="accent1"/>
-            </a:effectRef>
-            <a:fontRef idx="minor">
-              <a:schemeClr val="lt1"/>
-            </a:fontRef>
-          </p:style>
-          <p:txBody>
-            <a:bodyPr rtlCol="0" anchor="ctr"/>
-            <a:lstStyle/>
-            <a:p>
-              <a:r>
-                <a:rPr sz="900" b="1">
-                  <a:solidFill>
-                    <a:srgbClr val="FFFFFF"/>
-                  </a:solidFill>
-                </a:rPr>
-                <a:t>要補圖</a:t>
-              </a:r>
-            </a:p>
-            <a:p>
-              <a:r>
-                <a:rPr sz="900" b="1">
-                  <a:solidFill>
-                    <a:srgbClr val="FFFFFF"/>
-                  </a:solidFill>
-                </a:rPr>
-                <a:t>tomb_lowaltar</a:t>
-              </a:r>
-            </a:p>
-          </p:txBody>
-        </p:sp>
+          </p:spPr>
+        </p:pic>
         <p:sp>
           <p:nvSpPr>
             <p:cNvPr id="179" name="TextBox 178"/>
@@ -8849,12 +7861,20 @@
             <a:chExt cx="1280000" cy="1020000"/>
           </a:xfrm>
         </p:grpSpPr>
-        <p:sp>
-          <p:nvSpPr>
-            <p:cNvPr id="181" name="Rectangle 180"/>
-            <p:cNvSpPr/>
-            <p:nvPr/>
-          </p:nvSpPr>
+        <p:pic>
+          <p:nvPicPr>
+            <p:cNvPr id="181" name="Picture 180" descr="tomb_adit.webp.jpg"/>
+            <p:cNvPicPr>
+              <a:picLocks noChangeAspect="1"/>
+            </p:cNvPicPr>
+            <p:nvPr/>
+          </p:nvPicPr>
+          <p:blipFill>
+            <a:blip r:embed="rId61"/>
+            <a:stretch>
+              <a:fillRect/>
+            </a:stretch>
+          </p:blipFill>
           <p:spPr>
             <a:xfrm>
               <a:off x="24300000" y="18250000"/>
@@ -8863,54 +7883,8 @@
             <a:prstGeom prst="rect">
               <a:avLst/>
             </a:prstGeom>
-            <a:solidFill>
-              <a:srgbClr val="3FB950"/>
-            </a:solidFill>
-            <a:ln>
-              <a:solidFill>
-                <a:srgbClr val="2B8A3A"/>
-              </a:solidFill>
-            </a:ln>
-          </p:spPr>
-          <p:style>
-            <a:lnRef idx="1">
-              <a:schemeClr val="accent1"/>
-            </a:lnRef>
-            <a:fillRef idx="3">
-              <a:schemeClr val="accent1"/>
-            </a:fillRef>
-            <a:effectRef idx="2">
-              <a:schemeClr val="accent1"/>
-            </a:effectRef>
-            <a:fontRef idx="minor">
-              <a:schemeClr val="lt1"/>
-            </a:fontRef>
-          </p:style>
-          <p:txBody>
-            <a:bodyPr rtlCol="0" anchor="ctr"/>
-            <a:lstStyle/>
-            <a:p>
-              <a:r>
-                <a:rPr sz="900" b="1">
-                  <a:solidFill>
-                    <a:srgbClr val="FFFFFF"/>
-                  </a:solidFill>
-                </a:rPr>
-                <a:t>要補圖</a:t>
-              </a:r>
-            </a:p>
-            <a:p>
-              <a:r>
-                <a:rPr sz="900" b="1">
-                  <a:solidFill>
-                    <a:srgbClr val="FFFFFF"/>
-                  </a:solidFill>
-                </a:rPr>
-                <a:t>tomb_adit</a:t>
-              </a:r>
-            </a:p>
-          </p:txBody>
-        </p:sp>
+          </p:spPr>
+        </p:pic>
         <p:sp>
           <p:nvSpPr>
             <p:cNvPr id="182" name="TextBox 181"/>
@@ -8976,7 +7950,7 @@
             <p:nvPr/>
           </p:nvPicPr>
           <p:blipFill>
-            <a:blip r:embed="rId35"/>
+            <a:blip r:embed="rId62"/>
             <a:stretch>
               <a:fillRect/>
             </a:stretch>
